--- a/docs/Axel version 3 - plantilla_video.pptx
+++ b/docs/Axel version 3 - plantilla_video.pptx
@@ -291,7 +291,7 @@
               <a:pPr>
                 <a:defRPr/>
               </a:pPr>
-              <a:t>3/27/2026</a:t>
+              <a:t>4/11/26</a:t>
             </a:fld>
             <a:endParaRPr lang="en-US" altLang="es-ES"/>
           </a:p>
@@ -583,9 +583,9 @@
         <a:solidFill>
           <a:srgbClr val="000000"/>
         </a:solidFill>
-        <a:latin typeface="Avenir Roman" charset="0"/>
-        <a:ea typeface="Avenir Roman" charset="0"/>
-        <a:cs typeface="Avenir Roman" charset="0"/>
+        <a:latin typeface="Avenir" charset="0"/>
+        <a:ea typeface="Avenir" charset="0"/>
+        <a:cs typeface="Avenir" charset="0"/>
         <a:sym typeface="Avenir Roman" charset="0"/>
       </a:defRPr>
     </a:lvl1pPr>
@@ -603,9 +603,9 @@
         <a:solidFill>
           <a:srgbClr val="000000"/>
         </a:solidFill>
-        <a:latin typeface="Avenir Roman" charset="0"/>
-        <a:ea typeface="Avenir Roman" charset="0"/>
-        <a:cs typeface="Avenir Roman" charset="0"/>
+        <a:latin typeface="Avenir" charset="0"/>
+        <a:ea typeface="Avenir" charset="0"/>
+        <a:cs typeface="Avenir" charset="0"/>
         <a:sym typeface="Avenir Roman" charset="0"/>
       </a:defRPr>
     </a:lvl2pPr>
@@ -623,9 +623,9 @@
         <a:solidFill>
           <a:srgbClr val="000000"/>
         </a:solidFill>
-        <a:latin typeface="Avenir Roman" charset="0"/>
-        <a:ea typeface="Avenir Roman" charset="0"/>
-        <a:cs typeface="Avenir Roman" charset="0"/>
+        <a:latin typeface="Avenir" charset="0"/>
+        <a:ea typeface="Avenir" charset="0"/>
+        <a:cs typeface="Avenir" charset="0"/>
         <a:sym typeface="Avenir Roman" charset="0"/>
       </a:defRPr>
     </a:lvl3pPr>
@@ -643,9 +643,9 @@
         <a:solidFill>
           <a:srgbClr val="000000"/>
         </a:solidFill>
-        <a:latin typeface="Avenir Roman" charset="0"/>
-        <a:ea typeface="Avenir Roman" charset="0"/>
-        <a:cs typeface="Avenir Roman" charset="0"/>
+        <a:latin typeface="Avenir" charset="0"/>
+        <a:ea typeface="Avenir" charset="0"/>
+        <a:cs typeface="Avenir" charset="0"/>
         <a:sym typeface="Avenir Roman" charset="0"/>
       </a:defRPr>
     </a:lvl4pPr>
@@ -663,9 +663,9 @@
         <a:solidFill>
           <a:srgbClr val="000000"/>
         </a:solidFill>
-        <a:latin typeface="Avenir Roman" charset="0"/>
-        <a:ea typeface="Avenir Roman" charset="0"/>
-        <a:cs typeface="Avenir Roman" charset="0"/>
+        <a:latin typeface="Avenir" charset="0"/>
+        <a:ea typeface="Avenir" charset="0"/>
+        <a:cs typeface="Avenir" charset="0"/>
         <a:sym typeface="Avenir Roman" charset="0"/>
       </a:defRPr>
     </a:lvl5pPr>
@@ -757,97 +757,6 @@
           <a:bodyPr/>
           <a:lstStyle/>
           <a:p>
-            <a:r>
-              <a:rPr lang="es-ES" dirty="0"/>
-              <a:t>*   **Notas del Presentador:** *"Bienvenidos y muchas gracias al tribunal. Somos el Equipo 3005 y hoy les presentamos 'Caporal AI', nuestro Sistema para la Optimización Económica de Dietas Bovinas. En los próximos minutos, demostraremos cómo la Inteligencia Artificial híbrida puede democratizar la zootecnia de precisión y proteger el patrimonio de nuestros ganaderos mexicanos frente a la crisis climática e inflacionaria."*</a:t>
-            </a:r>
-          </a:p>
-          <a:p>
-            <a:endParaRPr lang="es-ES" dirty="0"/>
-          </a:p>
-          <a:p>
-            <a:pPr marL="342900" indent="-342900">
-              <a:buFont typeface="Arial" panose="020B0604020202020204" pitchFamily="34" charset="0"/>
-              <a:buChar char="•"/>
-            </a:pPr>
-            <a:r>
-              <a:rPr lang="es-ES" dirty="0"/>
-              <a:t>**Sugerencia Visual:** Portada limpia y ejecutiva usando el logotipo de la Universidad (UNIR) tal como marca la plantilla oficial.</a:t>
-            </a:r>
-          </a:p>
-          <a:p>
-            <a:pPr marL="342900" indent="-342900">
-              <a:buFont typeface="Arial" panose="020B0604020202020204" pitchFamily="34" charset="0"/>
-              <a:buChar char="•"/>
-            </a:pPr>
-            <a:endParaRPr lang="es-ES" dirty="0"/>
-          </a:p>
-          <a:p>
-            <a:pPr marL="342900" indent="-342900">
-              <a:buFont typeface="Arial" panose="020B0604020202020204" pitchFamily="34" charset="0"/>
-              <a:buChar char="•"/>
-            </a:pPr>
-            <a:endParaRPr lang="es-ES" dirty="0"/>
-          </a:p>
-          <a:p>
-            <a:pPr marL="0" indent="0">
-              <a:buFont typeface="Arial" panose="020B0604020202020204" pitchFamily="34" charset="0"/>
-              <a:buNone/>
-            </a:pPr>
-            <a:r>
-              <a:rPr lang="es-ES" dirty="0"/>
-              <a:t>### 💡 Reglas de Oro para la grabación (Según Clase S04):</a:t>
-            </a:r>
-          </a:p>
-          <a:p>
-            <a:pPr marL="0" indent="0">
-              <a:buFont typeface="Arial" panose="020B0604020202020204" pitchFamily="34" charset="0"/>
-              <a:buNone/>
-            </a:pPr>
-            <a:r>
-              <a:rPr lang="es-ES" dirty="0"/>
-              <a:t>1. **Practiquen para no exceder los 10 minutos cronometrados.**</a:t>
-            </a:r>
-          </a:p>
-          <a:p>
-            <a:pPr marL="0" indent="0">
-              <a:buFont typeface="Arial" panose="020B0604020202020204" pitchFamily="34" charset="0"/>
-              <a:buNone/>
-            </a:pPr>
-            <a:r>
-              <a:rPr lang="es-ES" dirty="0"/>
-              <a:t>2. **Repártanse equitativamente las diapositivas; todos deben hablar.**</a:t>
-            </a:r>
-          </a:p>
-          <a:p>
-            <a:pPr marL="0" indent="0">
-              <a:buFont typeface="Arial" panose="020B0604020202020204" pitchFamily="34" charset="0"/>
-              <a:buNone/>
-            </a:pPr>
-            <a:r>
-              <a:rPr lang="es-ES" dirty="0"/>
-              <a:t>3. **Usen OBS Studio o </a:t>
-            </a:r>
-            <a:r>
-              <a:rPr lang="es-ES" dirty="0" err="1"/>
-              <a:t>Teams</a:t>
-            </a:r>
-            <a:r>
-              <a:rPr lang="es-ES" dirty="0"/>
-              <a:t>/Zoom.** Compartan pantalla con sus **cámaras encendidas** en todo momento.</a:t>
-            </a:r>
-          </a:p>
-          <a:p>
-            <a:pPr marL="0" indent="0">
-              <a:buFont typeface="Arial" panose="020B0604020202020204" pitchFamily="34" charset="0"/>
-              <a:buNone/>
-            </a:pPr>
-            <a:r>
-              <a:rPr lang="es-ES" dirty="0"/>
-              <a:t>4. **NO LEAN.** El texto de la PPT es de apoyo; el guion es para que lo estudien, lo hagan suyo y lo expliquen con naturalidad. La rúbrica prohíbe terminantemente leer mecánicamente.</a:t>
-            </a:r>
-          </a:p>
-          <a:p>
             <a:pPr marL="0" marR="0" lvl="0" indent="0" algn="l" defTabSz="457200" rtl="0" eaLnBrk="0" fontAlgn="base" latinLnBrk="0" hangingPunct="0">
               <a:lnSpc>
                 <a:spcPct val="125000"/>
@@ -865,262 +774,236 @@
               <a:tabLst/>
               <a:defRPr/>
             </a:pPr>
+            <a:r>
+              <a:rPr lang="en-US" sz="2400" kern="1200" dirty="0">
+                <a:solidFill>
+                  <a:srgbClr val="000000"/>
+                </a:solidFill>
+                <a:effectLst/>
+                <a:latin typeface="Avenir" charset="0"/>
+                <a:ea typeface="Avenir" charset="0"/>
+                <a:cs typeface="Avenir" charset="0"/>
+                <a:sym typeface="Avenir Roman" charset="0"/>
+              </a:rPr>
+              <a:t>[P1] "</a:t>
+            </a:r>
+            <a:r>
+              <a:rPr lang="en-US" sz="2400" kern="1200" dirty="0" err="1">
+                <a:solidFill>
+                  <a:srgbClr val="000000"/>
+                </a:solidFill>
+                <a:effectLst/>
+                <a:latin typeface="Avenir" charset="0"/>
+                <a:ea typeface="Avenir" charset="0"/>
+                <a:cs typeface="Avenir" charset="0"/>
+                <a:sym typeface="Avenir Roman" charset="0"/>
+              </a:rPr>
+              <a:t>Bienvenidos</a:t>
+            </a:r>
+            <a:r>
+              <a:rPr lang="en-US" sz="2400" kern="1200" dirty="0">
+                <a:solidFill>
+                  <a:srgbClr val="000000"/>
+                </a:solidFill>
+                <a:effectLst/>
+                <a:latin typeface="Avenir" charset="0"/>
+                <a:ea typeface="Avenir" charset="0"/>
+                <a:cs typeface="Avenir" charset="0"/>
+                <a:sym typeface="Avenir Roman" charset="0"/>
+              </a:rPr>
+              <a:t> y </a:t>
+            </a:r>
+            <a:r>
+              <a:rPr lang="en-US" sz="2400" kern="1200" dirty="0" err="1">
+                <a:solidFill>
+                  <a:srgbClr val="000000"/>
+                </a:solidFill>
+                <a:effectLst/>
+                <a:latin typeface="Avenir" charset="0"/>
+                <a:ea typeface="Avenir" charset="0"/>
+                <a:cs typeface="Avenir" charset="0"/>
+                <a:sym typeface="Avenir Roman" charset="0"/>
+              </a:rPr>
+              <a:t>muchas</a:t>
+            </a:r>
+            <a:r>
+              <a:rPr lang="en-US" sz="2400" kern="1200" dirty="0">
+                <a:solidFill>
+                  <a:srgbClr val="000000"/>
+                </a:solidFill>
+                <a:effectLst/>
+                <a:latin typeface="Avenir" charset="0"/>
+                <a:ea typeface="Avenir" charset="0"/>
+                <a:cs typeface="Avenir" charset="0"/>
+                <a:sym typeface="Avenir Roman" charset="0"/>
+              </a:rPr>
+              <a:t> gracias al tribunal. Somos </a:t>
+            </a:r>
+            <a:r>
+              <a:rPr lang="en-US" sz="2400" kern="1200" dirty="0" err="1">
+                <a:solidFill>
+                  <a:srgbClr val="000000"/>
+                </a:solidFill>
+                <a:effectLst/>
+                <a:latin typeface="Avenir" charset="0"/>
+                <a:ea typeface="Avenir" charset="0"/>
+                <a:cs typeface="Avenir" charset="0"/>
+                <a:sym typeface="Avenir Roman" charset="0"/>
+              </a:rPr>
+              <a:t>el</a:t>
+            </a:r>
+            <a:r>
+              <a:rPr lang="en-US" sz="2400" kern="1200" dirty="0">
+                <a:solidFill>
+                  <a:srgbClr val="000000"/>
+                </a:solidFill>
+                <a:effectLst/>
+                <a:latin typeface="Avenir" charset="0"/>
+                <a:ea typeface="Avenir" charset="0"/>
+                <a:cs typeface="Avenir" charset="0"/>
+                <a:sym typeface="Avenir Roman" charset="0"/>
+              </a:rPr>
+              <a:t> Equipo 3005, y hoy les </a:t>
+            </a:r>
+            <a:r>
+              <a:rPr lang="en-US" sz="2400" kern="1200" dirty="0" err="1">
+                <a:solidFill>
+                  <a:srgbClr val="000000"/>
+                </a:solidFill>
+                <a:effectLst/>
+                <a:latin typeface="Avenir" charset="0"/>
+                <a:ea typeface="Avenir" charset="0"/>
+                <a:cs typeface="Avenir" charset="0"/>
+                <a:sym typeface="Avenir Roman" charset="0"/>
+              </a:rPr>
+              <a:t>presentamos</a:t>
+            </a:r>
+            <a:r>
+              <a:rPr lang="en-US" sz="2400" kern="1200" dirty="0">
+                <a:solidFill>
+                  <a:srgbClr val="000000"/>
+                </a:solidFill>
+                <a:effectLst/>
+                <a:latin typeface="Avenir" charset="0"/>
+                <a:ea typeface="Avenir" charset="0"/>
+                <a:cs typeface="Avenir" charset="0"/>
+                <a:sym typeface="Avenir Roman" charset="0"/>
+              </a:rPr>
+              <a:t> Caporal AI: un Sistema para la </a:t>
+            </a:r>
+            <a:r>
+              <a:rPr lang="en-US" sz="2400" kern="1200" dirty="0" err="1">
+                <a:solidFill>
+                  <a:srgbClr val="000000"/>
+                </a:solidFill>
+                <a:effectLst/>
+                <a:latin typeface="Avenir" charset="0"/>
+                <a:ea typeface="Avenir" charset="0"/>
+                <a:cs typeface="Avenir" charset="0"/>
+                <a:sym typeface="Avenir Roman" charset="0"/>
+              </a:rPr>
+              <a:t>Optimización</a:t>
+            </a:r>
+            <a:r>
+              <a:rPr lang="en-US" sz="2400" kern="1200" dirty="0">
+                <a:solidFill>
+                  <a:srgbClr val="000000"/>
+                </a:solidFill>
+                <a:effectLst/>
+                <a:latin typeface="Avenir" charset="0"/>
+                <a:ea typeface="Avenir" charset="0"/>
+                <a:cs typeface="Avenir" charset="0"/>
+                <a:sym typeface="Avenir Roman" charset="0"/>
+              </a:rPr>
+              <a:t> </a:t>
+            </a:r>
+            <a:r>
+              <a:rPr lang="en-US" sz="2400" kern="1200" dirty="0" err="1">
+                <a:solidFill>
+                  <a:srgbClr val="000000"/>
+                </a:solidFill>
+                <a:effectLst/>
+                <a:latin typeface="Avenir" charset="0"/>
+                <a:ea typeface="Avenir" charset="0"/>
+                <a:cs typeface="Avenir" charset="0"/>
+                <a:sym typeface="Avenir Roman" charset="0"/>
+              </a:rPr>
+              <a:t>Económica</a:t>
+            </a:r>
+            <a:r>
+              <a:rPr lang="en-US" sz="2400" kern="1200" dirty="0">
+                <a:solidFill>
+                  <a:srgbClr val="000000"/>
+                </a:solidFill>
+                <a:effectLst/>
+                <a:latin typeface="Avenir" charset="0"/>
+                <a:ea typeface="Avenir" charset="0"/>
+                <a:cs typeface="Avenir" charset="0"/>
+                <a:sym typeface="Avenir Roman" charset="0"/>
+              </a:rPr>
+              <a:t> de </a:t>
+            </a:r>
+            <a:r>
+              <a:rPr lang="en-US" sz="2400" kern="1200" dirty="0" err="1">
+                <a:solidFill>
+                  <a:srgbClr val="000000"/>
+                </a:solidFill>
+                <a:effectLst/>
+                <a:latin typeface="Avenir" charset="0"/>
+                <a:ea typeface="Avenir" charset="0"/>
+                <a:cs typeface="Avenir" charset="0"/>
+                <a:sym typeface="Avenir Roman" charset="0"/>
+              </a:rPr>
+              <a:t>Dietas</a:t>
+            </a:r>
+            <a:r>
+              <a:rPr lang="en-US" sz="2400" kern="1200" dirty="0">
+                <a:solidFill>
+                  <a:srgbClr val="000000"/>
+                </a:solidFill>
+                <a:effectLst/>
+                <a:latin typeface="Avenir" charset="0"/>
+                <a:ea typeface="Avenir" charset="0"/>
+                <a:cs typeface="Avenir" charset="0"/>
+                <a:sym typeface="Avenir Roman" charset="0"/>
+              </a:rPr>
+              <a:t> </a:t>
+            </a:r>
+            <a:r>
+              <a:rPr lang="en-US" sz="2400" kern="1200" dirty="0" err="1">
+                <a:solidFill>
+                  <a:srgbClr val="000000"/>
+                </a:solidFill>
+                <a:effectLst/>
+                <a:latin typeface="Avenir" charset="0"/>
+                <a:ea typeface="Avenir" charset="0"/>
+                <a:cs typeface="Avenir" charset="0"/>
+                <a:sym typeface="Avenir Roman" charset="0"/>
+              </a:rPr>
+              <a:t>Bovinas</a:t>
+            </a:r>
+            <a:r>
+              <a:rPr lang="en-US" sz="2400" kern="1200" dirty="0">
+                <a:solidFill>
+                  <a:srgbClr val="000000"/>
+                </a:solidFill>
+                <a:effectLst/>
+                <a:latin typeface="Avenir" charset="0"/>
+                <a:ea typeface="Avenir" charset="0"/>
+                <a:cs typeface="Avenir" charset="0"/>
+                <a:sym typeface="Avenir Roman" charset="0"/>
+              </a:rPr>
+              <a:t>."</a:t>
+            </a:r>
             <a:br>
-              <a:rPr lang="en-US" dirty="0"/>
-            </a:br>
-            <a:r>
-              <a:rPr lang="es-ES" b="1" dirty="0"/>
-              <a:t>----------------------------------------------------------------------------------------------------------------------------------------------------------------------------------------------</a:t>
-            </a:r>
-          </a:p>
-          <a:p>
-            <a:pPr marL="0" marR="0" lvl="0" indent="0" algn="l" defTabSz="457200" rtl="0" eaLnBrk="0" fontAlgn="base" latinLnBrk="0" hangingPunct="0">
-              <a:lnSpc>
-                <a:spcPct val="125000"/>
-              </a:lnSpc>
-              <a:spcBef>
-                <a:spcPct val="0"/>
-              </a:spcBef>
-              <a:spcAft>
-                <a:spcPct val="0"/>
-              </a:spcAft>
-              <a:buClrTx/>
-              <a:buSzTx/>
-              <a:buFont typeface="Arial" panose="020B0604020202020204" pitchFamily="34" charset="0"/>
-              <a:buNone/>
-              <a:tabLst/>
-              <a:defRPr/>
-            </a:pPr>
-            <a:r>
-              <a:rPr lang="en-US" sz="2400" kern="1200" dirty="0">
-                <a:solidFill>
-                  <a:srgbClr val="000000"/>
-                </a:solidFill>
-                <a:effectLst/>
-                <a:latin typeface="Avenir Roman" charset="0"/>
-                <a:ea typeface="Avenir Roman" charset="0"/>
-                <a:cs typeface="Avenir Roman" charset="0"/>
-                <a:sym typeface="Avenir Roman" charset="0"/>
-              </a:rPr>
-              <a:t>[P1] "</a:t>
-            </a:r>
-            <a:r>
-              <a:rPr lang="en-US" sz="2400" kern="1200" dirty="0" err="1">
-                <a:solidFill>
-                  <a:srgbClr val="000000"/>
-                </a:solidFill>
-                <a:effectLst/>
-                <a:latin typeface="Avenir Roman" charset="0"/>
-                <a:ea typeface="Avenir Roman" charset="0"/>
-                <a:cs typeface="Avenir Roman" charset="0"/>
-                <a:sym typeface="Avenir Roman" charset="0"/>
-              </a:rPr>
-              <a:t>Bienvenidos</a:t>
-            </a:r>
-            <a:r>
-              <a:rPr lang="en-US" sz="2400" kern="1200" dirty="0">
-                <a:solidFill>
-                  <a:srgbClr val="000000"/>
-                </a:solidFill>
-                <a:effectLst/>
-                <a:latin typeface="Avenir Roman" charset="0"/>
-                <a:ea typeface="Avenir Roman" charset="0"/>
-                <a:cs typeface="Avenir Roman" charset="0"/>
-                <a:sym typeface="Avenir Roman" charset="0"/>
-              </a:rPr>
-              <a:t> y </a:t>
-            </a:r>
-            <a:r>
-              <a:rPr lang="en-US" sz="2400" kern="1200" dirty="0" err="1">
-                <a:solidFill>
-                  <a:srgbClr val="000000"/>
-                </a:solidFill>
-                <a:effectLst/>
-                <a:latin typeface="Avenir Roman" charset="0"/>
-                <a:ea typeface="Avenir Roman" charset="0"/>
-                <a:cs typeface="Avenir Roman" charset="0"/>
-                <a:sym typeface="Avenir Roman" charset="0"/>
-              </a:rPr>
-              <a:t>muchas</a:t>
-            </a:r>
-            <a:r>
-              <a:rPr lang="en-US" sz="2400" kern="1200" dirty="0">
-                <a:solidFill>
-                  <a:srgbClr val="000000"/>
-                </a:solidFill>
-                <a:effectLst/>
-                <a:latin typeface="Avenir Roman" charset="0"/>
-                <a:ea typeface="Avenir Roman" charset="0"/>
-                <a:cs typeface="Avenir Roman" charset="0"/>
-                <a:sym typeface="Avenir Roman" charset="0"/>
-              </a:rPr>
-              <a:t> gracias al tribunal. Somos </a:t>
-            </a:r>
-            <a:r>
-              <a:rPr lang="en-US" sz="2400" kern="1200" dirty="0" err="1">
-                <a:solidFill>
-                  <a:srgbClr val="000000"/>
-                </a:solidFill>
-                <a:effectLst/>
-                <a:latin typeface="Avenir Roman" charset="0"/>
-                <a:ea typeface="Avenir Roman" charset="0"/>
-                <a:cs typeface="Avenir Roman" charset="0"/>
-                <a:sym typeface="Avenir Roman" charset="0"/>
-              </a:rPr>
-              <a:t>el</a:t>
-            </a:r>
-            <a:r>
-              <a:rPr lang="en-US" sz="2400" kern="1200" dirty="0">
-                <a:solidFill>
-                  <a:srgbClr val="000000"/>
-                </a:solidFill>
-                <a:effectLst/>
-                <a:latin typeface="Avenir Roman" charset="0"/>
-                <a:ea typeface="Avenir Roman" charset="0"/>
-                <a:cs typeface="Avenir Roman" charset="0"/>
-                <a:sym typeface="Avenir Roman" charset="0"/>
-              </a:rPr>
-              <a:t> Equipo 3005, y hoy les </a:t>
-            </a:r>
-            <a:r>
-              <a:rPr lang="en-US" sz="2400" kern="1200" dirty="0" err="1">
-                <a:solidFill>
-                  <a:srgbClr val="000000"/>
-                </a:solidFill>
-                <a:effectLst/>
-                <a:latin typeface="Avenir Roman" charset="0"/>
-                <a:ea typeface="Avenir Roman" charset="0"/>
-                <a:cs typeface="Avenir Roman" charset="0"/>
-                <a:sym typeface="Avenir Roman" charset="0"/>
-              </a:rPr>
-              <a:t>presentamos</a:t>
-            </a:r>
-            <a:r>
-              <a:rPr lang="en-US" sz="2400" kern="1200" dirty="0">
-                <a:solidFill>
-                  <a:srgbClr val="000000"/>
-                </a:solidFill>
-                <a:effectLst/>
-                <a:latin typeface="Avenir Roman" charset="0"/>
-                <a:ea typeface="Avenir Roman" charset="0"/>
-                <a:cs typeface="Avenir Roman" charset="0"/>
-                <a:sym typeface="Avenir Roman" charset="0"/>
-              </a:rPr>
-              <a:t> Caporal AI: un Sistema para la </a:t>
-            </a:r>
-            <a:r>
-              <a:rPr lang="en-US" sz="2400" kern="1200" dirty="0" err="1">
-                <a:solidFill>
-                  <a:srgbClr val="000000"/>
-                </a:solidFill>
-                <a:effectLst/>
-                <a:latin typeface="Avenir Roman" charset="0"/>
-                <a:ea typeface="Avenir Roman" charset="0"/>
-                <a:cs typeface="Avenir Roman" charset="0"/>
-                <a:sym typeface="Avenir Roman" charset="0"/>
-              </a:rPr>
-              <a:t>Optimización</a:t>
-            </a:r>
-            <a:r>
-              <a:rPr lang="en-US" sz="2400" kern="1200" dirty="0">
-                <a:solidFill>
-                  <a:srgbClr val="000000"/>
-                </a:solidFill>
-                <a:effectLst/>
-                <a:latin typeface="Avenir Roman" charset="0"/>
-                <a:ea typeface="Avenir Roman" charset="0"/>
-                <a:cs typeface="Avenir Roman" charset="0"/>
-                <a:sym typeface="Avenir Roman" charset="0"/>
-              </a:rPr>
-              <a:t> </a:t>
-            </a:r>
-            <a:r>
-              <a:rPr lang="en-US" sz="2400" kern="1200" dirty="0" err="1">
-                <a:solidFill>
-                  <a:srgbClr val="000000"/>
-                </a:solidFill>
-                <a:effectLst/>
-                <a:latin typeface="Avenir Roman" charset="0"/>
-                <a:ea typeface="Avenir Roman" charset="0"/>
-                <a:cs typeface="Avenir Roman" charset="0"/>
-                <a:sym typeface="Avenir Roman" charset="0"/>
-              </a:rPr>
-              <a:t>Económica</a:t>
-            </a:r>
-            <a:r>
-              <a:rPr lang="en-US" sz="2400" kern="1200" dirty="0">
-                <a:solidFill>
-                  <a:srgbClr val="000000"/>
-                </a:solidFill>
-                <a:effectLst/>
-                <a:latin typeface="Avenir Roman" charset="0"/>
-                <a:ea typeface="Avenir Roman" charset="0"/>
-                <a:cs typeface="Avenir Roman" charset="0"/>
-                <a:sym typeface="Avenir Roman" charset="0"/>
-              </a:rPr>
-              <a:t> de </a:t>
-            </a:r>
-            <a:r>
-              <a:rPr lang="en-US" sz="2400" kern="1200" dirty="0" err="1">
-                <a:solidFill>
-                  <a:srgbClr val="000000"/>
-                </a:solidFill>
-                <a:effectLst/>
-                <a:latin typeface="Avenir Roman" charset="0"/>
-                <a:ea typeface="Avenir Roman" charset="0"/>
-                <a:cs typeface="Avenir Roman" charset="0"/>
-                <a:sym typeface="Avenir Roman" charset="0"/>
-              </a:rPr>
-              <a:t>Dietas</a:t>
-            </a:r>
-            <a:r>
-              <a:rPr lang="en-US" sz="2400" kern="1200" dirty="0">
-                <a:solidFill>
-                  <a:srgbClr val="000000"/>
-                </a:solidFill>
-                <a:effectLst/>
-                <a:latin typeface="Avenir Roman" charset="0"/>
-                <a:ea typeface="Avenir Roman" charset="0"/>
-                <a:cs typeface="Avenir Roman" charset="0"/>
-                <a:sym typeface="Avenir Roman" charset="0"/>
-              </a:rPr>
-              <a:t> </a:t>
-            </a:r>
-            <a:r>
-              <a:rPr lang="en-US" sz="2400" kern="1200" dirty="0" err="1">
-                <a:solidFill>
-                  <a:srgbClr val="000000"/>
-                </a:solidFill>
-                <a:effectLst/>
-                <a:latin typeface="Avenir Roman" charset="0"/>
-                <a:ea typeface="Avenir Roman" charset="0"/>
-                <a:cs typeface="Avenir Roman" charset="0"/>
-                <a:sym typeface="Avenir Roman" charset="0"/>
-              </a:rPr>
-              <a:t>Bovinas</a:t>
-            </a:r>
-            <a:r>
-              <a:rPr lang="en-US" sz="2400" kern="1200" dirty="0">
-                <a:solidFill>
-                  <a:srgbClr val="000000"/>
-                </a:solidFill>
-                <a:effectLst/>
-                <a:latin typeface="Avenir Roman" charset="0"/>
-                <a:ea typeface="Avenir Roman" charset="0"/>
-                <a:cs typeface="Avenir Roman" charset="0"/>
-                <a:sym typeface="Avenir Roman" charset="0"/>
-              </a:rPr>
-              <a:t>."</a:t>
-            </a:r>
-            <a:br>
-              <a:rPr lang="en-US" sz="2400" kern="1200" dirty="0">
-                <a:solidFill>
-                  <a:srgbClr val="000000"/>
-                </a:solidFill>
-                <a:effectLst/>
-                <a:latin typeface="Avenir Roman" charset="0"/>
-                <a:ea typeface="Avenir Roman" charset="0"/>
-                <a:cs typeface="Avenir Roman" charset="0"/>
+              <a:rPr lang="en-US" sz="2400" kern="1200" dirty="0">
+                <a:solidFill>
+                  <a:srgbClr val="000000"/>
+                </a:solidFill>
+                <a:effectLst/>
+                <a:latin typeface="Avenir" charset="0"/>
+                <a:ea typeface="Avenir" charset="0"/>
+                <a:cs typeface="Avenir" charset="0"/>
                 <a:sym typeface="Avenir Roman" charset="0"/>
               </a:rPr>
             </a:br>
@@ -1130,9 +1013,9 @@
                   <a:srgbClr val="000000"/>
                 </a:solidFill>
                 <a:effectLst/>
-                <a:latin typeface="Avenir Roman" charset="0"/>
-                <a:ea typeface="Avenir Roman" charset="0"/>
-                <a:cs typeface="Avenir Roman" charset="0"/>
+                <a:latin typeface="Avenir" charset="0"/>
+                <a:ea typeface="Avenir" charset="0"/>
+                <a:cs typeface="Avenir" charset="0"/>
                 <a:sym typeface="Avenir Roman" charset="0"/>
               </a:rPr>
             </a:br>
@@ -1142,9 +1025,9 @@
                   <a:srgbClr val="000000"/>
                 </a:solidFill>
                 <a:effectLst/>
-                <a:latin typeface="Avenir Roman" charset="0"/>
-                <a:ea typeface="Avenir Roman" charset="0"/>
-                <a:cs typeface="Avenir Roman" charset="0"/>
+                <a:latin typeface="Avenir" charset="0"/>
+                <a:ea typeface="Avenir" charset="0"/>
+                <a:cs typeface="Avenir" charset="0"/>
                 <a:sym typeface="Avenir Roman" charset="0"/>
               </a:rPr>
               <a:t>[P2] "Durante </a:t>
@@ -1155,9 +1038,9 @@
                   <a:srgbClr val="000000"/>
                 </a:solidFill>
                 <a:effectLst/>
-                <a:latin typeface="Avenir Roman" charset="0"/>
-                <a:ea typeface="Avenir Roman" charset="0"/>
-                <a:cs typeface="Avenir Roman" charset="0"/>
+                <a:latin typeface="Avenir" charset="0"/>
+                <a:ea typeface="Avenir" charset="0"/>
+                <a:cs typeface="Avenir" charset="0"/>
                 <a:sym typeface="Avenir Roman" charset="0"/>
               </a:rPr>
               <a:t>los</a:t>
@@ -1168,9 +1051,9 @@
                   <a:srgbClr val="000000"/>
                 </a:solidFill>
                 <a:effectLst/>
-                <a:latin typeface="Avenir Roman" charset="0"/>
-                <a:ea typeface="Avenir Roman" charset="0"/>
-                <a:cs typeface="Avenir Roman" charset="0"/>
+                <a:latin typeface="Avenir" charset="0"/>
+                <a:ea typeface="Avenir" charset="0"/>
+                <a:cs typeface="Avenir" charset="0"/>
                 <a:sym typeface="Avenir Roman" charset="0"/>
               </a:rPr>
               <a:t> </a:t>
@@ -1181,9 +1064,9 @@
                   <a:srgbClr val="000000"/>
                 </a:solidFill>
                 <a:effectLst/>
-                <a:latin typeface="Avenir Roman" charset="0"/>
-                <a:ea typeface="Avenir Roman" charset="0"/>
-                <a:cs typeface="Avenir Roman" charset="0"/>
+                <a:latin typeface="Avenir" charset="0"/>
+                <a:ea typeface="Avenir" charset="0"/>
+                <a:cs typeface="Avenir" charset="0"/>
                 <a:sym typeface="Avenir Roman" charset="0"/>
               </a:rPr>
               <a:t>próximos</a:t>
@@ -1194,9 +1077,9 @@
                   <a:srgbClr val="000000"/>
                 </a:solidFill>
                 <a:effectLst/>
-                <a:latin typeface="Avenir Roman" charset="0"/>
-                <a:ea typeface="Avenir Roman" charset="0"/>
-                <a:cs typeface="Avenir Roman" charset="0"/>
+                <a:latin typeface="Avenir" charset="0"/>
+                <a:ea typeface="Avenir" charset="0"/>
+                <a:cs typeface="Avenir" charset="0"/>
                 <a:sym typeface="Avenir Roman" charset="0"/>
               </a:rPr>
               <a:t> </a:t>
@@ -1207,9 +1090,9 @@
                   <a:srgbClr val="000000"/>
                 </a:solidFill>
                 <a:effectLst/>
-                <a:latin typeface="Avenir Roman" charset="0"/>
-                <a:ea typeface="Avenir Roman" charset="0"/>
-                <a:cs typeface="Avenir Roman" charset="0"/>
+                <a:latin typeface="Avenir" charset="0"/>
+                <a:ea typeface="Avenir" charset="0"/>
+                <a:cs typeface="Avenir" charset="0"/>
                 <a:sym typeface="Avenir Roman" charset="0"/>
               </a:rPr>
               <a:t>minutos</a:t>
@@ -1220,9 +1103,9 @@
                   <a:srgbClr val="000000"/>
                 </a:solidFill>
                 <a:effectLst/>
-                <a:latin typeface="Avenir Roman" charset="0"/>
-                <a:ea typeface="Avenir Roman" charset="0"/>
-                <a:cs typeface="Avenir Roman" charset="0"/>
+                <a:latin typeface="Avenir" charset="0"/>
+                <a:ea typeface="Avenir" charset="0"/>
+                <a:cs typeface="Avenir" charset="0"/>
                 <a:sym typeface="Avenir Roman" charset="0"/>
               </a:rPr>
               <a:t> </a:t>
@@ -1233,9 +1116,9 @@
                   <a:srgbClr val="000000"/>
                 </a:solidFill>
                 <a:effectLst/>
-                <a:latin typeface="Avenir Roman" charset="0"/>
-                <a:ea typeface="Avenir Roman" charset="0"/>
-                <a:cs typeface="Avenir Roman" charset="0"/>
+                <a:latin typeface="Avenir" charset="0"/>
+                <a:ea typeface="Avenir" charset="0"/>
+                <a:cs typeface="Avenir" charset="0"/>
                 <a:sym typeface="Avenir Roman" charset="0"/>
               </a:rPr>
               <a:t>vamos</a:t>
@@ -1246,9 +1129,9 @@
                   <a:srgbClr val="000000"/>
                 </a:solidFill>
                 <a:effectLst/>
-                <a:latin typeface="Avenir Roman" charset="0"/>
-                <a:ea typeface="Avenir Roman" charset="0"/>
-                <a:cs typeface="Avenir Roman" charset="0"/>
+                <a:latin typeface="Avenir" charset="0"/>
+                <a:ea typeface="Avenir" charset="0"/>
+                <a:cs typeface="Avenir" charset="0"/>
                 <a:sym typeface="Avenir Roman" charset="0"/>
               </a:rPr>
               <a:t> a </a:t>
@@ -1259,9 +1142,9 @@
                   <a:srgbClr val="000000"/>
                 </a:solidFill>
                 <a:effectLst/>
-                <a:latin typeface="Avenir Roman" charset="0"/>
-                <a:ea typeface="Avenir Roman" charset="0"/>
-                <a:cs typeface="Avenir Roman" charset="0"/>
+                <a:latin typeface="Avenir" charset="0"/>
+                <a:ea typeface="Avenir" charset="0"/>
+                <a:cs typeface="Avenir" charset="0"/>
                 <a:sym typeface="Avenir Roman" charset="0"/>
               </a:rPr>
               <a:t>demostrar</a:t>
@@ -1272,9 +1155,9 @@
                   <a:srgbClr val="000000"/>
                 </a:solidFill>
                 <a:effectLst/>
-                <a:latin typeface="Avenir Roman" charset="0"/>
-                <a:ea typeface="Avenir Roman" charset="0"/>
-                <a:cs typeface="Avenir Roman" charset="0"/>
+                <a:latin typeface="Avenir" charset="0"/>
+                <a:ea typeface="Avenir" charset="0"/>
+                <a:cs typeface="Avenir" charset="0"/>
                 <a:sym typeface="Avenir Roman" charset="0"/>
               </a:rPr>
               <a:t> </a:t>
@@ -1285,9 +1168,9 @@
                   <a:srgbClr val="000000"/>
                 </a:solidFill>
                 <a:effectLst/>
-                <a:latin typeface="Avenir Roman" charset="0"/>
-                <a:ea typeface="Avenir Roman" charset="0"/>
-                <a:cs typeface="Avenir Roman" charset="0"/>
+                <a:latin typeface="Avenir" charset="0"/>
+                <a:ea typeface="Avenir" charset="0"/>
+                <a:cs typeface="Avenir" charset="0"/>
                 <a:sym typeface="Avenir Roman" charset="0"/>
               </a:rPr>
               <a:t>cómo</a:t>
@@ -1298,9 +1181,9 @@
                   <a:srgbClr val="000000"/>
                 </a:solidFill>
                 <a:effectLst/>
-                <a:latin typeface="Avenir Roman" charset="0"/>
-                <a:ea typeface="Avenir Roman" charset="0"/>
-                <a:cs typeface="Avenir Roman" charset="0"/>
+                <a:latin typeface="Avenir" charset="0"/>
+                <a:ea typeface="Avenir" charset="0"/>
+                <a:cs typeface="Avenir" charset="0"/>
                 <a:sym typeface="Avenir Roman" charset="0"/>
               </a:rPr>
               <a:t> la </a:t>
@@ -1311,9 +1194,9 @@
                   <a:srgbClr val="000000"/>
                 </a:solidFill>
                 <a:effectLst/>
-                <a:latin typeface="Avenir Roman" charset="0"/>
-                <a:ea typeface="Avenir Roman" charset="0"/>
-                <a:cs typeface="Avenir Roman" charset="0"/>
+                <a:latin typeface="Avenir" charset="0"/>
+                <a:ea typeface="Avenir" charset="0"/>
+                <a:cs typeface="Avenir" charset="0"/>
                 <a:sym typeface="Avenir Roman" charset="0"/>
               </a:rPr>
               <a:t>Inteligencia</a:t>
@@ -1324,9 +1207,9 @@
                   <a:srgbClr val="000000"/>
                 </a:solidFill>
                 <a:effectLst/>
-                <a:latin typeface="Avenir Roman" charset="0"/>
-                <a:ea typeface="Avenir Roman" charset="0"/>
-                <a:cs typeface="Avenir Roman" charset="0"/>
+                <a:latin typeface="Avenir" charset="0"/>
+                <a:ea typeface="Avenir" charset="0"/>
+                <a:cs typeface="Avenir" charset="0"/>
                 <a:sym typeface="Avenir Roman" charset="0"/>
               </a:rPr>
               <a:t> Artificial </a:t>
@@ -1337,9 +1220,9 @@
                   <a:srgbClr val="000000"/>
                 </a:solidFill>
                 <a:effectLst/>
-                <a:latin typeface="Avenir Roman" charset="0"/>
-                <a:ea typeface="Avenir Roman" charset="0"/>
-                <a:cs typeface="Avenir Roman" charset="0"/>
+                <a:latin typeface="Avenir" charset="0"/>
+                <a:ea typeface="Avenir" charset="0"/>
+                <a:cs typeface="Avenir" charset="0"/>
                 <a:sym typeface="Avenir Roman" charset="0"/>
               </a:rPr>
               <a:t>híbrida</a:t>
@@ -1350,9 +1233,9 @@
                   <a:srgbClr val="000000"/>
                 </a:solidFill>
                 <a:effectLst/>
-                <a:latin typeface="Avenir Roman" charset="0"/>
-                <a:ea typeface="Avenir Roman" charset="0"/>
-                <a:cs typeface="Avenir Roman" charset="0"/>
+                <a:latin typeface="Avenir" charset="0"/>
+                <a:ea typeface="Avenir" charset="0"/>
+                <a:cs typeface="Avenir" charset="0"/>
                 <a:sym typeface="Avenir Roman" charset="0"/>
               </a:rPr>
               <a:t> </a:t>
@@ -1363,9 +1246,9 @@
                   <a:srgbClr val="000000"/>
                 </a:solidFill>
                 <a:effectLst/>
-                <a:latin typeface="Avenir Roman" charset="0"/>
-                <a:ea typeface="Avenir Roman" charset="0"/>
-                <a:cs typeface="Avenir Roman" charset="0"/>
+                <a:latin typeface="Avenir" charset="0"/>
+                <a:ea typeface="Avenir" charset="0"/>
+                <a:cs typeface="Avenir" charset="0"/>
                 <a:sym typeface="Avenir Roman" charset="0"/>
               </a:rPr>
               <a:t>puede</a:t>
@@ -1376,9 +1259,9 @@
                   <a:srgbClr val="000000"/>
                 </a:solidFill>
                 <a:effectLst/>
-                <a:latin typeface="Avenir Roman" charset="0"/>
-                <a:ea typeface="Avenir Roman" charset="0"/>
-                <a:cs typeface="Avenir Roman" charset="0"/>
+                <a:latin typeface="Avenir" charset="0"/>
+                <a:ea typeface="Avenir" charset="0"/>
+                <a:cs typeface="Avenir" charset="0"/>
                 <a:sym typeface="Avenir Roman" charset="0"/>
               </a:rPr>
               <a:t> </a:t>
@@ -1389,9 +1272,9 @@
                   <a:srgbClr val="000000"/>
                 </a:solidFill>
                 <a:effectLst/>
-                <a:latin typeface="Avenir Roman" charset="0"/>
-                <a:ea typeface="Avenir Roman" charset="0"/>
-                <a:cs typeface="Avenir Roman" charset="0"/>
+                <a:latin typeface="Avenir" charset="0"/>
+                <a:ea typeface="Avenir" charset="0"/>
+                <a:cs typeface="Avenir" charset="0"/>
                 <a:sym typeface="Avenir Roman" charset="0"/>
               </a:rPr>
               <a:t>democratizar</a:t>
@@ -1402,9 +1285,9 @@
                   <a:srgbClr val="000000"/>
                 </a:solidFill>
                 <a:effectLst/>
-                <a:latin typeface="Avenir Roman" charset="0"/>
-                <a:ea typeface="Avenir Roman" charset="0"/>
-                <a:cs typeface="Avenir Roman" charset="0"/>
+                <a:latin typeface="Avenir" charset="0"/>
+                <a:ea typeface="Avenir" charset="0"/>
+                <a:cs typeface="Avenir" charset="0"/>
                 <a:sym typeface="Avenir Roman" charset="0"/>
               </a:rPr>
               <a:t> la </a:t>
@@ -1415,9 +1298,9 @@
                   <a:srgbClr val="000000"/>
                 </a:solidFill>
                 <a:effectLst/>
-                <a:latin typeface="Avenir Roman" charset="0"/>
-                <a:ea typeface="Avenir Roman" charset="0"/>
-                <a:cs typeface="Avenir Roman" charset="0"/>
+                <a:latin typeface="Avenir" charset="0"/>
+                <a:ea typeface="Avenir" charset="0"/>
+                <a:cs typeface="Avenir" charset="0"/>
                 <a:sym typeface="Avenir Roman" charset="0"/>
               </a:rPr>
               <a:t>zootecnia</a:t>
@@ -1428,9 +1311,9 @@
                   <a:srgbClr val="000000"/>
                 </a:solidFill>
                 <a:effectLst/>
-                <a:latin typeface="Avenir Roman" charset="0"/>
-                <a:ea typeface="Avenir Roman" charset="0"/>
-                <a:cs typeface="Avenir Roman" charset="0"/>
+                <a:latin typeface="Avenir" charset="0"/>
+                <a:ea typeface="Avenir" charset="0"/>
+                <a:cs typeface="Avenir" charset="0"/>
                 <a:sym typeface="Avenir Roman" charset="0"/>
               </a:rPr>
               <a:t> de </a:t>
@@ -1441,9 +1324,9 @@
                   <a:srgbClr val="000000"/>
                 </a:solidFill>
                 <a:effectLst/>
-                <a:latin typeface="Avenir Roman" charset="0"/>
-                <a:ea typeface="Avenir Roman" charset="0"/>
-                <a:cs typeface="Avenir Roman" charset="0"/>
+                <a:latin typeface="Avenir" charset="0"/>
+                <a:ea typeface="Avenir" charset="0"/>
+                <a:cs typeface="Avenir" charset="0"/>
                 <a:sym typeface="Avenir Roman" charset="0"/>
               </a:rPr>
               <a:t>precisión</a:t>
@@ -1454,9 +1337,9 @@
                   <a:srgbClr val="000000"/>
                 </a:solidFill>
                 <a:effectLst/>
-                <a:latin typeface="Avenir Roman" charset="0"/>
-                <a:ea typeface="Avenir Roman" charset="0"/>
-                <a:cs typeface="Avenir Roman" charset="0"/>
+                <a:latin typeface="Avenir" charset="0"/>
+                <a:ea typeface="Avenir" charset="0"/>
+                <a:cs typeface="Avenir" charset="0"/>
                 <a:sym typeface="Avenir Roman" charset="0"/>
               </a:rPr>
               <a:t> para </a:t>
@@ -1467,9 +1350,9 @@
                   <a:srgbClr val="000000"/>
                 </a:solidFill>
                 <a:effectLst/>
-                <a:latin typeface="Avenir Roman" charset="0"/>
-                <a:ea typeface="Avenir Roman" charset="0"/>
-                <a:cs typeface="Avenir Roman" charset="0"/>
+                <a:latin typeface="Avenir" charset="0"/>
+                <a:ea typeface="Avenir" charset="0"/>
+                <a:cs typeface="Avenir" charset="0"/>
                 <a:sym typeface="Avenir Roman" charset="0"/>
               </a:rPr>
               <a:t>los</a:t>
@@ -1480,9 +1363,9 @@
                   <a:srgbClr val="000000"/>
                 </a:solidFill>
                 <a:effectLst/>
-                <a:latin typeface="Avenir Roman" charset="0"/>
-                <a:ea typeface="Avenir Roman" charset="0"/>
-                <a:cs typeface="Avenir Roman" charset="0"/>
+                <a:latin typeface="Avenir" charset="0"/>
+                <a:ea typeface="Avenir" charset="0"/>
+                <a:cs typeface="Avenir" charset="0"/>
                 <a:sym typeface="Avenir Roman" charset="0"/>
               </a:rPr>
               <a:t> </a:t>
@@ -1493,9 +1376,9 @@
                   <a:srgbClr val="000000"/>
                 </a:solidFill>
                 <a:effectLst/>
-                <a:latin typeface="Avenir Roman" charset="0"/>
-                <a:ea typeface="Avenir Roman" charset="0"/>
-                <a:cs typeface="Avenir Roman" charset="0"/>
+                <a:latin typeface="Avenir" charset="0"/>
+                <a:ea typeface="Avenir" charset="0"/>
+                <a:cs typeface="Avenir" charset="0"/>
                 <a:sym typeface="Avenir Roman" charset="0"/>
               </a:rPr>
               <a:t>ganaderos</a:t>
@@ -1506,9 +1389,9 @@
                   <a:srgbClr val="000000"/>
                 </a:solidFill>
                 <a:effectLst/>
-                <a:latin typeface="Avenir Roman" charset="0"/>
-                <a:ea typeface="Avenir Roman" charset="0"/>
-                <a:cs typeface="Avenir Roman" charset="0"/>
+                <a:latin typeface="Avenir" charset="0"/>
+                <a:ea typeface="Avenir" charset="0"/>
+                <a:cs typeface="Avenir" charset="0"/>
                 <a:sym typeface="Avenir Roman" charset="0"/>
               </a:rPr>
               <a:t> </a:t>
@@ -1519,9 +1402,9 @@
                   <a:srgbClr val="000000"/>
                 </a:solidFill>
                 <a:effectLst/>
-                <a:latin typeface="Avenir Roman" charset="0"/>
-                <a:ea typeface="Avenir Roman" charset="0"/>
-                <a:cs typeface="Avenir Roman" charset="0"/>
+                <a:latin typeface="Avenir" charset="0"/>
+                <a:ea typeface="Avenir" charset="0"/>
+                <a:cs typeface="Avenir" charset="0"/>
                 <a:sym typeface="Avenir Roman" charset="0"/>
               </a:rPr>
               <a:t>mexicanos</a:t>
@@ -1532,9 +1415,9 @@
                   <a:srgbClr val="000000"/>
                 </a:solidFill>
                 <a:effectLst/>
-                <a:latin typeface="Avenir Roman" charset="0"/>
-                <a:ea typeface="Avenir Roman" charset="0"/>
-                <a:cs typeface="Avenir Roman" charset="0"/>
+                <a:latin typeface="Avenir" charset="0"/>
+                <a:ea typeface="Avenir" charset="0"/>
+                <a:cs typeface="Avenir" charset="0"/>
                 <a:sym typeface="Avenir Roman" charset="0"/>
               </a:rPr>
               <a:t>."</a:t>
@@ -1545,9 +1428,9 @@
                   <a:srgbClr val="000000"/>
                 </a:solidFill>
                 <a:effectLst/>
-                <a:latin typeface="Avenir Roman" charset="0"/>
-                <a:ea typeface="Avenir Roman" charset="0"/>
-                <a:cs typeface="Avenir Roman" charset="0"/>
+                <a:latin typeface="Avenir" charset="0"/>
+                <a:ea typeface="Avenir" charset="0"/>
+                <a:cs typeface="Avenir" charset="0"/>
                 <a:sym typeface="Avenir Roman" charset="0"/>
               </a:rPr>
             </a:br>
@@ -1557,9 +1440,9 @@
                   <a:srgbClr val="000000"/>
                 </a:solidFill>
                 <a:effectLst/>
-                <a:latin typeface="Avenir Roman" charset="0"/>
-                <a:ea typeface="Avenir Roman" charset="0"/>
-                <a:cs typeface="Avenir Roman" charset="0"/>
+                <a:latin typeface="Avenir" charset="0"/>
+                <a:ea typeface="Avenir" charset="0"/>
+                <a:cs typeface="Avenir" charset="0"/>
                 <a:sym typeface="Avenir Roman" charset="0"/>
               </a:rPr>
             </a:br>
@@ -1569,9 +1452,9 @@
                   <a:srgbClr val="000000"/>
                 </a:solidFill>
                 <a:effectLst/>
-                <a:latin typeface="Avenir Roman" charset="0"/>
-                <a:ea typeface="Avenir Roman" charset="0"/>
-                <a:cs typeface="Avenir Roman" charset="0"/>
+                <a:latin typeface="Avenir" charset="0"/>
+                <a:ea typeface="Avenir" charset="0"/>
+                <a:cs typeface="Avenir" charset="0"/>
                 <a:sym typeface="Avenir Roman" charset="0"/>
               </a:rPr>
               <a:t>[P3] "Un </a:t>
@@ -1582,9 +1465,9 @@
                   <a:srgbClr val="000000"/>
                 </a:solidFill>
                 <a:effectLst/>
-                <a:latin typeface="Avenir Roman" charset="0"/>
-                <a:ea typeface="Avenir Roman" charset="0"/>
-                <a:cs typeface="Avenir Roman" charset="0"/>
+                <a:latin typeface="Avenir" charset="0"/>
+                <a:ea typeface="Avenir" charset="0"/>
+                <a:cs typeface="Avenir" charset="0"/>
                 <a:sym typeface="Avenir Roman" charset="0"/>
               </a:rPr>
               <a:t>proyecto</a:t>
@@ -1595,9 +1478,9 @@
                   <a:srgbClr val="000000"/>
                 </a:solidFill>
                 <a:effectLst/>
-                <a:latin typeface="Avenir Roman" charset="0"/>
-                <a:ea typeface="Avenir Roman" charset="0"/>
-                <a:cs typeface="Avenir Roman" charset="0"/>
+                <a:latin typeface="Avenir" charset="0"/>
+                <a:ea typeface="Avenir" charset="0"/>
+                <a:cs typeface="Avenir" charset="0"/>
                 <a:sym typeface="Avenir Roman" charset="0"/>
               </a:rPr>
               <a:t> </a:t>
@@ -1608,9 +1491,9 @@
                   <a:srgbClr val="000000"/>
                 </a:solidFill>
                 <a:effectLst/>
-                <a:latin typeface="Avenir Roman" charset="0"/>
-                <a:ea typeface="Avenir Roman" charset="0"/>
-                <a:cs typeface="Avenir Roman" charset="0"/>
+                <a:latin typeface="Avenir" charset="0"/>
+                <a:ea typeface="Avenir" charset="0"/>
+                <a:cs typeface="Avenir" charset="0"/>
                 <a:sym typeface="Avenir Roman" charset="0"/>
               </a:rPr>
               <a:t>construido</a:t>
@@ -1621,9 +1504,9 @@
                   <a:srgbClr val="000000"/>
                 </a:solidFill>
                 <a:effectLst/>
-                <a:latin typeface="Avenir Roman" charset="0"/>
-                <a:ea typeface="Avenir Roman" charset="0"/>
-                <a:cs typeface="Avenir Roman" charset="0"/>
+                <a:latin typeface="Avenir" charset="0"/>
+                <a:ea typeface="Avenir" charset="0"/>
+                <a:cs typeface="Avenir" charset="0"/>
                 <a:sym typeface="Avenir Roman" charset="0"/>
               </a:rPr>
               <a:t> con rigor </a:t>
@@ -1634,9 +1517,9 @@
                   <a:srgbClr val="000000"/>
                 </a:solidFill>
                 <a:effectLst/>
-                <a:latin typeface="Avenir Roman" charset="0"/>
-                <a:ea typeface="Avenir Roman" charset="0"/>
-                <a:cs typeface="Avenir Roman" charset="0"/>
+                <a:latin typeface="Avenir" charset="0"/>
+                <a:ea typeface="Avenir" charset="0"/>
+                <a:cs typeface="Avenir" charset="0"/>
                 <a:sym typeface="Avenir Roman" charset="0"/>
               </a:rPr>
               <a:t>científico</a:t>
@@ -1647,9 +1530,9 @@
                   <a:srgbClr val="000000"/>
                 </a:solidFill>
                 <a:effectLst/>
-                <a:latin typeface="Avenir Roman" charset="0"/>
-                <a:ea typeface="Avenir Roman" charset="0"/>
-                <a:cs typeface="Avenir Roman" charset="0"/>
+                <a:latin typeface="Avenir" charset="0"/>
+                <a:ea typeface="Avenir" charset="0"/>
+                <a:cs typeface="Avenir" charset="0"/>
                 <a:sym typeface="Avenir Roman" charset="0"/>
               </a:rPr>
               <a:t>, </a:t>
@@ -1660,9 +1543,9 @@
                   <a:srgbClr val="000000"/>
                 </a:solidFill>
                 <a:effectLst/>
-                <a:latin typeface="Avenir Roman" charset="0"/>
-                <a:ea typeface="Avenir Roman" charset="0"/>
-                <a:cs typeface="Avenir Roman" charset="0"/>
+                <a:latin typeface="Avenir" charset="0"/>
+                <a:ea typeface="Avenir" charset="0"/>
+                <a:cs typeface="Avenir" charset="0"/>
                 <a:sym typeface="Avenir Roman" charset="0"/>
               </a:rPr>
               <a:t>metodología</a:t>
@@ -1673,9 +1556,9 @@
                   <a:srgbClr val="000000"/>
                 </a:solidFill>
                 <a:effectLst/>
-                <a:latin typeface="Avenir Roman" charset="0"/>
-                <a:ea typeface="Avenir Roman" charset="0"/>
-                <a:cs typeface="Avenir Roman" charset="0"/>
+                <a:latin typeface="Avenir" charset="0"/>
+                <a:ea typeface="Avenir" charset="0"/>
+                <a:cs typeface="Avenir" charset="0"/>
                 <a:sym typeface="Avenir Roman" charset="0"/>
               </a:rPr>
               <a:t> Scrum y </a:t>
@@ -1686,9 +1569,9 @@
                   <a:srgbClr val="000000"/>
                 </a:solidFill>
                 <a:effectLst/>
-                <a:latin typeface="Avenir Roman" charset="0"/>
-                <a:ea typeface="Avenir Roman" charset="0"/>
-                <a:cs typeface="Avenir Roman" charset="0"/>
+                <a:latin typeface="Avenir" charset="0"/>
+                <a:ea typeface="Avenir" charset="0"/>
+                <a:cs typeface="Avenir" charset="0"/>
                 <a:sym typeface="Avenir Roman" charset="0"/>
               </a:rPr>
               <a:t>validado</a:t>
@@ -1699,9 +1582,9 @@
                   <a:srgbClr val="000000"/>
                 </a:solidFill>
                 <a:effectLst/>
-                <a:latin typeface="Avenir Roman" charset="0"/>
-                <a:ea typeface="Avenir Roman" charset="0"/>
-                <a:cs typeface="Avenir Roman" charset="0"/>
+                <a:latin typeface="Avenir" charset="0"/>
+                <a:ea typeface="Avenir" charset="0"/>
+                <a:cs typeface="Avenir" charset="0"/>
                 <a:sym typeface="Avenir Roman" charset="0"/>
               </a:rPr>
               <a:t> con </a:t>
@@ -1712,9 +1595,9 @@
                   <a:srgbClr val="000000"/>
                 </a:solidFill>
                 <a:effectLst/>
-                <a:latin typeface="Avenir Roman" charset="0"/>
-                <a:ea typeface="Avenir Roman" charset="0"/>
-                <a:cs typeface="Avenir Roman" charset="0"/>
+                <a:latin typeface="Avenir" charset="0"/>
+                <a:ea typeface="Avenir" charset="0"/>
+                <a:cs typeface="Avenir" charset="0"/>
                 <a:sym typeface="Avenir Roman" charset="0"/>
               </a:rPr>
               <a:t>datos</a:t>
@@ -1725,9 +1608,9 @@
                   <a:srgbClr val="000000"/>
                 </a:solidFill>
                 <a:effectLst/>
-                <a:latin typeface="Avenir Roman" charset="0"/>
-                <a:ea typeface="Avenir Roman" charset="0"/>
-                <a:cs typeface="Avenir Roman" charset="0"/>
+                <a:latin typeface="Avenir" charset="0"/>
+                <a:ea typeface="Avenir" charset="0"/>
+                <a:cs typeface="Avenir" charset="0"/>
                 <a:sym typeface="Avenir Roman" charset="0"/>
               </a:rPr>
               <a:t> reales. Los </a:t>
@@ -1738,9 +1621,9 @@
                   <a:srgbClr val="000000"/>
                 </a:solidFill>
                 <a:effectLst/>
-                <a:latin typeface="Avenir Roman" charset="0"/>
-                <a:ea typeface="Avenir Roman" charset="0"/>
-                <a:cs typeface="Avenir Roman" charset="0"/>
+                <a:latin typeface="Avenir" charset="0"/>
+                <a:ea typeface="Avenir" charset="0"/>
+                <a:cs typeface="Avenir" charset="0"/>
                 <a:sym typeface="Avenir Roman" charset="0"/>
               </a:rPr>
               <a:t>invitamos</a:t>
@@ -1751,9 +1634,9 @@
                   <a:srgbClr val="000000"/>
                 </a:solidFill>
                 <a:effectLst/>
-                <a:latin typeface="Avenir Roman" charset="0"/>
-                <a:ea typeface="Avenir Roman" charset="0"/>
-                <a:cs typeface="Avenir Roman" charset="0"/>
+                <a:latin typeface="Avenir" charset="0"/>
+                <a:ea typeface="Avenir" charset="0"/>
+                <a:cs typeface="Avenir" charset="0"/>
                 <a:sym typeface="Avenir Roman" charset="0"/>
               </a:rPr>
               <a:t> a </a:t>
@@ -1764,9 +1647,9 @@
                   <a:srgbClr val="000000"/>
                 </a:solidFill>
                 <a:effectLst/>
-                <a:latin typeface="Avenir Roman" charset="0"/>
-                <a:ea typeface="Avenir Roman" charset="0"/>
-                <a:cs typeface="Avenir Roman" charset="0"/>
+                <a:latin typeface="Avenir" charset="0"/>
+                <a:ea typeface="Avenir" charset="0"/>
+                <a:cs typeface="Avenir" charset="0"/>
                 <a:sym typeface="Avenir Roman" charset="0"/>
               </a:rPr>
               <a:t>conocerlo</a:t>
@@ -1777,9 +1660,9 @@
                   <a:srgbClr val="000000"/>
                 </a:solidFill>
                 <a:effectLst/>
-                <a:latin typeface="Avenir Roman" charset="0"/>
-                <a:ea typeface="Avenir Roman" charset="0"/>
-                <a:cs typeface="Avenir Roman" charset="0"/>
+                <a:latin typeface="Avenir" charset="0"/>
+                <a:ea typeface="Avenir" charset="0"/>
+                <a:cs typeface="Avenir" charset="0"/>
                 <a:sym typeface="Avenir Roman" charset="0"/>
               </a:rPr>
               <a:t>."</a:t>
@@ -1790,9 +1673,9 @@
                   <a:srgbClr val="000000"/>
                 </a:solidFill>
                 <a:effectLst/>
-                <a:latin typeface="Avenir Roman" charset="0"/>
-                <a:ea typeface="Avenir Roman" charset="0"/>
-                <a:cs typeface="Avenir Roman" charset="0"/>
+                <a:latin typeface="Avenir" charset="0"/>
+                <a:ea typeface="Avenir" charset="0"/>
+                <a:cs typeface="Avenir" charset="0"/>
                 <a:sym typeface="Avenir Roman" charset="0"/>
               </a:rPr>
             </a:br>
@@ -1802,9 +1685,9 @@
                   <a:srgbClr val="000000"/>
                 </a:solidFill>
                 <a:effectLst/>
-                <a:latin typeface="Avenir Roman" charset="0"/>
-                <a:ea typeface="Avenir Roman" charset="0"/>
-                <a:cs typeface="Avenir Roman" charset="0"/>
+                <a:latin typeface="Avenir" charset="0"/>
+                <a:ea typeface="Avenir" charset="0"/>
+                <a:cs typeface="Avenir" charset="0"/>
                 <a:sym typeface="Avenir Roman" charset="0"/>
               </a:rPr>
             </a:br>
@@ -1814,9 +1697,9 @@
                   <a:srgbClr val="000000"/>
                 </a:solidFill>
                 <a:effectLst/>
-                <a:latin typeface="Avenir Roman" charset="0"/>
-                <a:ea typeface="Avenir Roman" charset="0"/>
-                <a:cs typeface="Avenir Roman" charset="0"/>
+                <a:latin typeface="Avenir" charset="0"/>
+                <a:ea typeface="Avenir" charset="0"/>
+                <a:cs typeface="Avenir" charset="0"/>
                 <a:sym typeface="Avenir Roman" charset="0"/>
               </a:rPr>
               <a:t>⏱ ~30 seg. | 💡 Reglas de Oro: No leer — </a:t>
@@ -1827,9 +1710,9 @@
                   <a:srgbClr val="000000"/>
                 </a:solidFill>
                 <a:effectLst/>
-                <a:latin typeface="Avenir Roman" charset="0"/>
-                <a:ea typeface="Avenir Roman" charset="0"/>
-                <a:cs typeface="Avenir Roman" charset="0"/>
+                <a:latin typeface="Avenir" charset="0"/>
+                <a:ea typeface="Avenir" charset="0"/>
+                <a:cs typeface="Avenir" charset="0"/>
                 <a:sym typeface="Avenir Roman" charset="0"/>
               </a:rPr>
               <a:t>cámaras</a:t>
@@ -1840,9 +1723,9 @@
                   <a:srgbClr val="000000"/>
                 </a:solidFill>
                 <a:effectLst/>
-                <a:latin typeface="Avenir Roman" charset="0"/>
-                <a:ea typeface="Avenir Roman" charset="0"/>
-                <a:cs typeface="Avenir Roman" charset="0"/>
+                <a:latin typeface="Avenir" charset="0"/>
+                <a:ea typeface="Avenir" charset="0"/>
+                <a:cs typeface="Avenir" charset="0"/>
                 <a:sym typeface="Avenir Roman" charset="0"/>
               </a:rPr>
               <a:t> </a:t>
@@ -1853,9 +1736,9 @@
                   <a:srgbClr val="000000"/>
                 </a:solidFill>
                 <a:effectLst/>
-                <a:latin typeface="Avenir Roman" charset="0"/>
-                <a:ea typeface="Avenir Roman" charset="0"/>
-                <a:cs typeface="Avenir Roman" charset="0"/>
+                <a:latin typeface="Avenir" charset="0"/>
+                <a:ea typeface="Avenir" charset="0"/>
+                <a:cs typeface="Avenir" charset="0"/>
                 <a:sym typeface="Avenir Roman" charset="0"/>
               </a:rPr>
               <a:t>encendidas</a:t>
@@ -1866,9 +1749,9 @@
                   <a:srgbClr val="000000"/>
                 </a:solidFill>
                 <a:effectLst/>
-                <a:latin typeface="Avenir Roman" charset="0"/>
-                <a:ea typeface="Avenir Roman" charset="0"/>
-                <a:cs typeface="Avenir Roman" charset="0"/>
+                <a:latin typeface="Avenir" charset="0"/>
+                <a:ea typeface="Avenir" charset="0"/>
+                <a:cs typeface="Avenir" charset="0"/>
                 <a:sym typeface="Avenir Roman" charset="0"/>
               </a:rPr>
               <a:t> — </a:t>
@@ -1879,9 +1762,9 @@
                   <a:srgbClr val="000000"/>
                 </a:solidFill>
                 <a:effectLst/>
-                <a:latin typeface="Avenir Roman" charset="0"/>
-                <a:ea typeface="Avenir Roman" charset="0"/>
-                <a:cs typeface="Avenir Roman" charset="0"/>
+                <a:latin typeface="Avenir" charset="0"/>
+                <a:ea typeface="Avenir" charset="0"/>
+                <a:cs typeface="Avenir" charset="0"/>
                 <a:sym typeface="Avenir Roman" charset="0"/>
               </a:rPr>
               <a:t>máx</a:t>
@@ -1892,9 +1775,9 @@
                   <a:srgbClr val="000000"/>
                 </a:solidFill>
                 <a:effectLst/>
-                <a:latin typeface="Avenir Roman" charset="0"/>
-                <a:ea typeface="Avenir Roman" charset="0"/>
-                <a:cs typeface="Avenir Roman" charset="0"/>
+                <a:latin typeface="Avenir" charset="0"/>
+                <a:ea typeface="Avenir" charset="0"/>
+                <a:cs typeface="Avenir" charset="0"/>
                 <a:sym typeface="Avenir Roman" charset="0"/>
               </a:rPr>
               <a:t>. 10-15 min </a:t>
@@ -1905,9 +1788,9 @@
                   <a:srgbClr val="000000"/>
                 </a:solidFill>
                 <a:effectLst/>
-                <a:latin typeface="Avenir Roman" charset="0"/>
-                <a:ea typeface="Avenir Roman" charset="0"/>
-                <a:cs typeface="Avenir Roman" charset="0"/>
+                <a:latin typeface="Avenir" charset="0"/>
+                <a:ea typeface="Avenir" charset="0"/>
+                <a:cs typeface="Avenir" charset="0"/>
                 <a:sym typeface="Avenir Roman" charset="0"/>
               </a:rPr>
               <a:t>en</a:t>
@@ -1918,9 +1801,9 @@
                   <a:srgbClr val="000000"/>
                 </a:solidFill>
                 <a:effectLst/>
-                <a:latin typeface="Avenir Roman" charset="0"/>
-                <a:ea typeface="Avenir Roman" charset="0"/>
-                <a:cs typeface="Avenir Roman" charset="0"/>
+                <a:latin typeface="Avenir" charset="0"/>
+                <a:ea typeface="Avenir" charset="0"/>
+                <a:cs typeface="Avenir" charset="0"/>
                 <a:sym typeface="Avenir Roman" charset="0"/>
               </a:rPr>
               <a:t> total.</a:t>
@@ -1995,46 +1878,6 @@
           <a:bodyPr/>
           <a:lstStyle/>
           <a:p>
-            <a:r>
-              <a:rPr lang="es-ES" dirty="0"/>
-              <a:t>*   **Notas del Presentador:** *"Para esta exposición, seguiremos la estructura de la plantilla oficial. Comenzaremos abordando la problemática del sector y nuestros objetivos, para luego profundizar en la arquitectura híbrida de nuestra propuesta. Después, presentaremos nuestro prototipo en acción, validaremos científicamente los resultados y cerraremos con nuestras conclusiones."*</a:t>
-            </a:r>
-          </a:p>
-          <a:p>
-            <a:endParaRPr lang="es-ES" dirty="0"/>
-          </a:p>
-          <a:p>
-            <a:pPr marL="342900" indent="-342900">
-              <a:buFont typeface="Arial" panose="020B0604020202020204" pitchFamily="34" charset="0"/>
-              <a:buChar char="•"/>
-            </a:pPr>
-            <a:r>
-              <a:rPr lang="es-ES" dirty="0"/>
-              <a:t>**Sugerencia Visual:** Simplemente el texto organizado con viñetas limpias.</a:t>
-            </a:r>
-          </a:p>
-          <a:p>
-            <a:pPr marL="342900" indent="-342900">
-              <a:buFont typeface="Arial" panose="020B0604020202020204" pitchFamily="34" charset="0"/>
-              <a:buChar char="•"/>
-            </a:pPr>
-            <a:endParaRPr lang="en-US" dirty="0"/>
-          </a:p>
-          <a:p>
-            <a:pPr marL="342900" indent="-342900">
-              <a:buFont typeface="Arial" panose="020B0604020202020204" pitchFamily="34" charset="0"/>
-              <a:buChar char="•"/>
-            </a:pPr>
-            <a:endParaRPr lang="en-US" dirty="0"/>
-          </a:p>
-          <a:p>
-            <a:pPr marL="342900" indent="-342900">
-              <a:buFont typeface="Arial" panose="020B0604020202020204" pitchFamily="34" charset="0"/>
-              <a:buChar char="•"/>
-            </a:pPr>
-            <a:endParaRPr lang="en-US" dirty="0"/>
-          </a:p>
-          <a:p>
             <a:pPr marL="0" marR="0" lvl="0" indent="0" algn="l" defTabSz="457200" rtl="0" eaLnBrk="0" fontAlgn="base" latinLnBrk="0" hangingPunct="0">
               <a:lnSpc>
                 <a:spcPct val="125000"/>
@@ -2053,49 +1896,14 @@
               <a:defRPr/>
             </a:pPr>
             <a:r>
-              <a:rPr lang="es-ES" sz="2400" b="1" kern="1200" dirty="0">
-                <a:solidFill>
-                  <a:srgbClr val="000000"/>
-                </a:solidFill>
-                <a:effectLst/>
-                <a:latin typeface="Avenir Roman" charset="0"/>
-                <a:ea typeface="Avenir Roman" charset="0"/>
-                <a:cs typeface="Avenir Roman" charset="0"/>
-                <a:sym typeface="Avenir Roman" charset="0"/>
-              </a:rPr>
-              <a:t>----------------------------------------------------------------------------------------------------------------------------------------------------------------------------------------------</a:t>
-            </a:r>
-            <a:endParaRPr lang="en-US" dirty="0">
-              <a:effectLst/>
-            </a:endParaRPr>
-          </a:p>
-          <a:p>
-            <a:pPr marL="0" marR="0" lvl="0" indent="0" algn="l" defTabSz="457200" rtl="0" eaLnBrk="0" fontAlgn="base" latinLnBrk="0" hangingPunct="0">
-              <a:lnSpc>
-                <a:spcPct val="125000"/>
-              </a:lnSpc>
-              <a:spcBef>
-                <a:spcPct val="0"/>
-              </a:spcBef>
-              <a:spcAft>
-                <a:spcPct val="0"/>
-              </a:spcAft>
-              <a:buClrTx/>
-              <a:buSzTx/>
-              <a:buFont typeface="Arial" panose="020B0604020202020204" pitchFamily="34" charset="0"/>
-              <a:buNone/>
-              <a:tabLst/>
-              <a:defRPr/>
-            </a:pPr>
-            <a:r>
-              <a:rPr lang="en-US" sz="2400" kern="1200" dirty="0">
-                <a:solidFill>
-                  <a:srgbClr val="000000"/>
-                </a:solidFill>
-                <a:effectLst/>
-                <a:latin typeface="Avenir Roman" charset="0"/>
-                <a:ea typeface="Avenir Roman" charset="0"/>
-                <a:cs typeface="Avenir Roman" charset="0"/>
+              <a:rPr lang="en-US" sz="2400" kern="1200" dirty="0">
+                <a:solidFill>
+                  <a:srgbClr val="000000"/>
+                </a:solidFill>
+                <a:effectLst/>
+                <a:latin typeface="Avenir" charset="0"/>
+                <a:ea typeface="Avenir" charset="0"/>
+                <a:cs typeface="Avenir" charset="0"/>
                 <a:sym typeface="Avenir Roman" charset="0"/>
               </a:rPr>
               <a:t>[P2] "</a:t>
@@ -2106,9 +1914,9 @@
                   <a:srgbClr val="000000"/>
                 </a:solidFill>
                 <a:effectLst/>
-                <a:latin typeface="Avenir Roman" charset="0"/>
-                <a:ea typeface="Avenir Roman" charset="0"/>
-                <a:cs typeface="Avenir Roman" charset="0"/>
+                <a:latin typeface="Avenir" charset="0"/>
+                <a:ea typeface="Avenir" charset="0"/>
+                <a:cs typeface="Avenir" charset="0"/>
                 <a:sym typeface="Avenir Roman" charset="0"/>
               </a:rPr>
               <a:t>Seguiremos</a:t>
@@ -2119,9 +1927,9 @@
                   <a:srgbClr val="000000"/>
                 </a:solidFill>
                 <a:effectLst/>
-                <a:latin typeface="Avenir Roman" charset="0"/>
-                <a:ea typeface="Avenir Roman" charset="0"/>
-                <a:cs typeface="Avenir Roman" charset="0"/>
+                <a:latin typeface="Avenir" charset="0"/>
+                <a:ea typeface="Avenir" charset="0"/>
+                <a:cs typeface="Avenir" charset="0"/>
                 <a:sym typeface="Avenir Roman" charset="0"/>
               </a:rPr>
               <a:t> la </a:t>
@@ -2132,9 +1940,9 @@
                   <a:srgbClr val="000000"/>
                 </a:solidFill>
                 <a:effectLst/>
-                <a:latin typeface="Avenir Roman" charset="0"/>
-                <a:ea typeface="Avenir Roman" charset="0"/>
-                <a:cs typeface="Avenir Roman" charset="0"/>
+                <a:latin typeface="Avenir" charset="0"/>
+                <a:ea typeface="Avenir" charset="0"/>
+                <a:cs typeface="Avenir" charset="0"/>
                 <a:sym typeface="Avenir Roman" charset="0"/>
               </a:rPr>
               <a:t>estructura</a:t>
@@ -2145,9 +1953,9 @@
                   <a:srgbClr val="000000"/>
                 </a:solidFill>
                 <a:effectLst/>
-                <a:latin typeface="Avenir Roman" charset="0"/>
-                <a:ea typeface="Avenir Roman" charset="0"/>
-                <a:cs typeface="Avenir Roman" charset="0"/>
+                <a:latin typeface="Avenir" charset="0"/>
+                <a:ea typeface="Avenir" charset="0"/>
+                <a:cs typeface="Avenir" charset="0"/>
                 <a:sym typeface="Avenir Roman" charset="0"/>
               </a:rPr>
               <a:t> </a:t>
@@ -2158,9 +1966,9 @@
                   <a:srgbClr val="000000"/>
                 </a:solidFill>
                 <a:effectLst/>
-                <a:latin typeface="Avenir Roman" charset="0"/>
-                <a:ea typeface="Avenir Roman" charset="0"/>
-                <a:cs typeface="Avenir Roman" charset="0"/>
+                <a:latin typeface="Avenir" charset="0"/>
+                <a:ea typeface="Avenir" charset="0"/>
+                <a:cs typeface="Avenir" charset="0"/>
                 <a:sym typeface="Avenir Roman" charset="0"/>
               </a:rPr>
               <a:t>oficial</a:t>
@@ -2171,9 +1979,9 @@
                   <a:srgbClr val="000000"/>
                 </a:solidFill>
                 <a:effectLst/>
-                <a:latin typeface="Avenir Roman" charset="0"/>
-                <a:ea typeface="Avenir Roman" charset="0"/>
-                <a:cs typeface="Avenir Roman" charset="0"/>
+                <a:latin typeface="Avenir" charset="0"/>
+                <a:ea typeface="Avenir" charset="0"/>
+                <a:cs typeface="Avenir" charset="0"/>
                 <a:sym typeface="Avenir Roman" charset="0"/>
               </a:rPr>
               <a:t> de la </a:t>
@@ -2184,9 +1992,9 @@
                   <a:srgbClr val="000000"/>
                 </a:solidFill>
                 <a:effectLst/>
-                <a:latin typeface="Avenir Roman" charset="0"/>
-                <a:ea typeface="Avenir Roman" charset="0"/>
-                <a:cs typeface="Avenir Roman" charset="0"/>
+                <a:latin typeface="Avenir" charset="0"/>
+                <a:ea typeface="Avenir" charset="0"/>
+                <a:cs typeface="Avenir" charset="0"/>
                 <a:sym typeface="Avenir Roman" charset="0"/>
               </a:rPr>
               <a:t>plantilla</a:t>
@@ -2197,9 +2005,9 @@
                   <a:srgbClr val="000000"/>
                 </a:solidFill>
                 <a:effectLst/>
-                <a:latin typeface="Avenir Roman" charset="0"/>
-                <a:ea typeface="Avenir Roman" charset="0"/>
-                <a:cs typeface="Avenir Roman" charset="0"/>
+                <a:latin typeface="Avenir" charset="0"/>
+                <a:ea typeface="Avenir" charset="0"/>
+                <a:cs typeface="Avenir" charset="0"/>
                 <a:sym typeface="Avenir Roman" charset="0"/>
               </a:rPr>
               <a:t>. </a:t>
@@ -2210,9 +2018,9 @@
                   <a:srgbClr val="000000"/>
                 </a:solidFill>
                 <a:effectLst/>
-                <a:latin typeface="Avenir Roman" charset="0"/>
-                <a:ea typeface="Avenir Roman" charset="0"/>
-                <a:cs typeface="Avenir Roman" charset="0"/>
+                <a:latin typeface="Avenir" charset="0"/>
+                <a:ea typeface="Avenir" charset="0"/>
+                <a:cs typeface="Avenir" charset="0"/>
                 <a:sym typeface="Avenir Roman" charset="0"/>
               </a:rPr>
               <a:t>Comenzamos</a:t>
@@ -2223,9 +2031,9 @@
                   <a:srgbClr val="000000"/>
                 </a:solidFill>
                 <a:effectLst/>
-                <a:latin typeface="Avenir Roman" charset="0"/>
-                <a:ea typeface="Avenir Roman" charset="0"/>
-                <a:cs typeface="Avenir Roman" charset="0"/>
+                <a:latin typeface="Avenir" charset="0"/>
+                <a:ea typeface="Avenir" charset="0"/>
+                <a:cs typeface="Avenir" charset="0"/>
                 <a:sym typeface="Avenir Roman" charset="0"/>
               </a:rPr>
               <a:t> con </a:t>
@@ -2236,9 +2044,9 @@
                   <a:srgbClr val="000000"/>
                 </a:solidFill>
                 <a:effectLst/>
-                <a:latin typeface="Avenir Roman" charset="0"/>
-                <a:ea typeface="Avenir Roman" charset="0"/>
-                <a:cs typeface="Avenir Roman" charset="0"/>
+                <a:latin typeface="Avenir" charset="0"/>
+                <a:ea typeface="Avenir" charset="0"/>
+                <a:cs typeface="Avenir" charset="0"/>
                 <a:sym typeface="Avenir Roman" charset="0"/>
               </a:rPr>
               <a:t>el</a:t>
@@ -2249,9 +2057,9 @@
                   <a:srgbClr val="000000"/>
                 </a:solidFill>
                 <a:effectLst/>
-                <a:latin typeface="Avenir Roman" charset="0"/>
-                <a:ea typeface="Avenir Roman" charset="0"/>
-                <a:cs typeface="Avenir Roman" charset="0"/>
+                <a:latin typeface="Avenir" charset="0"/>
+                <a:ea typeface="Avenir" charset="0"/>
+                <a:cs typeface="Avenir" charset="0"/>
                 <a:sym typeface="Avenir Roman" charset="0"/>
               </a:rPr>
               <a:t> </a:t>
@@ -2262,9 +2070,9 @@
                   <a:srgbClr val="000000"/>
                 </a:solidFill>
                 <a:effectLst/>
-                <a:latin typeface="Avenir Roman" charset="0"/>
-                <a:ea typeface="Avenir Roman" charset="0"/>
-                <a:cs typeface="Avenir Roman" charset="0"/>
+                <a:latin typeface="Avenir" charset="0"/>
+                <a:ea typeface="Avenir" charset="0"/>
+                <a:cs typeface="Avenir" charset="0"/>
                 <a:sym typeface="Avenir Roman" charset="0"/>
               </a:rPr>
               <a:t>contexto</a:t>
@@ -2275,9 +2083,9 @@
                   <a:srgbClr val="000000"/>
                 </a:solidFill>
                 <a:effectLst/>
-                <a:latin typeface="Avenir Roman" charset="0"/>
-                <a:ea typeface="Avenir Roman" charset="0"/>
-                <a:cs typeface="Avenir Roman" charset="0"/>
+                <a:latin typeface="Avenir" charset="0"/>
+                <a:ea typeface="Avenir" charset="0"/>
+                <a:cs typeface="Avenir" charset="0"/>
                 <a:sym typeface="Avenir Roman" charset="0"/>
               </a:rPr>
               <a:t> y </a:t>
@@ -2288,9 +2096,9 @@
                   <a:srgbClr val="000000"/>
                 </a:solidFill>
                 <a:effectLst/>
-                <a:latin typeface="Avenir Roman" charset="0"/>
-                <a:ea typeface="Avenir Roman" charset="0"/>
-                <a:cs typeface="Avenir Roman" charset="0"/>
+                <a:latin typeface="Avenir" charset="0"/>
+                <a:ea typeface="Avenir" charset="0"/>
+                <a:cs typeface="Avenir" charset="0"/>
                 <a:sym typeface="Avenir Roman" charset="0"/>
               </a:rPr>
               <a:t>el</a:t>
@@ -2301,9 +2109,9 @@
                   <a:srgbClr val="000000"/>
                 </a:solidFill>
                 <a:effectLst/>
-                <a:latin typeface="Avenir Roman" charset="0"/>
-                <a:ea typeface="Avenir Roman" charset="0"/>
-                <a:cs typeface="Avenir Roman" charset="0"/>
+                <a:latin typeface="Avenir" charset="0"/>
+                <a:ea typeface="Avenir" charset="0"/>
+                <a:cs typeface="Avenir" charset="0"/>
                 <a:sym typeface="Avenir Roman" charset="0"/>
               </a:rPr>
               <a:t> </a:t>
@@ -2314,9 +2122,9 @@
                   <a:srgbClr val="000000"/>
                 </a:solidFill>
                 <a:effectLst/>
-                <a:latin typeface="Avenir Roman" charset="0"/>
-                <a:ea typeface="Avenir Roman" charset="0"/>
-                <a:cs typeface="Avenir Roman" charset="0"/>
+                <a:latin typeface="Avenir" charset="0"/>
+                <a:ea typeface="Avenir" charset="0"/>
+                <a:cs typeface="Avenir" charset="0"/>
                 <a:sym typeface="Avenir Roman" charset="0"/>
               </a:rPr>
               <a:t>problema</a:t>
@@ -2327,9 +2135,9 @@
                   <a:srgbClr val="000000"/>
                 </a:solidFill>
                 <a:effectLst/>
-                <a:latin typeface="Avenir Roman" charset="0"/>
-                <a:ea typeface="Avenir Roman" charset="0"/>
-                <a:cs typeface="Avenir Roman" charset="0"/>
+                <a:latin typeface="Avenir" charset="0"/>
+                <a:ea typeface="Avenir" charset="0"/>
+                <a:cs typeface="Avenir" charset="0"/>
                 <a:sym typeface="Avenir Roman" charset="0"/>
               </a:rPr>
               <a:t>, luego </a:t>
@@ -2340,9 +2148,9 @@
                   <a:srgbClr val="000000"/>
                 </a:solidFill>
                 <a:effectLst/>
-                <a:latin typeface="Avenir Roman" charset="0"/>
-                <a:ea typeface="Avenir Roman" charset="0"/>
-                <a:cs typeface="Avenir Roman" charset="0"/>
+                <a:latin typeface="Avenir" charset="0"/>
+                <a:ea typeface="Avenir" charset="0"/>
+                <a:cs typeface="Avenir" charset="0"/>
                 <a:sym typeface="Avenir Roman" charset="0"/>
               </a:rPr>
               <a:t>los</a:t>
@@ -2353,9 +2161,9 @@
                   <a:srgbClr val="000000"/>
                 </a:solidFill>
                 <a:effectLst/>
-                <a:latin typeface="Avenir Roman" charset="0"/>
-                <a:ea typeface="Avenir Roman" charset="0"/>
-                <a:cs typeface="Avenir Roman" charset="0"/>
+                <a:latin typeface="Avenir" charset="0"/>
+                <a:ea typeface="Avenir" charset="0"/>
+                <a:cs typeface="Avenir" charset="0"/>
                 <a:sym typeface="Avenir Roman" charset="0"/>
               </a:rPr>
               <a:t> </a:t>
@@ -2366,9 +2174,9 @@
                   <a:srgbClr val="000000"/>
                 </a:solidFill>
                 <a:effectLst/>
-                <a:latin typeface="Avenir Roman" charset="0"/>
-                <a:ea typeface="Avenir Roman" charset="0"/>
-                <a:cs typeface="Avenir Roman" charset="0"/>
+                <a:latin typeface="Avenir" charset="0"/>
+                <a:ea typeface="Avenir" charset="0"/>
+                <a:cs typeface="Avenir" charset="0"/>
                 <a:sym typeface="Avenir Roman" charset="0"/>
               </a:rPr>
               <a:t>objetivos</a:t>
@@ -2379,9 +2187,9 @@
                   <a:srgbClr val="000000"/>
                 </a:solidFill>
                 <a:effectLst/>
-                <a:latin typeface="Avenir Roman" charset="0"/>
-                <a:ea typeface="Avenir Roman" charset="0"/>
-                <a:cs typeface="Avenir Roman" charset="0"/>
+                <a:latin typeface="Avenir" charset="0"/>
+                <a:ea typeface="Avenir" charset="0"/>
+                <a:cs typeface="Avenir" charset="0"/>
                 <a:sym typeface="Avenir Roman" charset="0"/>
               </a:rPr>
               <a:t> y </a:t>
@@ -2392,9 +2200,9 @@
                   <a:srgbClr val="000000"/>
                 </a:solidFill>
                 <a:effectLst/>
-                <a:latin typeface="Avenir Roman" charset="0"/>
-                <a:ea typeface="Avenir Roman" charset="0"/>
-                <a:cs typeface="Avenir Roman" charset="0"/>
+                <a:latin typeface="Avenir" charset="0"/>
+                <a:ea typeface="Avenir" charset="0"/>
+                <a:cs typeface="Avenir" charset="0"/>
                 <a:sym typeface="Avenir Roman" charset="0"/>
               </a:rPr>
               <a:t>metodología</a:t>
@@ -2405,9 +2213,9 @@
                   <a:srgbClr val="000000"/>
                 </a:solidFill>
                 <a:effectLst/>
-                <a:latin typeface="Avenir Roman" charset="0"/>
-                <a:ea typeface="Avenir Roman" charset="0"/>
-                <a:cs typeface="Avenir Roman" charset="0"/>
+                <a:latin typeface="Avenir" charset="0"/>
+                <a:ea typeface="Avenir" charset="0"/>
+                <a:cs typeface="Avenir" charset="0"/>
                 <a:sym typeface="Avenir Roman" charset="0"/>
               </a:rPr>
               <a:t>, </a:t>
@@ -2418,9 +2226,9 @@
                   <a:srgbClr val="000000"/>
                 </a:solidFill>
                 <a:effectLst/>
-                <a:latin typeface="Avenir Roman" charset="0"/>
-                <a:ea typeface="Avenir Roman" charset="0"/>
-                <a:cs typeface="Avenir Roman" charset="0"/>
+                <a:latin typeface="Avenir" charset="0"/>
+                <a:ea typeface="Avenir" charset="0"/>
+                <a:cs typeface="Avenir" charset="0"/>
                 <a:sym typeface="Avenir Roman" charset="0"/>
               </a:rPr>
               <a:t>después</a:t>
@@ -2431,9 +2239,9 @@
                   <a:srgbClr val="000000"/>
                 </a:solidFill>
                 <a:effectLst/>
-                <a:latin typeface="Avenir Roman" charset="0"/>
-                <a:ea typeface="Avenir Roman" charset="0"/>
-                <a:cs typeface="Avenir Roman" charset="0"/>
+                <a:latin typeface="Avenir" charset="0"/>
+                <a:ea typeface="Avenir" charset="0"/>
+                <a:cs typeface="Avenir" charset="0"/>
                 <a:sym typeface="Avenir Roman" charset="0"/>
               </a:rPr>
               <a:t> la </a:t>
@@ -2444,9 +2252,9 @@
                   <a:srgbClr val="000000"/>
                 </a:solidFill>
                 <a:effectLst/>
-                <a:latin typeface="Avenir Roman" charset="0"/>
-                <a:ea typeface="Avenir Roman" charset="0"/>
-                <a:cs typeface="Avenir Roman" charset="0"/>
+                <a:latin typeface="Avenir" charset="0"/>
+                <a:ea typeface="Avenir" charset="0"/>
+                <a:cs typeface="Avenir" charset="0"/>
                 <a:sym typeface="Avenir Roman" charset="0"/>
               </a:rPr>
               <a:t>arquitectura</a:t>
@@ -2457,9 +2265,9 @@
                   <a:srgbClr val="000000"/>
                 </a:solidFill>
                 <a:effectLst/>
-                <a:latin typeface="Avenir Roman" charset="0"/>
-                <a:ea typeface="Avenir Roman" charset="0"/>
-                <a:cs typeface="Avenir Roman" charset="0"/>
+                <a:latin typeface="Avenir" charset="0"/>
+                <a:ea typeface="Avenir" charset="0"/>
+                <a:cs typeface="Avenir" charset="0"/>
                 <a:sym typeface="Avenir Roman" charset="0"/>
               </a:rPr>
               <a:t> </a:t>
@@ -2470,9 +2278,9 @@
                   <a:srgbClr val="000000"/>
                 </a:solidFill>
                 <a:effectLst/>
-                <a:latin typeface="Avenir Roman" charset="0"/>
-                <a:ea typeface="Avenir Roman" charset="0"/>
-                <a:cs typeface="Avenir Roman" charset="0"/>
+                <a:latin typeface="Avenir" charset="0"/>
+                <a:ea typeface="Avenir" charset="0"/>
+                <a:cs typeface="Avenir" charset="0"/>
                 <a:sym typeface="Avenir Roman" charset="0"/>
               </a:rPr>
               <a:t>técnica</a:t>
@@ -2483,9 +2291,9 @@
                   <a:srgbClr val="000000"/>
                 </a:solidFill>
                 <a:effectLst/>
-                <a:latin typeface="Avenir Roman" charset="0"/>
-                <a:ea typeface="Avenir Roman" charset="0"/>
-                <a:cs typeface="Avenir Roman" charset="0"/>
+                <a:latin typeface="Avenir" charset="0"/>
+                <a:ea typeface="Avenir" charset="0"/>
+                <a:cs typeface="Avenir" charset="0"/>
                 <a:sym typeface="Avenir Roman" charset="0"/>
               </a:rPr>
               <a:t> con </a:t>
@@ -2496,9 +2304,9 @@
                   <a:srgbClr val="000000"/>
                 </a:solidFill>
                 <a:effectLst/>
-                <a:latin typeface="Avenir Roman" charset="0"/>
-                <a:ea typeface="Avenir Roman" charset="0"/>
-                <a:cs typeface="Avenir Roman" charset="0"/>
+                <a:latin typeface="Avenir" charset="0"/>
+                <a:ea typeface="Avenir" charset="0"/>
+                <a:cs typeface="Avenir" charset="0"/>
                 <a:sym typeface="Avenir Roman" charset="0"/>
               </a:rPr>
               <a:t>una</a:t>
@@ -2509,9 +2317,9 @@
                   <a:srgbClr val="000000"/>
                 </a:solidFill>
                 <a:effectLst/>
-                <a:latin typeface="Avenir Roman" charset="0"/>
-                <a:ea typeface="Avenir Roman" charset="0"/>
-                <a:cs typeface="Avenir Roman" charset="0"/>
+                <a:latin typeface="Avenir" charset="0"/>
+                <a:ea typeface="Avenir" charset="0"/>
+                <a:cs typeface="Avenir" charset="0"/>
                 <a:sym typeface="Avenir Roman" charset="0"/>
               </a:rPr>
               <a:t> </a:t>
@@ -2522,9 +2330,9 @@
                   <a:srgbClr val="000000"/>
                 </a:solidFill>
                 <a:effectLst/>
-                <a:latin typeface="Avenir Roman" charset="0"/>
-                <a:ea typeface="Avenir Roman" charset="0"/>
-                <a:cs typeface="Avenir Roman" charset="0"/>
+                <a:latin typeface="Avenir" charset="0"/>
+                <a:ea typeface="Avenir" charset="0"/>
+                <a:cs typeface="Avenir" charset="0"/>
                 <a:sym typeface="Avenir Roman" charset="0"/>
               </a:rPr>
               <a:t>demostración</a:t>
@@ -2535,9 +2343,9 @@
                   <a:srgbClr val="000000"/>
                 </a:solidFill>
                 <a:effectLst/>
-                <a:latin typeface="Avenir Roman" charset="0"/>
-                <a:ea typeface="Avenir Roman" charset="0"/>
-                <a:cs typeface="Avenir Roman" charset="0"/>
+                <a:latin typeface="Avenir" charset="0"/>
+                <a:ea typeface="Avenir" charset="0"/>
+                <a:cs typeface="Avenir" charset="0"/>
                 <a:sym typeface="Avenir Roman" charset="0"/>
               </a:rPr>
               <a:t> del </a:t>
@@ -2548,9 +2356,9 @@
                   <a:srgbClr val="000000"/>
                 </a:solidFill>
                 <a:effectLst/>
-                <a:latin typeface="Avenir Roman" charset="0"/>
-                <a:ea typeface="Avenir Roman" charset="0"/>
-                <a:cs typeface="Avenir Roman" charset="0"/>
+                <a:latin typeface="Avenir" charset="0"/>
+                <a:ea typeface="Avenir" charset="0"/>
+                <a:cs typeface="Avenir" charset="0"/>
                 <a:sym typeface="Avenir Roman" charset="0"/>
               </a:rPr>
               <a:t>prototipo</a:t>
@@ -2561,9 +2369,9 @@
                   <a:srgbClr val="000000"/>
                 </a:solidFill>
                 <a:effectLst/>
-                <a:latin typeface="Avenir Roman" charset="0"/>
-                <a:ea typeface="Avenir Roman" charset="0"/>
-                <a:cs typeface="Avenir Roman" charset="0"/>
+                <a:latin typeface="Avenir" charset="0"/>
+                <a:ea typeface="Avenir" charset="0"/>
+                <a:cs typeface="Avenir" charset="0"/>
                 <a:sym typeface="Avenir Roman" charset="0"/>
               </a:rPr>
               <a:t>, la </a:t>
@@ -2574,9 +2382,9 @@
                   <a:srgbClr val="000000"/>
                 </a:solidFill>
                 <a:effectLst/>
-                <a:latin typeface="Avenir Roman" charset="0"/>
-                <a:ea typeface="Avenir Roman" charset="0"/>
-                <a:cs typeface="Avenir Roman" charset="0"/>
+                <a:latin typeface="Avenir" charset="0"/>
+                <a:ea typeface="Avenir" charset="0"/>
+                <a:cs typeface="Avenir" charset="0"/>
                 <a:sym typeface="Avenir Roman" charset="0"/>
               </a:rPr>
               <a:t>validación</a:t>
@@ -2587,9 +2395,9 @@
                   <a:srgbClr val="000000"/>
                 </a:solidFill>
                 <a:effectLst/>
-                <a:latin typeface="Avenir Roman" charset="0"/>
-                <a:ea typeface="Avenir Roman" charset="0"/>
-                <a:cs typeface="Avenir Roman" charset="0"/>
+                <a:latin typeface="Avenir" charset="0"/>
+                <a:ea typeface="Avenir" charset="0"/>
+                <a:cs typeface="Avenir" charset="0"/>
                 <a:sym typeface="Avenir Roman" charset="0"/>
               </a:rPr>
               <a:t> </a:t>
@@ -2600,9 +2408,9 @@
                   <a:srgbClr val="000000"/>
                 </a:solidFill>
                 <a:effectLst/>
-                <a:latin typeface="Avenir Roman" charset="0"/>
-                <a:ea typeface="Avenir Roman" charset="0"/>
-                <a:cs typeface="Avenir Roman" charset="0"/>
+                <a:latin typeface="Avenir" charset="0"/>
+                <a:ea typeface="Avenir" charset="0"/>
+                <a:cs typeface="Avenir" charset="0"/>
                 <a:sym typeface="Avenir Roman" charset="0"/>
               </a:rPr>
               <a:t>científica</a:t>
@@ -2613,9 +2421,9 @@
                   <a:srgbClr val="000000"/>
                 </a:solidFill>
                 <a:effectLst/>
-                <a:latin typeface="Avenir Roman" charset="0"/>
-                <a:ea typeface="Avenir Roman" charset="0"/>
-                <a:cs typeface="Avenir Roman" charset="0"/>
+                <a:latin typeface="Avenir" charset="0"/>
+                <a:ea typeface="Avenir" charset="0"/>
+                <a:cs typeface="Avenir" charset="0"/>
                 <a:sym typeface="Avenir Roman" charset="0"/>
               </a:rPr>
               <a:t> con </a:t>
@@ -2626,9 +2434,9 @@
                   <a:srgbClr val="000000"/>
                 </a:solidFill>
                 <a:effectLst/>
-                <a:latin typeface="Avenir Roman" charset="0"/>
-                <a:ea typeface="Avenir Roman" charset="0"/>
-                <a:cs typeface="Avenir Roman" charset="0"/>
+                <a:latin typeface="Avenir" charset="0"/>
+                <a:ea typeface="Avenir" charset="0"/>
+                <a:cs typeface="Avenir" charset="0"/>
                 <a:sym typeface="Avenir Roman" charset="0"/>
               </a:rPr>
               <a:t>nuestros</a:t>
@@ -2639,9 +2447,9 @@
                   <a:srgbClr val="000000"/>
                 </a:solidFill>
                 <a:effectLst/>
-                <a:latin typeface="Avenir Roman" charset="0"/>
-                <a:ea typeface="Avenir Roman" charset="0"/>
-                <a:cs typeface="Avenir Roman" charset="0"/>
+                <a:latin typeface="Avenir" charset="0"/>
+                <a:ea typeface="Avenir" charset="0"/>
+                <a:cs typeface="Avenir" charset="0"/>
                 <a:sym typeface="Avenir Roman" charset="0"/>
               </a:rPr>
               <a:t> KPIs, y </a:t>
@@ -2652,9 +2460,9 @@
                   <a:srgbClr val="000000"/>
                 </a:solidFill>
                 <a:effectLst/>
-                <a:latin typeface="Avenir Roman" charset="0"/>
-                <a:ea typeface="Avenir Roman" charset="0"/>
-                <a:cs typeface="Avenir Roman" charset="0"/>
+                <a:latin typeface="Avenir" charset="0"/>
+                <a:ea typeface="Avenir" charset="0"/>
+                <a:cs typeface="Avenir" charset="0"/>
                 <a:sym typeface="Avenir Roman" charset="0"/>
               </a:rPr>
               <a:t>cerramos</a:t>
@@ -2665,9 +2473,9 @@
                   <a:srgbClr val="000000"/>
                 </a:solidFill>
                 <a:effectLst/>
-                <a:latin typeface="Avenir Roman" charset="0"/>
-                <a:ea typeface="Avenir Roman" charset="0"/>
-                <a:cs typeface="Avenir Roman" charset="0"/>
+                <a:latin typeface="Avenir" charset="0"/>
+                <a:ea typeface="Avenir" charset="0"/>
+                <a:cs typeface="Avenir" charset="0"/>
                 <a:sym typeface="Avenir Roman" charset="0"/>
               </a:rPr>
               <a:t> con las </a:t>
@@ -2678,9 +2486,9 @@
                   <a:srgbClr val="000000"/>
                 </a:solidFill>
                 <a:effectLst/>
-                <a:latin typeface="Avenir Roman" charset="0"/>
-                <a:ea typeface="Avenir Roman" charset="0"/>
-                <a:cs typeface="Avenir Roman" charset="0"/>
+                <a:latin typeface="Avenir" charset="0"/>
+                <a:ea typeface="Avenir" charset="0"/>
+                <a:cs typeface="Avenir" charset="0"/>
                 <a:sym typeface="Avenir Roman" charset="0"/>
               </a:rPr>
               <a:t>conclusiones</a:t>
@@ -2691,9 +2499,9 @@
                   <a:srgbClr val="000000"/>
                 </a:solidFill>
                 <a:effectLst/>
-                <a:latin typeface="Avenir Roman" charset="0"/>
-                <a:ea typeface="Avenir Roman" charset="0"/>
-                <a:cs typeface="Avenir Roman" charset="0"/>
+                <a:latin typeface="Avenir" charset="0"/>
+                <a:ea typeface="Avenir" charset="0"/>
+                <a:cs typeface="Avenir" charset="0"/>
                 <a:sym typeface="Avenir Roman" charset="0"/>
               </a:rPr>
               <a:t> y </a:t>
@@ -2704,9 +2512,9 @@
                   <a:srgbClr val="000000"/>
                 </a:solidFill>
                 <a:effectLst/>
-                <a:latin typeface="Avenir Roman" charset="0"/>
-                <a:ea typeface="Avenir Roman" charset="0"/>
-                <a:cs typeface="Avenir Roman" charset="0"/>
+                <a:latin typeface="Avenir" charset="0"/>
+                <a:ea typeface="Avenir" charset="0"/>
+                <a:cs typeface="Avenir" charset="0"/>
                 <a:sym typeface="Avenir Roman" charset="0"/>
               </a:rPr>
               <a:t>trabajo</a:t>
@@ -2717,9 +2525,9 @@
                   <a:srgbClr val="000000"/>
                 </a:solidFill>
                 <a:effectLst/>
-                <a:latin typeface="Avenir Roman" charset="0"/>
-                <a:ea typeface="Avenir Roman" charset="0"/>
-                <a:cs typeface="Avenir Roman" charset="0"/>
+                <a:latin typeface="Avenir" charset="0"/>
+                <a:ea typeface="Avenir" charset="0"/>
+                <a:cs typeface="Avenir" charset="0"/>
                 <a:sym typeface="Avenir Roman" charset="0"/>
               </a:rPr>
               <a:t> </a:t>
@@ -2730,9 +2538,9 @@
                   <a:srgbClr val="000000"/>
                 </a:solidFill>
                 <a:effectLst/>
-                <a:latin typeface="Avenir Roman" charset="0"/>
-                <a:ea typeface="Avenir Roman" charset="0"/>
-                <a:cs typeface="Avenir Roman" charset="0"/>
+                <a:latin typeface="Avenir" charset="0"/>
+                <a:ea typeface="Avenir" charset="0"/>
+                <a:cs typeface="Avenir" charset="0"/>
                 <a:sym typeface="Avenir Roman" charset="0"/>
               </a:rPr>
               <a:t>futuro</a:t>
@@ -2743,9 +2551,9 @@
                   <a:srgbClr val="000000"/>
                 </a:solidFill>
                 <a:effectLst/>
-                <a:latin typeface="Avenir Roman" charset="0"/>
-                <a:ea typeface="Avenir Roman" charset="0"/>
-                <a:cs typeface="Avenir Roman" charset="0"/>
+                <a:latin typeface="Avenir" charset="0"/>
+                <a:ea typeface="Avenir" charset="0"/>
+                <a:cs typeface="Avenir" charset="0"/>
                 <a:sym typeface="Avenir Roman" charset="0"/>
               </a:rPr>
               <a:t>."</a:t>
@@ -2756,9 +2564,9 @@
                   <a:srgbClr val="000000"/>
                 </a:solidFill>
                 <a:effectLst/>
-                <a:latin typeface="Avenir Roman" charset="0"/>
-                <a:ea typeface="Avenir Roman" charset="0"/>
-                <a:cs typeface="Avenir Roman" charset="0"/>
+                <a:latin typeface="Avenir" charset="0"/>
+                <a:ea typeface="Avenir" charset="0"/>
+                <a:cs typeface="Avenir" charset="0"/>
                 <a:sym typeface="Avenir Roman" charset="0"/>
               </a:rPr>
             </a:br>
@@ -2768,9 +2576,9 @@
                   <a:srgbClr val="000000"/>
                 </a:solidFill>
                 <a:effectLst/>
-                <a:latin typeface="Avenir Roman" charset="0"/>
-                <a:ea typeface="Avenir Roman" charset="0"/>
-                <a:cs typeface="Avenir Roman" charset="0"/>
+                <a:latin typeface="Avenir" charset="0"/>
+                <a:ea typeface="Avenir" charset="0"/>
+                <a:cs typeface="Avenir" charset="0"/>
                 <a:sym typeface="Avenir Roman" charset="0"/>
               </a:rPr>
             </a:br>
@@ -2780,9 +2588,9 @@
                   <a:srgbClr val="000000"/>
                 </a:solidFill>
                 <a:effectLst/>
-                <a:latin typeface="Avenir Roman" charset="0"/>
-                <a:ea typeface="Avenir Roman" charset="0"/>
-                <a:cs typeface="Avenir Roman" charset="0"/>
+                <a:latin typeface="Avenir" charset="0"/>
+                <a:ea typeface="Avenir" charset="0"/>
+                <a:cs typeface="Avenir" charset="0"/>
                 <a:sym typeface="Avenir Roman" charset="0"/>
               </a:rPr>
               <a:t>⏱ ~20 seg.</a:t>
@@ -2857,39 +2665,6 @@
           <a:bodyPr/>
           <a:lstStyle/>
           <a:p>
-            <a:pPr marL="342900" indent="-342900">
-              <a:buFont typeface="Arial" panose="020B0604020202020204" pitchFamily="34" charset="0"/>
-              <a:buChar char="•"/>
-            </a:pPr>
-            <a:r>
-              <a:rPr lang="es-ES" dirty="0"/>
-              <a:t>**Notas del Presentador:** *"El sector ganadero en México enfrenta una crisis severa. El productor mediano pierde dinero porque alimenta a su ganado de forma empírica y tarda en reaccionar a la inflación del maíz. Aunque existe software como Ganadero SG, éste se limita a contar vacas, no a optimizar dinero. Por otro lado, herramientas científicas como NDS son inaccesibles. Nuestra solución, Caporal AI, cubre esta brecha: es un agente prescriptivo que te dice qué comprar hoy para ahorrar dinero, comunicándose en lenguaje natural."*</a:t>
-            </a:r>
-          </a:p>
-          <a:p>
-            <a:pPr marL="0" indent="0">
-              <a:buFont typeface="Arial" panose="020B0604020202020204" pitchFamily="34" charset="0"/>
-              <a:buNone/>
-            </a:pPr>
-            <a:endParaRPr lang="es-ES" dirty="0"/>
-          </a:p>
-          <a:p>
-            <a:r>
-              <a:rPr lang="es-ES" dirty="0"/>
-              <a:t>*   **Sugerencia Visual:** Una tabla comparativa simplificada (inspirada en la Tabla 3 del documento) o iconos que contrasten "Software Administrativo" vs "Zootecnia de Precisión".</a:t>
-            </a:r>
-            <a:br>
-              <a:rPr lang="es-ES" dirty="0"/>
-            </a:br>
-            <a:br>
-              <a:rPr lang="es-ES" dirty="0"/>
-            </a:br>
-            <a:r>
-              <a:rPr lang="es-ES" b="1" dirty="0"/>
-              <a:t>----------------------------------------------------------------------------------------------------------------------------------------------------------------------------------------------</a:t>
-            </a:r>
-          </a:p>
-          <a:p>
             <a:pPr marL="0" marR="0" lvl="0" indent="0" algn="l" defTabSz="457200" rtl="0" eaLnBrk="0" fontAlgn="base" latinLnBrk="0" hangingPunct="0">
               <a:lnSpc>
                 <a:spcPct val="125000"/>
@@ -3513,71 +3288,6 @@
           <a:bodyPr/>
           <a:lstStyle/>
           <a:p>
-            <a:r>
-              <a:rPr lang="es-ES" dirty="0"/>
-              <a:t>*   **Notas del Presentador:** *"Nuestro objetivo principal es claro: lograr una reducción teórica comprobable de entre el 5% y el 10% en el costo diario de la dieta, sin violar jamás las restricciones biológicas del </a:t>
-            </a:r>
-            <a:r>
-              <a:rPr lang="es-ES" dirty="0" err="1"/>
-              <a:t>National</a:t>
-            </a:r>
-            <a:r>
-              <a:rPr lang="es-ES" dirty="0"/>
-              <a:t> </a:t>
-            </a:r>
-            <a:r>
-              <a:rPr lang="es-ES" dirty="0" err="1"/>
-              <a:t>Research</a:t>
-            </a:r>
-            <a:r>
-              <a:rPr lang="es-ES" dirty="0"/>
-              <a:t> Council. Para lograrlo sin perder el rumbo, estructuramos el desarrollo en 7 </a:t>
-            </a:r>
-            <a:r>
-              <a:rPr lang="es-ES" dirty="0" err="1"/>
-              <a:t>Sprints</a:t>
-            </a:r>
-            <a:r>
-              <a:rPr lang="es-ES" dirty="0"/>
-              <a:t> semanales bajo la metodología Scrum y utilizamos el ciclo de Lean Startup para validar 7 </a:t>
-            </a:r>
-            <a:r>
-              <a:rPr lang="es-ES" dirty="0" err="1"/>
-              <a:t>KPIs</a:t>
-            </a:r>
-            <a:r>
-              <a:rPr lang="es-ES" dirty="0"/>
-              <a:t> estrictos."*</a:t>
-            </a:r>
-          </a:p>
-          <a:p>
-            <a:endParaRPr lang="es-ES" dirty="0"/>
-          </a:p>
-          <a:p>
-            <a:pPr marL="342900" indent="-342900">
-              <a:buFont typeface="Arial" panose="020B0604020202020204" pitchFamily="34" charset="0"/>
-              <a:buChar char="•"/>
-            </a:pPr>
-            <a:r>
-              <a:rPr lang="es-ES" dirty="0"/>
-              <a:t>**Sugerencia Visual:** Gráfico circular del ciclo Lean (Construir -&gt; Medir -&gt; Aprender).</a:t>
-            </a:r>
-          </a:p>
-          <a:p>
-            <a:pPr marL="342900" indent="-342900">
-              <a:buFont typeface="Arial" panose="020B0604020202020204" pitchFamily="34" charset="0"/>
-              <a:buChar char="•"/>
-            </a:pPr>
-            <a:endParaRPr lang="es-ES" dirty="0"/>
-          </a:p>
-          <a:p>
-            <a:pPr marL="342900" indent="-342900">
-              <a:buFont typeface="Arial" panose="020B0604020202020204" pitchFamily="34" charset="0"/>
-              <a:buChar char="•"/>
-            </a:pPr>
-            <a:endParaRPr lang="es-ES" dirty="0"/>
-          </a:p>
-          <a:p>
             <a:pPr marL="0" marR="0" lvl="0" indent="0" algn="l" defTabSz="457200" rtl="0" eaLnBrk="0" fontAlgn="base" latinLnBrk="0" hangingPunct="0">
               <a:lnSpc>
                 <a:spcPct val="125000"/>
@@ -3596,49 +3306,14 @@
               <a:defRPr/>
             </a:pPr>
             <a:r>
-              <a:rPr lang="es-ES" sz="2400" b="1" kern="1200" dirty="0">
-                <a:solidFill>
-                  <a:srgbClr val="000000"/>
-                </a:solidFill>
-                <a:effectLst/>
-                <a:latin typeface="Avenir Roman" charset="0"/>
-                <a:ea typeface="Avenir Roman" charset="0"/>
-                <a:cs typeface="Avenir Roman" charset="0"/>
-                <a:sym typeface="Avenir Roman" charset="0"/>
-              </a:rPr>
-              <a:t>----------------------------------------------------------------------------------------------------------------------------------------------------------------------------------------------</a:t>
-            </a:r>
-            <a:endParaRPr lang="en-US" dirty="0">
-              <a:effectLst/>
-            </a:endParaRPr>
-          </a:p>
-          <a:p>
-            <a:pPr marL="0" marR="0" lvl="0" indent="0" algn="l" defTabSz="457200" rtl="0" eaLnBrk="0" fontAlgn="base" latinLnBrk="0" hangingPunct="0">
-              <a:lnSpc>
-                <a:spcPct val="125000"/>
-              </a:lnSpc>
-              <a:spcBef>
-                <a:spcPct val="0"/>
-              </a:spcBef>
-              <a:spcAft>
-                <a:spcPct val="0"/>
-              </a:spcAft>
-              <a:buClrTx/>
-              <a:buSzTx/>
-              <a:buFont typeface="Arial" panose="020B0604020202020204" pitchFamily="34" charset="0"/>
-              <a:buNone/>
-              <a:tabLst/>
-              <a:defRPr/>
-            </a:pPr>
-            <a:r>
-              <a:rPr lang="en-US" sz="2400" kern="1200" dirty="0">
-                <a:solidFill>
-                  <a:srgbClr val="000000"/>
-                </a:solidFill>
-                <a:effectLst/>
-                <a:latin typeface="Avenir Roman" charset="0"/>
-                <a:ea typeface="Avenir Roman" charset="0"/>
-                <a:cs typeface="Avenir Roman" charset="0"/>
+              <a:rPr lang="en-US" sz="2400" kern="1200" dirty="0">
+                <a:solidFill>
+                  <a:srgbClr val="000000"/>
+                </a:solidFill>
+                <a:effectLst/>
+                <a:latin typeface="Avenir" charset="0"/>
+                <a:ea typeface="Avenir" charset="0"/>
+                <a:cs typeface="Avenir" charset="0"/>
                 <a:sym typeface="Avenir Roman" charset="0"/>
               </a:rPr>
               <a:t>[P1] "Nuestro </a:t>
@@ -3649,9 +3324,9 @@
                   <a:srgbClr val="000000"/>
                 </a:solidFill>
                 <a:effectLst/>
-                <a:latin typeface="Avenir Roman" charset="0"/>
-                <a:ea typeface="Avenir Roman" charset="0"/>
-                <a:cs typeface="Avenir Roman" charset="0"/>
+                <a:latin typeface="Avenir" charset="0"/>
+                <a:ea typeface="Avenir" charset="0"/>
+                <a:cs typeface="Avenir" charset="0"/>
                 <a:sym typeface="Avenir Roman" charset="0"/>
               </a:rPr>
               <a:t>objetivo</a:t>
@@ -3662,9 +3337,9 @@
                   <a:srgbClr val="000000"/>
                 </a:solidFill>
                 <a:effectLst/>
-                <a:latin typeface="Avenir Roman" charset="0"/>
-                <a:ea typeface="Avenir Roman" charset="0"/>
-                <a:cs typeface="Avenir Roman" charset="0"/>
+                <a:latin typeface="Avenir" charset="0"/>
+                <a:ea typeface="Avenir" charset="0"/>
+                <a:cs typeface="Avenir" charset="0"/>
                 <a:sym typeface="Avenir Roman" charset="0"/>
               </a:rPr>
               <a:t> principal es claro y </a:t>
@@ -3675,9 +3350,9 @@
                   <a:srgbClr val="000000"/>
                 </a:solidFill>
                 <a:effectLst/>
-                <a:latin typeface="Avenir Roman" charset="0"/>
-                <a:ea typeface="Avenir Roman" charset="0"/>
-                <a:cs typeface="Avenir Roman" charset="0"/>
+                <a:latin typeface="Avenir" charset="0"/>
+                <a:ea typeface="Avenir" charset="0"/>
+                <a:cs typeface="Avenir" charset="0"/>
                 <a:sym typeface="Avenir Roman" charset="0"/>
               </a:rPr>
               <a:t>medible</a:t>
@@ -3688,9 +3363,9 @@
                   <a:srgbClr val="000000"/>
                 </a:solidFill>
                 <a:effectLst/>
-                <a:latin typeface="Avenir Roman" charset="0"/>
-                <a:ea typeface="Avenir Roman" charset="0"/>
-                <a:cs typeface="Avenir Roman" charset="0"/>
+                <a:latin typeface="Avenir" charset="0"/>
+                <a:ea typeface="Avenir" charset="0"/>
+                <a:cs typeface="Avenir" charset="0"/>
                 <a:sym typeface="Avenir Roman" charset="0"/>
               </a:rPr>
               <a:t>: </a:t>
@@ -3701,9 +3376,9 @@
                   <a:srgbClr val="000000"/>
                 </a:solidFill>
                 <a:effectLst/>
-                <a:latin typeface="Avenir Roman" charset="0"/>
-                <a:ea typeface="Avenir Roman" charset="0"/>
-                <a:cs typeface="Avenir Roman" charset="0"/>
+                <a:latin typeface="Avenir" charset="0"/>
+                <a:ea typeface="Avenir" charset="0"/>
+                <a:cs typeface="Avenir" charset="0"/>
                 <a:sym typeface="Avenir Roman" charset="0"/>
               </a:rPr>
               <a:t>reducir</a:t>
@@ -3714,9 +3389,9 @@
                   <a:srgbClr val="000000"/>
                 </a:solidFill>
                 <a:effectLst/>
-                <a:latin typeface="Avenir Roman" charset="0"/>
-                <a:ea typeface="Avenir Roman" charset="0"/>
-                <a:cs typeface="Avenir Roman" charset="0"/>
+                <a:latin typeface="Avenir" charset="0"/>
+                <a:ea typeface="Avenir" charset="0"/>
+                <a:cs typeface="Avenir" charset="0"/>
                 <a:sym typeface="Avenir Roman" charset="0"/>
               </a:rPr>
               <a:t> entre 5% y 10% </a:t>
@@ -3727,9 +3402,9 @@
                   <a:srgbClr val="000000"/>
                 </a:solidFill>
                 <a:effectLst/>
-                <a:latin typeface="Avenir Roman" charset="0"/>
-                <a:ea typeface="Avenir Roman" charset="0"/>
-                <a:cs typeface="Avenir Roman" charset="0"/>
+                <a:latin typeface="Avenir" charset="0"/>
+                <a:ea typeface="Avenir" charset="0"/>
+                <a:cs typeface="Avenir" charset="0"/>
                 <a:sym typeface="Avenir Roman" charset="0"/>
               </a:rPr>
               <a:t>el</a:t>
@@ -3740,9 +3415,9 @@
                   <a:srgbClr val="000000"/>
                 </a:solidFill>
                 <a:effectLst/>
-                <a:latin typeface="Avenir Roman" charset="0"/>
-                <a:ea typeface="Avenir Roman" charset="0"/>
-                <a:cs typeface="Avenir Roman" charset="0"/>
+                <a:latin typeface="Avenir" charset="0"/>
+                <a:ea typeface="Avenir" charset="0"/>
+                <a:cs typeface="Avenir" charset="0"/>
                 <a:sym typeface="Avenir Roman" charset="0"/>
               </a:rPr>
               <a:t> </a:t>
@@ -3753,9 +3428,9 @@
                   <a:srgbClr val="000000"/>
                 </a:solidFill>
                 <a:effectLst/>
-                <a:latin typeface="Avenir Roman" charset="0"/>
-                <a:ea typeface="Avenir Roman" charset="0"/>
-                <a:cs typeface="Avenir Roman" charset="0"/>
+                <a:latin typeface="Avenir" charset="0"/>
+                <a:ea typeface="Avenir" charset="0"/>
+                <a:cs typeface="Avenir" charset="0"/>
                 <a:sym typeface="Avenir Roman" charset="0"/>
               </a:rPr>
               <a:t>costo</a:t>
@@ -3766,9 +3441,9 @@
                   <a:srgbClr val="000000"/>
                 </a:solidFill>
                 <a:effectLst/>
-                <a:latin typeface="Avenir Roman" charset="0"/>
-                <a:ea typeface="Avenir Roman" charset="0"/>
-                <a:cs typeface="Avenir Roman" charset="0"/>
+                <a:latin typeface="Avenir" charset="0"/>
+                <a:ea typeface="Avenir" charset="0"/>
+                <a:cs typeface="Avenir" charset="0"/>
                 <a:sym typeface="Avenir Roman" charset="0"/>
               </a:rPr>
               <a:t> </a:t>
@@ -3779,9 +3454,9 @@
                   <a:srgbClr val="000000"/>
                 </a:solidFill>
                 <a:effectLst/>
-                <a:latin typeface="Avenir Roman" charset="0"/>
-                <a:ea typeface="Avenir Roman" charset="0"/>
-                <a:cs typeface="Avenir Roman" charset="0"/>
+                <a:latin typeface="Avenir" charset="0"/>
+                <a:ea typeface="Avenir" charset="0"/>
+                <a:cs typeface="Avenir" charset="0"/>
                 <a:sym typeface="Avenir Roman" charset="0"/>
               </a:rPr>
               <a:t>diario</a:t>
@@ -3792,9 +3467,9 @@
                   <a:srgbClr val="000000"/>
                 </a:solidFill>
                 <a:effectLst/>
-                <a:latin typeface="Avenir Roman" charset="0"/>
-                <a:ea typeface="Avenir Roman" charset="0"/>
-                <a:cs typeface="Avenir Roman" charset="0"/>
+                <a:latin typeface="Avenir" charset="0"/>
+                <a:ea typeface="Avenir" charset="0"/>
+                <a:cs typeface="Avenir" charset="0"/>
                 <a:sym typeface="Avenir Roman" charset="0"/>
               </a:rPr>
               <a:t> de la </a:t>
@@ -3805,9 +3480,9 @@
                   <a:srgbClr val="000000"/>
                 </a:solidFill>
                 <a:effectLst/>
-                <a:latin typeface="Avenir Roman" charset="0"/>
-                <a:ea typeface="Avenir Roman" charset="0"/>
-                <a:cs typeface="Avenir Roman" charset="0"/>
+                <a:latin typeface="Avenir" charset="0"/>
+                <a:ea typeface="Avenir" charset="0"/>
+                <a:cs typeface="Avenir" charset="0"/>
                 <a:sym typeface="Avenir Roman" charset="0"/>
               </a:rPr>
               <a:t>dieta</a:t>
@@ -3818,9 +3493,9 @@
                   <a:srgbClr val="000000"/>
                 </a:solidFill>
                 <a:effectLst/>
-                <a:latin typeface="Avenir Roman" charset="0"/>
-                <a:ea typeface="Avenir Roman" charset="0"/>
-                <a:cs typeface="Avenir Roman" charset="0"/>
+                <a:latin typeface="Avenir" charset="0"/>
+                <a:ea typeface="Avenir" charset="0"/>
+                <a:cs typeface="Avenir" charset="0"/>
                 <a:sym typeface="Avenir Roman" charset="0"/>
               </a:rPr>
               <a:t>, sin </a:t>
@@ -3831,9 +3506,9 @@
                   <a:srgbClr val="000000"/>
                 </a:solidFill>
                 <a:effectLst/>
-                <a:latin typeface="Avenir Roman" charset="0"/>
-                <a:ea typeface="Avenir Roman" charset="0"/>
-                <a:cs typeface="Avenir Roman" charset="0"/>
+                <a:latin typeface="Avenir" charset="0"/>
+                <a:ea typeface="Avenir" charset="0"/>
+                <a:cs typeface="Avenir" charset="0"/>
                 <a:sym typeface="Avenir Roman" charset="0"/>
               </a:rPr>
               <a:t>violar</a:t>
@@ -3844,9 +3519,9 @@
                   <a:srgbClr val="000000"/>
                 </a:solidFill>
                 <a:effectLst/>
-                <a:latin typeface="Avenir Roman" charset="0"/>
-                <a:ea typeface="Avenir Roman" charset="0"/>
-                <a:cs typeface="Avenir Roman" charset="0"/>
+                <a:latin typeface="Avenir" charset="0"/>
+                <a:ea typeface="Avenir" charset="0"/>
+                <a:cs typeface="Avenir" charset="0"/>
                 <a:sym typeface="Avenir Roman" charset="0"/>
               </a:rPr>
               <a:t> </a:t>
@@ -3857,9 +3532,9 @@
                   <a:srgbClr val="000000"/>
                 </a:solidFill>
                 <a:effectLst/>
-                <a:latin typeface="Avenir Roman" charset="0"/>
-                <a:ea typeface="Avenir Roman" charset="0"/>
-                <a:cs typeface="Avenir Roman" charset="0"/>
+                <a:latin typeface="Avenir" charset="0"/>
+                <a:ea typeface="Avenir" charset="0"/>
+                <a:cs typeface="Avenir" charset="0"/>
                 <a:sym typeface="Avenir Roman" charset="0"/>
               </a:rPr>
               <a:t>jamás</a:t>
@@ -3870,9 +3545,9 @@
                   <a:srgbClr val="000000"/>
                 </a:solidFill>
                 <a:effectLst/>
-                <a:latin typeface="Avenir Roman" charset="0"/>
-                <a:ea typeface="Avenir Roman" charset="0"/>
-                <a:cs typeface="Avenir Roman" charset="0"/>
+                <a:latin typeface="Avenir" charset="0"/>
+                <a:ea typeface="Avenir" charset="0"/>
+                <a:cs typeface="Avenir" charset="0"/>
                 <a:sym typeface="Avenir Roman" charset="0"/>
               </a:rPr>
               <a:t> las </a:t>
@@ -3883,9 +3558,9 @@
                   <a:srgbClr val="000000"/>
                 </a:solidFill>
                 <a:effectLst/>
-                <a:latin typeface="Avenir Roman" charset="0"/>
-                <a:ea typeface="Avenir Roman" charset="0"/>
-                <a:cs typeface="Avenir Roman" charset="0"/>
+                <a:latin typeface="Avenir" charset="0"/>
+                <a:ea typeface="Avenir" charset="0"/>
+                <a:cs typeface="Avenir" charset="0"/>
                 <a:sym typeface="Avenir Roman" charset="0"/>
               </a:rPr>
               <a:t>restricciones</a:t>
@@ -3896,9 +3571,9 @@
                   <a:srgbClr val="000000"/>
                 </a:solidFill>
                 <a:effectLst/>
-                <a:latin typeface="Avenir Roman" charset="0"/>
-                <a:ea typeface="Avenir Roman" charset="0"/>
-                <a:cs typeface="Avenir Roman" charset="0"/>
+                <a:latin typeface="Avenir" charset="0"/>
+                <a:ea typeface="Avenir" charset="0"/>
+                <a:cs typeface="Avenir" charset="0"/>
                 <a:sym typeface="Avenir Roman" charset="0"/>
               </a:rPr>
               <a:t> </a:t>
@@ -3909,9 +3584,9 @@
                   <a:srgbClr val="000000"/>
                 </a:solidFill>
                 <a:effectLst/>
-                <a:latin typeface="Avenir Roman" charset="0"/>
-                <a:ea typeface="Avenir Roman" charset="0"/>
-                <a:cs typeface="Avenir Roman" charset="0"/>
+                <a:latin typeface="Avenir" charset="0"/>
+                <a:ea typeface="Avenir" charset="0"/>
+                <a:cs typeface="Avenir" charset="0"/>
                 <a:sym typeface="Avenir Roman" charset="0"/>
               </a:rPr>
               <a:t>biológicas</a:t>
@@ -3922,9 +3597,9 @@
                   <a:srgbClr val="000000"/>
                 </a:solidFill>
                 <a:effectLst/>
-                <a:latin typeface="Avenir Roman" charset="0"/>
-                <a:ea typeface="Avenir Roman" charset="0"/>
-                <a:cs typeface="Avenir Roman" charset="0"/>
+                <a:latin typeface="Avenir" charset="0"/>
+                <a:ea typeface="Avenir" charset="0"/>
+                <a:cs typeface="Avenir" charset="0"/>
                 <a:sym typeface="Avenir Roman" charset="0"/>
               </a:rPr>
               <a:t> del National Research Council. Si no se </a:t>
@@ -3935,9 +3610,9 @@
                   <a:srgbClr val="000000"/>
                 </a:solidFill>
                 <a:effectLst/>
-                <a:latin typeface="Avenir Roman" charset="0"/>
-                <a:ea typeface="Avenir Roman" charset="0"/>
-                <a:cs typeface="Avenir Roman" charset="0"/>
+                <a:latin typeface="Avenir" charset="0"/>
+                <a:ea typeface="Avenir" charset="0"/>
+                <a:cs typeface="Avenir" charset="0"/>
                 <a:sym typeface="Avenir Roman" charset="0"/>
               </a:rPr>
               <a:t>cumple</a:t>
@@ -3948,9 +3623,9 @@
                   <a:srgbClr val="000000"/>
                 </a:solidFill>
                 <a:effectLst/>
-                <a:latin typeface="Avenir Roman" charset="0"/>
-                <a:ea typeface="Avenir Roman" charset="0"/>
-                <a:cs typeface="Avenir Roman" charset="0"/>
+                <a:latin typeface="Avenir" charset="0"/>
+                <a:ea typeface="Avenir" charset="0"/>
+                <a:cs typeface="Avenir" charset="0"/>
                 <a:sym typeface="Avenir Roman" charset="0"/>
               </a:rPr>
               <a:t> ese guardrail, </a:t>
@@ -3961,9 +3636,9 @@
                   <a:srgbClr val="000000"/>
                 </a:solidFill>
                 <a:effectLst/>
-                <a:latin typeface="Avenir Roman" charset="0"/>
-                <a:ea typeface="Avenir Roman" charset="0"/>
-                <a:cs typeface="Avenir Roman" charset="0"/>
+                <a:latin typeface="Avenir" charset="0"/>
+                <a:ea typeface="Avenir" charset="0"/>
+                <a:cs typeface="Avenir" charset="0"/>
                 <a:sym typeface="Avenir Roman" charset="0"/>
               </a:rPr>
               <a:t>el</a:t>
@@ -3974,9 +3649,9 @@
                   <a:srgbClr val="000000"/>
                 </a:solidFill>
                 <a:effectLst/>
-                <a:latin typeface="Avenir Roman" charset="0"/>
-                <a:ea typeface="Avenir Roman" charset="0"/>
-                <a:cs typeface="Avenir Roman" charset="0"/>
+                <a:latin typeface="Avenir" charset="0"/>
+                <a:ea typeface="Avenir" charset="0"/>
+                <a:cs typeface="Avenir" charset="0"/>
                 <a:sym typeface="Avenir Roman" charset="0"/>
               </a:rPr>
               <a:t> </a:t>
@@ -3987,9 +3662,9 @@
                   <a:srgbClr val="000000"/>
                 </a:solidFill>
                 <a:effectLst/>
-                <a:latin typeface="Avenir Roman" charset="0"/>
-                <a:ea typeface="Avenir Roman" charset="0"/>
-                <a:cs typeface="Avenir Roman" charset="0"/>
+                <a:latin typeface="Avenir" charset="0"/>
+                <a:ea typeface="Avenir" charset="0"/>
+                <a:cs typeface="Avenir" charset="0"/>
                 <a:sym typeface="Avenir Roman" charset="0"/>
               </a:rPr>
               <a:t>sistema</a:t>
@@ -4000,9 +3675,9 @@
                   <a:srgbClr val="000000"/>
                 </a:solidFill>
                 <a:effectLst/>
-                <a:latin typeface="Avenir Roman" charset="0"/>
-                <a:ea typeface="Avenir Roman" charset="0"/>
-                <a:cs typeface="Avenir Roman" charset="0"/>
+                <a:latin typeface="Avenir" charset="0"/>
+                <a:ea typeface="Avenir" charset="0"/>
+                <a:cs typeface="Avenir" charset="0"/>
                 <a:sym typeface="Avenir Roman" charset="0"/>
               </a:rPr>
               <a:t> no </a:t>
@@ -4013,9 +3688,9 @@
                   <a:srgbClr val="000000"/>
                 </a:solidFill>
                 <a:effectLst/>
-                <a:latin typeface="Avenir Roman" charset="0"/>
-                <a:ea typeface="Avenir Roman" charset="0"/>
-                <a:cs typeface="Avenir Roman" charset="0"/>
+                <a:latin typeface="Avenir" charset="0"/>
+                <a:ea typeface="Avenir" charset="0"/>
+                <a:cs typeface="Avenir" charset="0"/>
                 <a:sym typeface="Avenir Roman" charset="0"/>
               </a:rPr>
               <a:t>entrega</a:t>
@@ -4026,9 +3701,9 @@
                   <a:srgbClr val="000000"/>
                 </a:solidFill>
                 <a:effectLst/>
-                <a:latin typeface="Avenir Roman" charset="0"/>
-                <a:ea typeface="Avenir Roman" charset="0"/>
-                <a:cs typeface="Avenir Roman" charset="0"/>
+                <a:latin typeface="Avenir" charset="0"/>
+                <a:ea typeface="Avenir" charset="0"/>
+                <a:cs typeface="Avenir" charset="0"/>
                 <a:sym typeface="Avenir Roman" charset="0"/>
               </a:rPr>
               <a:t> </a:t>
@@ -4039,9 +3714,9 @@
                   <a:srgbClr val="000000"/>
                 </a:solidFill>
                 <a:effectLst/>
-                <a:latin typeface="Avenir Roman" charset="0"/>
-                <a:ea typeface="Avenir Roman" charset="0"/>
-                <a:cs typeface="Avenir Roman" charset="0"/>
+                <a:latin typeface="Avenir" charset="0"/>
+                <a:ea typeface="Avenir" charset="0"/>
+                <a:cs typeface="Avenir" charset="0"/>
                 <a:sym typeface="Avenir Roman" charset="0"/>
               </a:rPr>
               <a:t>ninguna</a:t>
@@ -4052,9 +3727,9 @@
                   <a:srgbClr val="000000"/>
                 </a:solidFill>
                 <a:effectLst/>
-                <a:latin typeface="Avenir Roman" charset="0"/>
-                <a:ea typeface="Avenir Roman" charset="0"/>
-                <a:cs typeface="Avenir Roman" charset="0"/>
+                <a:latin typeface="Avenir" charset="0"/>
+                <a:ea typeface="Avenir" charset="0"/>
+                <a:cs typeface="Avenir" charset="0"/>
                 <a:sym typeface="Avenir Roman" charset="0"/>
               </a:rPr>
               <a:t> </a:t>
@@ -4065,9 +3740,9 @@
                   <a:srgbClr val="000000"/>
                 </a:solidFill>
                 <a:effectLst/>
-                <a:latin typeface="Avenir Roman" charset="0"/>
-                <a:ea typeface="Avenir Roman" charset="0"/>
-                <a:cs typeface="Avenir Roman" charset="0"/>
+                <a:latin typeface="Avenir" charset="0"/>
+                <a:ea typeface="Avenir" charset="0"/>
+                <a:cs typeface="Avenir" charset="0"/>
                 <a:sym typeface="Avenir Roman" charset="0"/>
               </a:rPr>
               <a:t>recomendación</a:t>
@@ -4078,9 +3753,9 @@
                   <a:srgbClr val="000000"/>
                 </a:solidFill>
                 <a:effectLst/>
-                <a:latin typeface="Avenir Roman" charset="0"/>
-                <a:ea typeface="Avenir Roman" charset="0"/>
-                <a:cs typeface="Avenir Roman" charset="0"/>
+                <a:latin typeface="Avenir" charset="0"/>
+                <a:ea typeface="Avenir" charset="0"/>
+                <a:cs typeface="Avenir" charset="0"/>
                 <a:sym typeface="Avenir Roman" charset="0"/>
               </a:rPr>
               <a:t>."</a:t>
@@ -4091,9 +3766,9 @@
                   <a:srgbClr val="000000"/>
                 </a:solidFill>
                 <a:effectLst/>
-                <a:latin typeface="Avenir Roman" charset="0"/>
-                <a:ea typeface="Avenir Roman" charset="0"/>
-                <a:cs typeface="Avenir Roman" charset="0"/>
+                <a:latin typeface="Avenir" charset="0"/>
+                <a:ea typeface="Avenir" charset="0"/>
+                <a:cs typeface="Avenir" charset="0"/>
                 <a:sym typeface="Avenir Roman" charset="0"/>
               </a:rPr>
             </a:br>
@@ -4103,9 +3778,9 @@
                   <a:srgbClr val="000000"/>
                 </a:solidFill>
                 <a:effectLst/>
-                <a:latin typeface="Avenir Roman" charset="0"/>
-                <a:ea typeface="Avenir Roman" charset="0"/>
-                <a:cs typeface="Avenir Roman" charset="0"/>
+                <a:latin typeface="Avenir" charset="0"/>
+                <a:ea typeface="Avenir" charset="0"/>
+                <a:cs typeface="Avenir" charset="0"/>
                 <a:sym typeface="Avenir Roman" charset="0"/>
               </a:rPr>
             </a:br>
@@ -4115,9 +3790,9 @@
                   <a:srgbClr val="000000"/>
                 </a:solidFill>
                 <a:effectLst/>
-                <a:latin typeface="Avenir Roman" charset="0"/>
-                <a:ea typeface="Avenir Roman" charset="0"/>
-                <a:cs typeface="Avenir Roman" charset="0"/>
+                <a:latin typeface="Avenir" charset="0"/>
+                <a:ea typeface="Avenir" charset="0"/>
+                <a:cs typeface="Avenir" charset="0"/>
                 <a:sym typeface="Avenir Roman" charset="0"/>
               </a:rPr>
               <a:t>[P3] "Para </a:t>
@@ -4128,9 +3803,9 @@
                   <a:srgbClr val="000000"/>
                 </a:solidFill>
                 <a:effectLst/>
-                <a:latin typeface="Avenir Roman" charset="0"/>
-                <a:ea typeface="Avenir Roman" charset="0"/>
-                <a:cs typeface="Avenir Roman" charset="0"/>
+                <a:latin typeface="Avenir" charset="0"/>
+                <a:ea typeface="Avenir" charset="0"/>
+                <a:cs typeface="Avenir" charset="0"/>
                 <a:sym typeface="Avenir Roman" charset="0"/>
               </a:rPr>
               <a:t>validar</a:t>
@@ -4141,9 +3816,9 @@
                   <a:srgbClr val="000000"/>
                 </a:solidFill>
                 <a:effectLst/>
-                <a:latin typeface="Avenir Roman" charset="0"/>
-                <a:ea typeface="Avenir Roman" charset="0"/>
-                <a:cs typeface="Avenir Roman" charset="0"/>
+                <a:latin typeface="Avenir" charset="0"/>
+                <a:ea typeface="Avenir" charset="0"/>
+                <a:cs typeface="Avenir" charset="0"/>
                 <a:sym typeface="Avenir Roman" charset="0"/>
               </a:rPr>
               <a:t> </a:t>
@@ -4154,9 +3829,9 @@
                   <a:srgbClr val="000000"/>
                 </a:solidFill>
                 <a:effectLst/>
-                <a:latin typeface="Avenir Roman" charset="0"/>
-                <a:ea typeface="Avenir Roman" charset="0"/>
-                <a:cs typeface="Avenir Roman" charset="0"/>
+                <a:latin typeface="Avenir" charset="0"/>
+                <a:ea typeface="Avenir" charset="0"/>
+                <a:cs typeface="Avenir" charset="0"/>
                 <a:sym typeface="Avenir Roman" charset="0"/>
               </a:rPr>
               <a:t>que</a:t>
@@ -4167,9 +3842,9 @@
                   <a:srgbClr val="000000"/>
                 </a:solidFill>
                 <a:effectLst/>
-                <a:latin typeface="Avenir Roman" charset="0"/>
-                <a:ea typeface="Avenir Roman" charset="0"/>
-                <a:cs typeface="Avenir Roman" charset="0"/>
+                <a:latin typeface="Avenir" charset="0"/>
+                <a:ea typeface="Avenir" charset="0"/>
+                <a:cs typeface="Avenir" charset="0"/>
                 <a:sym typeface="Avenir Roman" charset="0"/>
               </a:rPr>
               <a:t> lo </a:t>
@@ -4180,9 +3855,9 @@
                   <a:srgbClr val="000000"/>
                 </a:solidFill>
                 <a:effectLst/>
-                <a:latin typeface="Avenir Roman" charset="0"/>
-                <a:ea typeface="Avenir Roman" charset="0"/>
-                <a:cs typeface="Avenir Roman" charset="0"/>
+                <a:latin typeface="Avenir" charset="0"/>
+                <a:ea typeface="Avenir" charset="0"/>
+                <a:cs typeface="Avenir" charset="0"/>
                 <a:sym typeface="Avenir Roman" charset="0"/>
               </a:rPr>
               <a:t>que</a:t>
@@ -4193,9 +3868,9 @@
                   <a:srgbClr val="000000"/>
                 </a:solidFill>
                 <a:effectLst/>
-                <a:latin typeface="Avenir Roman" charset="0"/>
-                <a:ea typeface="Avenir Roman" charset="0"/>
-                <a:cs typeface="Avenir Roman" charset="0"/>
+                <a:latin typeface="Avenir" charset="0"/>
+                <a:ea typeface="Avenir" charset="0"/>
+                <a:cs typeface="Avenir" charset="0"/>
                 <a:sym typeface="Avenir Roman" charset="0"/>
               </a:rPr>
               <a:t> </a:t>
@@ -4206,9 +3881,9 @@
                   <a:srgbClr val="000000"/>
                 </a:solidFill>
                 <a:effectLst/>
-                <a:latin typeface="Avenir Roman" charset="0"/>
-                <a:ea typeface="Avenir Roman" charset="0"/>
-                <a:cs typeface="Avenir Roman" charset="0"/>
+                <a:latin typeface="Avenir" charset="0"/>
+                <a:ea typeface="Avenir" charset="0"/>
+                <a:cs typeface="Avenir" charset="0"/>
                 <a:sym typeface="Avenir Roman" charset="0"/>
               </a:rPr>
               <a:t>construimos</a:t>
@@ -4219,9 +3894,9 @@
                   <a:srgbClr val="000000"/>
                 </a:solidFill>
                 <a:effectLst/>
-                <a:latin typeface="Avenir Roman" charset="0"/>
-                <a:ea typeface="Avenir Roman" charset="0"/>
-                <a:cs typeface="Avenir Roman" charset="0"/>
+                <a:latin typeface="Avenir" charset="0"/>
+                <a:ea typeface="Avenir" charset="0"/>
+                <a:cs typeface="Avenir" charset="0"/>
                 <a:sym typeface="Avenir Roman" charset="0"/>
               </a:rPr>
               <a:t> </a:t>
@@ -4232,9 +3907,9 @@
                   <a:srgbClr val="000000"/>
                 </a:solidFill>
                 <a:effectLst/>
-                <a:latin typeface="Avenir Roman" charset="0"/>
-                <a:ea typeface="Avenir Roman" charset="0"/>
-                <a:cs typeface="Avenir Roman" charset="0"/>
+                <a:latin typeface="Avenir" charset="0"/>
+                <a:ea typeface="Avenir" charset="0"/>
+                <a:cs typeface="Avenir" charset="0"/>
                 <a:sym typeface="Avenir Roman" charset="0"/>
               </a:rPr>
               <a:t>realmente</a:t>
@@ -4245,9 +3920,9 @@
                   <a:srgbClr val="000000"/>
                 </a:solidFill>
                 <a:effectLst/>
-                <a:latin typeface="Avenir Roman" charset="0"/>
-                <a:ea typeface="Avenir Roman" charset="0"/>
-                <a:cs typeface="Avenir Roman" charset="0"/>
+                <a:latin typeface="Avenir" charset="0"/>
+                <a:ea typeface="Avenir" charset="0"/>
+                <a:cs typeface="Avenir" charset="0"/>
                 <a:sym typeface="Avenir Roman" charset="0"/>
               </a:rPr>
               <a:t> </a:t>
@@ -4258,9 +3933,9 @@
                   <a:srgbClr val="000000"/>
                 </a:solidFill>
                 <a:effectLst/>
-                <a:latin typeface="Avenir Roman" charset="0"/>
-                <a:ea typeface="Avenir Roman" charset="0"/>
-                <a:cs typeface="Avenir Roman" charset="0"/>
+                <a:latin typeface="Avenir" charset="0"/>
+                <a:ea typeface="Avenir" charset="0"/>
+                <a:cs typeface="Avenir" charset="0"/>
                 <a:sym typeface="Avenir Roman" charset="0"/>
               </a:rPr>
               <a:t>funciona</a:t>
@@ -4271,9 +3946,9 @@
                   <a:srgbClr val="000000"/>
                 </a:solidFill>
                 <a:effectLst/>
-                <a:latin typeface="Avenir Roman" charset="0"/>
-                <a:ea typeface="Avenir Roman" charset="0"/>
-                <a:cs typeface="Avenir Roman" charset="0"/>
+                <a:latin typeface="Avenir" charset="0"/>
+                <a:ea typeface="Avenir" charset="0"/>
+                <a:cs typeface="Avenir" charset="0"/>
                 <a:sym typeface="Avenir Roman" charset="0"/>
               </a:rPr>
               <a:t>, </a:t>
@@ -4284,9 +3959,9 @@
                   <a:srgbClr val="000000"/>
                 </a:solidFill>
                 <a:effectLst/>
-                <a:latin typeface="Avenir Roman" charset="0"/>
-                <a:ea typeface="Avenir Roman" charset="0"/>
-                <a:cs typeface="Avenir Roman" charset="0"/>
+                <a:latin typeface="Avenir" charset="0"/>
+                <a:ea typeface="Avenir" charset="0"/>
+                <a:cs typeface="Avenir" charset="0"/>
                 <a:sym typeface="Avenir Roman" charset="0"/>
               </a:rPr>
               <a:t>adoptamos</a:t>
@@ -4297,9 +3972,9 @@
                   <a:srgbClr val="000000"/>
                 </a:solidFill>
                 <a:effectLst/>
-                <a:latin typeface="Avenir Roman" charset="0"/>
-                <a:ea typeface="Avenir Roman" charset="0"/>
-                <a:cs typeface="Avenir Roman" charset="0"/>
+                <a:latin typeface="Avenir" charset="0"/>
+                <a:ea typeface="Avenir" charset="0"/>
+                <a:cs typeface="Avenir" charset="0"/>
                 <a:sym typeface="Avenir Roman" charset="0"/>
               </a:rPr>
               <a:t> </a:t>
@@ -4310,9 +3985,9 @@
                   <a:srgbClr val="000000"/>
                 </a:solidFill>
                 <a:effectLst/>
-                <a:latin typeface="Avenir Roman" charset="0"/>
-                <a:ea typeface="Avenir Roman" charset="0"/>
-                <a:cs typeface="Avenir Roman" charset="0"/>
+                <a:latin typeface="Avenir" charset="0"/>
+                <a:ea typeface="Avenir" charset="0"/>
+                <a:cs typeface="Avenir" charset="0"/>
                 <a:sym typeface="Avenir Roman" charset="0"/>
               </a:rPr>
               <a:t>el</a:t>
@@ -4323,9 +3998,9 @@
                   <a:srgbClr val="000000"/>
                 </a:solidFill>
                 <a:effectLst/>
-                <a:latin typeface="Avenir Roman" charset="0"/>
-                <a:ea typeface="Avenir Roman" charset="0"/>
-                <a:cs typeface="Avenir Roman" charset="0"/>
+                <a:latin typeface="Avenir" charset="0"/>
+                <a:ea typeface="Avenir" charset="0"/>
+                <a:cs typeface="Avenir" charset="0"/>
                 <a:sym typeface="Avenir Roman" charset="0"/>
               </a:rPr>
               <a:t> </a:t>
@@ -4336,9 +4011,9 @@
                   <a:srgbClr val="000000"/>
                 </a:solidFill>
                 <a:effectLst/>
-                <a:latin typeface="Avenir Roman" charset="0"/>
-                <a:ea typeface="Avenir Roman" charset="0"/>
-                <a:cs typeface="Avenir Roman" charset="0"/>
+                <a:latin typeface="Avenir" charset="0"/>
+                <a:ea typeface="Avenir" charset="0"/>
+                <a:cs typeface="Avenir" charset="0"/>
                 <a:sym typeface="Avenir Roman" charset="0"/>
               </a:rPr>
               <a:t>ciclo</a:t>
@@ -4349,9 +4024,9 @@
                   <a:srgbClr val="000000"/>
                 </a:solidFill>
                 <a:effectLst/>
-                <a:latin typeface="Avenir Roman" charset="0"/>
-                <a:ea typeface="Avenir Roman" charset="0"/>
-                <a:cs typeface="Avenir Roman" charset="0"/>
+                <a:latin typeface="Avenir" charset="0"/>
+                <a:ea typeface="Avenir" charset="0"/>
+                <a:cs typeface="Avenir" charset="0"/>
                 <a:sym typeface="Avenir Roman" charset="0"/>
               </a:rPr>
               <a:t> Lean Startup </a:t>
@@ -4362,9 +4037,9 @@
                   <a:srgbClr val="000000"/>
                 </a:solidFill>
                 <a:effectLst/>
-                <a:latin typeface="Avenir Roman" charset="0"/>
-                <a:ea typeface="Avenir Roman" charset="0"/>
-                <a:cs typeface="Avenir Roman" charset="0"/>
+                <a:latin typeface="Avenir" charset="0"/>
+                <a:ea typeface="Avenir" charset="0"/>
+                <a:cs typeface="Avenir" charset="0"/>
                 <a:sym typeface="Avenir Roman" charset="0"/>
               </a:rPr>
               <a:t>que</a:t>
@@ -4375,9 +4050,9 @@
                   <a:srgbClr val="000000"/>
                 </a:solidFill>
                 <a:effectLst/>
-                <a:latin typeface="Avenir Roman" charset="0"/>
-                <a:ea typeface="Avenir Roman" charset="0"/>
-                <a:cs typeface="Avenir Roman" charset="0"/>
+                <a:latin typeface="Avenir" charset="0"/>
+                <a:ea typeface="Avenir" charset="0"/>
+                <a:cs typeface="Avenir" charset="0"/>
                 <a:sym typeface="Avenir Roman" charset="0"/>
               </a:rPr>
               <a:t> </a:t>
@@ -4388,9 +4063,9 @@
                   <a:srgbClr val="000000"/>
                 </a:solidFill>
                 <a:effectLst/>
-                <a:latin typeface="Avenir Roman" charset="0"/>
-                <a:ea typeface="Avenir Roman" charset="0"/>
-                <a:cs typeface="Avenir Roman" charset="0"/>
+                <a:latin typeface="Avenir" charset="0"/>
+                <a:ea typeface="Avenir" charset="0"/>
+                <a:cs typeface="Avenir" charset="0"/>
                 <a:sym typeface="Avenir Roman" charset="0"/>
               </a:rPr>
               <a:t>ven</a:t>
@@ -4401,9 +4076,9 @@
                   <a:srgbClr val="000000"/>
                 </a:solidFill>
                 <a:effectLst/>
-                <a:latin typeface="Avenir Roman" charset="0"/>
-                <a:ea typeface="Avenir Roman" charset="0"/>
-                <a:cs typeface="Avenir Roman" charset="0"/>
+                <a:latin typeface="Avenir" charset="0"/>
+                <a:ea typeface="Avenir" charset="0"/>
+                <a:cs typeface="Avenir" charset="0"/>
                 <a:sym typeface="Avenir Roman" charset="0"/>
               </a:rPr>
               <a:t> </a:t>
@@ -4414,9 +4089,9 @@
                   <a:srgbClr val="000000"/>
                 </a:solidFill>
                 <a:effectLst/>
-                <a:latin typeface="Avenir Roman" charset="0"/>
-                <a:ea typeface="Avenir Roman" charset="0"/>
-                <a:cs typeface="Avenir Roman" charset="0"/>
+                <a:latin typeface="Avenir" charset="0"/>
+                <a:ea typeface="Avenir" charset="0"/>
+                <a:cs typeface="Avenir" charset="0"/>
                 <a:sym typeface="Avenir Roman" charset="0"/>
               </a:rPr>
               <a:t>en</a:t>
@@ -4427,9 +4102,9 @@
                   <a:srgbClr val="000000"/>
                 </a:solidFill>
                 <a:effectLst/>
-                <a:latin typeface="Avenir Roman" charset="0"/>
-                <a:ea typeface="Avenir Roman" charset="0"/>
-                <a:cs typeface="Avenir Roman" charset="0"/>
+                <a:latin typeface="Avenir" charset="0"/>
+                <a:ea typeface="Avenir" charset="0"/>
+                <a:cs typeface="Avenir" charset="0"/>
                 <a:sym typeface="Avenir Roman" charset="0"/>
               </a:rPr>
               <a:t> </a:t>
@@ -4440,9 +4115,9 @@
                   <a:srgbClr val="000000"/>
                 </a:solidFill>
                 <a:effectLst/>
-                <a:latin typeface="Avenir Roman" charset="0"/>
-                <a:ea typeface="Avenir Roman" charset="0"/>
-                <a:cs typeface="Avenir Roman" charset="0"/>
+                <a:latin typeface="Avenir" charset="0"/>
+                <a:ea typeface="Avenir" charset="0"/>
+                <a:cs typeface="Avenir" charset="0"/>
                 <a:sym typeface="Avenir Roman" charset="0"/>
               </a:rPr>
               <a:t>el</a:t>
@@ -4453,9 +4128,9 @@
                   <a:srgbClr val="000000"/>
                 </a:solidFill>
                 <a:effectLst/>
-                <a:latin typeface="Avenir Roman" charset="0"/>
-                <a:ea typeface="Avenir Roman" charset="0"/>
-                <a:cs typeface="Avenir Roman" charset="0"/>
+                <a:latin typeface="Avenir" charset="0"/>
+                <a:ea typeface="Avenir" charset="0"/>
+                <a:cs typeface="Avenir" charset="0"/>
                 <a:sym typeface="Avenir Roman" charset="0"/>
               </a:rPr>
               <a:t> </a:t>
@@ -4466,9 +4141,9 @@
                   <a:srgbClr val="000000"/>
                 </a:solidFill>
                 <a:effectLst/>
-                <a:latin typeface="Avenir Roman" charset="0"/>
-                <a:ea typeface="Avenir Roman" charset="0"/>
-                <a:cs typeface="Avenir Roman" charset="0"/>
+                <a:latin typeface="Avenir" charset="0"/>
+                <a:ea typeface="Avenir" charset="0"/>
+                <a:cs typeface="Avenir" charset="0"/>
                 <a:sym typeface="Avenir Roman" charset="0"/>
               </a:rPr>
               <a:t>diagrama</a:t>
@@ -4479,9 +4154,9 @@
                   <a:srgbClr val="000000"/>
                 </a:solidFill>
                 <a:effectLst/>
-                <a:latin typeface="Avenir Roman" charset="0"/>
-                <a:ea typeface="Avenir Roman" charset="0"/>
-                <a:cs typeface="Avenir Roman" charset="0"/>
+                <a:latin typeface="Avenir" charset="0"/>
+                <a:ea typeface="Avenir" charset="0"/>
+                <a:cs typeface="Avenir" charset="0"/>
                 <a:sym typeface="Avenir Roman" charset="0"/>
               </a:rPr>
               <a:t> circular: </a:t>
@@ -4492,9 +4167,9 @@
                   <a:srgbClr val="000000"/>
                 </a:solidFill>
                 <a:effectLst/>
-                <a:latin typeface="Avenir Roman" charset="0"/>
-                <a:ea typeface="Avenir Roman" charset="0"/>
-                <a:cs typeface="Avenir Roman" charset="0"/>
+                <a:latin typeface="Avenir" charset="0"/>
+                <a:ea typeface="Avenir" charset="0"/>
+                <a:cs typeface="Avenir" charset="0"/>
                 <a:sym typeface="Avenir Roman" charset="0"/>
               </a:rPr>
               <a:t>Construir</a:t>
@@ -4505,9 +4180,9 @@
                   <a:srgbClr val="000000"/>
                 </a:solidFill>
                 <a:effectLst/>
-                <a:latin typeface="Avenir Roman" charset="0"/>
-                <a:ea typeface="Avenir Roman" charset="0"/>
-                <a:cs typeface="Avenir Roman" charset="0"/>
+                <a:latin typeface="Avenir" charset="0"/>
+                <a:ea typeface="Avenir" charset="0"/>
+                <a:cs typeface="Avenir" charset="0"/>
                 <a:sym typeface="Avenir Roman" charset="0"/>
               </a:rPr>
               <a:t> </a:t>
@@ -4518,9 +4193,9 @@
                   <a:srgbClr val="000000"/>
                 </a:solidFill>
                 <a:effectLst/>
-                <a:latin typeface="Avenir Roman" charset="0"/>
-                <a:ea typeface="Avenir Roman" charset="0"/>
-                <a:cs typeface="Avenir Roman" charset="0"/>
+                <a:latin typeface="Avenir" charset="0"/>
+                <a:ea typeface="Avenir" charset="0"/>
+                <a:cs typeface="Avenir" charset="0"/>
                 <a:sym typeface="Avenir Roman" charset="0"/>
               </a:rPr>
               <a:t>el</a:t>
@@ -4531,9 +4206,9 @@
                   <a:srgbClr val="000000"/>
                 </a:solidFill>
                 <a:effectLst/>
-                <a:latin typeface="Avenir Roman" charset="0"/>
-                <a:ea typeface="Avenir Roman" charset="0"/>
-                <a:cs typeface="Avenir Roman" charset="0"/>
+                <a:latin typeface="Avenir" charset="0"/>
+                <a:ea typeface="Avenir" charset="0"/>
+                <a:cs typeface="Avenir" charset="0"/>
                 <a:sym typeface="Avenir Roman" charset="0"/>
               </a:rPr>
               <a:t> </a:t>
@@ -4544,9 +4219,9 @@
                   <a:srgbClr val="000000"/>
                 </a:solidFill>
                 <a:effectLst/>
-                <a:latin typeface="Avenir Roman" charset="0"/>
-                <a:ea typeface="Avenir Roman" charset="0"/>
-                <a:cs typeface="Avenir Roman" charset="0"/>
+                <a:latin typeface="Avenir" charset="0"/>
+                <a:ea typeface="Avenir" charset="0"/>
+                <a:cs typeface="Avenir" charset="0"/>
                 <a:sym typeface="Avenir Roman" charset="0"/>
               </a:rPr>
               <a:t>prototipo</a:t>
@@ -4557,9 +4232,9 @@
                   <a:srgbClr val="000000"/>
                 </a:solidFill>
                 <a:effectLst/>
-                <a:latin typeface="Avenir Roman" charset="0"/>
-                <a:ea typeface="Avenir Roman" charset="0"/>
-                <a:cs typeface="Avenir Roman" charset="0"/>
+                <a:latin typeface="Avenir" charset="0"/>
+                <a:ea typeface="Avenir" charset="0"/>
+                <a:cs typeface="Avenir" charset="0"/>
                 <a:sym typeface="Avenir Roman" charset="0"/>
               </a:rPr>
               <a:t>, </a:t>
@@ -4570,9 +4245,9 @@
                   <a:srgbClr val="000000"/>
                 </a:solidFill>
                 <a:effectLst/>
-                <a:latin typeface="Avenir Roman" charset="0"/>
-                <a:ea typeface="Avenir Roman" charset="0"/>
-                <a:cs typeface="Avenir Roman" charset="0"/>
+                <a:latin typeface="Avenir" charset="0"/>
+                <a:ea typeface="Avenir" charset="0"/>
+                <a:cs typeface="Avenir" charset="0"/>
                 <a:sym typeface="Avenir Roman" charset="0"/>
               </a:rPr>
               <a:t>Medir</a:t>
@@ -4583,9 +4258,9 @@
                   <a:srgbClr val="000000"/>
                 </a:solidFill>
                 <a:effectLst/>
-                <a:latin typeface="Avenir Roman" charset="0"/>
-                <a:ea typeface="Avenir Roman" charset="0"/>
-                <a:cs typeface="Avenir Roman" charset="0"/>
+                <a:latin typeface="Avenir" charset="0"/>
+                <a:ea typeface="Avenir" charset="0"/>
+                <a:cs typeface="Avenir" charset="0"/>
                 <a:sym typeface="Avenir Roman" charset="0"/>
               </a:rPr>
               <a:t> con 7 KPIs </a:t>
@@ -4596,9 +4271,9 @@
                   <a:srgbClr val="000000"/>
                 </a:solidFill>
                 <a:effectLst/>
-                <a:latin typeface="Avenir Roman" charset="0"/>
-                <a:ea typeface="Avenir Roman" charset="0"/>
-                <a:cs typeface="Avenir Roman" charset="0"/>
+                <a:latin typeface="Avenir" charset="0"/>
+                <a:ea typeface="Avenir" charset="0"/>
+                <a:cs typeface="Avenir" charset="0"/>
                 <a:sym typeface="Avenir Roman" charset="0"/>
               </a:rPr>
               <a:t>estrictos</a:t>
@@ -4609,9 +4284,9 @@
                   <a:srgbClr val="000000"/>
                 </a:solidFill>
                 <a:effectLst/>
-                <a:latin typeface="Avenir Roman" charset="0"/>
-                <a:ea typeface="Avenir Roman" charset="0"/>
-                <a:cs typeface="Avenir Roman" charset="0"/>
+                <a:latin typeface="Avenir" charset="0"/>
+                <a:ea typeface="Avenir" charset="0"/>
+                <a:cs typeface="Avenir" charset="0"/>
                 <a:sym typeface="Avenir Roman" charset="0"/>
               </a:rPr>
               <a:t>, y </a:t>
@@ -4622,9 +4297,9 @@
                   <a:srgbClr val="000000"/>
                 </a:solidFill>
                 <a:effectLst/>
-                <a:latin typeface="Avenir Roman" charset="0"/>
-                <a:ea typeface="Avenir Roman" charset="0"/>
-                <a:cs typeface="Avenir Roman" charset="0"/>
+                <a:latin typeface="Avenir" charset="0"/>
+                <a:ea typeface="Avenir" charset="0"/>
+                <a:cs typeface="Avenir" charset="0"/>
                 <a:sym typeface="Avenir Roman" charset="0"/>
               </a:rPr>
               <a:t>Aprender</a:t>
@@ -4635,9 +4310,9 @@
                   <a:srgbClr val="000000"/>
                 </a:solidFill>
                 <a:effectLst/>
-                <a:latin typeface="Avenir Roman" charset="0"/>
-                <a:ea typeface="Avenir Roman" charset="0"/>
-                <a:cs typeface="Avenir Roman" charset="0"/>
+                <a:latin typeface="Avenir" charset="0"/>
+                <a:ea typeface="Avenir" charset="0"/>
+                <a:cs typeface="Avenir" charset="0"/>
                 <a:sym typeface="Avenir Roman" charset="0"/>
               </a:rPr>
               <a:t> para </a:t>
@@ -4648,9 +4323,9 @@
                   <a:srgbClr val="000000"/>
                 </a:solidFill>
                 <a:effectLst/>
-                <a:latin typeface="Avenir Roman" charset="0"/>
-                <a:ea typeface="Avenir Roman" charset="0"/>
-                <a:cs typeface="Avenir Roman" charset="0"/>
+                <a:latin typeface="Avenir" charset="0"/>
+                <a:ea typeface="Avenir" charset="0"/>
+                <a:cs typeface="Avenir" charset="0"/>
                 <a:sym typeface="Avenir Roman" charset="0"/>
               </a:rPr>
               <a:t>iterar</a:t>
@@ -4661,9 +4336,9 @@
                   <a:srgbClr val="000000"/>
                 </a:solidFill>
                 <a:effectLst/>
-                <a:latin typeface="Avenir Roman" charset="0"/>
-                <a:ea typeface="Avenir Roman" charset="0"/>
-                <a:cs typeface="Avenir Roman" charset="0"/>
+                <a:latin typeface="Avenir" charset="0"/>
+                <a:ea typeface="Avenir" charset="0"/>
+                <a:cs typeface="Avenir" charset="0"/>
                 <a:sym typeface="Avenir Roman" charset="0"/>
               </a:rPr>
               <a:t>. Esto </a:t>
@@ -4674,9 +4349,9 @@
                   <a:srgbClr val="000000"/>
                 </a:solidFill>
                 <a:effectLst/>
-                <a:latin typeface="Avenir Roman" charset="0"/>
-                <a:ea typeface="Avenir Roman" charset="0"/>
-                <a:cs typeface="Avenir Roman" charset="0"/>
+                <a:latin typeface="Avenir" charset="0"/>
+                <a:ea typeface="Avenir" charset="0"/>
+                <a:cs typeface="Avenir" charset="0"/>
                 <a:sym typeface="Avenir Roman" charset="0"/>
               </a:rPr>
               <a:t>nos</a:t>
@@ -4687,9 +4362,9 @@
                   <a:srgbClr val="000000"/>
                 </a:solidFill>
                 <a:effectLst/>
-                <a:latin typeface="Avenir Roman" charset="0"/>
-                <a:ea typeface="Avenir Roman" charset="0"/>
-                <a:cs typeface="Avenir Roman" charset="0"/>
+                <a:latin typeface="Avenir" charset="0"/>
+                <a:ea typeface="Avenir" charset="0"/>
+                <a:cs typeface="Avenir" charset="0"/>
                 <a:sym typeface="Avenir Roman" charset="0"/>
               </a:rPr>
               <a:t> </a:t>
@@ -4700,9 +4375,9 @@
                   <a:srgbClr val="000000"/>
                 </a:solidFill>
                 <a:effectLst/>
-                <a:latin typeface="Avenir Roman" charset="0"/>
-                <a:ea typeface="Avenir Roman" charset="0"/>
-                <a:cs typeface="Avenir Roman" charset="0"/>
+                <a:latin typeface="Avenir" charset="0"/>
+                <a:ea typeface="Avenir" charset="0"/>
+                <a:cs typeface="Avenir" charset="0"/>
                 <a:sym typeface="Avenir Roman" charset="0"/>
               </a:rPr>
               <a:t>dio</a:t>
@@ -4713,9 +4388,9 @@
                   <a:srgbClr val="000000"/>
                 </a:solidFill>
                 <a:effectLst/>
-                <a:latin typeface="Avenir Roman" charset="0"/>
-                <a:ea typeface="Avenir Roman" charset="0"/>
-                <a:cs typeface="Avenir Roman" charset="0"/>
+                <a:latin typeface="Avenir" charset="0"/>
+                <a:ea typeface="Avenir" charset="0"/>
+                <a:cs typeface="Avenir" charset="0"/>
                 <a:sym typeface="Avenir Roman" charset="0"/>
               </a:rPr>
               <a:t> </a:t>
@@ -4726,9 +4401,9 @@
                   <a:srgbClr val="000000"/>
                 </a:solidFill>
                 <a:effectLst/>
-                <a:latin typeface="Avenir Roman" charset="0"/>
-                <a:ea typeface="Avenir Roman" charset="0"/>
-                <a:cs typeface="Avenir Roman" charset="0"/>
+                <a:latin typeface="Avenir" charset="0"/>
+                <a:ea typeface="Avenir" charset="0"/>
+                <a:cs typeface="Avenir" charset="0"/>
                 <a:sym typeface="Avenir Roman" charset="0"/>
               </a:rPr>
               <a:t>una</a:t>
@@ -4739,9 +4414,9 @@
                   <a:srgbClr val="000000"/>
                 </a:solidFill>
                 <a:effectLst/>
-                <a:latin typeface="Avenir Roman" charset="0"/>
-                <a:ea typeface="Avenir Roman" charset="0"/>
-                <a:cs typeface="Avenir Roman" charset="0"/>
+                <a:latin typeface="Avenir" charset="0"/>
+                <a:ea typeface="Avenir" charset="0"/>
+                <a:cs typeface="Avenir" charset="0"/>
                 <a:sym typeface="Avenir Roman" charset="0"/>
               </a:rPr>
               <a:t> </a:t>
@@ -4752,9 +4427,9 @@
                   <a:srgbClr val="000000"/>
                 </a:solidFill>
                 <a:effectLst/>
-                <a:latin typeface="Avenir Roman" charset="0"/>
-                <a:ea typeface="Avenir Roman" charset="0"/>
-                <a:cs typeface="Avenir Roman" charset="0"/>
+                <a:latin typeface="Avenir" charset="0"/>
+                <a:ea typeface="Avenir" charset="0"/>
+                <a:cs typeface="Avenir" charset="0"/>
                 <a:sym typeface="Avenir Roman" charset="0"/>
               </a:rPr>
               <a:t>validación</a:t>
@@ -4765,9 +4440,9 @@
                   <a:srgbClr val="000000"/>
                 </a:solidFill>
                 <a:effectLst/>
-                <a:latin typeface="Avenir Roman" charset="0"/>
-                <a:ea typeface="Avenir Roman" charset="0"/>
-                <a:cs typeface="Avenir Roman" charset="0"/>
+                <a:latin typeface="Avenir" charset="0"/>
+                <a:ea typeface="Avenir" charset="0"/>
+                <a:cs typeface="Avenir" charset="0"/>
                 <a:sym typeface="Avenir Roman" charset="0"/>
               </a:rPr>
               <a:t> </a:t>
@@ -4778,9 +4453,9 @@
                   <a:srgbClr val="000000"/>
                 </a:solidFill>
                 <a:effectLst/>
-                <a:latin typeface="Avenir Roman" charset="0"/>
-                <a:ea typeface="Avenir Roman" charset="0"/>
-                <a:cs typeface="Avenir Roman" charset="0"/>
+                <a:latin typeface="Avenir" charset="0"/>
+                <a:ea typeface="Avenir" charset="0"/>
+                <a:cs typeface="Avenir" charset="0"/>
                 <a:sym typeface="Avenir Roman" charset="0"/>
               </a:rPr>
               <a:t>objetiva</a:t>
@@ -4791,9 +4466,9 @@
                   <a:srgbClr val="000000"/>
                 </a:solidFill>
                 <a:effectLst/>
-                <a:latin typeface="Avenir Roman" charset="0"/>
-                <a:ea typeface="Avenir Roman" charset="0"/>
-                <a:cs typeface="Avenir Roman" charset="0"/>
+                <a:latin typeface="Avenir" charset="0"/>
+                <a:ea typeface="Avenir" charset="0"/>
+                <a:cs typeface="Avenir" charset="0"/>
                 <a:sym typeface="Avenir Roman" charset="0"/>
               </a:rPr>
               <a:t> </a:t>
@@ -4804,9 +4479,9 @@
                   <a:srgbClr val="000000"/>
                 </a:solidFill>
                 <a:effectLst/>
-                <a:latin typeface="Avenir Roman" charset="0"/>
-                <a:ea typeface="Avenir Roman" charset="0"/>
-                <a:cs typeface="Avenir Roman" charset="0"/>
+                <a:latin typeface="Avenir" charset="0"/>
+                <a:ea typeface="Avenir" charset="0"/>
+                <a:cs typeface="Avenir" charset="0"/>
                 <a:sym typeface="Avenir Roman" charset="0"/>
               </a:rPr>
               <a:t>en</a:t>
@@ -4817,9 +4492,9 @@
                   <a:srgbClr val="000000"/>
                 </a:solidFill>
                 <a:effectLst/>
-                <a:latin typeface="Avenir Roman" charset="0"/>
-                <a:ea typeface="Avenir Roman" charset="0"/>
-                <a:cs typeface="Avenir Roman" charset="0"/>
+                <a:latin typeface="Avenir" charset="0"/>
+                <a:ea typeface="Avenir" charset="0"/>
+                <a:cs typeface="Avenir" charset="0"/>
                 <a:sym typeface="Avenir Roman" charset="0"/>
               </a:rPr>
               <a:t> </a:t>
@@ -4830,9 +4505,9 @@
                   <a:srgbClr val="000000"/>
                 </a:solidFill>
                 <a:effectLst/>
-                <a:latin typeface="Avenir Roman" charset="0"/>
-                <a:ea typeface="Avenir Roman" charset="0"/>
-                <a:cs typeface="Avenir Roman" charset="0"/>
+                <a:latin typeface="Avenir" charset="0"/>
+                <a:ea typeface="Avenir" charset="0"/>
+                <a:cs typeface="Avenir" charset="0"/>
                 <a:sym typeface="Avenir Roman" charset="0"/>
               </a:rPr>
               <a:t>cada</a:t>
@@ -4843,9 +4518,9 @@
                   <a:srgbClr val="000000"/>
                 </a:solidFill>
                 <a:effectLst/>
-                <a:latin typeface="Avenir Roman" charset="0"/>
-                <a:ea typeface="Avenir Roman" charset="0"/>
-                <a:cs typeface="Avenir Roman" charset="0"/>
+                <a:latin typeface="Avenir" charset="0"/>
+                <a:ea typeface="Avenir" charset="0"/>
+                <a:cs typeface="Avenir" charset="0"/>
                 <a:sym typeface="Avenir Roman" charset="0"/>
               </a:rPr>
               <a:t> sprint."</a:t>
@@ -4856,9 +4531,9 @@
                   <a:srgbClr val="000000"/>
                 </a:solidFill>
                 <a:effectLst/>
-                <a:latin typeface="Avenir Roman" charset="0"/>
-                <a:ea typeface="Avenir Roman" charset="0"/>
-                <a:cs typeface="Avenir Roman" charset="0"/>
+                <a:latin typeface="Avenir" charset="0"/>
+                <a:ea typeface="Avenir" charset="0"/>
+                <a:cs typeface="Avenir" charset="0"/>
                 <a:sym typeface="Avenir Roman" charset="0"/>
               </a:rPr>
             </a:br>
@@ -4868,9 +4543,9 @@
                   <a:srgbClr val="000000"/>
                 </a:solidFill>
                 <a:effectLst/>
-                <a:latin typeface="Avenir Roman" charset="0"/>
-                <a:ea typeface="Avenir Roman" charset="0"/>
-                <a:cs typeface="Avenir Roman" charset="0"/>
+                <a:latin typeface="Avenir" charset="0"/>
+                <a:ea typeface="Avenir" charset="0"/>
+                <a:cs typeface="Avenir" charset="0"/>
                 <a:sym typeface="Avenir Roman" charset="0"/>
               </a:rPr>
             </a:br>
@@ -4880,9 +4555,9 @@
                   <a:srgbClr val="000000"/>
                 </a:solidFill>
                 <a:effectLst/>
-                <a:latin typeface="Avenir Roman" charset="0"/>
-                <a:ea typeface="Avenir Roman" charset="0"/>
-                <a:cs typeface="Avenir Roman" charset="0"/>
+                <a:latin typeface="Avenir" charset="0"/>
+                <a:ea typeface="Avenir" charset="0"/>
+                <a:cs typeface="Avenir" charset="0"/>
                 <a:sym typeface="Avenir Roman" charset="0"/>
               </a:rPr>
               <a:t>[P2] "Y para </a:t>
@@ -4893,9 +4568,9 @@
                   <a:srgbClr val="000000"/>
                 </a:solidFill>
                 <a:effectLst/>
-                <a:latin typeface="Avenir Roman" charset="0"/>
-                <a:ea typeface="Avenir Roman" charset="0"/>
-                <a:cs typeface="Avenir Roman" charset="0"/>
+                <a:latin typeface="Avenir" charset="0"/>
+                <a:ea typeface="Avenir" charset="0"/>
+                <a:cs typeface="Avenir" charset="0"/>
                 <a:sym typeface="Avenir Roman" charset="0"/>
               </a:rPr>
               <a:t>organizarnos</a:t>
@@ -4906,9 +4581,9 @@
                   <a:srgbClr val="000000"/>
                 </a:solidFill>
                 <a:effectLst/>
-                <a:latin typeface="Avenir Roman" charset="0"/>
-                <a:ea typeface="Avenir Roman" charset="0"/>
-                <a:cs typeface="Avenir Roman" charset="0"/>
+                <a:latin typeface="Avenir" charset="0"/>
+                <a:ea typeface="Avenir" charset="0"/>
+                <a:cs typeface="Avenir" charset="0"/>
                 <a:sym typeface="Avenir Roman" charset="0"/>
               </a:rPr>
               <a:t>, </a:t>
@@ -4919,9 +4594,9 @@
                   <a:srgbClr val="000000"/>
                 </a:solidFill>
                 <a:effectLst/>
-                <a:latin typeface="Avenir Roman" charset="0"/>
-                <a:ea typeface="Avenir Roman" charset="0"/>
-                <a:cs typeface="Avenir Roman" charset="0"/>
+                <a:latin typeface="Avenir" charset="0"/>
+                <a:ea typeface="Avenir" charset="0"/>
+                <a:cs typeface="Avenir" charset="0"/>
                 <a:sym typeface="Avenir Roman" charset="0"/>
               </a:rPr>
               <a:t>trabajamos</a:t>
@@ -4932,9 +4607,9 @@
                   <a:srgbClr val="000000"/>
                 </a:solidFill>
                 <a:effectLst/>
-                <a:latin typeface="Avenir Roman" charset="0"/>
-                <a:ea typeface="Avenir Roman" charset="0"/>
-                <a:cs typeface="Avenir Roman" charset="0"/>
+                <a:latin typeface="Avenir" charset="0"/>
+                <a:ea typeface="Avenir" charset="0"/>
+                <a:cs typeface="Avenir" charset="0"/>
                 <a:sym typeface="Avenir Roman" charset="0"/>
               </a:rPr>
               <a:t> 7 Sprints </a:t>
@@ -4945,9 +4620,9 @@
                   <a:srgbClr val="000000"/>
                 </a:solidFill>
                 <a:effectLst/>
-                <a:latin typeface="Avenir Roman" charset="0"/>
-                <a:ea typeface="Avenir Roman" charset="0"/>
-                <a:cs typeface="Avenir Roman" charset="0"/>
+                <a:latin typeface="Avenir" charset="0"/>
+                <a:ea typeface="Avenir" charset="0"/>
+                <a:cs typeface="Avenir" charset="0"/>
                 <a:sym typeface="Avenir Roman" charset="0"/>
               </a:rPr>
               <a:t>semanales</a:t>
@@ -4958,9 +4633,9 @@
                   <a:srgbClr val="000000"/>
                 </a:solidFill>
                 <a:effectLst/>
-                <a:latin typeface="Avenir Roman" charset="0"/>
-                <a:ea typeface="Avenir Roman" charset="0"/>
-                <a:cs typeface="Avenir Roman" charset="0"/>
+                <a:latin typeface="Avenir" charset="0"/>
+                <a:ea typeface="Avenir" charset="0"/>
+                <a:cs typeface="Avenir" charset="0"/>
                 <a:sym typeface="Avenir Roman" charset="0"/>
               </a:rPr>
               <a:t> bajo Scrum, con backlog, </a:t>
@@ -4971,9 +4646,9 @@
                   <a:srgbClr val="000000"/>
                 </a:solidFill>
                 <a:effectLst/>
-                <a:latin typeface="Avenir Roman" charset="0"/>
-                <a:ea typeface="Avenir Roman" charset="0"/>
-                <a:cs typeface="Avenir Roman" charset="0"/>
+                <a:latin typeface="Avenir" charset="0"/>
+                <a:ea typeface="Avenir" charset="0"/>
+                <a:cs typeface="Avenir" charset="0"/>
                 <a:sym typeface="Avenir Roman" charset="0"/>
               </a:rPr>
               <a:t>historias</a:t>
@@ -4984,9 +4659,9 @@
                   <a:srgbClr val="000000"/>
                 </a:solidFill>
                 <a:effectLst/>
-                <a:latin typeface="Avenir Roman" charset="0"/>
-                <a:ea typeface="Avenir Roman" charset="0"/>
-                <a:cs typeface="Avenir Roman" charset="0"/>
+                <a:latin typeface="Avenir" charset="0"/>
+                <a:ea typeface="Avenir" charset="0"/>
+                <a:cs typeface="Avenir" charset="0"/>
                 <a:sym typeface="Avenir Roman" charset="0"/>
               </a:rPr>
               <a:t> de </a:t>
@@ -4997,9 +4672,9 @@
                   <a:srgbClr val="000000"/>
                 </a:solidFill>
                 <a:effectLst/>
-                <a:latin typeface="Avenir Roman" charset="0"/>
-                <a:ea typeface="Avenir Roman" charset="0"/>
-                <a:cs typeface="Avenir Roman" charset="0"/>
+                <a:latin typeface="Avenir" charset="0"/>
+                <a:ea typeface="Avenir" charset="0"/>
+                <a:cs typeface="Avenir" charset="0"/>
                 <a:sym typeface="Avenir Roman" charset="0"/>
               </a:rPr>
               <a:t>usuario</a:t>
@@ -5010,9 +4685,9 @@
                   <a:srgbClr val="000000"/>
                 </a:solidFill>
                 <a:effectLst/>
-                <a:latin typeface="Avenir Roman" charset="0"/>
-                <a:ea typeface="Avenir Roman" charset="0"/>
-                <a:cs typeface="Avenir Roman" charset="0"/>
+                <a:latin typeface="Avenir" charset="0"/>
+                <a:ea typeface="Avenir" charset="0"/>
+                <a:cs typeface="Avenir" charset="0"/>
                 <a:sym typeface="Avenir Roman" charset="0"/>
               </a:rPr>
               <a:t>, y </a:t>
@@ -5023,9 +4698,9 @@
                   <a:srgbClr val="000000"/>
                 </a:solidFill>
                 <a:effectLst/>
-                <a:latin typeface="Avenir Roman" charset="0"/>
-                <a:ea typeface="Avenir Roman" charset="0"/>
-                <a:cs typeface="Avenir Roman" charset="0"/>
+                <a:latin typeface="Avenir" charset="0"/>
+                <a:ea typeface="Avenir" charset="0"/>
+                <a:cs typeface="Avenir" charset="0"/>
                 <a:sym typeface="Avenir Roman" charset="0"/>
               </a:rPr>
               <a:t>definición</a:t>
@@ -5036,9 +4711,9 @@
                   <a:srgbClr val="000000"/>
                 </a:solidFill>
                 <a:effectLst/>
-                <a:latin typeface="Avenir Roman" charset="0"/>
-                <a:ea typeface="Avenir Roman" charset="0"/>
-                <a:cs typeface="Avenir Roman" charset="0"/>
+                <a:latin typeface="Avenir" charset="0"/>
+                <a:ea typeface="Avenir" charset="0"/>
+                <a:cs typeface="Avenir" charset="0"/>
                 <a:sym typeface="Avenir Roman" charset="0"/>
               </a:rPr>
               <a:t> de Done para </a:t>
@@ -5049,9 +4724,9 @@
                   <a:srgbClr val="000000"/>
                 </a:solidFill>
                 <a:effectLst/>
-                <a:latin typeface="Avenir Roman" charset="0"/>
-                <a:ea typeface="Avenir Roman" charset="0"/>
-                <a:cs typeface="Avenir Roman" charset="0"/>
+                <a:latin typeface="Avenir" charset="0"/>
+                <a:ea typeface="Avenir" charset="0"/>
+                <a:cs typeface="Avenir" charset="0"/>
                 <a:sym typeface="Avenir Roman" charset="0"/>
               </a:rPr>
               <a:t>cada</a:t>
@@ -5062,9 +4737,9 @@
                   <a:srgbClr val="000000"/>
                 </a:solidFill>
                 <a:effectLst/>
-                <a:latin typeface="Avenir Roman" charset="0"/>
-                <a:ea typeface="Avenir Roman" charset="0"/>
-                <a:cs typeface="Avenir Roman" charset="0"/>
+                <a:latin typeface="Avenir" charset="0"/>
+                <a:ea typeface="Avenir" charset="0"/>
+                <a:cs typeface="Avenir" charset="0"/>
                 <a:sym typeface="Avenir Roman" charset="0"/>
               </a:rPr>
               <a:t> </a:t>
@@ -5075,9 +4750,9 @@
                   <a:srgbClr val="000000"/>
                 </a:solidFill>
                 <a:effectLst/>
-                <a:latin typeface="Avenir Roman" charset="0"/>
-                <a:ea typeface="Avenir Roman" charset="0"/>
-                <a:cs typeface="Avenir Roman" charset="0"/>
+                <a:latin typeface="Avenir" charset="0"/>
+                <a:ea typeface="Avenir" charset="0"/>
+                <a:cs typeface="Avenir" charset="0"/>
                 <a:sym typeface="Avenir Roman" charset="0"/>
               </a:rPr>
               <a:t>entregable</a:t>
@@ -5088,9 +4763,9 @@
                   <a:srgbClr val="000000"/>
                 </a:solidFill>
                 <a:effectLst/>
-                <a:latin typeface="Avenir Roman" charset="0"/>
-                <a:ea typeface="Avenir Roman" charset="0"/>
-                <a:cs typeface="Avenir Roman" charset="0"/>
+                <a:latin typeface="Avenir" charset="0"/>
+                <a:ea typeface="Avenir" charset="0"/>
+                <a:cs typeface="Avenir" charset="0"/>
                 <a:sym typeface="Avenir Roman" charset="0"/>
               </a:rPr>
               <a:t>. La </a:t>
@@ -5101,9 +4776,9 @@
                   <a:srgbClr val="000000"/>
                 </a:solidFill>
                 <a:effectLst/>
-                <a:latin typeface="Avenir Roman" charset="0"/>
-                <a:ea typeface="Avenir Roman" charset="0"/>
-                <a:cs typeface="Avenir Roman" charset="0"/>
+                <a:latin typeface="Avenir" charset="0"/>
+                <a:ea typeface="Avenir" charset="0"/>
+                <a:cs typeface="Avenir" charset="0"/>
                 <a:sym typeface="Avenir Roman" charset="0"/>
               </a:rPr>
               <a:t>combinación</a:t>
@@ -5114,9 +4789,9 @@
                   <a:srgbClr val="000000"/>
                 </a:solidFill>
                 <a:effectLst/>
-                <a:latin typeface="Avenir Roman" charset="0"/>
-                <a:ea typeface="Avenir Roman" charset="0"/>
-                <a:cs typeface="Avenir Roman" charset="0"/>
+                <a:latin typeface="Avenir" charset="0"/>
+                <a:ea typeface="Avenir" charset="0"/>
+                <a:cs typeface="Avenir" charset="0"/>
                 <a:sym typeface="Avenir Roman" charset="0"/>
               </a:rPr>
               <a:t> Scrum + Lean </a:t>
@@ -5127,9 +4802,9 @@
                   <a:srgbClr val="000000"/>
                 </a:solidFill>
                 <a:effectLst/>
-                <a:latin typeface="Avenir Roman" charset="0"/>
-                <a:ea typeface="Avenir Roman" charset="0"/>
-                <a:cs typeface="Avenir Roman" charset="0"/>
+                <a:latin typeface="Avenir" charset="0"/>
+                <a:ea typeface="Avenir" charset="0"/>
+                <a:cs typeface="Avenir" charset="0"/>
                 <a:sym typeface="Avenir Roman" charset="0"/>
               </a:rPr>
               <a:t>nos</a:t>
@@ -5140,9 +4815,9 @@
                   <a:srgbClr val="000000"/>
                 </a:solidFill>
                 <a:effectLst/>
-                <a:latin typeface="Avenir Roman" charset="0"/>
-                <a:ea typeface="Avenir Roman" charset="0"/>
-                <a:cs typeface="Avenir Roman" charset="0"/>
+                <a:latin typeface="Avenir" charset="0"/>
+                <a:ea typeface="Avenir" charset="0"/>
+                <a:cs typeface="Avenir" charset="0"/>
                 <a:sym typeface="Avenir Roman" charset="0"/>
               </a:rPr>
               <a:t> </a:t>
@@ -5153,9 +4828,9 @@
                   <a:srgbClr val="000000"/>
                 </a:solidFill>
                 <a:effectLst/>
-                <a:latin typeface="Avenir Roman" charset="0"/>
-                <a:ea typeface="Avenir Roman" charset="0"/>
-                <a:cs typeface="Avenir Roman" charset="0"/>
+                <a:latin typeface="Avenir" charset="0"/>
+                <a:ea typeface="Avenir" charset="0"/>
+                <a:cs typeface="Avenir" charset="0"/>
                 <a:sym typeface="Avenir Roman" charset="0"/>
               </a:rPr>
               <a:t>mantuvo</a:t>
@@ -5166,9 +4841,9 @@
                   <a:srgbClr val="000000"/>
                 </a:solidFill>
                 <a:effectLst/>
-                <a:latin typeface="Avenir Roman" charset="0"/>
-                <a:ea typeface="Avenir Roman" charset="0"/>
-                <a:cs typeface="Avenir Roman" charset="0"/>
+                <a:latin typeface="Avenir" charset="0"/>
+                <a:ea typeface="Avenir" charset="0"/>
+                <a:cs typeface="Avenir" charset="0"/>
                 <a:sym typeface="Avenir Roman" charset="0"/>
               </a:rPr>
               <a:t> </a:t>
@@ -5179,9 +4854,9 @@
                   <a:srgbClr val="000000"/>
                 </a:solidFill>
                 <a:effectLst/>
-                <a:latin typeface="Avenir Roman" charset="0"/>
-                <a:ea typeface="Avenir Roman" charset="0"/>
-                <a:cs typeface="Avenir Roman" charset="0"/>
+                <a:latin typeface="Avenir" charset="0"/>
+                <a:ea typeface="Avenir" charset="0"/>
+                <a:cs typeface="Avenir" charset="0"/>
                 <a:sym typeface="Avenir Roman" charset="0"/>
               </a:rPr>
               <a:t>alineados</a:t>
@@ -5192,9 +4867,9 @@
                   <a:srgbClr val="000000"/>
                 </a:solidFill>
                 <a:effectLst/>
-                <a:latin typeface="Avenir Roman" charset="0"/>
-                <a:ea typeface="Avenir Roman" charset="0"/>
-                <a:cs typeface="Avenir Roman" charset="0"/>
+                <a:latin typeface="Avenir" charset="0"/>
+                <a:ea typeface="Avenir" charset="0"/>
+                <a:cs typeface="Avenir" charset="0"/>
                 <a:sym typeface="Avenir Roman" charset="0"/>
               </a:rPr>
               <a:t> </a:t>
@@ -5205,9 +4880,9 @@
                   <a:srgbClr val="000000"/>
                 </a:solidFill>
                 <a:effectLst/>
-                <a:latin typeface="Avenir Roman" charset="0"/>
-                <a:ea typeface="Avenir Roman" charset="0"/>
-                <a:cs typeface="Avenir Roman" charset="0"/>
+                <a:latin typeface="Avenir" charset="0"/>
+                <a:ea typeface="Avenir" charset="0"/>
+                <a:cs typeface="Avenir" charset="0"/>
                 <a:sym typeface="Avenir Roman" charset="0"/>
               </a:rPr>
               <a:t>durante</a:t>
@@ -5218,9 +4893,9 @@
                   <a:srgbClr val="000000"/>
                 </a:solidFill>
                 <a:effectLst/>
-                <a:latin typeface="Avenir Roman" charset="0"/>
-                <a:ea typeface="Avenir Roman" charset="0"/>
-                <a:cs typeface="Avenir Roman" charset="0"/>
+                <a:latin typeface="Avenir" charset="0"/>
+                <a:ea typeface="Avenir" charset="0"/>
+                <a:cs typeface="Avenir" charset="0"/>
                 <a:sym typeface="Avenir Roman" charset="0"/>
               </a:rPr>
               <a:t> </a:t>
@@ -5231,9 +4906,9 @@
                   <a:srgbClr val="000000"/>
                 </a:solidFill>
                 <a:effectLst/>
-                <a:latin typeface="Avenir Roman" charset="0"/>
-                <a:ea typeface="Avenir Roman" charset="0"/>
-                <a:cs typeface="Avenir Roman" charset="0"/>
+                <a:latin typeface="Avenir" charset="0"/>
+                <a:ea typeface="Avenir" charset="0"/>
+                <a:cs typeface="Avenir" charset="0"/>
                 <a:sym typeface="Avenir Roman" charset="0"/>
               </a:rPr>
               <a:t>todo</a:t>
@@ -5244,9 +4919,9 @@
                   <a:srgbClr val="000000"/>
                 </a:solidFill>
                 <a:effectLst/>
-                <a:latin typeface="Avenir Roman" charset="0"/>
-                <a:ea typeface="Avenir Roman" charset="0"/>
-                <a:cs typeface="Avenir Roman" charset="0"/>
+                <a:latin typeface="Avenir" charset="0"/>
+                <a:ea typeface="Avenir" charset="0"/>
+                <a:cs typeface="Avenir" charset="0"/>
                 <a:sym typeface="Avenir Roman" charset="0"/>
               </a:rPr>
               <a:t> </a:t>
@@ -5257,9 +4932,9 @@
                   <a:srgbClr val="000000"/>
                 </a:solidFill>
                 <a:effectLst/>
-                <a:latin typeface="Avenir Roman" charset="0"/>
-                <a:ea typeface="Avenir Roman" charset="0"/>
-                <a:cs typeface="Avenir Roman" charset="0"/>
+                <a:latin typeface="Avenir" charset="0"/>
+                <a:ea typeface="Avenir" charset="0"/>
+                <a:cs typeface="Avenir" charset="0"/>
                 <a:sym typeface="Avenir Roman" charset="0"/>
               </a:rPr>
               <a:t>el</a:t>
@@ -5270,9 +4945,9 @@
                   <a:srgbClr val="000000"/>
                 </a:solidFill>
                 <a:effectLst/>
-                <a:latin typeface="Avenir Roman" charset="0"/>
-                <a:ea typeface="Avenir Roman" charset="0"/>
-                <a:cs typeface="Avenir Roman" charset="0"/>
+                <a:latin typeface="Avenir" charset="0"/>
+                <a:ea typeface="Avenir" charset="0"/>
+                <a:cs typeface="Avenir" charset="0"/>
                 <a:sym typeface="Avenir Roman" charset="0"/>
               </a:rPr>
               <a:t> </a:t>
@@ -5283,9 +4958,9 @@
                   <a:srgbClr val="000000"/>
                 </a:solidFill>
                 <a:effectLst/>
-                <a:latin typeface="Avenir Roman" charset="0"/>
-                <a:ea typeface="Avenir Roman" charset="0"/>
-                <a:cs typeface="Avenir Roman" charset="0"/>
+                <a:latin typeface="Avenir" charset="0"/>
+                <a:ea typeface="Avenir" charset="0"/>
+                <a:cs typeface="Avenir" charset="0"/>
                 <a:sym typeface="Avenir Roman" charset="0"/>
               </a:rPr>
               <a:t>desarrollo</a:t>
@@ -5296,9 +4971,9 @@
                   <a:srgbClr val="000000"/>
                 </a:solidFill>
                 <a:effectLst/>
-                <a:latin typeface="Avenir Roman" charset="0"/>
-                <a:ea typeface="Avenir Roman" charset="0"/>
-                <a:cs typeface="Avenir Roman" charset="0"/>
+                <a:latin typeface="Avenir" charset="0"/>
+                <a:ea typeface="Avenir" charset="0"/>
+                <a:cs typeface="Avenir" charset="0"/>
                 <a:sym typeface="Avenir Roman" charset="0"/>
               </a:rPr>
               <a:t>."</a:t>
@@ -5309,9 +4984,9 @@
                   <a:srgbClr val="000000"/>
                 </a:solidFill>
                 <a:effectLst/>
-                <a:latin typeface="Avenir Roman" charset="0"/>
-                <a:ea typeface="Avenir Roman" charset="0"/>
-                <a:cs typeface="Avenir Roman" charset="0"/>
+                <a:latin typeface="Avenir" charset="0"/>
+                <a:ea typeface="Avenir" charset="0"/>
+                <a:cs typeface="Avenir" charset="0"/>
                 <a:sym typeface="Avenir Roman" charset="0"/>
               </a:rPr>
             </a:br>
@@ -5321,9 +4996,9 @@
                   <a:srgbClr val="000000"/>
                 </a:solidFill>
                 <a:effectLst/>
-                <a:latin typeface="Avenir Roman" charset="0"/>
-                <a:ea typeface="Avenir Roman" charset="0"/>
-                <a:cs typeface="Avenir Roman" charset="0"/>
+                <a:latin typeface="Avenir" charset="0"/>
+                <a:ea typeface="Avenir" charset="0"/>
+                <a:cs typeface="Avenir" charset="0"/>
                 <a:sym typeface="Avenir Roman" charset="0"/>
               </a:rPr>
             </a:br>
@@ -5333,9 +5008,9 @@
                   <a:srgbClr val="000000"/>
                 </a:solidFill>
                 <a:effectLst/>
-                <a:latin typeface="Avenir Roman" charset="0"/>
-                <a:ea typeface="Avenir Roman" charset="0"/>
-                <a:cs typeface="Avenir Roman" charset="0"/>
+                <a:latin typeface="Avenir" charset="0"/>
+                <a:ea typeface="Avenir" charset="0"/>
+                <a:cs typeface="Avenir" charset="0"/>
                 <a:sym typeface="Avenir Roman" charset="0"/>
               </a:rPr>
               <a:t>⏱ ~1:30 min.</a:t>
@@ -5412,83 +5087,6 @@
         <p:txBody>
           <a:bodyPr/>
           <a:lstStyle/>
-          <a:p>
-            <a:r>
-              <a:rPr lang="es-ES" dirty="0"/>
-              <a:t>*   **Notas del Presentador:** *"A nivel técnico, implementamos una Arquitectura Hexagonal para aislar nuestras capas. La gran innovación tecnológica aquí es nuestro sistema híbrido. Los modelos de lenguaje como </a:t>
-            </a:r>
-            <a:r>
-              <a:rPr lang="es-ES" dirty="0" err="1"/>
-              <a:t>ChatGPT</a:t>
-            </a:r>
-            <a:r>
-              <a:rPr lang="es-ES" dirty="0"/>
-              <a:t> tienden a alucinar, lo cual es mortal para el ganado. Por eso, en Caporal AI, la IA generativa (</a:t>
-            </a:r>
-            <a:r>
-              <a:rPr lang="es-ES" dirty="0" err="1"/>
-              <a:t>LangChain</a:t>
-            </a:r>
-            <a:r>
-              <a:rPr lang="es-ES" dirty="0"/>
-              <a:t>/RAG) solo funciona como un orquestador que entiende al ganadero, pero la matemática de la ración la resuelve exclusivamente nuestro microservicio en Python usando el algoritmo determinista Simplex. Esto garantiza cero riesgos biológicos."*</a:t>
-            </a:r>
-          </a:p>
-          <a:p>
-            <a:endParaRPr lang="es-ES" dirty="0"/>
-          </a:p>
-          <a:p>
-            <a:pPr marL="342900" indent="-342900">
-              <a:buFont typeface="Arial" panose="020B0604020202020204" pitchFamily="34" charset="0"/>
-              <a:buChar char="•"/>
-            </a:pPr>
-            <a:r>
-              <a:rPr lang="es-ES" dirty="0"/>
-              <a:t>**Sugerencia Visual:** Insertar la **Figura 3** del documento (Diagrama de Arquitectura Hexagonal).</a:t>
-            </a:r>
-          </a:p>
-          <a:p>
-            <a:pPr marL="342900" indent="-342900">
-              <a:buFont typeface="Arial" panose="020B0604020202020204" pitchFamily="34" charset="0"/>
-              <a:buChar char="•"/>
-            </a:pPr>
-            <a:endParaRPr lang="es-ES" dirty="0"/>
-          </a:p>
-          <a:p>
-            <a:pPr marL="0" marR="0" lvl="0" indent="0" algn="l" defTabSz="457200" rtl="0" eaLnBrk="0" fontAlgn="base" latinLnBrk="0" hangingPunct="0">
-              <a:lnSpc>
-                <a:spcPct val="125000"/>
-              </a:lnSpc>
-              <a:spcBef>
-                <a:spcPct val="0"/>
-              </a:spcBef>
-              <a:spcAft>
-                <a:spcPct val="0"/>
-              </a:spcAft>
-              <a:buClrTx/>
-              <a:buSzTx/>
-              <a:buFont typeface="Arial" panose="020B0604020202020204" pitchFamily="34" charset="0"/>
-              <a:buNone/>
-              <a:tabLst/>
-              <a:defRPr/>
-            </a:pPr>
-            <a:r>
-              <a:rPr lang="es-ES" sz="2400" b="1" kern="1200" dirty="0">
-                <a:solidFill>
-                  <a:srgbClr val="000000"/>
-                </a:solidFill>
-                <a:effectLst/>
-                <a:latin typeface="Avenir Roman" charset="0"/>
-                <a:ea typeface="Avenir Roman" charset="0"/>
-                <a:cs typeface="Avenir Roman" charset="0"/>
-                <a:sym typeface="Avenir Roman" charset="0"/>
-              </a:rPr>
-              <a:t>----------------------------------------------------------------------------------------------------------------------------------------------------------------------------------------------</a:t>
-            </a:r>
-            <a:endParaRPr lang="en-US" dirty="0">
-              <a:effectLst/>
-            </a:endParaRPr>
-          </a:p>
           <a:p>
             <a:pPr marL="0" marR="0" lvl="0" indent="0" algn="l" defTabSz="457200" rtl="0" eaLnBrk="0" fontAlgn="base" latinLnBrk="0" hangingPunct="0">
               <a:lnSpc>
@@ -5740,125 +5338,6 @@
           <a:bodyPr/>
           <a:lstStyle/>
           <a:p>
-            <a:pPr marL="342900" indent="-342900">
-              <a:buFont typeface="Arial" panose="020B0604020202020204" pitchFamily="34" charset="0"/>
-              <a:buChar char="•"/>
-            </a:pPr>
-            <a:r>
-              <a:rPr lang="es-ES" dirty="0"/>
-              <a:t>**Notas del Presentador:** *"Llegó el momento de ver la herramienta en acción. (Aquí uno de ustedes toma la pantalla o reproduce el video pregrabado del MVP). Como pueden observar en nuestro </a:t>
-            </a:r>
-            <a:r>
-              <a:rPr lang="es-ES" dirty="0" err="1"/>
-              <a:t>dashboard</a:t>
-            </a:r>
-            <a:r>
-              <a:rPr lang="es-ES" dirty="0"/>
-              <a:t> en </a:t>
-            </a:r>
-            <a:r>
-              <a:rPr lang="es-ES" dirty="0" err="1"/>
-              <a:t>React</a:t>
-            </a:r>
-            <a:r>
-              <a:rPr lang="es-ES" dirty="0"/>
-              <a:t>, el productor puede actualizar el precio del maíz y en menos de 5 minutos el </a:t>
-            </a:r>
-            <a:r>
-              <a:rPr lang="es-ES" dirty="0" err="1"/>
-              <a:t>Solver</a:t>
-            </a:r>
-            <a:r>
-              <a:rPr lang="es-ES" dirty="0"/>
-              <a:t> recalcula la dieta más barata. Además, mediante nuestro </a:t>
-            </a:r>
-            <a:r>
-              <a:rPr lang="es-ES" dirty="0" err="1"/>
-              <a:t>chatbot</a:t>
-            </a:r>
-            <a:r>
-              <a:rPr lang="es-ES" dirty="0"/>
-              <a:t> asistido por RAG, el ganadero puede preguntar dudas técnicas, y el sistema responde basándose únicamente en la literatura indexada, citando sus fuentes."*</a:t>
-            </a:r>
-          </a:p>
-          <a:p>
-            <a:pPr marL="0" indent="0">
-              <a:buFont typeface="Arial" panose="020B0604020202020204" pitchFamily="34" charset="0"/>
-              <a:buNone/>
-            </a:pPr>
-            <a:endParaRPr lang="es-ES" dirty="0"/>
-          </a:p>
-          <a:p>
-            <a:pPr marL="342900" indent="-342900">
-              <a:buFont typeface="Arial" panose="020B0604020202020204" pitchFamily="34" charset="0"/>
-              <a:buChar char="•"/>
-            </a:pPr>
-            <a:r>
-              <a:rPr lang="es-ES" dirty="0"/>
-              <a:t>**Sugerencia Visual:** **Obligatorio por la Clase S04:** Mostrar las **Figuras 4, 5 y 6** (Capturas de pantalla de los </a:t>
-            </a:r>
-            <a:r>
-              <a:rPr lang="es-ES" dirty="0" err="1"/>
-              <a:t>Dashboards</a:t>
-            </a:r>
-            <a:r>
-              <a:rPr lang="es-ES" dirty="0"/>
-              <a:t>) o reproducir un video breve de la pantalla navegando por el sistema en vivo</a:t>
-            </a:r>
-          </a:p>
-          <a:p>
-            <a:pPr marL="342900" indent="-342900">
-              <a:buFont typeface="Arial" panose="020B0604020202020204" pitchFamily="34" charset="0"/>
-              <a:buChar char="•"/>
-            </a:pPr>
-            <a:endParaRPr lang="es-ES" dirty="0"/>
-          </a:p>
-          <a:p>
-            <a:pPr marL="0" marR="0" lvl="0" indent="0" algn="l" defTabSz="457200" rtl="0" eaLnBrk="0" fontAlgn="base" latinLnBrk="0" hangingPunct="0">
-              <a:lnSpc>
-                <a:spcPct val="125000"/>
-              </a:lnSpc>
-              <a:spcBef>
-                <a:spcPct val="0"/>
-              </a:spcBef>
-              <a:spcAft>
-                <a:spcPct val="0"/>
-              </a:spcAft>
-              <a:buClrTx/>
-              <a:buSzTx/>
-              <a:buFont typeface="Arial" panose="020B0604020202020204" pitchFamily="34" charset="0"/>
-              <a:buNone/>
-              <a:tabLst/>
-              <a:defRPr/>
-            </a:pPr>
-            <a:r>
-              <a:rPr lang="es-ES" sz="2400" b="1" kern="1200" dirty="0">
-                <a:solidFill>
-                  <a:srgbClr val="000000"/>
-                </a:solidFill>
-                <a:effectLst/>
-                <a:latin typeface="Avenir Roman" charset="0"/>
-                <a:ea typeface="Avenir Roman" charset="0"/>
-                <a:cs typeface="Avenir Roman" charset="0"/>
-                <a:sym typeface="Avenir Roman" charset="0"/>
-              </a:rPr>
-              <a:t>----------------------------------------------------------------------------------------------------------------------------------------------------------------------------------------------</a:t>
-            </a:r>
-            <a:endParaRPr lang="en-US" dirty="0">
-              <a:effectLst/>
-            </a:endParaRPr>
-          </a:p>
-          <a:p>
-            <a:pPr marL="0" indent="0">
-              <a:buFont typeface="Arial" panose="020B0604020202020204" pitchFamily="34" charset="0"/>
-              <a:buNone/>
-            </a:pPr>
-            <a:r>
-              <a:rPr lang="es-ES" dirty="0"/>
-              <a:t>.</a:t>
-            </a:r>
-          </a:p>
-          <a:p>
             <a:pPr marL="0" indent="0">
               <a:buFont typeface="Arial" panose="020B0604020202020204" pitchFamily="34" charset="0"/>
               <a:buNone/>
@@ -6027,63 +5506,6 @@
           <a:bodyPr/>
           <a:lstStyle/>
           <a:p>
-            <a:pPr marL="342900" indent="-342900">
-              <a:buFont typeface="Arial" panose="020B0604020202020204" pitchFamily="34" charset="0"/>
-              <a:buChar char="•"/>
-            </a:pPr>
-            <a:r>
-              <a:rPr lang="es-ES" dirty="0"/>
-              <a:t>**Notas del Presentador:** *"Para someter nuestra teoría al rigor científico, diseñamos un experimento de '</a:t>
-            </a:r>
-            <a:r>
-              <a:rPr lang="es-ES" dirty="0" err="1"/>
-              <a:t>backtesting</a:t>
-            </a:r>
-            <a:r>
-              <a:rPr lang="es-ES" dirty="0"/>
-              <a:t>' de 90 días inyectando datos históricos reales de la inflación en México. Al comparar el '</a:t>
-            </a:r>
-            <a:r>
-              <a:rPr lang="es-ES" dirty="0" err="1"/>
-              <a:t>baseline</a:t>
-            </a:r>
-            <a:r>
-              <a:rPr lang="es-ES" dirty="0"/>
-              <a:t>' estático del ganadero tradicional contra la formulación dinámica de Caporal AI, logramos comprobar la reducción teórica de costos proyectada. Aún más importante: cumplimos nuestro KPI de seguridad, obteniendo cero violaciones a las restricciones nutricionales del NRC, demostrando que la solución es económicamente viable y biológicamente segura."*</a:t>
-            </a:r>
-          </a:p>
-          <a:p>
-            <a:pPr marL="342900" indent="-342900">
-              <a:buFont typeface="Arial" panose="020B0604020202020204" pitchFamily="34" charset="0"/>
-              <a:buChar char="•"/>
-            </a:pPr>
-            <a:endParaRPr lang="es-ES" dirty="0"/>
-          </a:p>
-          <a:p>
-            <a:pPr marL="0" indent="0">
-              <a:buFont typeface="Arial" panose="020B0604020202020204" pitchFamily="34" charset="0"/>
-              <a:buNone/>
-            </a:pPr>
-            <a:endParaRPr lang="es-ES" dirty="0"/>
-          </a:p>
-          <a:p>
-            <a:pPr marL="342900" indent="-342900">
-              <a:buFont typeface="Arial" panose="020B0604020202020204" pitchFamily="34" charset="0"/>
-              <a:buChar char="•"/>
-            </a:pPr>
-            <a:r>
-              <a:rPr lang="es-ES" dirty="0"/>
-              <a:t>**Sugerencia Visual:** Curva de campana de rigor estadístico (como sugiere la plantilla) o la tabla de cierre del ciclo Lean (Tabla 9) simplificada a semáforos verde/rojo.</a:t>
-            </a:r>
-          </a:p>
-          <a:p>
-            <a:pPr marL="342900" indent="-342900">
-              <a:buFont typeface="Arial" panose="020B0604020202020204" pitchFamily="34" charset="0"/>
-              <a:buChar char="•"/>
-            </a:pPr>
-            <a:endParaRPr lang="es-ES" dirty="0"/>
-          </a:p>
-          <a:p>
             <a:pPr marL="0" marR="0" lvl="0" indent="0" algn="l" defTabSz="457200" rtl="0" eaLnBrk="0" fontAlgn="base" latinLnBrk="0" hangingPunct="0">
               <a:lnSpc>
                 <a:spcPct val="125000"/>
@@ -6102,49 +5524,14 @@
               <a:defRPr/>
             </a:pPr>
             <a:r>
-              <a:rPr lang="es-ES" sz="2400" b="1" kern="1200" dirty="0">
-                <a:solidFill>
-                  <a:srgbClr val="000000"/>
-                </a:solidFill>
-                <a:effectLst/>
-                <a:latin typeface="Avenir Roman" charset="0"/>
-                <a:ea typeface="Avenir Roman" charset="0"/>
-                <a:cs typeface="Avenir Roman" charset="0"/>
-                <a:sym typeface="Avenir Roman" charset="0"/>
-              </a:rPr>
-              <a:t>----------------------------------------------------------------------------------------------------------------------------------------------------------------------------------------------</a:t>
-            </a:r>
-            <a:endParaRPr lang="en-US" dirty="0">
-              <a:effectLst/>
-            </a:endParaRPr>
-          </a:p>
-          <a:p>
-            <a:pPr marL="0" marR="0" lvl="0" indent="0" algn="l" defTabSz="457200" rtl="0" eaLnBrk="0" fontAlgn="base" latinLnBrk="0" hangingPunct="0">
-              <a:lnSpc>
-                <a:spcPct val="125000"/>
-              </a:lnSpc>
-              <a:spcBef>
-                <a:spcPct val="0"/>
-              </a:spcBef>
-              <a:spcAft>
-                <a:spcPct val="0"/>
-              </a:spcAft>
-              <a:buClrTx/>
-              <a:buSzTx/>
-              <a:buFont typeface="Arial" panose="020B0604020202020204" pitchFamily="34" charset="0"/>
-              <a:buNone/>
-              <a:tabLst/>
-              <a:defRPr/>
-            </a:pPr>
-            <a:r>
-              <a:rPr lang="en-US" sz="2400" kern="1200" dirty="0">
-                <a:solidFill>
-                  <a:srgbClr val="000000"/>
-                </a:solidFill>
-                <a:effectLst/>
-                <a:latin typeface="Avenir Roman" charset="0"/>
-                <a:ea typeface="Avenir Roman" charset="0"/>
-                <a:cs typeface="Avenir Roman" charset="0"/>
+              <a:rPr lang="en-US" sz="2400" kern="1200" dirty="0">
+                <a:solidFill>
+                  <a:srgbClr val="000000"/>
+                </a:solidFill>
+                <a:effectLst/>
+                <a:latin typeface="Avenir" charset="0"/>
+                <a:ea typeface="Avenir" charset="0"/>
+                <a:cs typeface="Avenir" charset="0"/>
                 <a:sym typeface="Avenir Roman" charset="0"/>
               </a:rPr>
               <a:t>[P1] "Para </a:t>
@@ -6155,9 +5542,9 @@
                   <a:srgbClr val="000000"/>
                 </a:solidFill>
                 <a:effectLst/>
-                <a:latin typeface="Avenir Roman" charset="0"/>
-                <a:ea typeface="Avenir Roman" charset="0"/>
-                <a:cs typeface="Avenir Roman" charset="0"/>
+                <a:latin typeface="Avenir" charset="0"/>
+                <a:ea typeface="Avenir" charset="0"/>
+                <a:cs typeface="Avenir" charset="0"/>
                 <a:sym typeface="Avenir Roman" charset="0"/>
               </a:rPr>
               <a:t>someter</a:t>
@@ -6168,9 +5555,9 @@
                   <a:srgbClr val="000000"/>
                 </a:solidFill>
                 <a:effectLst/>
-                <a:latin typeface="Avenir Roman" charset="0"/>
-                <a:ea typeface="Avenir Roman" charset="0"/>
-                <a:cs typeface="Avenir Roman" charset="0"/>
+                <a:latin typeface="Avenir" charset="0"/>
+                <a:ea typeface="Avenir" charset="0"/>
+                <a:cs typeface="Avenir" charset="0"/>
                 <a:sym typeface="Avenir Roman" charset="0"/>
               </a:rPr>
               <a:t> </a:t>
@@ -6181,9 +5568,9 @@
                   <a:srgbClr val="000000"/>
                 </a:solidFill>
                 <a:effectLst/>
-                <a:latin typeface="Avenir Roman" charset="0"/>
-                <a:ea typeface="Avenir Roman" charset="0"/>
-                <a:cs typeface="Avenir Roman" charset="0"/>
+                <a:latin typeface="Avenir" charset="0"/>
+                <a:ea typeface="Avenir" charset="0"/>
+                <a:cs typeface="Avenir" charset="0"/>
                 <a:sym typeface="Avenir Roman" charset="0"/>
               </a:rPr>
               <a:t>nuestra</a:t>
@@ -6194,9 +5581,9 @@
                   <a:srgbClr val="000000"/>
                 </a:solidFill>
                 <a:effectLst/>
-                <a:latin typeface="Avenir Roman" charset="0"/>
-                <a:ea typeface="Avenir Roman" charset="0"/>
-                <a:cs typeface="Avenir Roman" charset="0"/>
+                <a:latin typeface="Avenir" charset="0"/>
+                <a:ea typeface="Avenir" charset="0"/>
+                <a:cs typeface="Avenir" charset="0"/>
                 <a:sym typeface="Avenir Roman" charset="0"/>
               </a:rPr>
               <a:t> </a:t>
@@ -6207,9 +5594,9 @@
                   <a:srgbClr val="000000"/>
                 </a:solidFill>
                 <a:effectLst/>
-                <a:latin typeface="Avenir Roman" charset="0"/>
-                <a:ea typeface="Avenir Roman" charset="0"/>
-                <a:cs typeface="Avenir Roman" charset="0"/>
+                <a:latin typeface="Avenir" charset="0"/>
+                <a:ea typeface="Avenir" charset="0"/>
+                <a:cs typeface="Avenir" charset="0"/>
                 <a:sym typeface="Avenir Roman" charset="0"/>
               </a:rPr>
               <a:t>propuesta</a:t>
@@ -6220,9 +5607,9 @@
                   <a:srgbClr val="000000"/>
                 </a:solidFill>
                 <a:effectLst/>
-                <a:latin typeface="Avenir Roman" charset="0"/>
-                <a:ea typeface="Avenir Roman" charset="0"/>
-                <a:cs typeface="Avenir Roman" charset="0"/>
+                <a:latin typeface="Avenir" charset="0"/>
+                <a:ea typeface="Avenir" charset="0"/>
+                <a:cs typeface="Avenir" charset="0"/>
                 <a:sym typeface="Avenir Roman" charset="0"/>
               </a:rPr>
               <a:t> al rigor </a:t>
@@ -6233,9 +5620,9 @@
                   <a:srgbClr val="000000"/>
                 </a:solidFill>
                 <a:effectLst/>
-                <a:latin typeface="Avenir Roman" charset="0"/>
-                <a:ea typeface="Avenir Roman" charset="0"/>
-                <a:cs typeface="Avenir Roman" charset="0"/>
+                <a:latin typeface="Avenir" charset="0"/>
+                <a:ea typeface="Avenir" charset="0"/>
+                <a:cs typeface="Avenir" charset="0"/>
                 <a:sym typeface="Avenir Roman" charset="0"/>
               </a:rPr>
               <a:t>científico</a:t>
@@ -6246,9 +5633,9 @@
                   <a:srgbClr val="000000"/>
                 </a:solidFill>
                 <a:effectLst/>
-                <a:latin typeface="Avenir Roman" charset="0"/>
-                <a:ea typeface="Avenir Roman" charset="0"/>
-                <a:cs typeface="Avenir Roman" charset="0"/>
+                <a:latin typeface="Avenir" charset="0"/>
+                <a:ea typeface="Avenir" charset="0"/>
+                <a:cs typeface="Avenir" charset="0"/>
                 <a:sym typeface="Avenir Roman" charset="0"/>
               </a:rPr>
               <a:t>, </a:t>
@@ -6259,9 +5646,9 @@
                   <a:srgbClr val="000000"/>
                 </a:solidFill>
                 <a:effectLst/>
-                <a:latin typeface="Avenir Roman" charset="0"/>
-                <a:ea typeface="Avenir Roman" charset="0"/>
-                <a:cs typeface="Avenir Roman" charset="0"/>
+                <a:latin typeface="Avenir" charset="0"/>
+                <a:ea typeface="Avenir" charset="0"/>
+                <a:cs typeface="Avenir" charset="0"/>
                 <a:sym typeface="Avenir Roman" charset="0"/>
               </a:rPr>
               <a:t>diseñamos</a:t>
@@ -6272,9 +5659,9 @@
                   <a:srgbClr val="000000"/>
                 </a:solidFill>
                 <a:effectLst/>
-                <a:latin typeface="Avenir Roman" charset="0"/>
-                <a:ea typeface="Avenir Roman" charset="0"/>
-                <a:cs typeface="Avenir Roman" charset="0"/>
+                <a:latin typeface="Avenir" charset="0"/>
+                <a:ea typeface="Avenir" charset="0"/>
+                <a:cs typeface="Avenir" charset="0"/>
                 <a:sym typeface="Avenir Roman" charset="0"/>
               </a:rPr>
               <a:t> un </a:t>
@@ -6285,9 +5672,9 @@
                   <a:srgbClr val="000000"/>
                 </a:solidFill>
                 <a:effectLst/>
-                <a:latin typeface="Avenir Roman" charset="0"/>
-                <a:ea typeface="Avenir Roman" charset="0"/>
-                <a:cs typeface="Avenir Roman" charset="0"/>
+                <a:latin typeface="Avenir" charset="0"/>
+                <a:ea typeface="Avenir" charset="0"/>
+                <a:cs typeface="Avenir" charset="0"/>
                 <a:sym typeface="Avenir Roman" charset="0"/>
               </a:rPr>
               <a:t>experimento</a:t>
@@ -6298,9 +5685,9 @@
                   <a:srgbClr val="000000"/>
                 </a:solidFill>
                 <a:effectLst/>
-                <a:latin typeface="Avenir Roman" charset="0"/>
-                <a:ea typeface="Avenir Roman" charset="0"/>
-                <a:cs typeface="Avenir Roman" charset="0"/>
+                <a:latin typeface="Avenir" charset="0"/>
+                <a:ea typeface="Avenir" charset="0"/>
+                <a:cs typeface="Avenir" charset="0"/>
                 <a:sym typeface="Avenir Roman" charset="0"/>
               </a:rPr>
               <a:t> de </a:t>
@@ -6311,9 +5698,9 @@
                   <a:srgbClr val="000000"/>
                 </a:solidFill>
                 <a:effectLst/>
-                <a:latin typeface="Avenir Roman" charset="0"/>
-                <a:ea typeface="Avenir Roman" charset="0"/>
-                <a:cs typeface="Avenir Roman" charset="0"/>
+                <a:latin typeface="Avenir" charset="0"/>
+                <a:ea typeface="Avenir" charset="0"/>
+                <a:cs typeface="Avenir" charset="0"/>
                 <a:sym typeface="Avenir Roman" charset="0"/>
               </a:rPr>
               <a:t>backtesting</a:t>
@@ -6324,9 +5711,9 @@
                   <a:srgbClr val="000000"/>
                 </a:solidFill>
                 <a:effectLst/>
-                <a:latin typeface="Avenir Roman" charset="0"/>
-                <a:ea typeface="Avenir Roman" charset="0"/>
-                <a:cs typeface="Avenir Roman" charset="0"/>
+                <a:latin typeface="Avenir" charset="0"/>
+                <a:ea typeface="Avenir" charset="0"/>
+                <a:cs typeface="Avenir" charset="0"/>
                 <a:sym typeface="Avenir Roman" charset="0"/>
               </a:rPr>
               <a:t> de 90 días: </a:t>
@@ -6337,9 +5724,9 @@
                   <a:srgbClr val="000000"/>
                 </a:solidFill>
                 <a:effectLst/>
-                <a:latin typeface="Avenir Roman" charset="0"/>
-                <a:ea typeface="Avenir Roman" charset="0"/>
-                <a:cs typeface="Avenir Roman" charset="0"/>
+                <a:latin typeface="Avenir" charset="0"/>
+                <a:ea typeface="Avenir" charset="0"/>
+                <a:cs typeface="Avenir" charset="0"/>
                 <a:sym typeface="Avenir Roman" charset="0"/>
               </a:rPr>
               <a:t>inyectamos</a:t>
@@ -6350,9 +5737,9 @@
                   <a:srgbClr val="000000"/>
                 </a:solidFill>
                 <a:effectLst/>
-                <a:latin typeface="Avenir Roman" charset="0"/>
-                <a:ea typeface="Avenir Roman" charset="0"/>
-                <a:cs typeface="Avenir Roman" charset="0"/>
+                <a:latin typeface="Avenir" charset="0"/>
+                <a:ea typeface="Avenir" charset="0"/>
+                <a:cs typeface="Avenir" charset="0"/>
                 <a:sym typeface="Avenir Roman" charset="0"/>
               </a:rPr>
               <a:t> </a:t>
@@ -6363,9 +5750,9 @@
                   <a:srgbClr val="000000"/>
                 </a:solidFill>
                 <a:effectLst/>
-                <a:latin typeface="Avenir Roman" charset="0"/>
-                <a:ea typeface="Avenir Roman" charset="0"/>
-                <a:cs typeface="Avenir Roman" charset="0"/>
+                <a:latin typeface="Avenir" charset="0"/>
+                <a:ea typeface="Avenir" charset="0"/>
+                <a:cs typeface="Avenir" charset="0"/>
                 <a:sym typeface="Avenir Roman" charset="0"/>
               </a:rPr>
               <a:t>los</a:t>
@@ -6376,9 +5763,9 @@
                   <a:srgbClr val="000000"/>
                 </a:solidFill>
                 <a:effectLst/>
-                <a:latin typeface="Avenir Roman" charset="0"/>
-                <a:ea typeface="Avenir Roman" charset="0"/>
-                <a:cs typeface="Avenir Roman" charset="0"/>
+                <a:latin typeface="Avenir" charset="0"/>
+                <a:ea typeface="Avenir" charset="0"/>
+                <a:cs typeface="Avenir" charset="0"/>
                 <a:sym typeface="Avenir Roman" charset="0"/>
               </a:rPr>
               <a:t> </a:t>
@@ -6389,9 +5776,9 @@
                   <a:srgbClr val="000000"/>
                 </a:solidFill>
                 <a:effectLst/>
-                <a:latin typeface="Avenir Roman" charset="0"/>
-                <a:ea typeface="Avenir Roman" charset="0"/>
-                <a:cs typeface="Avenir Roman" charset="0"/>
+                <a:latin typeface="Avenir" charset="0"/>
+                <a:ea typeface="Avenir" charset="0"/>
+                <a:cs typeface="Avenir" charset="0"/>
                 <a:sym typeface="Avenir Roman" charset="0"/>
               </a:rPr>
               <a:t>datos</a:t>
@@ -6402,9 +5789,9 @@
                   <a:srgbClr val="000000"/>
                 </a:solidFill>
                 <a:effectLst/>
-                <a:latin typeface="Avenir Roman" charset="0"/>
-                <a:ea typeface="Avenir Roman" charset="0"/>
-                <a:cs typeface="Avenir Roman" charset="0"/>
+                <a:latin typeface="Avenir" charset="0"/>
+                <a:ea typeface="Avenir" charset="0"/>
+                <a:cs typeface="Avenir" charset="0"/>
                 <a:sym typeface="Avenir Roman" charset="0"/>
               </a:rPr>
               <a:t> </a:t>
@@ -6415,9 +5802,9 @@
                   <a:srgbClr val="000000"/>
                 </a:solidFill>
                 <a:effectLst/>
-                <a:latin typeface="Avenir Roman" charset="0"/>
-                <a:ea typeface="Avenir Roman" charset="0"/>
-                <a:cs typeface="Avenir Roman" charset="0"/>
+                <a:latin typeface="Avenir" charset="0"/>
+                <a:ea typeface="Avenir" charset="0"/>
+                <a:cs typeface="Avenir" charset="0"/>
                 <a:sym typeface="Avenir Roman" charset="0"/>
               </a:rPr>
               <a:t>históricos</a:t>
@@ -6428,9 +5815,9 @@
                   <a:srgbClr val="000000"/>
                 </a:solidFill>
                 <a:effectLst/>
-                <a:latin typeface="Avenir Roman" charset="0"/>
-                <a:ea typeface="Avenir Roman" charset="0"/>
-                <a:cs typeface="Avenir Roman" charset="0"/>
+                <a:latin typeface="Avenir" charset="0"/>
+                <a:ea typeface="Avenir" charset="0"/>
+                <a:cs typeface="Avenir" charset="0"/>
                 <a:sym typeface="Avenir Roman" charset="0"/>
               </a:rPr>
               <a:t> reales de la </a:t>
@@ -6441,9 +5828,9 @@
                   <a:srgbClr val="000000"/>
                 </a:solidFill>
                 <a:effectLst/>
-                <a:latin typeface="Avenir Roman" charset="0"/>
-                <a:ea typeface="Avenir Roman" charset="0"/>
-                <a:cs typeface="Avenir Roman" charset="0"/>
+                <a:latin typeface="Avenir" charset="0"/>
+                <a:ea typeface="Avenir" charset="0"/>
+                <a:cs typeface="Avenir" charset="0"/>
                 <a:sym typeface="Avenir Roman" charset="0"/>
               </a:rPr>
               <a:t>inflación</a:t>
@@ -6454,9 +5841,9 @@
                   <a:srgbClr val="000000"/>
                 </a:solidFill>
                 <a:effectLst/>
-                <a:latin typeface="Avenir Roman" charset="0"/>
-                <a:ea typeface="Avenir Roman" charset="0"/>
-                <a:cs typeface="Avenir Roman" charset="0"/>
+                <a:latin typeface="Avenir" charset="0"/>
+                <a:ea typeface="Avenir" charset="0"/>
+                <a:cs typeface="Avenir" charset="0"/>
                 <a:sym typeface="Avenir Roman" charset="0"/>
               </a:rPr>
               <a:t> de granos </a:t>
@@ -6467,9 +5854,9 @@
                   <a:srgbClr val="000000"/>
                 </a:solidFill>
                 <a:effectLst/>
-                <a:latin typeface="Avenir Roman" charset="0"/>
-                <a:ea typeface="Avenir Roman" charset="0"/>
-                <a:cs typeface="Avenir Roman" charset="0"/>
+                <a:latin typeface="Avenir" charset="0"/>
+                <a:ea typeface="Avenir" charset="0"/>
+                <a:cs typeface="Avenir" charset="0"/>
                 <a:sym typeface="Avenir Roman" charset="0"/>
               </a:rPr>
               <a:t>en</a:t>
@@ -6480,9 +5867,9 @@
                   <a:srgbClr val="000000"/>
                 </a:solidFill>
                 <a:effectLst/>
-                <a:latin typeface="Avenir Roman" charset="0"/>
-                <a:ea typeface="Avenir Roman" charset="0"/>
-                <a:cs typeface="Avenir Roman" charset="0"/>
+                <a:latin typeface="Avenir" charset="0"/>
+                <a:ea typeface="Avenir" charset="0"/>
+                <a:cs typeface="Avenir" charset="0"/>
                 <a:sym typeface="Avenir Roman" charset="0"/>
               </a:rPr>
               <a:t> México y </a:t>
@@ -6493,9 +5880,9 @@
                   <a:srgbClr val="000000"/>
                 </a:solidFill>
                 <a:effectLst/>
-                <a:latin typeface="Avenir Roman" charset="0"/>
-                <a:ea typeface="Avenir Roman" charset="0"/>
-                <a:cs typeface="Avenir Roman" charset="0"/>
+                <a:latin typeface="Avenir" charset="0"/>
+                <a:ea typeface="Avenir" charset="0"/>
+                <a:cs typeface="Avenir" charset="0"/>
                 <a:sym typeface="Avenir Roman" charset="0"/>
               </a:rPr>
               <a:t>simulamos</a:t>
@@ -6506,9 +5893,9 @@
                   <a:srgbClr val="000000"/>
                 </a:solidFill>
                 <a:effectLst/>
-                <a:latin typeface="Avenir Roman" charset="0"/>
-                <a:ea typeface="Avenir Roman" charset="0"/>
-                <a:cs typeface="Avenir Roman" charset="0"/>
+                <a:latin typeface="Avenir" charset="0"/>
+                <a:ea typeface="Avenir" charset="0"/>
+                <a:cs typeface="Avenir" charset="0"/>
                 <a:sym typeface="Avenir Roman" charset="0"/>
               </a:rPr>
               <a:t> </a:t>
@@ -6519,9 +5906,9 @@
                   <a:srgbClr val="000000"/>
                 </a:solidFill>
                 <a:effectLst/>
-                <a:latin typeface="Avenir Roman" charset="0"/>
-                <a:ea typeface="Avenir Roman" charset="0"/>
-                <a:cs typeface="Avenir Roman" charset="0"/>
+                <a:latin typeface="Avenir" charset="0"/>
+                <a:ea typeface="Avenir" charset="0"/>
+                <a:cs typeface="Avenir" charset="0"/>
                 <a:sym typeface="Avenir Roman" charset="0"/>
               </a:rPr>
               <a:t>cómo</a:t>
@@ -6532,9 +5919,9 @@
                   <a:srgbClr val="000000"/>
                 </a:solidFill>
                 <a:effectLst/>
-                <a:latin typeface="Avenir Roman" charset="0"/>
-                <a:ea typeface="Avenir Roman" charset="0"/>
-                <a:cs typeface="Avenir Roman" charset="0"/>
+                <a:latin typeface="Avenir" charset="0"/>
+                <a:ea typeface="Avenir" charset="0"/>
+                <a:cs typeface="Avenir" charset="0"/>
                 <a:sym typeface="Avenir Roman" charset="0"/>
               </a:rPr>
               <a:t> </a:t>
@@ -6545,9 +5932,9 @@
                   <a:srgbClr val="000000"/>
                 </a:solidFill>
                 <a:effectLst/>
-                <a:latin typeface="Avenir Roman" charset="0"/>
-                <a:ea typeface="Avenir Roman" charset="0"/>
-                <a:cs typeface="Avenir Roman" charset="0"/>
+                <a:latin typeface="Avenir" charset="0"/>
+                <a:ea typeface="Avenir" charset="0"/>
+                <a:cs typeface="Avenir" charset="0"/>
                 <a:sym typeface="Avenir Roman" charset="0"/>
               </a:rPr>
               <a:t>habría</a:t>
@@ -6558,9 +5945,9 @@
                   <a:srgbClr val="000000"/>
                 </a:solidFill>
                 <a:effectLst/>
-                <a:latin typeface="Avenir Roman" charset="0"/>
-                <a:ea typeface="Avenir Roman" charset="0"/>
-                <a:cs typeface="Avenir Roman" charset="0"/>
+                <a:latin typeface="Avenir" charset="0"/>
+                <a:ea typeface="Avenir" charset="0"/>
+                <a:cs typeface="Avenir" charset="0"/>
                 <a:sym typeface="Avenir Roman" charset="0"/>
               </a:rPr>
               <a:t> </a:t>
@@ -6571,9 +5958,9 @@
                   <a:srgbClr val="000000"/>
                 </a:solidFill>
                 <a:effectLst/>
-                <a:latin typeface="Avenir Roman" charset="0"/>
-                <a:ea typeface="Avenir Roman" charset="0"/>
-                <a:cs typeface="Avenir Roman" charset="0"/>
+                <a:latin typeface="Avenir" charset="0"/>
+                <a:ea typeface="Avenir" charset="0"/>
+                <a:cs typeface="Avenir" charset="0"/>
                 <a:sym typeface="Avenir Roman" charset="0"/>
               </a:rPr>
               <a:t>respondido</a:t>
@@ -6584,9 +5971,9 @@
                   <a:srgbClr val="000000"/>
                 </a:solidFill>
                 <a:effectLst/>
-                <a:latin typeface="Avenir Roman" charset="0"/>
-                <a:ea typeface="Avenir Roman" charset="0"/>
-                <a:cs typeface="Avenir Roman" charset="0"/>
+                <a:latin typeface="Avenir" charset="0"/>
+                <a:ea typeface="Avenir" charset="0"/>
+                <a:cs typeface="Avenir" charset="0"/>
                 <a:sym typeface="Avenir Roman" charset="0"/>
               </a:rPr>
               <a:t> Caporal AI versus un </a:t>
@@ -6597,9 +5984,9 @@
                   <a:srgbClr val="000000"/>
                 </a:solidFill>
                 <a:effectLst/>
-                <a:latin typeface="Avenir Roman" charset="0"/>
-                <a:ea typeface="Avenir Roman" charset="0"/>
-                <a:cs typeface="Avenir Roman" charset="0"/>
+                <a:latin typeface="Avenir" charset="0"/>
+                <a:ea typeface="Avenir" charset="0"/>
+                <a:cs typeface="Avenir" charset="0"/>
                 <a:sym typeface="Avenir Roman" charset="0"/>
               </a:rPr>
               <a:t>ganadero</a:t>
@@ -6610,9 +5997,9 @@
                   <a:srgbClr val="000000"/>
                 </a:solidFill>
                 <a:effectLst/>
-                <a:latin typeface="Avenir Roman" charset="0"/>
-                <a:ea typeface="Avenir Roman" charset="0"/>
-                <a:cs typeface="Avenir Roman" charset="0"/>
+                <a:latin typeface="Avenir" charset="0"/>
+                <a:ea typeface="Avenir" charset="0"/>
+                <a:cs typeface="Avenir" charset="0"/>
                 <a:sym typeface="Avenir Roman" charset="0"/>
               </a:rPr>
               <a:t> </a:t>
@@ -6623,9 +6010,9 @@
                   <a:srgbClr val="000000"/>
                 </a:solidFill>
                 <a:effectLst/>
-                <a:latin typeface="Avenir Roman" charset="0"/>
-                <a:ea typeface="Avenir Roman" charset="0"/>
-                <a:cs typeface="Avenir Roman" charset="0"/>
+                <a:latin typeface="Avenir" charset="0"/>
+                <a:ea typeface="Avenir" charset="0"/>
+                <a:cs typeface="Avenir" charset="0"/>
                 <a:sym typeface="Avenir Roman" charset="0"/>
               </a:rPr>
               <a:t>que</a:t>
@@ -6636,9 +6023,9 @@
                   <a:srgbClr val="000000"/>
                 </a:solidFill>
                 <a:effectLst/>
-                <a:latin typeface="Avenir Roman" charset="0"/>
-                <a:ea typeface="Avenir Roman" charset="0"/>
-                <a:cs typeface="Avenir Roman" charset="0"/>
+                <a:latin typeface="Avenir" charset="0"/>
+                <a:ea typeface="Avenir" charset="0"/>
+                <a:cs typeface="Avenir" charset="0"/>
                 <a:sym typeface="Avenir Roman" charset="0"/>
               </a:rPr>
               <a:t> </a:t>
@@ -6649,9 +6036,9 @@
                   <a:srgbClr val="000000"/>
                 </a:solidFill>
                 <a:effectLst/>
-                <a:latin typeface="Avenir Roman" charset="0"/>
-                <a:ea typeface="Avenir Roman" charset="0"/>
-                <a:cs typeface="Avenir Roman" charset="0"/>
+                <a:latin typeface="Avenir" charset="0"/>
+                <a:ea typeface="Avenir" charset="0"/>
+                <a:cs typeface="Avenir" charset="0"/>
                 <a:sym typeface="Avenir Roman" charset="0"/>
               </a:rPr>
               <a:t>sigue</a:t>
@@ -6662,9 +6049,9 @@
                   <a:srgbClr val="000000"/>
                 </a:solidFill>
                 <a:effectLst/>
-                <a:latin typeface="Avenir Roman" charset="0"/>
-                <a:ea typeface="Avenir Roman" charset="0"/>
-                <a:cs typeface="Avenir Roman" charset="0"/>
+                <a:latin typeface="Avenir" charset="0"/>
+                <a:ea typeface="Avenir" charset="0"/>
+                <a:cs typeface="Avenir" charset="0"/>
                 <a:sym typeface="Avenir Roman" charset="0"/>
               </a:rPr>
               <a:t> </a:t>
@@ -6675,9 +6062,9 @@
                   <a:srgbClr val="000000"/>
                 </a:solidFill>
                 <a:effectLst/>
-                <a:latin typeface="Avenir Roman" charset="0"/>
-                <a:ea typeface="Avenir Roman" charset="0"/>
-                <a:cs typeface="Avenir Roman" charset="0"/>
+                <a:latin typeface="Avenir" charset="0"/>
+                <a:ea typeface="Avenir" charset="0"/>
+                <a:cs typeface="Avenir" charset="0"/>
                 <a:sym typeface="Avenir Roman" charset="0"/>
               </a:rPr>
               <a:t>su</a:t>
@@ -6688,9 +6075,9 @@
                   <a:srgbClr val="000000"/>
                 </a:solidFill>
                 <a:effectLst/>
-                <a:latin typeface="Avenir Roman" charset="0"/>
-                <a:ea typeface="Avenir Roman" charset="0"/>
-                <a:cs typeface="Avenir Roman" charset="0"/>
+                <a:latin typeface="Avenir" charset="0"/>
+                <a:ea typeface="Avenir" charset="0"/>
+                <a:cs typeface="Avenir" charset="0"/>
                 <a:sym typeface="Avenir Roman" charset="0"/>
               </a:rPr>
               <a:t> </a:t>
@@ -6701,9 +6088,9 @@
                   <a:srgbClr val="000000"/>
                 </a:solidFill>
                 <a:effectLst/>
-                <a:latin typeface="Avenir Roman" charset="0"/>
-                <a:ea typeface="Avenir Roman" charset="0"/>
-                <a:cs typeface="Avenir Roman" charset="0"/>
+                <a:latin typeface="Avenir" charset="0"/>
+                <a:ea typeface="Avenir" charset="0"/>
+                <a:cs typeface="Avenir" charset="0"/>
                 <a:sym typeface="Avenir Roman" charset="0"/>
               </a:rPr>
               <a:t>práctica</a:t>
@@ -6714,9 +6101,9 @@
                   <a:srgbClr val="000000"/>
                 </a:solidFill>
                 <a:effectLst/>
-                <a:latin typeface="Avenir Roman" charset="0"/>
-                <a:ea typeface="Avenir Roman" charset="0"/>
-                <a:cs typeface="Avenir Roman" charset="0"/>
+                <a:latin typeface="Avenir" charset="0"/>
+                <a:ea typeface="Avenir" charset="0"/>
+                <a:cs typeface="Avenir" charset="0"/>
                 <a:sym typeface="Avenir Roman" charset="0"/>
               </a:rPr>
               <a:t> </a:t>
@@ -6727,9 +6114,9 @@
                   <a:srgbClr val="000000"/>
                 </a:solidFill>
                 <a:effectLst/>
-                <a:latin typeface="Avenir Roman" charset="0"/>
-                <a:ea typeface="Avenir Roman" charset="0"/>
-                <a:cs typeface="Avenir Roman" charset="0"/>
+                <a:latin typeface="Avenir" charset="0"/>
+                <a:ea typeface="Avenir" charset="0"/>
+                <a:cs typeface="Avenir" charset="0"/>
                 <a:sym typeface="Avenir Roman" charset="0"/>
               </a:rPr>
               <a:t>empírica</a:t>
@@ -6740,9 +6127,9 @@
                   <a:srgbClr val="000000"/>
                 </a:solidFill>
                 <a:effectLst/>
-                <a:latin typeface="Avenir Roman" charset="0"/>
-                <a:ea typeface="Avenir Roman" charset="0"/>
-                <a:cs typeface="Avenir Roman" charset="0"/>
+                <a:latin typeface="Avenir" charset="0"/>
+                <a:ea typeface="Avenir" charset="0"/>
+                <a:cs typeface="Avenir" charset="0"/>
                 <a:sym typeface="Avenir Roman" charset="0"/>
               </a:rPr>
               <a:t> </a:t>
@@ -6753,9 +6140,9 @@
                   <a:srgbClr val="000000"/>
                 </a:solidFill>
                 <a:effectLst/>
-                <a:latin typeface="Avenir Roman" charset="0"/>
-                <a:ea typeface="Avenir Roman" charset="0"/>
-                <a:cs typeface="Avenir Roman" charset="0"/>
+                <a:latin typeface="Avenir" charset="0"/>
+                <a:ea typeface="Avenir" charset="0"/>
+                <a:cs typeface="Avenir" charset="0"/>
                 <a:sym typeface="Avenir Roman" charset="0"/>
               </a:rPr>
               <a:t>tradicional</a:t>
@@ -6766,9 +6153,9 @@
                   <a:srgbClr val="000000"/>
                 </a:solidFill>
                 <a:effectLst/>
-                <a:latin typeface="Avenir Roman" charset="0"/>
-                <a:ea typeface="Avenir Roman" charset="0"/>
-                <a:cs typeface="Avenir Roman" charset="0"/>
+                <a:latin typeface="Avenir" charset="0"/>
+                <a:ea typeface="Avenir" charset="0"/>
+                <a:cs typeface="Avenir" charset="0"/>
                 <a:sym typeface="Avenir Roman" charset="0"/>
               </a:rPr>
               <a:t>."</a:t>
@@ -6779,9 +6166,9 @@
                   <a:srgbClr val="000000"/>
                 </a:solidFill>
                 <a:effectLst/>
-                <a:latin typeface="Avenir Roman" charset="0"/>
-                <a:ea typeface="Avenir Roman" charset="0"/>
-                <a:cs typeface="Avenir Roman" charset="0"/>
+                <a:latin typeface="Avenir" charset="0"/>
+                <a:ea typeface="Avenir" charset="0"/>
+                <a:cs typeface="Avenir" charset="0"/>
                 <a:sym typeface="Avenir Roman" charset="0"/>
               </a:rPr>
             </a:br>
@@ -6791,9 +6178,9 @@
                   <a:srgbClr val="000000"/>
                 </a:solidFill>
                 <a:effectLst/>
-                <a:latin typeface="Avenir Roman" charset="0"/>
-                <a:ea typeface="Avenir Roman" charset="0"/>
-                <a:cs typeface="Avenir Roman" charset="0"/>
+                <a:latin typeface="Avenir" charset="0"/>
+                <a:ea typeface="Avenir" charset="0"/>
+                <a:cs typeface="Avenir" charset="0"/>
                 <a:sym typeface="Avenir Roman" charset="0"/>
               </a:rPr>
             </a:br>
@@ -6803,9 +6190,9 @@
                   <a:srgbClr val="000000"/>
                 </a:solidFill>
                 <a:effectLst/>
-                <a:latin typeface="Avenir Roman" charset="0"/>
-                <a:ea typeface="Avenir Roman" charset="0"/>
-                <a:cs typeface="Avenir Roman" charset="0"/>
+                <a:latin typeface="Avenir" charset="0"/>
+                <a:ea typeface="Avenir" charset="0"/>
+                <a:cs typeface="Avenir" charset="0"/>
                 <a:sym typeface="Avenir Roman" charset="0"/>
               </a:rPr>
               <a:t>[P2] "Los </a:t>
@@ -6816,9 +6203,9 @@
                   <a:srgbClr val="000000"/>
                 </a:solidFill>
                 <a:effectLst/>
-                <a:latin typeface="Avenir Roman" charset="0"/>
-                <a:ea typeface="Avenir Roman" charset="0"/>
-                <a:cs typeface="Avenir Roman" charset="0"/>
+                <a:latin typeface="Avenir" charset="0"/>
+                <a:ea typeface="Avenir" charset="0"/>
+                <a:cs typeface="Avenir" charset="0"/>
                 <a:sym typeface="Avenir Roman" charset="0"/>
               </a:rPr>
               <a:t>tres</a:t>
@@ -6829,9 +6216,9 @@
                   <a:srgbClr val="000000"/>
                 </a:solidFill>
                 <a:effectLst/>
-                <a:latin typeface="Avenir Roman" charset="0"/>
-                <a:ea typeface="Avenir Roman" charset="0"/>
-                <a:cs typeface="Avenir Roman" charset="0"/>
+                <a:latin typeface="Avenir" charset="0"/>
+                <a:ea typeface="Avenir" charset="0"/>
+                <a:cs typeface="Avenir" charset="0"/>
                 <a:sym typeface="Avenir Roman" charset="0"/>
               </a:rPr>
               <a:t> KPIs </a:t>
@@ -6842,9 +6229,9 @@
                   <a:srgbClr val="000000"/>
                 </a:solidFill>
                 <a:effectLst/>
-                <a:latin typeface="Avenir Roman" charset="0"/>
-                <a:ea typeface="Avenir Roman" charset="0"/>
-                <a:cs typeface="Avenir Roman" charset="0"/>
+                <a:latin typeface="Avenir" charset="0"/>
+                <a:ea typeface="Avenir" charset="0"/>
+                <a:cs typeface="Avenir" charset="0"/>
                 <a:sym typeface="Avenir Roman" charset="0"/>
               </a:rPr>
               <a:t>críticos</a:t>
@@ -6855,9 +6242,9 @@
                   <a:srgbClr val="000000"/>
                 </a:solidFill>
                 <a:effectLst/>
-                <a:latin typeface="Avenir Roman" charset="0"/>
-                <a:ea typeface="Avenir Roman" charset="0"/>
-                <a:cs typeface="Avenir Roman" charset="0"/>
+                <a:latin typeface="Avenir" charset="0"/>
+                <a:ea typeface="Avenir" charset="0"/>
+                <a:cs typeface="Avenir" charset="0"/>
                 <a:sym typeface="Avenir Roman" charset="0"/>
               </a:rPr>
               <a:t> </a:t>
@@ -6868,9 +6255,9 @@
                   <a:srgbClr val="000000"/>
                 </a:solidFill>
                 <a:effectLst/>
-                <a:latin typeface="Avenir Roman" charset="0"/>
-                <a:ea typeface="Avenir Roman" charset="0"/>
-                <a:cs typeface="Avenir Roman" charset="0"/>
+                <a:latin typeface="Avenir" charset="0"/>
+                <a:ea typeface="Avenir" charset="0"/>
+                <a:cs typeface="Avenir" charset="0"/>
                 <a:sym typeface="Avenir Roman" charset="0"/>
               </a:rPr>
               <a:t>que</a:t>
@@ -6881,9 +6268,9 @@
                   <a:srgbClr val="000000"/>
                 </a:solidFill>
                 <a:effectLst/>
-                <a:latin typeface="Avenir Roman" charset="0"/>
-                <a:ea typeface="Avenir Roman" charset="0"/>
-                <a:cs typeface="Avenir Roman" charset="0"/>
+                <a:latin typeface="Avenir" charset="0"/>
+                <a:ea typeface="Avenir" charset="0"/>
+                <a:cs typeface="Avenir" charset="0"/>
                 <a:sym typeface="Avenir Roman" charset="0"/>
               </a:rPr>
               <a:t> </a:t>
@@ -6894,9 +6281,9 @@
                   <a:srgbClr val="000000"/>
                 </a:solidFill>
                 <a:effectLst/>
-                <a:latin typeface="Avenir Roman" charset="0"/>
-                <a:ea typeface="Avenir Roman" charset="0"/>
-                <a:cs typeface="Avenir Roman" charset="0"/>
+                <a:latin typeface="Avenir" charset="0"/>
+                <a:ea typeface="Avenir" charset="0"/>
+                <a:cs typeface="Avenir" charset="0"/>
                 <a:sym typeface="Avenir Roman" charset="0"/>
               </a:rPr>
               <a:t>ven</a:t>
@@ -6907,9 +6294,9 @@
                   <a:srgbClr val="000000"/>
                 </a:solidFill>
                 <a:effectLst/>
-                <a:latin typeface="Avenir Roman" charset="0"/>
-                <a:ea typeface="Avenir Roman" charset="0"/>
-                <a:cs typeface="Avenir Roman" charset="0"/>
+                <a:latin typeface="Avenir" charset="0"/>
+                <a:ea typeface="Avenir" charset="0"/>
+                <a:cs typeface="Avenir" charset="0"/>
                 <a:sym typeface="Avenir Roman" charset="0"/>
               </a:rPr>
               <a:t> </a:t>
@@ -6920,9 +6307,9 @@
                   <a:srgbClr val="000000"/>
                 </a:solidFill>
                 <a:effectLst/>
-                <a:latin typeface="Avenir Roman" charset="0"/>
-                <a:ea typeface="Avenir Roman" charset="0"/>
-                <a:cs typeface="Avenir Roman" charset="0"/>
+                <a:latin typeface="Avenir" charset="0"/>
+                <a:ea typeface="Avenir" charset="0"/>
+                <a:cs typeface="Avenir" charset="0"/>
                 <a:sym typeface="Avenir Roman" charset="0"/>
               </a:rPr>
               <a:t>en</a:t>
@@ -6933,9 +6320,9 @@
                   <a:srgbClr val="000000"/>
                 </a:solidFill>
                 <a:effectLst/>
-                <a:latin typeface="Avenir Roman" charset="0"/>
-                <a:ea typeface="Avenir Roman" charset="0"/>
-                <a:cs typeface="Avenir Roman" charset="0"/>
+                <a:latin typeface="Avenir" charset="0"/>
+                <a:ea typeface="Avenir" charset="0"/>
+                <a:cs typeface="Avenir" charset="0"/>
                 <a:sym typeface="Avenir Roman" charset="0"/>
               </a:rPr>
               <a:t> las </a:t>
@@ -6946,9 +6333,9 @@
                   <a:srgbClr val="000000"/>
                 </a:solidFill>
                 <a:effectLst/>
-                <a:latin typeface="Avenir Roman" charset="0"/>
-                <a:ea typeface="Avenir Roman" charset="0"/>
-                <a:cs typeface="Avenir Roman" charset="0"/>
+                <a:latin typeface="Avenir" charset="0"/>
+                <a:ea typeface="Avenir" charset="0"/>
+                <a:cs typeface="Avenir" charset="0"/>
                 <a:sym typeface="Avenir Roman" charset="0"/>
               </a:rPr>
               <a:t>tarjetas</a:t>
@@ -6959,9 +6346,9 @@
                   <a:srgbClr val="000000"/>
                 </a:solidFill>
                 <a:effectLst/>
-                <a:latin typeface="Avenir Roman" charset="0"/>
-                <a:ea typeface="Avenir Roman" charset="0"/>
-                <a:cs typeface="Avenir Roman" charset="0"/>
+                <a:latin typeface="Avenir" charset="0"/>
+                <a:ea typeface="Avenir" charset="0"/>
+                <a:cs typeface="Avenir" charset="0"/>
                 <a:sym typeface="Avenir Roman" charset="0"/>
               </a:rPr>
               <a:t> </a:t>
@@ -6972,9 +6359,9 @@
                   <a:srgbClr val="000000"/>
                 </a:solidFill>
                 <a:effectLst/>
-                <a:latin typeface="Avenir Roman" charset="0"/>
-                <a:ea typeface="Avenir Roman" charset="0"/>
-                <a:cs typeface="Avenir Roman" charset="0"/>
+                <a:latin typeface="Avenir" charset="0"/>
+                <a:ea typeface="Avenir" charset="0"/>
+                <a:cs typeface="Avenir" charset="0"/>
                 <a:sym typeface="Avenir Roman" charset="0"/>
               </a:rPr>
               <a:t>superiores</a:t>
@@ -6985,9 +6372,9 @@
                   <a:srgbClr val="000000"/>
                 </a:solidFill>
                 <a:effectLst/>
-                <a:latin typeface="Avenir Roman" charset="0"/>
-                <a:ea typeface="Avenir Roman" charset="0"/>
-                <a:cs typeface="Avenir Roman" charset="0"/>
+                <a:latin typeface="Avenir" charset="0"/>
+                <a:ea typeface="Avenir" charset="0"/>
+                <a:cs typeface="Avenir" charset="0"/>
                 <a:sym typeface="Avenir Roman" charset="0"/>
               </a:rPr>
               <a:t> del </a:t>
@@ -6998,9 +6385,9 @@
                   <a:srgbClr val="000000"/>
                 </a:solidFill>
                 <a:effectLst/>
-                <a:latin typeface="Avenir Roman" charset="0"/>
-                <a:ea typeface="Avenir Roman" charset="0"/>
-                <a:cs typeface="Avenir Roman" charset="0"/>
+                <a:latin typeface="Avenir" charset="0"/>
+                <a:ea typeface="Avenir" charset="0"/>
+                <a:cs typeface="Avenir" charset="0"/>
                 <a:sym typeface="Avenir Roman" charset="0"/>
               </a:rPr>
               <a:t>gráfico</a:t>
@@ -7011,9 +6398,9 @@
                   <a:srgbClr val="000000"/>
                 </a:solidFill>
                 <a:effectLst/>
-                <a:latin typeface="Avenir Roman" charset="0"/>
-                <a:ea typeface="Avenir Roman" charset="0"/>
-                <a:cs typeface="Avenir Roman" charset="0"/>
+                <a:latin typeface="Avenir" charset="0"/>
+                <a:ea typeface="Avenir" charset="0"/>
+                <a:cs typeface="Avenir" charset="0"/>
                 <a:sym typeface="Avenir Roman" charset="0"/>
               </a:rPr>
               <a:t> </a:t>
@@ -7024,9 +6411,9 @@
                   <a:srgbClr val="000000"/>
                 </a:solidFill>
                 <a:effectLst/>
-                <a:latin typeface="Avenir Roman" charset="0"/>
-                <a:ea typeface="Avenir Roman" charset="0"/>
-                <a:cs typeface="Avenir Roman" charset="0"/>
+                <a:latin typeface="Avenir" charset="0"/>
+                <a:ea typeface="Avenir" charset="0"/>
+                <a:cs typeface="Avenir" charset="0"/>
                 <a:sym typeface="Avenir Roman" charset="0"/>
               </a:rPr>
               <a:t>resumen</a:t>
@@ -7037,9 +6424,9 @@
                   <a:srgbClr val="000000"/>
                 </a:solidFill>
                 <a:effectLst/>
-                <a:latin typeface="Avenir Roman" charset="0"/>
-                <a:ea typeface="Avenir Roman" charset="0"/>
-                <a:cs typeface="Avenir Roman" charset="0"/>
+                <a:latin typeface="Avenir" charset="0"/>
+                <a:ea typeface="Avenir" charset="0"/>
+                <a:cs typeface="Avenir" charset="0"/>
                 <a:sym typeface="Avenir Roman" charset="0"/>
               </a:rPr>
               <a:t> </a:t>
@@ -7050,9 +6437,9 @@
                   <a:srgbClr val="000000"/>
                 </a:solidFill>
                 <a:effectLst/>
-                <a:latin typeface="Avenir Roman" charset="0"/>
-                <a:ea typeface="Avenir Roman" charset="0"/>
-                <a:cs typeface="Avenir Roman" charset="0"/>
+                <a:latin typeface="Avenir" charset="0"/>
+                <a:ea typeface="Avenir" charset="0"/>
+                <a:cs typeface="Avenir" charset="0"/>
                 <a:sym typeface="Avenir Roman" charset="0"/>
               </a:rPr>
               <a:t>el</a:t>
@@ -7063,9 +6450,9 @@
                   <a:srgbClr val="000000"/>
                 </a:solidFill>
                 <a:effectLst/>
-                <a:latin typeface="Avenir Roman" charset="0"/>
-                <a:ea typeface="Avenir Roman" charset="0"/>
-                <a:cs typeface="Avenir Roman" charset="0"/>
+                <a:latin typeface="Avenir" charset="0"/>
+                <a:ea typeface="Avenir" charset="0"/>
+                <a:cs typeface="Avenir" charset="0"/>
                 <a:sym typeface="Avenir Roman" charset="0"/>
               </a:rPr>
               <a:t> </a:t>
@@ -7076,9 +6463,9 @@
                   <a:srgbClr val="000000"/>
                 </a:solidFill>
                 <a:effectLst/>
-                <a:latin typeface="Avenir Roman" charset="0"/>
-                <a:ea typeface="Avenir Roman" charset="0"/>
-                <a:cs typeface="Avenir Roman" charset="0"/>
+                <a:latin typeface="Avenir" charset="0"/>
+                <a:ea typeface="Avenir" charset="0"/>
+                <a:cs typeface="Avenir" charset="0"/>
                 <a:sym typeface="Avenir Roman" charset="0"/>
               </a:rPr>
               <a:t>resultado</a:t>
@@ -7089,9 +6476,9 @@
                   <a:srgbClr val="000000"/>
                 </a:solidFill>
                 <a:effectLst/>
-                <a:latin typeface="Avenir Roman" charset="0"/>
-                <a:ea typeface="Avenir Roman" charset="0"/>
-                <a:cs typeface="Avenir Roman" charset="0"/>
+                <a:latin typeface="Avenir" charset="0"/>
+                <a:ea typeface="Avenir" charset="0"/>
+                <a:cs typeface="Avenir" charset="0"/>
                 <a:sym typeface="Avenir Roman" charset="0"/>
               </a:rPr>
               <a:t>. El primero: cero </a:t>
@@ -7102,9 +6489,9 @@
                   <a:srgbClr val="000000"/>
                 </a:solidFill>
                 <a:effectLst/>
-                <a:latin typeface="Avenir Roman" charset="0"/>
-                <a:ea typeface="Avenir Roman" charset="0"/>
-                <a:cs typeface="Avenir Roman" charset="0"/>
+                <a:latin typeface="Avenir" charset="0"/>
+                <a:ea typeface="Avenir" charset="0"/>
+                <a:cs typeface="Avenir" charset="0"/>
                 <a:sym typeface="Avenir Roman" charset="0"/>
               </a:rPr>
               <a:t>violaciones</a:t>
@@ -7115,9 +6502,9 @@
                   <a:srgbClr val="000000"/>
                 </a:solidFill>
                 <a:effectLst/>
-                <a:latin typeface="Avenir Roman" charset="0"/>
-                <a:ea typeface="Avenir Roman" charset="0"/>
-                <a:cs typeface="Avenir Roman" charset="0"/>
+                <a:latin typeface="Avenir" charset="0"/>
+                <a:ea typeface="Avenir" charset="0"/>
+                <a:cs typeface="Avenir" charset="0"/>
                 <a:sym typeface="Avenir Roman" charset="0"/>
               </a:rPr>
               <a:t> a las </a:t>
@@ -7128,9 +6515,9 @@
                   <a:srgbClr val="000000"/>
                 </a:solidFill>
                 <a:effectLst/>
-                <a:latin typeface="Avenir Roman" charset="0"/>
-                <a:ea typeface="Avenir Roman" charset="0"/>
-                <a:cs typeface="Avenir Roman" charset="0"/>
+                <a:latin typeface="Avenir" charset="0"/>
+                <a:ea typeface="Avenir" charset="0"/>
+                <a:cs typeface="Avenir" charset="0"/>
                 <a:sym typeface="Avenir Roman" charset="0"/>
               </a:rPr>
               <a:t>restricciones</a:t>
@@ -7141,9 +6528,9 @@
                   <a:srgbClr val="000000"/>
                 </a:solidFill>
                 <a:effectLst/>
-                <a:latin typeface="Avenir Roman" charset="0"/>
-                <a:ea typeface="Avenir Roman" charset="0"/>
-                <a:cs typeface="Avenir Roman" charset="0"/>
+                <a:latin typeface="Avenir" charset="0"/>
+                <a:ea typeface="Avenir" charset="0"/>
+                <a:cs typeface="Avenir" charset="0"/>
                 <a:sym typeface="Avenir Roman" charset="0"/>
               </a:rPr>
               <a:t> </a:t>
@@ -7154,9 +6541,9 @@
                   <a:srgbClr val="000000"/>
                 </a:solidFill>
                 <a:effectLst/>
-                <a:latin typeface="Avenir Roman" charset="0"/>
-                <a:ea typeface="Avenir Roman" charset="0"/>
-                <a:cs typeface="Avenir Roman" charset="0"/>
+                <a:latin typeface="Avenir" charset="0"/>
+                <a:ea typeface="Avenir" charset="0"/>
+                <a:cs typeface="Avenir" charset="0"/>
                 <a:sym typeface="Avenir Roman" charset="0"/>
               </a:rPr>
               <a:t>nutricionales</a:t>
@@ -7167,9 +6554,9 @@
                   <a:srgbClr val="000000"/>
                 </a:solidFill>
                 <a:effectLst/>
-                <a:latin typeface="Avenir Roman" charset="0"/>
-                <a:ea typeface="Avenir Roman" charset="0"/>
-                <a:cs typeface="Avenir Roman" charset="0"/>
+                <a:latin typeface="Avenir" charset="0"/>
+                <a:ea typeface="Avenir" charset="0"/>
+                <a:cs typeface="Avenir" charset="0"/>
                 <a:sym typeface="Avenir Roman" charset="0"/>
               </a:rPr>
               <a:t> del NRC </a:t>
@@ -7180,9 +6567,9 @@
                   <a:srgbClr val="000000"/>
                 </a:solidFill>
                 <a:effectLst/>
-                <a:latin typeface="Avenir Roman" charset="0"/>
-                <a:ea typeface="Avenir Roman" charset="0"/>
-                <a:cs typeface="Avenir Roman" charset="0"/>
+                <a:latin typeface="Avenir" charset="0"/>
+                <a:ea typeface="Avenir" charset="0"/>
+                <a:cs typeface="Avenir" charset="0"/>
                 <a:sym typeface="Avenir Roman" charset="0"/>
               </a:rPr>
               <a:t>en</a:t>
@@ -7193,9 +6580,9 @@
                   <a:srgbClr val="000000"/>
                 </a:solidFill>
                 <a:effectLst/>
-                <a:latin typeface="Avenir Roman" charset="0"/>
-                <a:ea typeface="Avenir Roman" charset="0"/>
-                <a:cs typeface="Avenir Roman" charset="0"/>
+                <a:latin typeface="Avenir" charset="0"/>
+                <a:ea typeface="Avenir" charset="0"/>
+                <a:cs typeface="Avenir" charset="0"/>
                 <a:sym typeface="Avenir Roman" charset="0"/>
               </a:rPr>
               <a:t> </a:t>
@@ -7206,9 +6593,9 @@
                   <a:srgbClr val="000000"/>
                 </a:solidFill>
                 <a:effectLst/>
-                <a:latin typeface="Avenir Roman" charset="0"/>
-                <a:ea typeface="Avenir Roman" charset="0"/>
-                <a:cs typeface="Avenir Roman" charset="0"/>
+                <a:latin typeface="Avenir" charset="0"/>
+                <a:ea typeface="Avenir" charset="0"/>
+                <a:cs typeface="Avenir" charset="0"/>
                 <a:sym typeface="Avenir Roman" charset="0"/>
               </a:rPr>
               <a:t>todos</a:t>
@@ -7219,9 +6606,9 @@
                   <a:srgbClr val="000000"/>
                 </a:solidFill>
                 <a:effectLst/>
-                <a:latin typeface="Avenir Roman" charset="0"/>
-                <a:ea typeface="Avenir Roman" charset="0"/>
-                <a:cs typeface="Avenir Roman" charset="0"/>
+                <a:latin typeface="Avenir" charset="0"/>
+                <a:ea typeface="Avenir" charset="0"/>
+                <a:cs typeface="Avenir" charset="0"/>
                 <a:sym typeface="Avenir Roman" charset="0"/>
               </a:rPr>
               <a:t> </a:t>
@@ -7232,9 +6619,9 @@
                   <a:srgbClr val="000000"/>
                 </a:solidFill>
                 <a:effectLst/>
-                <a:latin typeface="Avenir Roman" charset="0"/>
-                <a:ea typeface="Avenir Roman" charset="0"/>
-                <a:cs typeface="Avenir Roman" charset="0"/>
+                <a:latin typeface="Avenir" charset="0"/>
+                <a:ea typeface="Avenir" charset="0"/>
+                <a:cs typeface="Avenir" charset="0"/>
                 <a:sym typeface="Avenir Roman" charset="0"/>
               </a:rPr>
               <a:t>los</a:t>
@@ -7245,9 +6632,9 @@
                   <a:srgbClr val="000000"/>
                 </a:solidFill>
                 <a:effectLst/>
-                <a:latin typeface="Avenir Roman" charset="0"/>
-                <a:ea typeface="Avenir Roman" charset="0"/>
-                <a:cs typeface="Avenir Roman" charset="0"/>
+                <a:latin typeface="Avenir" charset="0"/>
+                <a:ea typeface="Avenir" charset="0"/>
+                <a:cs typeface="Avenir" charset="0"/>
                 <a:sym typeface="Avenir Roman" charset="0"/>
               </a:rPr>
               <a:t> </a:t>
@@ -7258,9 +6645,9 @@
                   <a:srgbClr val="000000"/>
                 </a:solidFill>
                 <a:effectLst/>
-                <a:latin typeface="Avenir Roman" charset="0"/>
-                <a:ea typeface="Avenir Roman" charset="0"/>
-                <a:cs typeface="Avenir Roman" charset="0"/>
+                <a:latin typeface="Avenir" charset="0"/>
+                <a:ea typeface="Avenir" charset="0"/>
+                <a:cs typeface="Avenir" charset="0"/>
                 <a:sym typeface="Avenir Roman" charset="0"/>
               </a:rPr>
               <a:t>escenarios</a:t>
@@ -7271,9 +6658,9 @@
                   <a:srgbClr val="000000"/>
                 </a:solidFill>
                 <a:effectLst/>
-                <a:latin typeface="Avenir Roman" charset="0"/>
-                <a:ea typeface="Avenir Roman" charset="0"/>
-                <a:cs typeface="Avenir Roman" charset="0"/>
+                <a:latin typeface="Avenir" charset="0"/>
+                <a:ea typeface="Avenir" charset="0"/>
+                <a:cs typeface="Avenir" charset="0"/>
                 <a:sym typeface="Avenir Roman" charset="0"/>
               </a:rPr>
               <a:t> — la </a:t>
@@ -7284,9 +6671,9 @@
                   <a:srgbClr val="000000"/>
                 </a:solidFill>
                 <a:effectLst/>
-                <a:latin typeface="Avenir Roman" charset="0"/>
-                <a:ea typeface="Avenir Roman" charset="0"/>
-                <a:cs typeface="Avenir Roman" charset="0"/>
+                <a:latin typeface="Avenir" charset="0"/>
+                <a:ea typeface="Avenir" charset="0"/>
+                <a:cs typeface="Avenir" charset="0"/>
                 <a:sym typeface="Avenir Roman" charset="0"/>
               </a:rPr>
               <a:t>solución</a:t>
@@ -7297,9 +6684,9 @@
                   <a:srgbClr val="000000"/>
                 </a:solidFill>
                 <a:effectLst/>
-                <a:latin typeface="Avenir Roman" charset="0"/>
-                <a:ea typeface="Avenir Roman" charset="0"/>
-                <a:cs typeface="Avenir Roman" charset="0"/>
+                <a:latin typeface="Avenir" charset="0"/>
+                <a:ea typeface="Avenir" charset="0"/>
+                <a:cs typeface="Avenir" charset="0"/>
                 <a:sym typeface="Avenir Roman" charset="0"/>
               </a:rPr>
               <a:t> es 100% </a:t>
@@ -7310,9 +6697,9 @@
                   <a:srgbClr val="000000"/>
                 </a:solidFill>
                 <a:effectLst/>
-                <a:latin typeface="Avenir Roman" charset="0"/>
-                <a:ea typeface="Avenir Roman" charset="0"/>
-                <a:cs typeface="Avenir Roman" charset="0"/>
+                <a:latin typeface="Avenir" charset="0"/>
+                <a:ea typeface="Avenir" charset="0"/>
+                <a:cs typeface="Avenir" charset="0"/>
                 <a:sym typeface="Avenir Roman" charset="0"/>
               </a:rPr>
               <a:t>biológicamente</a:t>
@@ -7323,9 +6710,9 @@
                   <a:srgbClr val="000000"/>
                 </a:solidFill>
                 <a:effectLst/>
-                <a:latin typeface="Avenir Roman" charset="0"/>
-                <a:ea typeface="Avenir Roman" charset="0"/>
-                <a:cs typeface="Avenir Roman" charset="0"/>
+                <a:latin typeface="Avenir" charset="0"/>
+                <a:ea typeface="Avenir" charset="0"/>
+                <a:cs typeface="Avenir" charset="0"/>
                 <a:sym typeface="Avenir Roman" charset="0"/>
               </a:rPr>
               <a:t> </a:t>
@@ -7336,9 +6723,9 @@
                   <a:srgbClr val="000000"/>
                 </a:solidFill>
                 <a:effectLst/>
-                <a:latin typeface="Avenir Roman" charset="0"/>
-                <a:ea typeface="Avenir Roman" charset="0"/>
-                <a:cs typeface="Avenir Roman" charset="0"/>
+                <a:latin typeface="Avenir" charset="0"/>
+                <a:ea typeface="Avenir" charset="0"/>
+                <a:cs typeface="Avenir" charset="0"/>
                 <a:sym typeface="Avenir Roman" charset="0"/>
               </a:rPr>
               <a:t>segura</a:t>
@@ -7349,9 +6736,9 @@
                   <a:srgbClr val="000000"/>
                 </a:solidFill>
                 <a:effectLst/>
-                <a:latin typeface="Avenir Roman" charset="0"/>
-                <a:ea typeface="Avenir Roman" charset="0"/>
-                <a:cs typeface="Avenir Roman" charset="0"/>
+                <a:latin typeface="Avenir" charset="0"/>
+                <a:ea typeface="Avenir" charset="0"/>
+                <a:cs typeface="Avenir" charset="0"/>
                 <a:sym typeface="Avenir Roman" charset="0"/>
               </a:rPr>
               <a:t>. El </a:t>
@@ -7362,9 +6749,9 @@
                   <a:srgbClr val="000000"/>
                 </a:solidFill>
                 <a:effectLst/>
-                <a:latin typeface="Avenir Roman" charset="0"/>
-                <a:ea typeface="Avenir Roman" charset="0"/>
-                <a:cs typeface="Avenir Roman" charset="0"/>
+                <a:latin typeface="Avenir" charset="0"/>
+                <a:ea typeface="Avenir" charset="0"/>
+                <a:cs typeface="Avenir" charset="0"/>
                 <a:sym typeface="Avenir Roman" charset="0"/>
               </a:rPr>
               <a:t>segundo</a:t>
@@ -7375,9 +6762,9 @@
                   <a:srgbClr val="000000"/>
                 </a:solidFill>
                 <a:effectLst/>
-                <a:latin typeface="Avenir Roman" charset="0"/>
-                <a:ea typeface="Avenir Roman" charset="0"/>
-                <a:cs typeface="Avenir Roman" charset="0"/>
+                <a:latin typeface="Avenir" charset="0"/>
+                <a:ea typeface="Avenir" charset="0"/>
+                <a:cs typeface="Avenir" charset="0"/>
                 <a:sym typeface="Avenir Roman" charset="0"/>
               </a:rPr>
               <a:t>: </a:t>
@@ -7388,9 +6775,9 @@
                   <a:srgbClr val="000000"/>
                 </a:solidFill>
                 <a:effectLst/>
-                <a:latin typeface="Avenir Roman" charset="0"/>
-                <a:ea typeface="Avenir Roman" charset="0"/>
-                <a:cs typeface="Avenir Roman" charset="0"/>
+                <a:latin typeface="Avenir" charset="0"/>
+                <a:ea typeface="Avenir" charset="0"/>
+                <a:cs typeface="Avenir" charset="0"/>
                 <a:sym typeface="Avenir Roman" charset="0"/>
               </a:rPr>
               <a:t>más</a:t>
@@ -7401,9 +6788,9 @@
                   <a:srgbClr val="000000"/>
                 </a:solidFill>
                 <a:effectLst/>
-                <a:latin typeface="Avenir Roman" charset="0"/>
-                <a:ea typeface="Avenir Roman" charset="0"/>
-                <a:cs typeface="Avenir Roman" charset="0"/>
+                <a:latin typeface="Avenir" charset="0"/>
+                <a:ea typeface="Avenir" charset="0"/>
+                <a:cs typeface="Avenir" charset="0"/>
                 <a:sym typeface="Avenir Roman" charset="0"/>
               </a:rPr>
               <a:t> del 92% de las </a:t>
@@ -7414,9 +6801,9 @@
                   <a:srgbClr val="000000"/>
                 </a:solidFill>
                 <a:effectLst/>
-                <a:latin typeface="Avenir Roman" charset="0"/>
-                <a:ea typeface="Avenir Roman" charset="0"/>
-                <a:cs typeface="Avenir Roman" charset="0"/>
+                <a:latin typeface="Avenir" charset="0"/>
+                <a:ea typeface="Avenir" charset="0"/>
+                <a:cs typeface="Avenir" charset="0"/>
                 <a:sym typeface="Avenir Roman" charset="0"/>
               </a:rPr>
               <a:t>respuestas</a:t>
@@ -7427,9 +6814,9 @@
                   <a:srgbClr val="000000"/>
                 </a:solidFill>
                 <a:effectLst/>
-                <a:latin typeface="Avenir Roman" charset="0"/>
-                <a:ea typeface="Avenir Roman" charset="0"/>
-                <a:cs typeface="Avenir Roman" charset="0"/>
+                <a:latin typeface="Avenir" charset="0"/>
+                <a:ea typeface="Avenir" charset="0"/>
+                <a:cs typeface="Avenir" charset="0"/>
                 <a:sym typeface="Avenir Roman" charset="0"/>
               </a:rPr>
               <a:t> del chatbot </a:t>
@@ -7440,9 +6827,9 @@
                   <a:srgbClr val="000000"/>
                 </a:solidFill>
                 <a:effectLst/>
-                <a:latin typeface="Avenir Roman" charset="0"/>
-                <a:ea typeface="Avenir Roman" charset="0"/>
-                <a:cs typeface="Avenir Roman" charset="0"/>
+                <a:latin typeface="Avenir" charset="0"/>
+                <a:ea typeface="Avenir" charset="0"/>
+                <a:cs typeface="Avenir" charset="0"/>
                 <a:sym typeface="Avenir Roman" charset="0"/>
               </a:rPr>
               <a:t>incluyen</a:t>
@@ -7453,9 +6840,9 @@
                   <a:srgbClr val="000000"/>
                 </a:solidFill>
                 <a:effectLst/>
-                <a:latin typeface="Avenir Roman" charset="0"/>
-                <a:ea typeface="Avenir Roman" charset="0"/>
-                <a:cs typeface="Avenir Roman" charset="0"/>
+                <a:latin typeface="Avenir" charset="0"/>
+                <a:ea typeface="Avenir" charset="0"/>
+                <a:cs typeface="Avenir" charset="0"/>
                 <a:sym typeface="Avenir Roman" charset="0"/>
               </a:rPr>
               <a:t> </a:t>
@@ -7466,9 +6853,9 @@
                   <a:srgbClr val="000000"/>
                 </a:solidFill>
                 <a:effectLst/>
-                <a:latin typeface="Avenir Roman" charset="0"/>
-                <a:ea typeface="Avenir Roman" charset="0"/>
-                <a:cs typeface="Avenir Roman" charset="0"/>
+                <a:latin typeface="Avenir" charset="0"/>
+                <a:ea typeface="Avenir" charset="0"/>
+                <a:cs typeface="Avenir" charset="0"/>
                 <a:sym typeface="Avenir Roman" charset="0"/>
               </a:rPr>
               <a:t>citas</a:t>
@@ -7479,9 +6866,9 @@
                   <a:srgbClr val="000000"/>
                 </a:solidFill>
                 <a:effectLst/>
-                <a:latin typeface="Avenir Roman" charset="0"/>
-                <a:ea typeface="Avenir Roman" charset="0"/>
-                <a:cs typeface="Avenir Roman" charset="0"/>
+                <a:latin typeface="Avenir" charset="0"/>
+                <a:ea typeface="Avenir" charset="0"/>
+                <a:cs typeface="Avenir" charset="0"/>
                 <a:sym typeface="Avenir Roman" charset="0"/>
               </a:rPr>
               <a:t> </a:t>
@@ -7492,9 +6879,9 @@
                   <a:srgbClr val="000000"/>
                 </a:solidFill>
                 <a:effectLst/>
-                <a:latin typeface="Avenir Roman" charset="0"/>
-                <a:ea typeface="Avenir Roman" charset="0"/>
-                <a:cs typeface="Avenir Roman" charset="0"/>
+                <a:latin typeface="Avenir" charset="0"/>
+                <a:ea typeface="Avenir" charset="0"/>
+                <a:cs typeface="Avenir" charset="0"/>
                 <a:sym typeface="Avenir Roman" charset="0"/>
               </a:rPr>
               <a:t>verificables</a:t>
@@ -7505,9 +6892,9 @@
                   <a:srgbClr val="000000"/>
                 </a:solidFill>
                 <a:effectLst/>
-                <a:latin typeface="Avenir Roman" charset="0"/>
-                <a:ea typeface="Avenir Roman" charset="0"/>
-                <a:cs typeface="Avenir Roman" charset="0"/>
+                <a:latin typeface="Avenir" charset="0"/>
+                <a:ea typeface="Avenir" charset="0"/>
+                <a:cs typeface="Avenir" charset="0"/>
                 <a:sym typeface="Avenir Roman" charset="0"/>
               </a:rPr>
               <a:t> — </a:t>
@@ -7518,9 +6905,9 @@
                   <a:srgbClr val="000000"/>
                 </a:solidFill>
                 <a:effectLst/>
-                <a:latin typeface="Avenir Roman" charset="0"/>
-                <a:ea typeface="Avenir Roman" charset="0"/>
-                <a:cs typeface="Avenir Roman" charset="0"/>
+                <a:latin typeface="Avenir" charset="0"/>
+                <a:ea typeface="Avenir" charset="0"/>
+                <a:cs typeface="Avenir" charset="0"/>
                 <a:sym typeface="Avenir Roman" charset="0"/>
               </a:rPr>
               <a:t>el</a:t>
@@ -7531,9 +6918,9 @@
                   <a:srgbClr val="000000"/>
                 </a:solidFill>
                 <a:effectLst/>
-                <a:latin typeface="Avenir Roman" charset="0"/>
-                <a:ea typeface="Avenir Roman" charset="0"/>
-                <a:cs typeface="Avenir Roman" charset="0"/>
+                <a:latin typeface="Avenir" charset="0"/>
+                <a:ea typeface="Avenir" charset="0"/>
+                <a:cs typeface="Avenir" charset="0"/>
                 <a:sym typeface="Avenir Roman" charset="0"/>
               </a:rPr>
               <a:t> </a:t>
@@ -7544,9 +6931,9 @@
                   <a:srgbClr val="000000"/>
                 </a:solidFill>
                 <a:effectLst/>
-                <a:latin typeface="Avenir Roman" charset="0"/>
-                <a:ea typeface="Avenir Roman" charset="0"/>
-                <a:cs typeface="Avenir Roman" charset="0"/>
+                <a:latin typeface="Avenir" charset="0"/>
+                <a:ea typeface="Avenir" charset="0"/>
+                <a:cs typeface="Avenir" charset="0"/>
                 <a:sym typeface="Avenir Roman" charset="0"/>
               </a:rPr>
               <a:t>sistema</a:t>
@@ -7557,9 +6944,9 @@
                   <a:srgbClr val="000000"/>
                 </a:solidFill>
                 <a:effectLst/>
-                <a:latin typeface="Avenir Roman" charset="0"/>
-                <a:ea typeface="Avenir Roman" charset="0"/>
-                <a:cs typeface="Avenir Roman" charset="0"/>
+                <a:latin typeface="Avenir" charset="0"/>
+                <a:ea typeface="Avenir" charset="0"/>
+                <a:cs typeface="Avenir" charset="0"/>
                 <a:sym typeface="Avenir Roman" charset="0"/>
               </a:rPr>
               <a:t> </a:t>
@@ -7570,9 +6957,9 @@
                   <a:srgbClr val="000000"/>
                 </a:solidFill>
                 <a:effectLst/>
-                <a:latin typeface="Avenir Roman" charset="0"/>
-                <a:ea typeface="Avenir Roman" charset="0"/>
-                <a:cs typeface="Avenir Roman" charset="0"/>
+                <a:latin typeface="Avenir" charset="0"/>
+                <a:ea typeface="Avenir" charset="0"/>
+                <a:cs typeface="Avenir" charset="0"/>
                 <a:sym typeface="Avenir Roman" charset="0"/>
               </a:rPr>
               <a:t>nunca</a:t>
@@ -7583,9 +6970,9 @@
                   <a:srgbClr val="000000"/>
                 </a:solidFill>
                 <a:effectLst/>
-                <a:latin typeface="Avenir Roman" charset="0"/>
-                <a:ea typeface="Avenir Roman" charset="0"/>
-                <a:cs typeface="Avenir Roman" charset="0"/>
+                <a:latin typeface="Avenir" charset="0"/>
+                <a:ea typeface="Avenir" charset="0"/>
+                <a:cs typeface="Avenir" charset="0"/>
                 <a:sym typeface="Avenir Roman" charset="0"/>
               </a:rPr>
               <a:t> </a:t>
@@ -7596,9 +6983,9 @@
                   <a:srgbClr val="000000"/>
                 </a:solidFill>
                 <a:effectLst/>
-                <a:latin typeface="Avenir Roman" charset="0"/>
-                <a:ea typeface="Avenir Roman" charset="0"/>
-                <a:cs typeface="Avenir Roman" charset="0"/>
+                <a:latin typeface="Avenir" charset="0"/>
+                <a:ea typeface="Avenir" charset="0"/>
+                <a:cs typeface="Avenir" charset="0"/>
                 <a:sym typeface="Avenir Roman" charset="0"/>
               </a:rPr>
               <a:t>alucina</a:t>
@@ -7609,9 +6996,9 @@
                   <a:srgbClr val="000000"/>
                 </a:solidFill>
                 <a:effectLst/>
-                <a:latin typeface="Avenir Roman" charset="0"/>
-                <a:ea typeface="Avenir Roman" charset="0"/>
-                <a:cs typeface="Avenir Roman" charset="0"/>
+                <a:latin typeface="Avenir" charset="0"/>
+                <a:ea typeface="Avenir" charset="0"/>
+                <a:cs typeface="Avenir" charset="0"/>
                 <a:sym typeface="Avenir Roman" charset="0"/>
               </a:rPr>
               <a:t> </a:t>
@@ -7622,9 +7009,9 @@
                   <a:srgbClr val="000000"/>
                 </a:solidFill>
                 <a:effectLst/>
-                <a:latin typeface="Avenir Roman" charset="0"/>
-                <a:ea typeface="Avenir Roman" charset="0"/>
-                <a:cs typeface="Avenir Roman" charset="0"/>
+                <a:latin typeface="Avenir" charset="0"/>
+                <a:ea typeface="Avenir" charset="0"/>
+                <a:cs typeface="Avenir" charset="0"/>
                 <a:sym typeface="Avenir Roman" charset="0"/>
               </a:rPr>
               <a:t>una</a:t>
@@ -7635,9 +7022,9 @@
                   <a:srgbClr val="000000"/>
                 </a:solidFill>
                 <a:effectLst/>
-                <a:latin typeface="Avenir Roman" charset="0"/>
-                <a:ea typeface="Avenir Roman" charset="0"/>
-                <a:cs typeface="Avenir Roman" charset="0"/>
+                <a:latin typeface="Avenir" charset="0"/>
+                <a:ea typeface="Avenir" charset="0"/>
+                <a:cs typeface="Avenir" charset="0"/>
                 <a:sym typeface="Avenir Roman" charset="0"/>
               </a:rPr>
               <a:t> </a:t>
@@ -7648,9 +7035,9 @@
                   <a:srgbClr val="000000"/>
                 </a:solidFill>
                 <a:effectLst/>
-                <a:latin typeface="Avenir Roman" charset="0"/>
-                <a:ea typeface="Avenir Roman" charset="0"/>
-                <a:cs typeface="Avenir Roman" charset="0"/>
+                <a:latin typeface="Avenir" charset="0"/>
+                <a:ea typeface="Avenir" charset="0"/>
+                <a:cs typeface="Avenir" charset="0"/>
                 <a:sym typeface="Avenir Roman" charset="0"/>
               </a:rPr>
               <a:t>recomendación</a:t>
@@ -7661,9 +7048,9 @@
                   <a:srgbClr val="000000"/>
                 </a:solidFill>
                 <a:effectLst/>
-                <a:latin typeface="Avenir Roman" charset="0"/>
-                <a:ea typeface="Avenir Roman" charset="0"/>
-                <a:cs typeface="Avenir Roman" charset="0"/>
+                <a:latin typeface="Avenir" charset="0"/>
+                <a:ea typeface="Avenir" charset="0"/>
+                <a:cs typeface="Avenir" charset="0"/>
                 <a:sym typeface="Avenir Roman" charset="0"/>
               </a:rPr>
               <a:t>."</a:t>
@@ -7674,9 +7061,9 @@
                   <a:srgbClr val="000000"/>
                 </a:solidFill>
                 <a:effectLst/>
-                <a:latin typeface="Avenir Roman" charset="0"/>
-                <a:ea typeface="Avenir Roman" charset="0"/>
-                <a:cs typeface="Avenir Roman" charset="0"/>
+                <a:latin typeface="Avenir" charset="0"/>
+                <a:ea typeface="Avenir" charset="0"/>
+                <a:cs typeface="Avenir" charset="0"/>
                 <a:sym typeface="Avenir Roman" charset="0"/>
               </a:rPr>
             </a:br>
@@ -7686,9 +7073,9 @@
                   <a:srgbClr val="000000"/>
                 </a:solidFill>
                 <a:effectLst/>
-                <a:latin typeface="Avenir Roman" charset="0"/>
-                <a:ea typeface="Avenir Roman" charset="0"/>
-                <a:cs typeface="Avenir Roman" charset="0"/>
+                <a:latin typeface="Avenir" charset="0"/>
+                <a:ea typeface="Avenir" charset="0"/>
+                <a:cs typeface="Avenir" charset="0"/>
                 <a:sym typeface="Avenir Roman" charset="0"/>
               </a:rPr>
             </a:br>
@@ -7698,9 +7085,9 @@
                   <a:srgbClr val="000000"/>
                 </a:solidFill>
                 <a:effectLst/>
-                <a:latin typeface="Avenir Roman" charset="0"/>
-                <a:ea typeface="Avenir Roman" charset="0"/>
-                <a:cs typeface="Avenir Roman" charset="0"/>
+                <a:latin typeface="Avenir" charset="0"/>
+                <a:ea typeface="Avenir" charset="0"/>
+                <a:cs typeface="Avenir" charset="0"/>
                 <a:sym typeface="Avenir Roman" charset="0"/>
               </a:rPr>
               <a:t>[P3] "Y </a:t>
@@ -7711,9 +7098,9 @@
                   <a:srgbClr val="000000"/>
                 </a:solidFill>
                 <a:effectLst/>
-                <a:latin typeface="Avenir Roman" charset="0"/>
-                <a:ea typeface="Avenir Roman" charset="0"/>
-                <a:cs typeface="Avenir Roman" charset="0"/>
+                <a:latin typeface="Avenir" charset="0"/>
+                <a:ea typeface="Avenir" charset="0"/>
+                <a:cs typeface="Avenir" charset="0"/>
                 <a:sym typeface="Avenir Roman" charset="0"/>
               </a:rPr>
               <a:t>el</a:t>
@@ -7724,9 +7111,9 @@
                   <a:srgbClr val="000000"/>
                 </a:solidFill>
                 <a:effectLst/>
-                <a:latin typeface="Avenir Roman" charset="0"/>
-                <a:ea typeface="Avenir Roman" charset="0"/>
-                <a:cs typeface="Avenir Roman" charset="0"/>
+                <a:latin typeface="Avenir" charset="0"/>
+                <a:ea typeface="Avenir" charset="0"/>
+                <a:cs typeface="Avenir" charset="0"/>
                 <a:sym typeface="Avenir Roman" charset="0"/>
               </a:rPr>
               <a:t> </a:t>
@@ -7737,9 +7124,9 @@
                   <a:srgbClr val="000000"/>
                 </a:solidFill>
                 <a:effectLst/>
-                <a:latin typeface="Avenir Roman" charset="0"/>
-                <a:ea typeface="Avenir Roman" charset="0"/>
-                <a:cs typeface="Avenir Roman" charset="0"/>
+                <a:latin typeface="Avenir" charset="0"/>
+                <a:ea typeface="Avenir" charset="0"/>
+                <a:cs typeface="Avenir" charset="0"/>
                 <a:sym typeface="Avenir Roman" charset="0"/>
               </a:rPr>
               <a:t>más</a:t>
@@ -7750,9 +7137,9 @@
                   <a:srgbClr val="000000"/>
                 </a:solidFill>
                 <a:effectLst/>
-                <a:latin typeface="Avenir Roman" charset="0"/>
-                <a:ea typeface="Avenir Roman" charset="0"/>
-                <a:cs typeface="Avenir Roman" charset="0"/>
+                <a:latin typeface="Avenir" charset="0"/>
+                <a:ea typeface="Avenir" charset="0"/>
+                <a:cs typeface="Avenir" charset="0"/>
                 <a:sym typeface="Avenir Roman" charset="0"/>
               </a:rPr>
               <a:t> </a:t>
@@ -7763,9 +7150,9 @@
                   <a:srgbClr val="000000"/>
                 </a:solidFill>
                 <a:effectLst/>
-                <a:latin typeface="Avenir Roman" charset="0"/>
-                <a:ea typeface="Avenir Roman" charset="0"/>
-                <a:cs typeface="Avenir Roman" charset="0"/>
+                <a:latin typeface="Avenir" charset="0"/>
+                <a:ea typeface="Avenir" charset="0"/>
+                <a:cs typeface="Avenir" charset="0"/>
                 <a:sym typeface="Avenir Roman" charset="0"/>
               </a:rPr>
               <a:t>importante</a:t>
@@ -7776,9 +7163,9 @@
                   <a:srgbClr val="000000"/>
                 </a:solidFill>
                 <a:effectLst/>
-                <a:latin typeface="Avenir Roman" charset="0"/>
-                <a:ea typeface="Avenir Roman" charset="0"/>
-                <a:cs typeface="Avenir Roman" charset="0"/>
+                <a:latin typeface="Avenir" charset="0"/>
+                <a:ea typeface="Avenir" charset="0"/>
+                <a:cs typeface="Avenir" charset="0"/>
                 <a:sym typeface="Avenir Roman" charset="0"/>
               </a:rPr>
               <a:t> para </a:t>
@@ -7789,9 +7176,9 @@
                   <a:srgbClr val="000000"/>
                 </a:solidFill>
                 <a:effectLst/>
-                <a:latin typeface="Avenir Roman" charset="0"/>
-                <a:ea typeface="Avenir Roman" charset="0"/>
-                <a:cs typeface="Avenir Roman" charset="0"/>
+                <a:latin typeface="Avenir" charset="0"/>
+                <a:ea typeface="Avenir" charset="0"/>
+                <a:cs typeface="Avenir" charset="0"/>
                 <a:sym typeface="Avenir Roman" charset="0"/>
               </a:rPr>
               <a:t>el</a:t>
@@ -7802,9 +7189,9 @@
                   <a:srgbClr val="000000"/>
                 </a:solidFill>
                 <a:effectLst/>
-                <a:latin typeface="Avenir Roman" charset="0"/>
-                <a:ea typeface="Avenir Roman" charset="0"/>
-                <a:cs typeface="Avenir Roman" charset="0"/>
+                <a:latin typeface="Avenir" charset="0"/>
+                <a:ea typeface="Avenir" charset="0"/>
+                <a:cs typeface="Avenir" charset="0"/>
                 <a:sym typeface="Avenir Roman" charset="0"/>
               </a:rPr>
               <a:t> </a:t>
@@ -7815,9 +7202,9 @@
                   <a:srgbClr val="000000"/>
                 </a:solidFill>
                 <a:effectLst/>
-                <a:latin typeface="Avenir Roman" charset="0"/>
-                <a:ea typeface="Avenir Roman" charset="0"/>
-                <a:cs typeface="Avenir Roman" charset="0"/>
+                <a:latin typeface="Avenir" charset="0"/>
+                <a:ea typeface="Avenir" charset="0"/>
+                <a:cs typeface="Avenir" charset="0"/>
                 <a:sym typeface="Avenir Roman" charset="0"/>
               </a:rPr>
               <a:t>ganadero</a:t>
@@ -7828,9 +7215,9 @@
                   <a:srgbClr val="000000"/>
                 </a:solidFill>
                 <a:effectLst/>
-                <a:latin typeface="Avenir Roman" charset="0"/>
-                <a:ea typeface="Avenir Roman" charset="0"/>
-                <a:cs typeface="Avenir Roman" charset="0"/>
+                <a:latin typeface="Avenir" charset="0"/>
+                <a:ea typeface="Avenir" charset="0"/>
+                <a:cs typeface="Avenir" charset="0"/>
                 <a:sym typeface="Avenir Roman" charset="0"/>
               </a:rPr>
               <a:t>: la barra </a:t>
@@ -7841,9 +7228,9 @@
                   <a:srgbClr val="000000"/>
                 </a:solidFill>
                 <a:effectLst/>
-                <a:latin typeface="Avenir Roman" charset="0"/>
-                <a:ea typeface="Avenir Roman" charset="0"/>
-                <a:cs typeface="Avenir Roman" charset="0"/>
+                <a:latin typeface="Avenir" charset="0"/>
+                <a:ea typeface="Avenir" charset="0"/>
+                <a:cs typeface="Avenir" charset="0"/>
                 <a:sym typeface="Avenir Roman" charset="0"/>
               </a:rPr>
               <a:t>azul</a:t>
@@ -7854,9 +7241,9 @@
                   <a:srgbClr val="000000"/>
                 </a:solidFill>
                 <a:effectLst/>
-                <a:latin typeface="Avenir Roman" charset="0"/>
-                <a:ea typeface="Avenir Roman" charset="0"/>
-                <a:cs typeface="Avenir Roman" charset="0"/>
+                <a:latin typeface="Avenir" charset="0"/>
+                <a:ea typeface="Avenir" charset="0"/>
+                <a:cs typeface="Avenir" charset="0"/>
                 <a:sym typeface="Avenir Roman" charset="0"/>
               </a:rPr>
               <a:t> de Caporal AI es </a:t>
@@ -7867,9 +7254,9 @@
                   <a:srgbClr val="000000"/>
                 </a:solidFill>
                 <a:effectLst/>
-                <a:latin typeface="Avenir Roman" charset="0"/>
-                <a:ea typeface="Avenir Roman" charset="0"/>
-                <a:cs typeface="Avenir Roman" charset="0"/>
+                <a:latin typeface="Avenir" charset="0"/>
+                <a:ea typeface="Avenir" charset="0"/>
+                <a:cs typeface="Avenir" charset="0"/>
                 <a:sym typeface="Avenir Roman" charset="0"/>
               </a:rPr>
               <a:t>consistentemente</a:t>
@@ -7880,9 +7267,9 @@
                   <a:srgbClr val="000000"/>
                 </a:solidFill>
                 <a:effectLst/>
-                <a:latin typeface="Avenir Roman" charset="0"/>
-                <a:ea typeface="Avenir Roman" charset="0"/>
-                <a:cs typeface="Avenir Roman" charset="0"/>
+                <a:latin typeface="Avenir" charset="0"/>
+                <a:ea typeface="Avenir" charset="0"/>
+                <a:cs typeface="Avenir" charset="0"/>
                 <a:sym typeface="Avenir Roman" charset="0"/>
               </a:rPr>
               <a:t> </a:t>
@@ -7893,9 +7280,9 @@
                   <a:srgbClr val="000000"/>
                 </a:solidFill>
                 <a:effectLst/>
-                <a:latin typeface="Avenir Roman" charset="0"/>
-                <a:ea typeface="Avenir Roman" charset="0"/>
-                <a:cs typeface="Avenir Roman" charset="0"/>
+                <a:latin typeface="Avenir" charset="0"/>
+                <a:ea typeface="Avenir" charset="0"/>
+                <a:cs typeface="Avenir" charset="0"/>
                 <a:sym typeface="Avenir Roman" charset="0"/>
               </a:rPr>
               <a:t>más</a:t>
@@ -7906,9 +7293,9 @@
                   <a:srgbClr val="000000"/>
                 </a:solidFill>
                 <a:effectLst/>
-                <a:latin typeface="Avenir Roman" charset="0"/>
-                <a:ea typeface="Avenir Roman" charset="0"/>
-                <a:cs typeface="Avenir Roman" charset="0"/>
+                <a:latin typeface="Avenir" charset="0"/>
+                <a:ea typeface="Avenir" charset="0"/>
+                <a:cs typeface="Avenir" charset="0"/>
                 <a:sym typeface="Avenir Roman" charset="0"/>
               </a:rPr>
               <a:t> baja </a:t>
@@ -7919,9 +7306,9 @@
                   <a:srgbClr val="000000"/>
                 </a:solidFill>
                 <a:effectLst/>
-                <a:latin typeface="Avenir Roman" charset="0"/>
-                <a:ea typeface="Avenir Roman" charset="0"/>
-                <a:cs typeface="Avenir Roman" charset="0"/>
+                <a:latin typeface="Avenir" charset="0"/>
+                <a:ea typeface="Avenir" charset="0"/>
+                <a:cs typeface="Avenir" charset="0"/>
                 <a:sym typeface="Avenir Roman" charset="0"/>
               </a:rPr>
               <a:t>que</a:t>
@@ -7932,9 +7319,9 @@
                   <a:srgbClr val="000000"/>
                 </a:solidFill>
                 <a:effectLst/>
-                <a:latin typeface="Avenir Roman" charset="0"/>
-                <a:ea typeface="Avenir Roman" charset="0"/>
-                <a:cs typeface="Avenir Roman" charset="0"/>
+                <a:latin typeface="Avenir" charset="0"/>
+                <a:ea typeface="Avenir" charset="0"/>
+                <a:cs typeface="Avenir" charset="0"/>
                 <a:sym typeface="Avenir Roman" charset="0"/>
               </a:rPr>
               <a:t> la gris </a:t>
@@ -7945,9 +7332,9 @@
                   <a:srgbClr val="000000"/>
                 </a:solidFill>
                 <a:effectLst/>
-                <a:latin typeface="Avenir Roman" charset="0"/>
-                <a:ea typeface="Avenir Roman" charset="0"/>
-                <a:cs typeface="Avenir Roman" charset="0"/>
+                <a:latin typeface="Avenir" charset="0"/>
+                <a:ea typeface="Avenir" charset="0"/>
+                <a:cs typeface="Avenir" charset="0"/>
                 <a:sym typeface="Avenir Roman" charset="0"/>
               </a:rPr>
               <a:t>en</a:t>
@@ -7958,9 +7345,9 @@
                   <a:srgbClr val="000000"/>
                 </a:solidFill>
                 <a:effectLst/>
-                <a:latin typeface="Avenir Roman" charset="0"/>
-                <a:ea typeface="Avenir Roman" charset="0"/>
-                <a:cs typeface="Avenir Roman" charset="0"/>
+                <a:latin typeface="Avenir" charset="0"/>
+                <a:ea typeface="Avenir" charset="0"/>
+                <a:cs typeface="Avenir" charset="0"/>
                 <a:sym typeface="Avenir Roman" charset="0"/>
               </a:rPr>
               <a:t> </a:t>
@@ -7971,9 +7358,9 @@
                   <a:srgbClr val="000000"/>
                 </a:solidFill>
                 <a:effectLst/>
-                <a:latin typeface="Avenir Roman" charset="0"/>
-                <a:ea typeface="Avenir Roman" charset="0"/>
-                <a:cs typeface="Avenir Roman" charset="0"/>
+                <a:latin typeface="Avenir" charset="0"/>
+                <a:ea typeface="Avenir" charset="0"/>
+                <a:cs typeface="Avenir" charset="0"/>
                 <a:sym typeface="Avenir Roman" charset="0"/>
               </a:rPr>
               <a:t>todos</a:t>
@@ -7984,9 +7371,9 @@
                   <a:srgbClr val="000000"/>
                 </a:solidFill>
                 <a:effectLst/>
-                <a:latin typeface="Avenir Roman" charset="0"/>
-                <a:ea typeface="Avenir Roman" charset="0"/>
-                <a:cs typeface="Avenir Roman" charset="0"/>
+                <a:latin typeface="Avenir" charset="0"/>
+                <a:ea typeface="Avenir" charset="0"/>
+                <a:cs typeface="Avenir" charset="0"/>
                 <a:sym typeface="Avenir Roman" charset="0"/>
               </a:rPr>
               <a:t> </a:t>
@@ -7997,9 +7384,9 @@
                   <a:srgbClr val="000000"/>
                 </a:solidFill>
                 <a:effectLst/>
-                <a:latin typeface="Avenir Roman" charset="0"/>
-                <a:ea typeface="Avenir Roman" charset="0"/>
-                <a:cs typeface="Avenir Roman" charset="0"/>
+                <a:latin typeface="Avenir" charset="0"/>
+                <a:ea typeface="Avenir" charset="0"/>
+                <a:cs typeface="Avenir" charset="0"/>
                 <a:sym typeface="Avenir Roman" charset="0"/>
               </a:rPr>
               <a:t>los</a:t>
@@ -8010,9 +7397,9 @@
                   <a:srgbClr val="000000"/>
                 </a:solidFill>
                 <a:effectLst/>
-                <a:latin typeface="Avenir Roman" charset="0"/>
-                <a:ea typeface="Avenir Roman" charset="0"/>
-                <a:cs typeface="Avenir Roman" charset="0"/>
+                <a:latin typeface="Avenir" charset="0"/>
+                <a:ea typeface="Avenir" charset="0"/>
+                <a:cs typeface="Avenir" charset="0"/>
                 <a:sym typeface="Avenir Roman" charset="0"/>
               </a:rPr>
               <a:t> meses </a:t>
@@ -8023,9 +7410,9 @@
                   <a:srgbClr val="000000"/>
                 </a:solidFill>
                 <a:effectLst/>
-                <a:latin typeface="Avenir Roman" charset="0"/>
-                <a:ea typeface="Avenir Roman" charset="0"/>
-                <a:cs typeface="Avenir Roman" charset="0"/>
+                <a:latin typeface="Avenir" charset="0"/>
+                <a:ea typeface="Avenir" charset="0"/>
+                <a:cs typeface="Avenir" charset="0"/>
                 <a:sym typeface="Avenir Roman" charset="0"/>
               </a:rPr>
               <a:t>simulados</a:t>
@@ -8036,9 +7423,9 @@
                   <a:srgbClr val="000000"/>
                 </a:solidFill>
                 <a:effectLst/>
-                <a:latin typeface="Avenir Roman" charset="0"/>
-                <a:ea typeface="Avenir Roman" charset="0"/>
-                <a:cs typeface="Avenir Roman" charset="0"/>
+                <a:latin typeface="Avenir" charset="0"/>
+                <a:ea typeface="Avenir" charset="0"/>
+                <a:cs typeface="Avenir" charset="0"/>
                 <a:sym typeface="Avenir Roman" charset="0"/>
               </a:rPr>
               <a:t>, lo </a:t>
@@ -8049,9 +7436,9 @@
                   <a:srgbClr val="000000"/>
                 </a:solidFill>
                 <a:effectLst/>
-                <a:latin typeface="Avenir Roman" charset="0"/>
-                <a:ea typeface="Avenir Roman" charset="0"/>
-                <a:cs typeface="Avenir Roman" charset="0"/>
+                <a:latin typeface="Avenir" charset="0"/>
+                <a:ea typeface="Avenir" charset="0"/>
+                <a:cs typeface="Avenir" charset="0"/>
                 <a:sym typeface="Avenir Roman" charset="0"/>
               </a:rPr>
               <a:t>que</a:t>
@@ -8062,9 +7449,9 @@
                   <a:srgbClr val="000000"/>
                 </a:solidFill>
                 <a:effectLst/>
-                <a:latin typeface="Avenir Roman" charset="0"/>
-                <a:ea typeface="Avenir Roman" charset="0"/>
-                <a:cs typeface="Avenir Roman" charset="0"/>
+                <a:latin typeface="Avenir" charset="0"/>
+                <a:ea typeface="Avenir" charset="0"/>
+                <a:cs typeface="Avenir" charset="0"/>
                 <a:sym typeface="Avenir Roman" charset="0"/>
               </a:rPr>
               <a:t> </a:t>
@@ -8075,9 +7462,9 @@
                   <a:srgbClr val="000000"/>
                 </a:solidFill>
                 <a:effectLst/>
-                <a:latin typeface="Avenir Roman" charset="0"/>
-                <a:ea typeface="Avenir Roman" charset="0"/>
-                <a:cs typeface="Avenir Roman" charset="0"/>
+                <a:latin typeface="Avenir" charset="0"/>
+                <a:ea typeface="Avenir" charset="0"/>
+                <a:cs typeface="Avenir" charset="0"/>
                 <a:sym typeface="Avenir Roman" charset="0"/>
               </a:rPr>
               <a:t>confirma</a:t>
@@ -8088,9 +7475,9 @@
                   <a:srgbClr val="000000"/>
                 </a:solidFill>
                 <a:effectLst/>
-                <a:latin typeface="Avenir Roman" charset="0"/>
-                <a:ea typeface="Avenir Roman" charset="0"/>
-                <a:cs typeface="Avenir Roman" charset="0"/>
+                <a:latin typeface="Avenir" charset="0"/>
+                <a:ea typeface="Avenir" charset="0"/>
+                <a:cs typeface="Avenir" charset="0"/>
                 <a:sym typeface="Avenir Roman" charset="0"/>
               </a:rPr>
               <a:t> la </a:t>
@@ -8101,9 +7488,9 @@
                   <a:srgbClr val="000000"/>
                 </a:solidFill>
                 <a:effectLst/>
-                <a:latin typeface="Avenir Roman" charset="0"/>
-                <a:ea typeface="Avenir Roman" charset="0"/>
-                <a:cs typeface="Avenir Roman" charset="0"/>
+                <a:latin typeface="Avenir" charset="0"/>
+                <a:ea typeface="Avenir" charset="0"/>
+                <a:cs typeface="Avenir" charset="0"/>
                 <a:sym typeface="Avenir Roman" charset="0"/>
               </a:rPr>
               <a:t>reducción</a:t>
@@ -8114,9 +7501,9 @@
                   <a:srgbClr val="000000"/>
                 </a:solidFill>
                 <a:effectLst/>
-                <a:latin typeface="Avenir Roman" charset="0"/>
-                <a:ea typeface="Avenir Roman" charset="0"/>
-                <a:cs typeface="Avenir Roman" charset="0"/>
+                <a:latin typeface="Avenir" charset="0"/>
+                <a:ea typeface="Avenir" charset="0"/>
+                <a:cs typeface="Avenir" charset="0"/>
                 <a:sym typeface="Avenir Roman" charset="0"/>
               </a:rPr>
               <a:t> del 5 al 10% </a:t>
@@ -8127,9 +7514,9 @@
                   <a:srgbClr val="000000"/>
                 </a:solidFill>
                 <a:effectLst/>
-                <a:latin typeface="Avenir Roman" charset="0"/>
-                <a:ea typeface="Avenir Roman" charset="0"/>
-                <a:cs typeface="Avenir Roman" charset="0"/>
+                <a:latin typeface="Avenir" charset="0"/>
+                <a:ea typeface="Avenir" charset="0"/>
+                <a:cs typeface="Avenir" charset="0"/>
                 <a:sym typeface="Avenir Roman" charset="0"/>
               </a:rPr>
               <a:t>en</a:t>
@@ -8140,9 +7527,9 @@
                   <a:srgbClr val="000000"/>
                 </a:solidFill>
                 <a:effectLst/>
-                <a:latin typeface="Avenir Roman" charset="0"/>
-                <a:ea typeface="Avenir Roman" charset="0"/>
-                <a:cs typeface="Avenir Roman" charset="0"/>
+                <a:latin typeface="Avenir" charset="0"/>
+                <a:ea typeface="Avenir" charset="0"/>
+                <a:cs typeface="Avenir" charset="0"/>
                 <a:sym typeface="Avenir Roman" charset="0"/>
               </a:rPr>
               <a:t> </a:t>
@@ -8153,9 +7540,9 @@
                   <a:srgbClr val="000000"/>
                 </a:solidFill>
                 <a:effectLst/>
-                <a:latin typeface="Avenir Roman" charset="0"/>
-                <a:ea typeface="Avenir Roman" charset="0"/>
-                <a:cs typeface="Avenir Roman" charset="0"/>
+                <a:latin typeface="Avenir" charset="0"/>
+                <a:ea typeface="Avenir" charset="0"/>
+                <a:cs typeface="Avenir" charset="0"/>
                 <a:sym typeface="Avenir Roman" charset="0"/>
               </a:rPr>
               <a:t>el</a:t>
@@ -8166,9 +7553,9 @@
                   <a:srgbClr val="000000"/>
                 </a:solidFill>
                 <a:effectLst/>
-                <a:latin typeface="Avenir Roman" charset="0"/>
-                <a:ea typeface="Avenir Roman" charset="0"/>
-                <a:cs typeface="Avenir Roman" charset="0"/>
+                <a:latin typeface="Avenir" charset="0"/>
+                <a:ea typeface="Avenir" charset="0"/>
+                <a:cs typeface="Avenir" charset="0"/>
                 <a:sym typeface="Avenir Roman" charset="0"/>
               </a:rPr>
               <a:t> </a:t>
@@ -8179,9 +7566,9 @@
                   <a:srgbClr val="000000"/>
                 </a:solidFill>
                 <a:effectLst/>
-                <a:latin typeface="Avenir Roman" charset="0"/>
-                <a:ea typeface="Avenir Roman" charset="0"/>
-                <a:cs typeface="Avenir Roman" charset="0"/>
+                <a:latin typeface="Avenir" charset="0"/>
+                <a:ea typeface="Avenir" charset="0"/>
+                <a:cs typeface="Avenir" charset="0"/>
                 <a:sym typeface="Avenir Roman" charset="0"/>
               </a:rPr>
               <a:t>costo</a:t>
@@ -8192,9 +7579,9 @@
                   <a:srgbClr val="000000"/>
                 </a:solidFill>
                 <a:effectLst/>
-                <a:latin typeface="Avenir Roman" charset="0"/>
-                <a:ea typeface="Avenir Roman" charset="0"/>
-                <a:cs typeface="Avenir Roman" charset="0"/>
+                <a:latin typeface="Avenir" charset="0"/>
+                <a:ea typeface="Avenir" charset="0"/>
+                <a:cs typeface="Avenir" charset="0"/>
                 <a:sym typeface="Avenir Roman" charset="0"/>
               </a:rPr>
               <a:t> </a:t>
@@ -8205,9 +7592,9 @@
                   <a:srgbClr val="000000"/>
                 </a:solidFill>
                 <a:effectLst/>
-                <a:latin typeface="Avenir Roman" charset="0"/>
-                <a:ea typeface="Avenir Roman" charset="0"/>
-                <a:cs typeface="Avenir Roman" charset="0"/>
+                <a:latin typeface="Avenir" charset="0"/>
+                <a:ea typeface="Avenir" charset="0"/>
+                <a:cs typeface="Avenir" charset="0"/>
                 <a:sym typeface="Avenir Roman" charset="0"/>
               </a:rPr>
               <a:t>diario</a:t>
@@ -8218,9 +7605,9 @@
                   <a:srgbClr val="000000"/>
                 </a:solidFill>
                 <a:effectLst/>
-                <a:latin typeface="Avenir Roman" charset="0"/>
-                <a:ea typeface="Avenir Roman" charset="0"/>
-                <a:cs typeface="Avenir Roman" charset="0"/>
+                <a:latin typeface="Avenir" charset="0"/>
+                <a:ea typeface="Avenir" charset="0"/>
+                <a:cs typeface="Avenir" charset="0"/>
                 <a:sym typeface="Avenir Roman" charset="0"/>
               </a:rPr>
               <a:t>. Caporal AI es </a:t>
@@ -8231,9 +7618,9 @@
                   <a:srgbClr val="000000"/>
                 </a:solidFill>
                 <a:effectLst/>
-                <a:latin typeface="Avenir Roman" charset="0"/>
-                <a:ea typeface="Avenir Roman" charset="0"/>
-                <a:cs typeface="Avenir Roman" charset="0"/>
+                <a:latin typeface="Avenir" charset="0"/>
+                <a:ea typeface="Avenir" charset="0"/>
+                <a:cs typeface="Avenir" charset="0"/>
                 <a:sym typeface="Avenir Roman" charset="0"/>
               </a:rPr>
               <a:t>económicamente</a:t>
@@ -8244,9 +7631,9 @@
                   <a:srgbClr val="000000"/>
                 </a:solidFill>
                 <a:effectLst/>
-                <a:latin typeface="Avenir Roman" charset="0"/>
-                <a:ea typeface="Avenir Roman" charset="0"/>
-                <a:cs typeface="Avenir Roman" charset="0"/>
+                <a:latin typeface="Avenir" charset="0"/>
+                <a:ea typeface="Avenir" charset="0"/>
+                <a:cs typeface="Avenir" charset="0"/>
                 <a:sym typeface="Avenir Roman" charset="0"/>
               </a:rPr>
               <a:t> viable y </a:t>
@@ -8257,9 +7644,9 @@
                   <a:srgbClr val="000000"/>
                 </a:solidFill>
                 <a:effectLst/>
-                <a:latin typeface="Avenir Roman" charset="0"/>
-                <a:ea typeface="Avenir Roman" charset="0"/>
-                <a:cs typeface="Avenir Roman" charset="0"/>
+                <a:latin typeface="Avenir" charset="0"/>
+                <a:ea typeface="Avenir" charset="0"/>
+                <a:cs typeface="Avenir" charset="0"/>
                 <a:sym typeface="Avenir Roman" charset="0"/>
               </a:rPr>
               <a:t>biológicamente</a:t>
@@ -8270,9 +7657,9 @@
                   <a:srgbClr val="000000"/>
                 </a:solidFill>
                 <a:effectLst/>
-                <a:latin typeface="Avenir Roman" charset="0"/>
-                <a:ea typeface="Avenir Roman" charset="0"/>
-                <a:cs typeface="Avenir Roman" charset="0"/>
+                <a:latin typeface="Avenir" charset="0"/>
+                <a:ea typeface="Avenir" charset="0"/>
+                <a:cs typeface="Avenir" charset="0"/>
                 <a:sym typeface="Avenir Roman" charset="0"/>
               </a:rPr>
               <a:t> </a:t>
@@ -8283,9 +7670,9 @@
                   <a:srgbClr val="000000"/>
                 </a:solidFill>
                 <a:effectLst/>
-                <a:latin typeface="Avenir Roman" charset="0"/>
-                <a:ea typeface="Avenir Roman" charset="0"/>
-                <a:cs typeface="Avenir Roman" charset="0"/>
+                <a:latin typeface="Avenir" charset="0"/>
+                <a:ea typeface="Avenir" charset="0"/>
+                <a:cs typeface="Avenir" charset="0"/>
                 <a:sym typeface="Avenir Roman" charset="0"/>
               </a:rPr>
               <a:t>seguro</a:t>
@@ -8296,9 +7683,9 @@
                   <a:srgbClr val="000000"/>
                 </a:solidFill>
                 <a:effectLst/>
-                <a:latin typeface="Avenir Roman" charset="0"/>
-                <a:ea typeface="Avenir Roman" charset="0"/>
-                <a:cs typeface="Avenir Roman" charset="0"/>
+                <a:latin typeface="Avenir" charset="0"/>
+                <a:ea typeface="Avenir" charset="0"/>
+                <a:cs typeface="Avenir" charset="0"/>
                 <a:sym typeface="Avenir Roman" charset="0"/>
               </a:rPr>
               <a:t> al </a:t>
@@ -8309,9 +7696,9 @@
                   <a:srgbClr val="000000"/>
                 </a:solidFill>
                 <a:effectLst/>
-                <a:latin typeface="Avenir Roman" charset="0"/>
-                <a:ea typeface="Avenir Roman" charset="0"/>
-                <a:cs typeface="Avenir Roman" charset="0"/>
+                <a:latin typeface="Avenir" charset="0"/>
+                <a:ea typeface="Avenir" charset="0"/>
+                <a:cs typeface="Avenir" charset="0"/>
                 <a:sym typeface="Avenir Roman" charset="0"/>
               </a:rPr>
               <a:t>mismo</a:t>
@@ -8322,9 +7709,9 @@
                   <a:srgbClr val="000000"/>
                 </a:solidFill>
                 <a:effectLst/>
-                <a:latin typeface="Avenir Roman" charset="0"/>
-                <a:ea typeface="Avenir Roman" charset="0"/>
-                <a:cs typeface="Avenir Roman" charset="0"/>
+                <a:latin typeface="Avenir" charset="0"/>
+                <a:ea typeface="Avenir" charset="0"/>
+                <a:cs typeface="Avenir" charset="0"/>
                 <a:sym typeface="Avenir Roman" charset="0"/>
               </a:rPr>
               <a:t> </a:t>
@@ -8335,9 +7722,9 @@
                   <a:srgbClr val="000000"/>
                 </a:solidFill>
                 <a:effectLst/>
-                <a:latin typeface="Avenir Roman" charset="0"/>
-                <a:ea typeface="Avenir Roman" charset="0"/>
-                <a:cs typeface="Avenir Roman" charset="0"/>
+                <a:latin typeface="Avenir" charset="0"/>
+                <a:ea typeface="Avenir" charset="0"/>
+                <a:cs typeface="Avenir" charset="0"/>
                 <a:sym typeface="Avenir Roman" charset="0"/>
               </a:rPr>
               <a:t>tiempo</a:t>
@@ -8348,9 +7735,9 @@
                   <a:srgbClr val="000000"/>
                 </a:solidFill>
                 <a:effectLst/>
-                <a:latin typeface="Avenir Roman" charset="0"/>
-                <a:ea typeface="Avenir Roman" charset="0"/>
-                <a:cs typeface="Avenir Roman" charset="0"/>
+                <a:latin typeface="Avenir" charset="0"/>
+                <a:ea typeface="Avenir" charset="0"/>
+                <a:cs typeface="Avenir" charset="0"/>
                 <a:sym typeface="Avenir Roman" charset="0"/>
               </a:rPr>
               <a:t>."</a:t>
@@ -8361,9 +7748,9 @@
                   <a:srgbClr val="000000"/>
                 </a:solidFill>
                 <a:effectLst/>
-                <a:latin typeface="Avenir Roman" charset="0"/>
-                <a:ea typeface="Avenir Roman" charset="0"/>
-                <a:cs typeface="Avenir Roman" charset="0"/>
+                <a:latin typeface="Avenir" charset="0"/>
+                <a:ea typeface="Avenir" charset="0"/>
+                <a:cs typeface="Avenir" charset="0"/>
                 <a:sym typeface="Avenir Roman" charset="0"/>
               </a:rPr>
             </a:br>
@@ -8373,9 +7760,9 @@
                   <a:srgbClr val="000000"/>
                 </a:solidFill>
                 <a:effectLst/>
-                <a:latin typeface="Avenir Roman" charset="0"/>
-                <a:ea typeface="Avenir Roman" charset="0"/>
-                <a:cs typeface="Avenir Roman" charset="0"/>
+                <a:latin typeface="Avenir" charset="0"/>
+                <a:ea typeface="Avenir" charset="0"/>
+                <a:cs typeface="Avenir" charset="0"/>
                 <a:sym typeface="Avenir Roman" charset="0"/>
               </a:rPr>
             </a:br>
@@ -8385,9 +7772,9 @@
                   <a:srgbClr val="000000"/>
                 </a:solidFill>
                 <a:effectLst/>
-                <a:latin typeface="Avenir Roman" charset="0"/>
-                <a:ea typeface="Avenir Roman" charset="0"/>
-                <a:cs typeface="Avenir Roman" charset="0"/>
+                <a:latin typeface="Avenir" charset="0"/>
+                <a:ea typeface="Avenir" charset="0"/>
+                <a:cs typeface="Avenir" charset="0"/>
                 <a:sym typeface="Avenir Roman" charset="0"/>
               </a:rPr>
               <a:t>⏱ ~1:30 min.</a:t>
@@ -8592,9 +7979,9 @@
                   <a:srgbClr val="000000"/>
                 </a:solidFill>
                 <a:effectLst/>
-                <a:latin typeface="Avenir Roman" charset="0"/>
-                <a:ea typeface="Avenir Roman" charset="0"/>
-                <a:cs typeface="Avenir Roman" charset="0"/>
+                <a:latin typeface="Avenir" charset="0"/>
+                <a:ea typeface="Avenir" charset="0"/>
+                <a:cs typeface="Avenir" charset="0"/>
                 <a:sym typeface="Avenir Roman" charset="0"/>
               </a:rPr>
               <a:t>----------------------------------------------------------------------------------------------------------------------------------------------------------------------------------------------</a:t>
@@ -8634,9 +8021,9 @@
                   <a:srgbClr val="000000"/>
                 </a:solidFill>
                 <a:effectLst/>
-                <a:latin typeface="Avenir Roman" charset="0"/>
-                <a:ea typeface="Avenir Roman" charset="0"/>
-                <a:cs typeface="Avenir Roman" charset="0"/>
+                <a:latin typeface="Avenir" charset="0"/>
+                <a:ea typeface="Avenir" charset="0"/>
+                <a:cs typeface="Avenir" charset="0"/>
                 <a:sym typeface="Avenir Roman" charset="0"/>
               </a:rPr>
               <a:t>[P2] "En </a:t>
@@ -8647,9 +8034,9 @@
                   <a:srgbClr val="000000"/>
                 </a:solidFill>
                 <a:effectLst/>
-                <a:latin typeface="Avenir Roman" charset="0"/>
-                <a:ea typeface="Avenir Roman" charset="0"/>
-                <a:cs typeface="Avenir Roman" charset="0"/>
+                <a:latin typeface="Avenir" charset="0"/>
+                <a:ea typeface="Avenir" charset="0"/>
+                <a:cs typeface="Avenir" charset="0"/>
                 <a:sym typeface="Avenir Roman" charset="0"/>
               </a:rPr>
               <a:t>conclusión</a:t>
@@ -8660,9 +8047,9 @@
                   <a:srgbClr val="000000"/>
                 </a:solidFill>
                 <a:effectLst/>
-                <a:latin typeface="Avenir Roman" charset="0"/>
-                <a:ea typeface="Avenir Roman" charset="0"/>
-                <a:cs typeface="Avenir Roman" charset="0"/>
+                <a:latin typeface="Avenir" charset="0"/>
+                <a:ea typeface="Avenir" charset="0"/>
+                <a:cs typeface="Avenir" charset="0"/>
                 <a:sym typeface="Avenir Roman" charset="0"/>
               </a:rPr>
               <a:t>, Caporal AI </a:t>
@@ -8673,9 +8060,9 @@
                   <a:srgbClr val="000000"/>
                 </a:solidFill>
                 <a:effectLst/>
-                <a:latin typeface="Avenir Roman" charset="0"/>
-                <a:ea typeface="Avenir Roman" charset="0"/>
-                <a:cs typeface="Avenir Roman" charset="0"/>
+                <a:latin typeface="Avenir" charset="0"/>
+                <a:ea typeface="Avenir" charset="0"/>
+                <a:cs typeface="Avenir" charset="0"/>
                 <a:sym typeface="Avenir Roman" charset="0"/>
               </a:rPr>
               <a:t>trasciende</a:t>
@@ -8686,9 +8073,9 @@
                   <a:srgbClr val="000000"/>
                 </a:solidFill>
                 <a:effectLst/>
-                <a:latin typeface="Avenir Roman" charset="0"/>
-                <a:ea typeface="Avenir Roman" charset="0"/>
-                <a:cs typeface="Avenir Roman" charset="0"/>
+                <a:latin typeface="Avenir" charset="0"/>
+                <a:ea typeface="Avenir" charset="0"/>
+                <a:cs typeface="Avenir" charset="0"/>
                 <a:sym typeface="Avenir Roman" charset="0"/>
               </a:rPr>
               <a:t> </a:t>
@@ -8699,9 +8086,9 @@
                   <a:srgbClr val="000000"/>
                 </a:solidFill>
                 <a:effectLst/>
-                <a:latin typeface="Avenir Roman" charset="0"/>
-                <a:ea typeface="Avenir Roman" charset="0"/>
-                <a:cs typeface="Avenir Roman" charset="0"/>
+                <a:latin typeface="Avenir" charset="0"/>
+                <a:ea typeface="Avenir" charset="0"/>
+                <a:cs typeface="Avenir" charset="0"/>
                 <a:sym typeface="Avenir Roman" charset="0"/>
               </a:rPr>
               <a:t>el</a:t>
@@ -8712,9 +8099,9 @@
                   <a:srgbClr val="000000"/>
                 </a:solidFill>
                 <a:effectLst/>
-                <a:latin typeface="Avenir Roman" charset="0"/>
-                <a:ea typeface="Avenir Roman" charset="0"/>
-                <a:cs typeface="Avenir Roman" charset="0"/>
+                <a:latin typeface="Avenir" charset="0"/>
+                <a:ea typeface="Avenir" charset="0"/>
+                <a:cs typeface="Avenir" charset="0"/>
                 <a:sym typeface="Avenir Roman" charset="0"/>
               </a:rPr>
               <a:t> software de </a:t>
@@ -8725,9 +8112,9 @@
                   <a:srgbClr val="000000"/>
                 </a:solidFill>
                 <a:effectLst/>
-                <a:latin typeface="Avenir Roman" charset="0"/>
-                <a:ea typeface="Avenir Roman" charset="0"/>
-                <a:cs typeface="Avenir Roman" charset="0"/>
+                <a:latin typeface="Avenir" charset="0"/>
+                <a:ea typeface="Avenir" charset="0"/>
+                <a:cs typeface="Avenir" charset="0"/>
                 <a:sym typeface="Avenir Roman" charset="0"/>
               </a:rPr>
               <a:t>registro</a:t>
@@ -8738,9 +8125,9 @@
                   <a:srgbClr val="000000"/>
                 </a:solidFill>
                 <a:effectLst/>
-                <a:latin typeface="Avenir Roman" charset="0"/>
-                <a:ea typeface="Avenir Roman" charset="0"/>
-                <a:cs typeface="Avenir Roman" charset="0"/>
+                <a:latin typeface="Avenir" charset="0"/>
+                <a:ea typeface="Avenir" charset="0"/>
+                <a:cs typeface="Avenir" charset="0"/>
                 <a:sym typeface="Avenir Roman" charset="0"/>
               </a:rPr>
               <a:t> y se </a:t>
@@ -8751,9 +8138,9 @@
                   <a:srgbClr val="000000"/>
                 </a:solidFill>
                 <a:effectLst/>
-                <a:latin typeface="Avenir Roman" charset="0"/>
-                <a:ea typeface="Avenir Roman" charset="0"/>
-                <a:cs typeface="Avenir Roman" charset="0"/>
+                <a:latin typeface="Avenir" charset="0"/>
+                <a:ea typeface="Avenir" charset="0"/>
+                <a:cs typeface="Avenir" charset="0"/>
                 <a:sym typeface="Avenir Roman" charset="0"/>
               </a:rPr>
               <a:t>posiciona</a:t>
@@ -8764,9 +8151,9 @@
                   <a:srgbClr val="000000"/>
                 </a:solidFill>
                 <a:effectLst/>
-                <a:latin typeface="Avenir Roman" charset="0"/>
-                <a:ea typeface="Avenir Roman" charset="0"/>
-                <a:cs typeface="Avenir Roman" charset="0"/>
+                <a:latin typeface="Avenir" charset="0"/>
+                <a:ea typeface="Avenir" charset="0"/>
+                <a:cs typeface="Avenir" charset="0"/>
                 <a:sym typeface="Avenir Roman" charset="0"/>
               </a:rPr>
               <a:t> </a:t>
@@ -8777,9 +8164,9 @@
                   <a:srgbClr val="000000"/>
                 </a:solidFill>
                 <a:effectLst/>
-                <a:latin typeface="Avenir Roman" charset="0"/>
-                <a:ea typeface="Avenir Roman" charset="0"/>
-                <a:cs typeface="Avenir Roman" charset="0"/>
+                <a:latin typeface="Avenir" charset="0"/>
+                <a:ea typeface="Avenir" charset="0"/>
+                <a:cs typeface="Avenir" charset="0"/>
                 <a:sym typeface="Avenir Roman" charset="0"/>
               </a:rPr>
               <a:t>como</a:t>
@@ -8790,9 +8177,9 @@
                   <a:srgbClr val="000000"/>
                 </a:solidFill>
                 <a:effectLst/>
-                <a:latin typeface="Avenir Roman" charset="0"/>
-                <a:ea typeface="Avenir Roman" charset="0"/>
-                <a:cs typeface="Avenir Roman" charset="0"/>
+                <a:latin typeface="Avenir" charset="0"/>
+                <a:ea typeface="Avenir" charset="0"/>
+                <a:cs typeface="Avenir" charset="0"/>
                 <a:sym typeface="Avenir Roman" charset="0"/>
               </a:rPr>
               <a:t> </a:t>
@@ -8803,9 +8190,9 @@
                   <a:srgbClr val="000000"/>
                 </a:solidFill>
                 <a:effectLst/>
-                <a:latin typeface="Avenir Roman" charset="0"/>
-                <a:ea typeface="Avenir Roman" charset="0"/>
-                <a:cs typeface="Avenir Roman" charset="0"/>
+                <a:latin typeface="Avenir" charset="0"/>
+                <a:ea typeface="Avenir" charset="0"/>
+                <a:cs typeface="Avenir" charset="0"/>
                 <a:sym typeface="Avenir Roman" charset="0"/>
               </a:rPr>
               <a:t>una</a:t>
@@ -8816,9 +8203,9 @@
                   <a:srgbClr val="000000"/>
                 </a:solidFill>
                 <a:effectLst/>
-                <a:latin typeface="Avenir Roman" charset="0"/>
-                <a:ea typeface="Avenir Roman" charset="0"/>
-                <a:cs typeface="Avenir Roman" charset="0"/>
+                <a:latin typeface="Avenir" charset="0"/>
+                <a:ea typeface="Avenir" charset="0"/>
+                <a:cs typeface="Avenir" charset="0"/>
                 <a:sym typeface="Avenir Roman" charset="0"/>
               </a:rPr>
               <a:t> </a:t>
@@ -8829,9 +8216,9 @@
                   <a:srgbClr val="000000"/>
                 </a:solidFill>
                 <a:effectLst/>
-                <a:latin typeface="Avenir Roman" charset="0"/>
-                <a:ea typeface="Avenir Roman" charset="0"/>
-                <a:cs typeface="Avenir Roman" charset="0"/>
+                <a:latin typeface="Avenir" charset="0"/>
+                <a:ea typeface="Avenir" charset="0"/>
+                <a:cs typeface="Avenir" charset="0"/>
                 <a:sym typeface="Avenir Roman" charset="0"/>
               </a:rPr>
               <a:t>herramienta</a:t>
@@ -8842,9 +8229,9 @@
                   <a:srgbClr val="000000"/>
                 </a:solidFill>
                 <a:effectLst/>
-                <a:latin typeface="Avenir Roman" charset="0"/>
-                <a:ea typeface="Avenir Roman" charset="0"/>
-                <a:cs typeface="Avenir Roman" charset="0"/>
+                <a:latin typeface="Avenir" charset="0"/>
+                <a:ea typeface="Avenir" charset="0"/>
+                <a:cs typeface="Avenir" charset="0"/>
                 <a:sym typeface="Avenir Roman" charset="0"/>
               </a:rPr>
               <a:t> </a:t>
@@ -8855,9 +8242,9 @@
                   <a:srgbClr val="000000"/>
                 </a:solidFill>
                 <a:effectLst/>
-                <a:latin typeface="Avenir Roman" charset="0"/>
-                <a:ea typeface="Avenir Roman" charset="0"/>
-                <a:cs typeface="Avenir Roman" charset="0"/>
+                <a:latin typeface="Avenir" charset="0"/>
+                <a:ea typeface="Avenir" charset="0"/>
+                <a:cs typeface="Avenir" charset="0"/>
                 <a:sym typeface="Avenir Roman" charset="0"/>
               </a:rPr>
               <a:t>prescriptiva</a:t>
@@ -8868,9 +8255,9 @@
                   <a:srgbClr val="000000"/>
                 </a:solidFill>
                 <a:effectLst/>
-                <a:latin typeface="Avenir Roman" charset="0"/>
-                <a:ea typeface="Avenir Roman" charset="0"/>
-                <a:cs typeface="Avenir Roman" charset="0"/>
+                <a:latin typeface="Avenir" charset="0"/>
+                <a:ea typeface="Avenir" charset="0"/>
+                <a:cs typeface="Avenir" charset="0"/>
                 <a:sym typeface="Avenir Roman" charset="0"/>
               </a:rPr>
               <a:t> </a:t>
@@ -8881,9 +8268,9 @@
                   <a:srgbClr val="000000"/>
                 </a:solidFill>
                 <a:effectLst/>
-                <a:latin typeface="Avenir Roman" charset="0"/>
-                <a:ea typeface="Avenir Roman" charset="0"/>
-                <a:cs typeface="Avenir Roman" charset="0"/>
+                <a:latin typeface="Avenir" charset="0"/>
+                <a:ea typeface="Avenir" charset="0"/>
+                <a:cs typeface="Avenir" charset="0"/>
                 <a:sym typeface="Avenir Roman" charset="0"/>
               </a:rPr>
               <a:t>que</a:t>
@@ -8894,9 +8281,9 @@
                   <a:srgbClr val="000000"/>
                 </a:solidFill>
                 <a:effectLst/>
-                <a:latin typeface="Avenir Roman" charset="0"/>
-                <a:ea typeface="Avenir Roman" charset="0"/>
-                <a:cs typeface="Avenir Roman" charset="0"/>
+                <a:latin typeface="Avenir" charset="0"/>
+                <a:ea typeface="Avenir" charset="0"/>
+                <a:cs typeface="Avenir" charset="0"/>
                 <a:sym typeface="Avenir Roman" charset="0"/>
               </a:rPr>
               <a:t> </a:t>
@@ -8907,9 +8294,9 @@
                   <a:srgbClr val="000000"/>
                 </a:solidFill>
                 <a:effectLst/>
-                <a:latin typeface="Avenir Roman" charset="0"/>
-                <a:ea typeface="Avenir Roman" charset="0"/>
-                <a:cs typeface="Avenir Roman" charset="0"/>
+                <a:latin typeface="Avenir" charset="0"/>
+                <a:ea typeface="Avenir" charset="0"/>
+                <a:cs typeface="Avenir" charset="0"/>
                 <a:sym typeface="Avenir Roman" charset="0"/>
               </a:rPr>
               <a:t>cuida</a:t>
@@ -8920,9 +8307,9 @@
                   <a:srgbClr val="000000"/>
                 </a:solidFill>
                 <a:effectLst/>
-                <a:latin typeface="Avenir Roman" charset="0"/>
-                <a:ea typeface="Avenir Roman" charset="0"/>
-                <a:cs typeface="Avenir Roman" charset="0"/>
+                <a:latin typeface="Avenir" charset="0"/>
+                <a:ea typeface="Avenir" charset="0"/>
+                <a:cs typeface="Avenir" charset="0"/>
                 <a:sym typeface="Avenir Roman" charset="0"/>
               </a:rPr>
               <a:t> </a:t>
@@ -8933,9 +8320,9 @@
                   <a:srgbClr val="000000"/>
                 </a:solidFill>
                 <a:effectLst/>
-                <a:latin typeface="Avenir Roman" charset="0"/>
-                <a:ea typeface="Avenir Roman" charset="0"/>
-                <a:cs typeface="Avenir Roman" charset="0"/>
+                <a:latin typeface="Avenir" charset="0"/>
+                <a:ea typeface="Avenir" charset="0"/>
+                <a:cs typeface="Avenir" charset="0"/>
                 <a:sym typeface="Avenir Roman" charset="0"/>
               </a:rPr>
               <a:t>el</a:t>
@@ -8946,9 +8333,9 @@
                   <a:srgbClr val="000000"/>
                 </a:solidFill>
                 <a:effectLst/>
-                <a:latin typeface="Avenir Roman" charset="0"/>
-                <a:ea typeface="Avenir Roman" charset="0"/>
-                <a:cs typeface="Avenir Roman" charset="0"/>
+                <a:latin typeface="Avenir" charset="0"/>
+                <a:ea typeface="Avenir" charset="0"/>
+                <a:cs typeface="Avenir" charset="0"/>
                 <a:sym typeface="Avenir Roman" charset="0"/>
               </a:rPr>
               <a:t> </a:t>
@@ -8959,9 +8346,9 @@
                   <a:srgbClr val="000000"/>
                 </a:solidFill>
                 <a:effectLst/>
-                <a:latin typeface="Avenir Roman" charset="0"/>
-                <a:ea typeface="Avenir Roman" charset="0"/>
-                <a:cs typeface="Avenir Roman" charset="0"/>
+                <a:latin typeface="Avenir" charset="0"/>
+                <a:ea typeface="Avenir" charset="0"/>
+                <a:cs typeface="Avenir" charset="0"/>
                 <a:sym typeface="Avenir Roman" charset="0"/>
               </a:rPr>
               <a:t>bolsillo</a:t>
@@ -8972,9 +8359,9 @@
                   <a:srgbClr val="000000"/>
                 </a:solidFill>
                 <a:effectLst/>
-                <a:latin typeface="Avenir Roman" charset="0"/>
-                <a:ea typeface="Avenir Roman" charset="0"/>
-                <a:cs typeface="Avenir Roman" charset="0"/>
+                <a:latin typeface="Avenir" charset="0"/>
+                <a:ea typeface="Avenir" charset="0"/>
+                <a:cs typeface="Avenir" charset="0"/>
                 <a:sym typeface="Avenir Roman" charset="0"/>
               </a:rPr>
               <a:t> del </a:t>
@@ -8985,9 +8372,9 @@
                   <a:srgbClr val="000000"/>
                 </a:solidFill>
                 <a:effectLst/>
-                <a:latin typeface="Avenir Roman" charset="0"/>
-                <a:ea typeface="Avenir Roman" charset="0"/>
-                <a:cs typeface="Avenir Roman" charset="0"/>
+                <a:latin typeface="Avenir" charset="0"/>
+                <a:ea typeface="Avenir" charset="0"/>
+                <a:cs typeface="Avenir" charset="0"/>
                 <a:sym typeface="Avenir Roman" charset="0"/>
               </a:rPr>
               <a:t>ganadero</a:t>
@@ -8998,9 +8385,9 @@
                   <a:srgbClr val="000000"/>
                 </a:solidFill>
                 <a:effectLst/>
-                <a:latin typeface="Avenir Roman" charset="0"/>
-                <a:ea typeface="Avenir Roman" charset="0"/>
-                <a:cs typeface="Avenir Roman" charset="0"/>
+                <a:latin typeface="Avenir" charset="0"/>
+                <a:ea typeface="Avenir" charset="0"/>
+                <a:cs typeface="Avenir" charset="0"/>
                 <a:sym typeface="Avenir Roman" charset="0"/>
               </a:rPr>
               <a:t> sin </a:t>
@@ -9011,9 +8398,9 @@
                   <a:srgbClr val="000000"/>
                 </a:solidFill>
                 <a:effectLst/>
-                <a:latin typeface="Avenir Roman" charset="0"/>
-                <a:ea typeface="Avenir Roman" charset="0"/>
-                <a:cs typeface="Avenir Roman" charset="0"/>
+                <a:latin typeface="Avenir" charset="0"/>
+                <a:ea typeface="Avenir" charset="0"/>
+                <a:cs typeface="Avenir" charset="0"/>
                 <a:sym typeface="Avenir Roman" charset="0"/>
               </a:rPr>
               <a:t>comprometer</a:t>
@@ -9024,9 +8411,9 @@
                   <a:srgbClr val="000000"/>
                 </a:solidFill>
                 <a:effectLst/>
-                <a:latin typeface="Avenir Roman" charset="0"/>
-                <a:ea typeface="Avenir Roman" charset="0"/>
-                <a:cs typeface="Avenir Roman" charset="0"/>
+                <a:latin typeface="Avenir" charset="0"/>
+                <a:ea typeface="Avenir" charset="0"/>
+                <a:cs typeface="Avenir" charset="0"/>
                 <a:sym typeface="Avenir Roman" charset="0"/>
               </a:rPr>
               <a:t> la </a:t>
@@ -9037,9 +8424,9 @@
                   <a:srgbClr val="000000"/>
                 </a:solidFill>
                 <a:effectLst/>
-                <a:latin typeface="Avenir Roman" charset="0"/>
-                <a:ea typeface="Avenir Roman" charset="0"/>
-                <a:cs typeface="Avenir Roman" charset="0"/>
+                <a:latin typeface="Avenir" charset="0"/>
+                <a:ea typeface="Avenir" charset="0"/>
+                <a:cs typeface="Avenir" charset="0"/>
                 <a:sym typeface="Avenir Roman" charset="0"/>
               </a:rPr>
               <a:t>salud</a:t>
@@ -9050,9 +8437,9 @@
                   <a:srgbClr val="000000"/>
                 </a:solidFill>
                 <a:effectLst/>
-                <a:latin typeface="Avenir Roman" charset="0"/>
-                <a:ea typeface="Avenir Roman" charset="0"/>
-                <a:cs typeface="Avenir Roman" charset="0"/>
+                <a:latin typeface="Avenir" charset="0"/>
+                <a:ea typeface="Avenir" charset="0"/>
+                <a:cs typeface="Avenir" charset="0"/>
                 <a:sym typeface="Avenir Roman" charset="0"/>
               </a:rPr>
               <a:t> del </a:t>
@@ -9063,9 +8450,9 @@
                   <a:srgbClr val="000000"/>
                 </a:solidFill>
                 <a:effectLst/>
-                <a:latin typeface="Avenir Roman" charset="0"/>
-                <a:ea typeface="Avenir Roman" charset="0"/>
-                <a:cs typeface="Avenir Roman" charset="0"/>
+                <a:latin typeface="Avenir" charset="0"/>
+                <a:ea typeface="Avenir" charset="0"/>
+                <a:cs typeface="Avenir" charset="0"/>
                 <a:sym typeface="Avenir Roman" charset="0"/>
               </a:rPr>
               <a:t>ganado</a:t>
@@ -9076,9 +8463,9 @@
                   <a:srgbClr val="000000"/>
                 </a:solidFill>
                 <a:effectLst/>
-                <a:latin typeface="Avenir Roman" charset="0"/>
-                <a:ea typeface="Avenir Roman" charset="0"/>
-                <a:cs typeface="Avenir Roman" charset="0"/>
+                <a:latin typeface="Avenir" charset="0"/>
+                <a:ea typeface="Avenir" charset="0"/>
+                <a:cs typeface="Avenir" charset="0"/>
                 <a:sym typeface="Avenir Roman" charset="0"/>
               </a:rPr>
               <a:t>. </a:t>
@@ -9089,9 +8476,9 @@
                   <a:srgbClr val="000000"/>
                 </a:solidFill>
                 <a:effectLst/>
-                <a:latin typeface="Avenir Roman" charset="0"/>
-                <a:ea typeface="Avenir Roman" charset="0"/>
-                <a:cs typeface="Avenir Roman" charset="0"/>
+                <a:latin typeface="Avenir" charset="0"/>
+                <a:ea typeface="Avenir" charset="0"/>
+                <a:cs typeface="Avenir" charset="0"/>
                 <a:sym typeface="Avenir Roman" charset="0"/>
               </a:rPr>
               <a:t>Logramos</a:t>
@@ -9102,9 +8489,9 @@
                   <a:srgbClr val="000000"/>
                 </a:solidFill>
                 <a:effectLst/>
-                <a:latin typeface="Avenir Roman" charset="0"/>
-                <a:ea typeface="Avenir Roman" charset="0"/>
-                <a:cs typeface="Avenir Roman" charset="0"/>
+                <a:latin typeface="Avenir" charset="0"/>
+                <a:ea typeface="Avenir" charset="0"/>
+                <a:cs typeface="Avenir" charset="0"/>
                 <a:sym typeface="Avenir Roman" charset="0"/>
               </a:rPr>
               <a:t> </a:t>
@@ -9115,9 +8502,9 @@
                   <a:srgbClr val="000000"/>
                 </a:solidFill>
                 <a:effectLst/>
-                <a:latin typeface="Avenir Roman" charset="0"/>
-                <a:ea typeface="Avenir Roman" charset="0"/>
-                <a:cs typeface="Avenir Roman" charset="0"/>
+                <a:latin typeface="Avenir" charset="0"/>
+                <a:ea typeface="Avenir" charset="0"/>
+                <a:cs typeface="Avenir" charset="0"/>
                 <a:sym typeface="Avenir Roman" charset="0"/>
               </a:rPr>
               <a:t>los</a:t>
@@ -9128,9 +8515,9 @@
                   <a:srgbClr val="000000"/>
                 </a:solidFill>
                 <a:effectLst/>
-                <a:latin typeface="Avenir Roman" charset="0"/>
-                <a:ea typeface="Avenir Roman" charset="0"/>
-                <a:cs typeface="Avenir Roman" charset="0"/>
+                <a:latin typeface="Avenir" charset="0"/>
+                <a:ea typeface="Avenir" charset="0"/>
+                <a:cs typeface="Avenir" charset="0"/>
                 <a:sym typeface="Avenir Roman" charset="0"/>
               </a:rPr>
               <a:t> dos </a:t>
@@ -9141,9 +8528,9 @@
                   <a:srgbClr val="000000"/>
                 </a:solidFill>
                 <a:effectLst/>
-                <a:latin typeface="Avenir Roman" charset="0"/>
-                <a:ea typeface="Avenir Roman" charset="0"/>
-                <a:cs typeface="Avenir Roman" charset="0"/>
+                <a:latin typeface="Avenir" charset="0"/>
+                <a:ea typeface="Avenir" charset="0"/>
+                <a:cs typeface="Avenir" charset="0"/>
                 <a:sym typeface="Avenir Roman" charset="0"/>
               </a:rPr>
               <a:t>objetivos</a:t>
@@ -9154,9 +8541,9 @@
                   <a:srgbClr val="000000"/>
                 </a:solidFill>
                 <a:effectLst/>
-                <a:latin typeface="Avenir Roman" charset="0"/>
-                <a:ea typeface="Avenir Roman" charset="0"/>
-                <a:cs typeface="Avenir Roman" charset="0"/>
+                <a:latin typeface="Avenir" charset="0"/>
+                <a:ea typeface="Avenir" charset="0"/>
+                <a:cs typeface="Avenir" charset="0"/>
                 <a:sym typeface="Avenir Roman" charset="0"/>
               </a:rPr>
               <a:t> </a:t>
@@ -9167,9 +8554,9 @@
                   <a:srgbClr val="000000"/>
                 </a:solidFill>
                 <a:effectLst/>
-                <a:latin typeface="Avenir Roman" charset="0"/>
-                <a:ea typeface="Avenir Roman" charset="0"/>
-                <a:cs typeface="Avenir Roman" charset="0"/>
+                <a:latin typeface="Avenir" charset="0"/>
+                <a:ea typeface="Avenir" charset="0"/>
+                <a:cs typeface="Avenir" charset="0"/>
                 <a:sym typeface="Avenir Roman" charset="0"/>
               </a:rPr>
               <a:t>que</a:t>
@@ -9180,9 +8567,9 @@
                   <a:srgbClr val="000000"/>
                 </a:solidFill>
                 <a:effectLst/>
-                <a:latin typeface="Avenir Roman" charset="0"/>
-                <a:ea typeface="Avenir Roman" charset="0"/>
-                <a:cs typeface="Avenir Roman" charset="0"/>
+                <a:latin typeface="Avenir" charset="0"/>
+                <a:ea typeface="Avenir" charset="0"/>
+                <a:cs typeface="Avenir" charset="0"/>
                 <a:sym typeface="Avenir Roman" charset="0"/>
               </a:rPr>
               <a:t> </a:t>
@@ -9193,9 +8580,9 @@
                   <a:srgbClr val="000000"/>
                 </a:solidFill>
                 <a:effectLst/>
-                <a:latin typeface="Avenir Roman" charset="0"/>
-                <a:ea typeface="Avenir Roman" charset="0"/>
-                <a:cs typeface="Avenir Roman" charset="0"/>
+                <a:latin typeface="Avenir" charset="0"/>
+                <a:ea typeface="Avenir" charset="0"/>
+                <a:cs typeface="Avenir" charset="0"/>
                 <a:sym typeface="Avenir Roman" charset="0"/>
               </a:rPr>
               <a:t>parecían</a:t>
@@ -9206,9 +8593,9 @@
                   <a:srgbClr val="000000"/>
                 </a:solidFill>
                 <a:effectLst/>
-                <a:latin typeface="Avenir Roman" charset="0"/>
-                <a:ea typeface="Avenir Roman" charset="0"/>
-                <a:cs typeface="Avenir Roman" charset="0"/>
+                <a:latin typeface="Avenir" charset="0"/>
+                <a:ea typeface="Avenir" charset="0"/>
+                <a:cs typeface="Avenir" charset="0"/>
                 <a:sym typeface="Avenir Roman" charset="0"/>
               </a:rPr>
               <a:t> incompatibles: </a:t>
@@ -9219,9 +8606,9 @@
                   <a:srgbClr val="000000"/>
                 </a:solidFill>
                 <a:effectLst/>
-                <a:latin typeface="Avenir Roman" charset="0"/>
-                <a:ea typeface="Avenir Roman" charset="0"/>
-                <a:cs typeface="Avenir Roman" charset="0"/>
+                <a:latin typeface="Avenir" charset="0"/>
+                <a:ea typeface="Avenir" charset="0"/>
+                <a:cs typeface="Avenir" charset="0"/>
                 <a:sym typeface="Avenir Roman" charset="0"/>
               </a:rPr>
               <a:t>ahorrar</a:t>
@@ -9232,9 +8619,9 @@
                   <a:srgbClr val="000000"/>
                 </a:solidFill>
                 <a:effectLst/>
-                <a:latin typeface="Avenir Roman" charset="0"/>
-                <a:ea typeface="Avenir Roman" charset="0"/>
-                <a:cs typeface="Avenir Roman" charset="0"/>
+                <a:latin typeface="Avenir" charset="0"/>
+                <a:ea typeface="Avenir" charset="0"/>
+                <a:cs typeface="Avenir" charset="0"/>
                 <a:sym typeface="Avenir Roman" charset="0"/>
               </a:rPr>
               <a:t> dinero y </a:t>
@@ -9245,9 +8632,9 @@
                   <a:srgbClr val="000000"/>
                 </a:solidFill>
                 <a:effectLst/>
-                <a:latin typeface="Avenir Roman" charset="0"/>
-                <a:ea typeface="Avenir Roman" charset="0"/>
-                <a:cs typeface="Avenir Roman" charset="0"/>
+                <a:latin typeface="Avenir" charset="0"/>
+                <a:ea typeface="Avenir" charset="0"/>
+                <a:cs typeface="Avenir" charset="0"/>
                 <a:sym typeface="Avenir Roman" charset="0"/>
               </a:rPr>
               <a:t>garantizar</a:t>
@@ -9258,9 +8645,9 @@
                   <a:srgbClr val="000000"/>
                 </a:solidFill>
                 <a:effectLst/>
-                <a:latin typeface="Avenir Roman" charset="0"/>
-                <a:ea typeface="Avenir Roman" charset="0"/>
-                <a:cs typeface="Avenir Roman" charset="0"/>
+                <a:latin typeface="Avenir" charset="0"/>
+                <a:ea typeface="Avenir" charset="0"/>
+                <a:cs typeface="Avenir" charset="0"/>
                 <a:sym typeface="Avenir Roman" charset="0"/>
               </a:rPr>
               <a:t> la </a:t>
@@ -9271,9 +8658,9 @@
                   <a:srgbClr val="000000"/>
                 </a:solidFill>
                 <a:effectLst/>
-                <a:latin typeface="Avenir Roman" charset="0"/>
-                <a:ea typeface="Avenir Roman" charset="0"/>
-                <a:cs typeface="Avenir Roman" charset="0"/>
+                <a:latin typeface="Avenir" charset="0"/>
+                <a:ea typeface="Avenir" charset="0"/>
+                <a:cs typeface="Avenir" charset="0"/>
                 <a:sym typeface="Avenir Roman" charset="0"/>
               </a:rPr>
               <a:t>seguridad</a:t>
@@ -9284,9 +8671,9 @@
                   <a:srgbClr val="000000"/>
                 </a:solidFill>
                 <a:effectLst/>
-                <a:latin typeface="Avenir Roman" charset="0"/>
-                <a:ea typeface="Avenir Roman" charset="0"/>
-                <a:cs typeface="Avenir Roman" charset="0"/>
+                <a:latin typeface="Avenir" charset="0"/>
+                <a:ea typeface="Avenir" charset="0"/>
+                <a:cs typeface="Avenir" charset="0"/>
                 <a:sym typeface="Avenir Roman" charset="0"/>
               </a:rPr>
               <a:t> </a:t>
@@ -9297,9 +8684,9 @@
                   <a:srgbClr val="000000"/>
                 </a:solidFill>
                 <a:effectLst/>
-                <a:latin typeface="Avenir Roman" charset="0"/>
-                <a:ea typeface="Avenir Roman" charset="0"/>
-                <a:cs typeface="Avenir Roman" charset="0"/>
+                <a:latin typeface="Avenir" charset="0"/>
+                <a:ea typeface="Avenir" charset="0"/>
+                <a:cs typeface="Avenir" charset="0"/>
                 <a:sym typeface="Avenir Roman" charset="0"/>
               </a:rPr>
               <a:t>biológica</a:t>
@@ -9310,9 +8697,9 @@
                   <a:srgbClr val="000000"/>
                 </a:solidFill>
                 <a:effectLst/>
-                <a:latin typeface="Avenir Roman" charset="0"/>
-                <a:ea typeface="Avenir Roman" charset="0"/>
-                <a:cs typeface="Avenir Roman" charset="0"/>
+                <a:latin typeface="Avenir" charset="0"/>
+                <a:ea typeface="Avenir" charset="0"/>
+                <a:cs typeface="Avenir" charset="0"/>
                 <a:sym typeface="Avenir Roman" charset="0"/>
               </a:rPr>
               <a:t>."</a:t>
@@ -9323,9 +8710,9 @@
                   <a:srgbClr val="000000"/>
                 </a:solidFill>
                 <a:effectLst/>
-                <a:latin typeface="Avenir Roman" charset="0"/>
-                <a:ea typeface="Avenir Roman" charset="0"/>
-                <a:cs typeface="Avenir Roman" charset="0"/>
+                <a:latin typeface="Avenir" charset="0"/>
+                <a:ea typeface="Avenir" charset="0"/>
+                <a:cs typeface="Avenir" charset="0"/>
                 <a:sym typeface="Avenir Roman" charset="0"/>
               </a:rPr>
             </a:br>
@@ -9335,9 +8722,9 @@
                   <a:srgbClr val="000000"/>
                 </a:solidFill>
                 <a:effectLst/>
-                <a:latin typeface="Avenir Roman" charset="0"/>
-                <a:ea typeface="Avenir Roman" charset="0"/>
-                <a:cs typeface="Avenir Roman" charset="0"/>
+                <a:latin typeface="Avenir" charset="0"/>
+                <a:ea typeface="Avenir" charset="0"/>
+                <a:cs typeface="Avenir" charset="0"/>
                 <a:sym typeface="Avenir Roman" charset="0"/>
               </a:rPr>
             </a:br>
@@ -9347,9 +8734,9 @@
                   <a:srgbClr val="000000"/>
                 </a:solidFill>
                 <a:effectLst/>
-                <a:latin typeface="Avenir Roman" charset="0"/>
-                <a:ea typeface="Avenir Roman" charset="0"/>
-                <a:cs typeface="Avenir Roman" charset="0"/>
+                <a:latin typeface="Avenir" charset="0"/>
+                <a:ea typeface="Avenir" charset="0"/>
+                <a:cs typeface="Avenir" charset="0"/>
                 <a:sym typeface="Avenir Roman" charset="0"/>
               </a:rPr>
               <a:t>[P1] "Hacia </a:t>
@@ -9360,9 +8747,9 @@
                   <a:srgbClr val="000000"/>
                 </a:solidFill>
                 <a:effectLst/>
-                <a:latin typeface="Avenir Roman" charset="0"/>
-                <a:ea typeface="Avenir Roman" charset="0"/>
-                <a:cs typeface="Avenir Roman" charset="0"/>
+                <a:latin typeface="Avenir" charset="0"/>
+                <a:ea typeface="Avenir" charset="0"/>
+                <a:cs typeface="Avenir" charset="0"/>
                 <a:sym typeface="Avenir Roman" charset="0"/>
               </a:rPr>
               <a:t>el</a:t>
@@ -9373,9 +8760,9 @@
                   <a:srgbClr val="000000"/>
                 </a:solidFill>
                 <a:effectLst/>
-                <a:latin typeface="Avenir Roman" charset="0"/>
-                <a:ea typeface="Avenir Roman" charset="0"/>
-                <a:cs typeface="Avenir Roman" charset="0"/>
+                <a:latin typeface="Avenir" charset="0"/>
+                <a:ea typeface="Avenir" charset="0"/>
+                <a:cs typeface="Avenir" charset="0"/>
                 <a:sym typeface="Avenir Roman" charset="0"/>
               </a:rPr>
               <a:t> </a:t>
@@ -9386,9 +8773,9 @@
                   <a:srgbClr val="000000"/>
                 </a:solidFill>
                 <a:effectLst/>
-                <a:latin typeface="Avenir Roman" charset="0"/>
-                <a:ea typeface="Avenir Roman" charset="0"/>
-                <a:cs typeface="Avenir Roman" charset="0"/>
+                <a:latin typeface="Avenir" charset="0"/>
+                <a:ea typeface="Avenir" charset="0"/>
+                <a:cs typeface="Avenir" charset="0"/>
                 <a:sym typeface="Avenir Roman" charset="0"/>
               </a:rPr>
               <a:t>futuro</a:t>
@@ -9399,9 +8786,9 @@
                   <a:srgbClr val="000000"/>
                 </a:solidFill>
                 <a:effectLst/>
-                <a:latin typeface="Avenir Roman" charset="0"/>
-                <a:ea typeface="Avenir Roman" charset="0"/>
-                <a:cs typeface="Avenir Roman" charset="0"/>
+                <a:latin typeface="Avenir" charset="0"/>
+                <a:ea typeface="Avenir" charset="0"/>
+                <a:cs typeface="Avenir" charset="0"/>
                 <a:sym typeface="Avenir Roman" charset="0"/>
               </a:rPr>
               <a:t>, </a:t>
@@ -9412,9 +8799,9 @@
                   <a:srgbClr val="000000"/>
                 </a:solidFill>
                 <a:effectLst/>
-                <a:latin typeface="Avenir Roman" charset="0"/>
-                <a:ea typeface="Avenir Roman" charset="0"/>
-                <a:cs typeface="Avenir Roman" charset="0"/>
+                <a:latin typeface="Avenir" charset="0"/>
+                <a:ea typeface="Avenir" charset="0"/>
+                <a:cs typeface="Avenir" charset="0"/>
                 <a:sym typeface="Avenir Roman" charset="0"/>
               </a:rPr>
               <a:t>el</a:t>
@@ -9425,9 +8812,9 @@
                   <a:srgbClr val="000000"/>
                 </a:solidFill>
                 <a:effectLst/>
-                <a:latin typeface="Avenir Roman" charset="0"/>
-                <a:ea typeface="Avenir Roman" charset="0"/>
-                <a:cs typeface="Avenir Roman" charset="0"/>
+                <a:latin typeface="Avenir" charset="0"/>
+                <a:ea typeface="Avenir" charset="0"/>
+                <a:cs typeface="Avenir" charset="0"/>
                 <a:sym typeface="Avenir Roman" charset="0"/>
               </a:rPr>
               <a:t> roadmap </a:t>
@@ -9438,9 +8825,9 @@
                   <a:srgbClr val="000000"/>
                 </a:solidFill>
                 <a:effectLst/>
-                <a:latin typeface="Avenir Roman" charset="0"/>
-                <a:ea typeface="Avenir Roman" charset="0"/>
-                <a:cs typeface="Avenir Roman" charset="0"/>
+                <a:latin typeface="Avenir" charset="0"/>
+                <a:ea typeface="Avenir" charset="0"/>
+                <a:cs typeface="Avenir" charset="0"/>
                 <a:sym typeface="Avenir Roman" charset="0"/>
               </a:rPr>
               <a:t>que</a:t>
@@ -9451,9 +8838,9 @@
                   <a:srgbClr val="000000"/>
                 </a:solidFill>
                 <a:effectLst/>
-                <a:latin typeface="Avenir Roman" charset="0"/>
-                <a:ea typeface="Avenir Roman" charset="0"/>
-                <a:cs typeface="Avenir Roman" charset="0"/>
+                <a:latin typeface="Avenir" charset="0"/>
+                <a:ea typeface="Avenir" charset="0"/>
+                <a:cs typeface="Avenir" charset="0"/>
                 <a:sym typeface="Avenir Roman" charset="0"/>
               </a:rPr>
               <a:t> </a:t>
@@ -9464,9 +8851,9 @@
                   <a:srgbClr val="000000"/>
                 </a:solidFill>
                 <a:effectLst/>
-                <a:latin typeface="Avenir Roman" charset="0"/>
-                <a:ea typeface="Avenir Roman" charset="0"/>
-                <a:cs typeface="Avenir Roman" charset="0"/>
+                <a:latin typeface="Avenir" charset="0"/>
+                <a:ea typeface="Avenir" charset="0"/>
+                <a:cs typeface="Avenir" charset="0"/>
                 <a:sym typeface="Avenir Roman" charset="0"/>
               </a:rPr>
               <a:t>ven</a:t>
@@ -9477,9 +8864,9 @@
                   <a:srgbClr val="000000"/>
                 </a:solidFill>
                 <a:effectLst/>
-                <a:latin typeface="Avenir Roman" charset="0"/>
-                <a:ea typeface="Avenir Roman" charset="0"/>
-                <a:cs typeface="Avenir Roman" charset="0"/>
+                <a:latin typeface="Avenir" charset="0"/>
+                <a:ea typeface="Avenir" charset="0"/>
+                <a:cs typeface="Avenir" charset="0"/>
                 <a:sym typeface="Avenir Roman" charset="0"/>
               </a:rPr>
               <a:t> </a:t>
@@ -9490,9 +8877,9 @@
                   <a:srgbClr val="000000"/>
                 </a:solidFill>
                 <a:effectLst/>
-                <a:latin typeface="Avenir Roman" charset="0"/>
-                <a:ea typeface="Avenir Roman" charset="0"/>
-                <a:cs typeface="Avenir Roman" charset="0"/>
+                <a:latin typeface="Avenir" charset="0"/>
+                <a:ea typeface="Avenir" charset="0"/>
+                <a:cs typeface="Avenir" charset="0"/>
                 <a:sym typeface="Avenir Roman" charset="0"/>
               </a:rPr>
               <a:t>en</a:t>
@@ -9503,9 +8890,9 @@
                   <a:srgbClr val="000000"/>
                 </a:solidFill>
                 <a:effectLst/>
-                <a:latin typeface="Avenir Roman" charset="0"/>
-                <a:ea typeface="Avenir Roman" charset="0"/>
-                <a:cs typeface="Avenir Roman" charset="0"/>
+                <a:latin typeface="Avenir" charset="0"/>
+                <a:ea typeface="Avenir" charset="0"/>
+                <a:cs typeface="Avenir" charset="0"/>
                 <a:sym typeface="Avenir Roman" charset="0"/>
               </a:rPr>
               <a:t> </a:t>
@@ -9516,9 +8903,9 @@
                   <a:srgbClr val="000000"/>
                 </a:solidFill>
                 <a:effectLst/>
-                <a:latin typeface="Avenir Roman" charset="0"/>
-                <a:ea typeface="Avenir Roman" charset="0"/>
-                <a:cs typeface="Avenir Roman" charset="0"/>
+                <a:latin typeface="Avenir" charset="0"/>
+                <a:ea typeface="Avenir" charset="0"/>
+                <a:cs typeface="Avenir" charset="0"/>
                 <a:sym typeface="Avenir Roman" charset="0"/>
               </a:rPr>
               <a:t>el</a:t>
@@ -9529,9 +8916,9 @@
                   <a:srgbClr val="000000"/>
                 </a:solidFill>
                 <a:effectLst/>
-                <a:latin typeface="Avenir Roman" charset="0"/>
-                <a:ea typeface="Avenir Roman" charset="0"/>
-                <a:cs typeface="Avenir Roman" charset="0"/>
+                <a:latin typeface="Avenir" charset="0"/>
+                <a:ea typeface="Avenir" charset="0"/>
+                <a:cs typeface="Avenir" charset="0"/>
                 <a:sym typeface="Avenir Roman" charset="0"/>
               </a:rPr>
               <a:t> </a:t>
@@ -9542,9 +8929,9 @@
                   <a:srgbClr val="000000"/>
                 </a:solidFill>
                 <a:effectLst/>
-                <a:latin typeface="Avenir Roman" charset="0"/>
-                <a:ea typeface="Avenir Roman" charset="0"/>
-                <a:cs typeface="Avenir Roman" charset="0"/>
+                <a:latin typeface="Avenir" charset="0"/>
+                <a:ea typeface="Avenir" charset="0"/>
+                <a:cs typeface="Avenir" charset="0"/>
                 <a:sym typeface="Avenir Roman" charset="0"/>
               </a:rPr>
               <a:t>diagrama</a:t>
@@ -9555,9 +8942,9 @@
                   <a:srgbClr val="000000"/>
                 </a:solidFill>
                 <a:effectLst/>
-                <a:latin typeface="Avenir Roman" charset="0"/>
-                <a:ea typeface="Avenir Roman" charset="0"/>
-                <a:cs typeface="Avenir Roman" charset="0"/>
+                <a:latin typeface="Avenir" charset="0"/>
+                <a:ea typeface="Avenir" charset="0"/>
+                <a:cs typeface="Avenir" charset="0"/>
                 <a:sym typeface="Avenir Roman" charset="0"/>
               </a:rPr>
               <a:t> </a:t>
@@ -9568,9 +8955,9 @@
                   <a:srgbClr val="000000"/>
                 </a:solidFill>
                 <a:effectLst/>
-                <a:latin typeface="Avenir Roman" charset="0"/>
-                <a:ea typeface="Avenir Roman" charset="0"/>
-                <a:cs typeface="Avenir Roman" charset="0"/>
+                <a:latin typeface="Avenir" charset="0"/>
+                <a:ea typeface="Avenir" charset="0"/>
+                <a:cs typeface="Avenir" charset="0"/>
                 <a:sym typeface="Avenir Roman" charset="0"/>
               </a:rPr>
               <a:t>tiene</a:t>
@@ -9581,9 +8968,9 @@
                   <a:srgbClr val="000000"/>
                 </a:solidFill>
                 <a:effectLst/>
-                <a:latin typeface="Avenir Roman" charset="0"/>
-                <a:ea typeface="Avenir Roman" charset="0"/>
-                <a:cs typeface="Avenir Roman" charset="0"/>
+                <a:latin typeface="Avenir" charset="0"/>
+                <a:ea typeface="Avenir" charset="0"/>
+                <a:cs typeface="Avenir" charset="0"/>
                 <a:sym typeface="Avenir Roman" charset="0"/>
               </a:rPr>
               <a:t> </a:t>
@@ -9594,9 +8981,9 @@
                   <a:srgbClr val="000000"/>
                 </a:solidFill>
                 <a:effectLst/>
-                <a:latin typeface="Avenir Roman" charset="0"/>
-                <a:ea typeface="Avenir Roman" charset="0"/>
-                <a:cs typeface="Avenir Roman" charset="0"/>
+                <a:latin typeface="Avenir" charset="0"/>
+                <a:ea typeface="Avenir" charset="0"/>
+                <a:cs typeface="Avenir" charset="0"/>
                 <a:sym typeface="Avenir Roman" charset="0"/>
               </a:rPr>
               <a:t>tres</a:t>
@@ -9607,9 +8994,9 @@
                   <a:srgbClr val="000000"/>
                 </a:solidFill>
                 <a:effectLst/>
-                <a:latin typeface="Avenir Roman" charset="0"/>
-                <a:ea typeface="Avenir Roman" charset="0"/>
-                <a:cs typeface="Avenir Roman" charset="0"/>
+                <a:latin typeface="Avenir" charset="0"/>
+                <a:ea typeface="Avenir" charset="0"/>
+                <a:cs typeface="Avenir" charset="0"/>
                 <a:sym typeface="Avenir Roman" charset="0"/>
               </a:rPr>
               <a:t> pasos claros: </a:t>
@@ -9620,9 +9007,9 @@
                   <a:srgbClr val="000000"/>
                 </a:solidFill>
                 <a:effectLst/>
-                <a:latin typeface="Avenir Roman" charset="0"/>
-                <a:ea typeface="Avenir Roman" charset="0"/>
-                <a:cs typeface="Avenir Roman" charset="0"/>
+                <a:latin typeface="Avenir" charset="0"/>
+                <a:ea typeface="Avenir" charset="0"/>
+                <a:cs typeface="Avenir" charset="0"/>
                 <a:sym typeface="Avenir Roman" charset="0"/>
               </a:rPr>
               <a:t>conectar</a:t>
@@ -9633,9 +9020,9 @@
                   <a:srgbClr val="000000"/>
                 </a:solidFill>
                 <a:effectLst/>
-                <a:latin typeface="Avenir Roman" charset="0"/>
-                <a:ea typeface="Avenir Roman" charset="0"/>
-                <a:cs typeface="Avenir Roman" charset="0"/>
+                <a:latin typeface="Avenir" charset="0"/>
+                <a:ea typeface="Avenir" charset="0"/>
+                <a:cs typeface="Avenir" charset="0"/>
                 <a:sym typeface="Avenir Roman" charset="0"/>
               </a:rPr>
               <a:t> </a:t>
@@ -9646,9 +9033,9 @@
                   <a:srgbClr val="000000"/>
                 </a:solidFill>
                 <a:effectLst/>
-                <a:latin typeface="Avenir Roman" charset="0"/>
-                <a:ea typeface="Avenir Roman" charset="0"/>
-                <a:cs typeface="Avenir Roman" charset="0"/>
+                <a:latin typeface="Avenir" charset="0"/>
+                <a:ea typeface="Avenir" charset="0"/>
+                <a:cs typeface="Avenir" charset="0"/>
                 <a:sym typeface="Avenir Roman" charset="0"/>
               </a:rPr>
               <a:t>el</a:t>
@@ -9659,9 +9046,9 @@
                   <a:srgbClr val="000000"/>
                 </a:solidFill>
                 <a:effectLst/>
-                <a:latin typeface="Avenir Roman" charset="0"/>
-                <a:ea typeface="Avenir Roman" charset="0"/>
-                <a:cs typeface="Avenir Roman" charset="0"/>
+                <a:latin typeface="Avenir" charset="0"/>
+                <a:ea typeface="Avenir" charset="0"/>
+                <a:cs typeface="Avenir" charset="0"/>
                 <a:sym typeface="Avenir Roman" charset="0"/>
               </a:rPr>
               <a:t> </a:t>
@@ -9672,9 +9059,9 @@
                   <a:srgbClr val="000000"/>
                 </a:solidFill>
                 <a:effectLst/>
-                <a:latin typeface="Avenir Roman" charset="0"/>
-                <a:ea typeface="Avenir Roman" charset="0"/>
-                <a:cs typeface="Avenir Roman" charset="0"/>
+                <a:latin typeface="Avenir" charset="0"/>
+                <a:ea typeface="Avenir" charset="0"/>
+                <a:cs typeface="Avenir" charset="0"/>
                 <a:sym typeface="Avenir Roman" charset="0"/>
               </a:rPr>
               <a:t>sistema</a:t>
@@ -9685,9 +9072,9 @@
                   <a:srgbClr val="000000"/>
                 </a:solidFill>
                 <a:effectLst/>
-                <a:latin typeface="Avenir Roman" charset="0"/>
-                <a:ea typeface="Avenir Roman" charset="0"/>
-                <a:cs typeface="Avenir Roman" charset="0"/>
+                <a:latin typeface="Avenir" charset="0"/>
+                <a:ea typeface="Avenir" charset="0"/>
+                <a:cs typeface="Avenir" charset="0"/>
                 <a:sym typeface="Avenir Roman" charset="0"/>
               </a:rPr>
               <a:t> a </a:t>
@@ -9698,9 +9085,9 @@
                   <a:srgbClr val="000000"/>
                 </a:solidFill>
                 <a:effectLst/>
-                <a:latin typeface="Avenir Roman" charset="0"/>
-                <a:ea typeface="Avenir Roman" charset="0"/>
-                <a:cs typeface="Avenir Roman" charset="0"/>
+                <a:latin typeface="Avenir" charset="0"/>
+                <a:ea typeface="Avenir" charset="0"/>
+                <a:cs typeface="Avenir" charset="0"/>
                 <a:sym typeface="Avenir Roman" charset="0"/>
               </a:rPr>
               <a:t>bolsas</a:t>
@@ -9711,9 +9098,9 @@
                   <a:srgbClr val="000000"/>
                 </a:solidFill>
                 <a:effectLst/>
-                <a:latin typeface="Avenir Roman" charset="0"/>
-                <a:ea typeface="Avenir Roman" charset="0"/>
-                <a:cs typeface="Avenir Roman" charset="0"/>
+                <a:latin typeface="Avenir" charset="0"/>
+                <a:ea typeface="Avenir" charset="0"/>
+                <a:cs typeface="Avenir" charset="0"/>
                 <a:sym typeface="Avenir Roman" charset="0"/>
               </a:rPr>
               <a:t> de </a:t>
@@ -9724,9 +9111,9 @@
                   <a:srgbClr val="000000"/>
                 </a:solidFill>
                 <a:effectLst/>
-                <a:latin typeface="Avenir Roman" charset="0"/>
-                <a:ea typeface="Avenir Roman" charset="0"/>
-                <a:cs typeface="Avenir Roman" charset="0"/>
+                <a:latin typeface="Avenir" charset="0"/>
+                <a:ea typeface="Avenir" charset="0"/>
+                <a:cs typeface="Avenir" charset="0"/>
                 <a:sym typeface="Avenir Roman" charset="0"/>
               </a:rPr>
               <a:t>valores</a:t>
@@ -9737,9 +9124,9 @@
                   <a:srgbClr val="000000"/>
                 </a:solidFill>
                 <a:effectLst/>
-                <a:latin typeface="Avenir Roman" charset="0"/>
-                <a:ea typeface="Avenir Roman" charset="0"/>
-                <a:cs typeface="Avenir Roman" charset="0"/>
+                <a:latin typeface="Avenir" charset="0"/>
+                <a:ea typeface="Avenir" charset="0"/>
+                <a:cs typeface="Avenir" charset="0"/>
                 <a:sym typeface="Avenir Roman" charset="0"/>
               </a:rPr>
               <a:t> </a:t>
@@ -9750,9 +9137,9 @@
                   <a:srgbClr val="000000"/>
                 </a:solidFill>
                 <a:effectLst/>
-                <a:latin typeface="Avenir Roman" charset="0"/>
-                <a:ea typeface="Avenir Roman" charset="0"/>
-                <a:cs typeface="Avenir Roman" charset="0"/>
+                <a:latin typeface="Avenir" charset="0"/>
+                <a:ea typeface="Avenir" charset="0"/>
+                <a:cs typeface="Avenir" charset="0"/>
                 <a:sym typeface="Avenir Roman" charset="0"/>
               </a:rPr>
               <a:t>agrícolas</a:t>
@@ -9763,9 +9150,9 @@
                   <a:srgbClr val="000000"/>
                 </a:solidFill>
                 <a:effectLst/>
-                <a:latin typeface="Avenir Roman" charset="0"/>
-                <a:ea typeface="Avenir Roman" charset="0"/>
-                <a:cs typeface="Avenir Roman" charset="0"/>
+                <a:latin typeface="Avenir" charset="0"/>
+                <a:ea typeface="Avenir" charset="0"/>
+                <a:cs typeface="Avenir" charset="0"/>
                 <a:sym typeface="Avenir Roman" charset="0"/>
               </a:rPr>
               <a:t> para </a:t>
@@ -9776,9 +9163,9 @@
                   <a:srgbClr val="000000"/>
                 </a:solidFill>
                 <a:effectLst/>
-                <a:latin typeface="Avenir Roman" charset="0"/>
-                <a:ea typeface="Avenir Roman" charset="0"/>
-                <a:cs typeface="Avenir Roman" charset="0"/>
+                <a:latin typeface="Avenir" charset="0"/>
+                <a:ea typeface="Avenir" charset="0"/>
+                <a:cs typeface="Avenir" charset="0"/>
                 <a:sym typeface="Avenir Roman" charset="0"/>
               </a:rPr>
               <a:t>que</a:t>
@@ -9789,9 +9176,9 @@
                   <a:srgbClr val="000000"/>
                 </a:solidFill>
                 <a:effectLst/>
-                <a:latin typeface="Avenir Roman" charset="0"/>
-                <a:ea typeface="Avenir Roman" charset="0"/>
-                <a:cs typeface="Avenir Roman" charset="0"/>
+                <a:latin typeface="Avenir" charset="0"/>
+                <a:ea typeface="Avenir" charset="0"/>
+                <a:cs typeface="Avenir" charset="0"/>
                 <a:sym typeface="Avenir Roman" charset="0"/>
               </a:rPr>
               <a:t> </a:t>
@@ -9802,9 +9189,9 @@
                   <a:srgbClr val="000000"/>
                 </a:solidFill>
                 <a:effectLst/>
-                <a:latin typeface="Avenir Roman" charset="0"/>
-                <a:ea typeface="Avenir Roman" charset="0"/>
-                <a:cs typeface="Avenir Roman" charset="0"/>
+                <a:latin typeface="Avenir" charset="0"/>
+                <a:ea typeface="Avenir" charset="0"/>
+                <a:cs typeface="Avenir" charset="0"/>
                 <a:sym typeface="Avenir Roman" charset="0"/>
               </a:rPr>
               <a:t>los</a:t>
@@ -9815,9 +9202,9 @@
                   <a:srgbClr val="000000"/>
                 </a:solidFill>
                 <a:effectLst/>
-                <a:latin typeface="Avenir Roman" charset="0"/>
-                <a:ea typeface="Avenir Roman" charset="0"/>
-                <a:cs typeface="Avenir Roman" charset="0"/>
+                <a:latin typeface="Avenir" charset="0"/>
+                <a:ea typeface="Avenir" charset="0"/>
+                <a:cs typeface="Avenir" charset="0"/>
                 <a:sym typeface="Avenir Roman" charset="0"/>
               </a:rPr>
               <a:t> </a:t>
@@ -9828,9 +9215,9 @@
                   <a:srgbClr val="000000"/>
                 </a:solidFill>
                 <a:effectLst/>
-                <a:latin typeface="Avenir Roman" charset="0"/>
-                <a:ea typeface="Avenir Roman" charset="0"/>
-                <a:cs typeface="Avenir Roman" charset="0"/>
+                <a:latin typeface="Avenir" charset="0"/>
+                <a:ea typeface="Avenir" charset="0"/>
+                <a:cs typeface="Avenir" charset="0"/>
                 <a:sym typeface="Avenir Roman" charset="0"/>
               </a:rPr>
               <a:t>precios</a:t>
@@ -9841,9 +9228,9 @@
                   <a:srgbClr val="000000"/>
                 </a:solidFill>
                 <a:effectLst/>
-                <a:latin typeface="Avenir Roman" charset="0"/>
-                <a:ea typeface="Avenir Roman" charset="0"/>
-                <a:cs typeface="Avenir Roman" charset="0"/>
+                <a:latin typeface="Avenir" charset="0"/>
+                <a:ea typeface="Avenir" charset="0"/>
+                <a:cs typeface="Avenir" charset="0"/>
                 <a:sym typeface="Avenir Roman" charset="0"/>
               </a:rPr>
               <a:t> se </a:t>
@@ -9854,9 +9241,9 @@
                   <a:srgbClr val="000000"/>
                 </a:solidFill>
                 <a:effectLst/>
-                <a:latin typeface="Avenir Roman" charset="0"/>
-                <a:ea typeface="Avenir Roman" charset="0"/>
-                <a:cs typeface="Avenir Roman" charset="0"/>
+                <a:latin typeface="Avenir" charset="0"/>
+                <a:ea typeface="Avenir" charset="0"/>
+                <a:cs typeface="Avenir" charset="0"/>
                 <a:sym typeface="Avenir Roman" charset="0"/>
               </a:rPr>
               <a:t>actualicen</a:t>
@@ -9867,9 +9254,9 @@
                   <a:srgbClr val="000000"/>
                 </a:solidFill>
                 <a:effectLst/>
-                <a:latin typeface="Avenir Roman" charset="0"/>
-                <a:ea typeface="Avenir Roman" charset="0"/>
-                <a:cs typeface="Avenir Roman" charset="0"/>
+                <a:latin typeface="Avenir" charset="0"/>
+                <a:ea typeface="Avenir" charset="0"/>
+                <a:cs typeface="Avenir" charset="0"/>
                 <a:sym typeface="Avenir Roman" charset="0"/>
               </a:rPr>
               <a:t> </a:t>
@@ -9880,9 +9267,9 @@
                   <a:srgbClr val="000000"/>
                 </a:solidFill>
                 <a:effectLst/>
-                <a:latin typeface="Avenir Roman" charset="0"/>
-                <a:ea typeface="Avenir Roman" charset="0"/>
-                <a:cs typeface="Avenir Roman" charset="0"/>
+                <a:latin typeface="Avenir" charset="0"/>
+                <a:ea typeface="Avenir" charset="0"/>
+                <a:cs typeface="Avenir" charset="0"/>
                 <a:sym typeface="Avenir Roman" charset="0"/>
               </a:rPr>
               <a:t>automáticamente</a:t>
@@ -9893,9 +9280,9 @@
                   <a:srgbClr val="000000"/>
                 </a:solidFill>
                 <a:effectLst/>
-                <a:latin typeface="Avenir Roman" charset="0"/>
-                <a:ea typeface="Avenir Roman" charset="0"/>
-                <a:cs typeface="Avenir Roman" charset="0"/>
+                <a:latin typeface="Avenir" charset="0"/>
+                <a:ea typeface="Avenir" charset="0"/>
+                <a:cs typeface="Avenir" charset="0"/>
                 <a:sym typeface="Avenir Roman" charset="0"/>
               </a:rPr>
               <a:t>; </a:t>
@@ -9906,9 +9293,9 @@
                   <a:srgbClr val="000000"/>
                 </a:solidFill>
                 <a:effectLst/>
-                <a:latin typeface="Avenir Roman" charset="0"/>
-                <a:ea typeface="Avenir Roman" charset="0"/>
-                <a:cs typeface="Avenir Roman" charset="0"/>
+                <a:latin typeface="Avenir" charset="0"/>
+                <a:ea typeface="Avenir" charset="0"/>
+                <a:cs typeface="Avenir" charset="0"/>
                 <a:sym typeface="Avenir Roman" charset="0"/>
               </a:rPr>
               <a:t>llevar</a:t>
@@ -9919,9 +9306,9 @@
                   <a:srgbClr val="000000"/>
                 </a:solidFill>
                 <a:effectLst/>
-                <a:latin typeface="Avenir Roman" charset="0"/>
-                <a:ea typeface="Avenir Roman" charset="0"/>
-                <a:cs typeface="Avenir Roman" charset="0"/>
+                <a:latin typeface="Avenir" charset="0"/>
+                <a:ea typeface="Avenir" charset="0"/>
+                <a:cs typeface="Avenir" charset="0"/>
                 <a:sym typeface="Avenir Roman" charset="0"/>
               </a:rPr>
               <a:t> </a:t>
@@ -9932,9 +9319,9 @@
                   <a:srgbClr val="000000"/>
                 </a:solidFill>
                 <a:effectLst/>
-                <a:latin typeface="Avenir Roman" charset="0"/>
-                <a:ea typeface="Avenir Roman" charset="0"/>
-                <a:cs typeface="Avenir Roman" charset="0"/>
+                <a:latin typeface="Avenir" charset="0"/>
+                <a:ea typeface="Avenir" charset="0"/>
+                <a:cs typeface="Avenir" charset="0"/>
                 <a:sym typeface="Avenir Roman" charset="0"/>
               </a:rPr>
               <a:t>el</a:t>
@@ -9945,9 +9332,9 @@
                   <a:srgbClr val="000000"/>
                 </a:solidFill>
                 <a:effectLst/>
-                <a:latin typeface="Avenir Roman" charset="0"/>
-                <a:ea typeface="Avenir Roman" charset="0"/>
-                <a:cs typeface="Avenir Roman" charset="0"/>
+                <a:latin typeface="Avenir" charset="0"/>
+                <a:ea typeface="Avenir" charset="0"/>
+                <a:cs typeface="Avenir" charset="0"/>
                 <a:sym typeface="Avenir Roman" charset="0"/>
               </a:rPr>
               <a:t> motor de </a:t>
@@ -9958,9 +9345,9 @@
                   <a:srgbClr val="000000"/>
                 </a:solidFill>
                 <a:effectLst/>
-                <a:latin typeface="Avenir Roman" charset="0"/>
-                <a:ea typeface="Avenir Roman" charset="0"/>
-                <a:cs typeface="Avenir Roman" charset="0"/>
+                <a:latin typeface="Avenir" charset="0"/>
+                <a:ea typeface="Avenir" charset="0"/>
+                <a:cs typeface="Avenir" charset="0"/>
                 <a:sym typeface="Avenir Roman" charset="0"/>
               </a:rPr>
               <a:t>cómputo</a:t>
@@ -9971,9 +9358,9 @@
                   <a:srgbClr val="000000"/>
                 </a:solidFill>
                 <a:effectLst/>
-                <a:latin typeface="Avenir Roman" charset="0"/>
-                <a:ea typeface="Avenir Roman" charset="0"/>
-                <a:cs typeface="Avenir Roman" charset="0"/>
+                <a:latin typeface="Avenir" charset="0"/>
+                <a:ea typeface="Avenir" charset="0"/>
+                <a:cs typeface="Avenir" charset="0"/>
                 <a:sym typeface="Avenir Roman" charset="0"/>
               </a:rPr>
               <a:t> al </a:t>
@@ -9984,9 +9371,9 @@
                   <a:srgbClr val="000000"/>
                 </a:solidFill>
                 <a:effectLst/>
-                <a:latin typeface="Avenir Roman" charset="0"/>
-                <a:ea typeface="Avenir Roman" charset="0"/>
-                <a:cs typeface="Avenir Roman" charset="0"/>
+                <a:latin typeface="Avenir" charset="0"/>
+                <a:ea typeface="Avenir" charset="0"/>
+                <a:cs typeface="Avenir" charset="0"/>
                 <a:sym typeface="Avenir Roman" charset="0"/>
               </a:rPr>
               <a:t>dispositivo</a:t>
@@ -9997,9 +9384,9 @@
                   <a:srgbClr val="000000"/>
                 </a:solidFill>
                 <a:effectLst/>
-                <a:latin typeface="Avenir Roman" charset="0"/>
-                <a:ea typeface="Avenir Roman" charset="0"/>
-                <a:cs typeface="Avenir Roman" charset="0"/>
+                <a:latin typeface="Avenir" charset="0"/>
+                <a:ea typeface="Avenir" charset="0"/>
+                <a:cs typeface="Avenir" charset="0"/>
                 <a:sym typeface="Avenir Roman" charset="0"/>
               </a:rPr>
               <a:t> del productor con Edge AI para zonas sin internet; y </a:t>
@@ -10010,9 +9397,9 @@
                   <a:srgbClr val="000000"/>
                 </a:solidFill>
                 <a:effectLst/>
-                <a:latin typeface="Avenir Roman" charset="0"/>
-                <a:ea typeface="Avenir Roman" charset="0"/>
-                <a:cs typeface="Avenir Roman" charset="0"/>
+                <a:latin typeface="Avenir" charset="0"/>
+                <a:ea typeface="Avenir" charset="0"/>
+                <a:cs typeface="Avenir" charset="0"/>
                 <a:sym typeface="Avenir Roman" charset="0"/>
               </a:rPr>
               <a:t>aplicar</a:t>
@@ -10023,9 +9410,9 @@
                   <a:srgbClr val="000000"/>
                 </a:solidFill>
                 <a:effectLst/>
-                <a:latin typeface="Avenir Roman" charset="0"/>
-                <a:ea typeface="Avenir Roman" charset="0"/>
-                <a:cs typeface="Avenir Roman" charset="0"/>
+                <a:latin typeface="Avenir" charset="0"/>
+                <a:ea typeface="Avenir" charset="0"/>
+                <a:cs typeface="Avenir" charset="0"/>
                 <a:sym typeface="Avenir Roman" charset="0"/>
               </a:rPr>
               <a:t> </a:t>
@@ -10036,9 +9423,9 @@
                   <a:srgbClr val="000000"/>
                 </a:solidFill>
                 <a:effectLst/>
-                <a:latin typeface="Avenir Roman" charset="0"/>
-                <a:ea typeface="Avenir Roman" charset="0"/>
-                <a:cs typeface="Avenir Roman" charset="0"/>
+                <a:latin typeface="Avenir" charset="0"/>
+                <a:ea typeface="Avenir" charset="0"/>
+                <a:cs typeface="Avenir" charset="0"/>
                 <a:sym typeface="Avenir Roman" charset="0"/>
               </a:rPr>
               <a:t>el</a:t>
@@ -10049,9 +9436,9 @@
                   <a:srgbClr val="000000"/>
                 </a:solidFill>
                 <a:effectLst/>
-                <a:latin typeface="Avenir Roman" charset="0"/>
-                <a:ea typeface="Avenir Roman" charset="0"/>
-                <a:cs typeface="Avenir Roman" charset="0"/>
+                <a:latin typeface="Avenir" charset="0"/>
+                <a:ea typeface="Avenir" charset="0"/>
+                <a:cs typeface="Avenir" charset="0"/>
                 <a:sym typeface="Avenir Roman" charset="0"/>
               </a:rPr>
               <a:t> </a:t>
@@ -10062,9 +9449,9 @@
                   <a:srgbClr val="000000"/>
                 </a:solidFill>
                 <a:effectLst/>
-                <a:latin typeface="Avenir Roman" charset="0"/>
-                <a:ea typeface="Avenir Roman" charset="0"/>
-                <a:cs typeface="Avenir Roman" charset="0"/>
+                <a:latin typeface="Avenir" charset="0"/>
+                <a:ea typeface="Avenir" charset="0"/>
+                <a:cs typeface="Avenir" charset="0"/>
                 <a:sym typeface="Avenir Roman" charset="0"/>
               </a:rPr>
               <a:t>mismo</a:t>
@@ -10075,9 +9462,9 @@
                   <a:srgbClr val="000000"/>
                 </a:solidFill>
                 <a:effectLst/>
-                <a:latin typeface="Avenir Roman" charset="0"/>
-                <a:ea typeface="Avenir Roman" charset="0"/>
-                <a:cs typeface="Avenir Roman" charset="0"/>
+                <a:latin typeface="Avenir" charset="0"/>
+                <a:ea typeface="Avenir" charset="0"/>
+                <a:cs typeface="Avenir" charset="0"/>
                 <a:sym typeface="Avenir Roman" charset="0"/>
               </a:rPr>
               <a:t> </a:t>
@@ -10088,9 +9475,9 @@
                   <a:srgbClr val="000000"/>
                 </a:solidFill>
                 <a:effectLst/>
-                <a:latin typeface="Avenir Roman" charset="0"/>
-                <a:ea typeface="Avenir Roman" charset="0"/>
-                <a:cs typeface="Avenir Roman" charset="0"/>
+                <a:latin typeface="Avenir" charset="0"/>
+                <a:ea typeface="Avenir" charset="0"/>
+                <a:cs typeface="Avenir" charset="0"/>
                 <a:sym typeface="Avenir Roman" charset="0"/>
               </a:rPr>
               <a:t>modelo</a:t>
@@ -10101,9 +9488,9 @@
                   <a:srgbClr val="000000"/>
                 </a:solidFill>
                 <a:effectLst/>
-                <a:latin typeface="Avenir Roman" charset="0"/>
-                <a:ea typeface="Avenir Roman" charset="0"/>
-                <a:cs typeface="Avenir Roman" charset="0"/>
+                <a:latin typeface="Avenir" charset="0"/>
+                <a:ea typeface="Avenir" charset="0"/>
+                <a:cs typeface="Avenir" charset="0"/>
                 <a:sym typeface="Avenir Roman" charset="0"/>
               </a:rPr>
               <a:t> a </a:t>
@@ -10114,9 +9501,9 @@
                   <a:srgbClr val="000000"/>
                 </a:solidFill>
                 <a:effectLst/>
-                <a:latin typeface="Avenir Roman" charset="0"/>
-                <a:ea typeface="Avenir Roman" charset="0"/>
-                <a:cs typeface="Avenir Roman" charset="0"/>
+                <a:latin typeface="Avenir" charset="0"/>
+                <a:ea typeface="Avenir" charset="0"/>
+                <a:cs typeface="Avenir" charset="0"/>
                 <a:sym typeface="Avenir Roman" charset="0"/>
               </a:rPr>
               <a:t>avicultura</a:t>
@@ -10127,9 +9514,9 @@
                   <a:srgbClr val="000000"/>
                 </a:solidFill>
                 <a:effectLst/>
-                <a:latin typeface="Avenir Roman" charset="0"/>
-                <a:ea typeface="Avenir Roman" charset="0"/>
-                <a:cs typeface="Avenir Roman" charset="0"/>
+                <a:latin typeface="Avenir" charset="0"/>
+                <a:ea typeface="Avenir" charset="0"/>
+                <a:cs typeface="Avenir" charset="0"/>
                 <a:sym typeface="Avenir Roman" charset="0"/>
               </a:rPr>
               <a:t> y </a:t>
@@ -10140,9 +9527,9 @@
                   <a:srgbClr val="000000"/>
                 </a:solidFill>
                 <a:effectLst/>
-                <a:latin typeface="Avenir Roman" charset="0"/>
-                <a:ea typeface="Avenir Roman" charset="0"/>
-                <a:cs typeface="Avenir Roman" charset="0"/>
+                <a:latin typeface="Avenir" charset="0"/>
+                <a:ea typeface="Avenir" charset="0"/>
+                <a:cs typeface="Avenir" charset="0"/>
                 <a:sym typeface="Avenir Roman" charset="0"/>
               </a:rPr>
               <a:t>porcicultura</a:t>
@@ -10153,9 +9540,9 @@
                   <a:srgbClr val="000000"/>
                 </a:solidFill>
                 <a:effectLst/>
-                <a:latin typeface="Avenir Roman" charset="0"/>
-                <a:ea typeface="Avenir Roman" charset="0"/>
-                <a:cs typeface="Avenir Roman" charset="0"/>
+                <a:latin typeface="Avenir" charset="0"/>
+                <a:ea typeface="Avenir" charset="0"/>
+                <a:cs typeface="Avenir" charset="0"/>
                 <a:sym typeface="Avenir Roman" charset="0"/>
               </a:rPr>
               <a:t>."</a:t>
@@ -10166,9 +9553,9 @@
                   <a:srgbClr val="000000"/>
                 </a:solidFill>
                 <a:effectLst/>
-                <a:latin typeface="Avenir Roman" charset="0"/>
-                <a:ea typeface="Avenir Roman" charset="0"/>
-                <a:cs typeface="Avenir Roman" charset="0"/>
+                <a:latin typeface="Avenir" charset="0"/>
+                <a:ea typeface="Avenir" charset="0"/>
+                <a:cs typeface="Avenir" charset="0"/>
                 <a:sym typeface="Avenir Roman" charset="0"/>
               </a:rPr>
             </a:br>
@@ -10178,9 +9565,9 @@
                   <a:srgbClr val="000000"/>
                 </a:solidFill>
                 <a:effectLst/>
-                <a:latin typeface="Avenir Roman" charset="0"/>
-                <a:ea typeface="Avenir Roman" charset="0"/>
-                <a:cs typeface="Avenir Roman" charset="0"/>
+                <a:latin typeface="Avenir" charset="0"/>
+                <a:ea typeface="Avenir" charset="0"/>
+                <a:cs typeface="Avenir" charset="0"/>
                 <a:sym typeface="Avenir Roman" charset="0"/>
               </a:rPr>
             </a:br>
@@ -10190,9 +9577,9 @@
                   <a:srgbClr val="000000"/>
                 </a:solidFill>
                 <a:effectLst/>
-                <a:latin typeface="Avenir Roman" charset="0"/>
-                <a:ea typeface="Avenir Roman" charset="0"/>
-                <a:cs typeface="Avenir Roman" charset="0"/>
+                <a:latin typeface="Avenir" charset="0"/>
+                <a:ea typeface="Avenir" charset="0"/>
+                <a:cs typeface="Avenir" charset="0"/>
                 <a:sym typeface="Avenir Roman" charset="0"/>
               </a:rPr>
               <a:t>[P3] "El motor </a:t>
@@ -10203,9 +9590,9 @@
                   <a:srgbClr val="000000"/>
                 </a:solidFill>
                 <a:effectLst/>
-                <a:latin typeface="Avenir Roman" charset="0"/>
-                <a:ea typeface="Avenir Roman" charset="0"/>
-                <a:cs typeface="Avenir Roman" charset="0"/>
+                <a:latin typeface="Avenir" charset="0"/>
+                <a:ea typeface="Avenir" charset="0"/>
+                <a:cs typeface="Avenir" charset="0"/>
                 <a:sym typeface="Avenir Roman" charset="0"/>
               </a:rPr>
               <a:t>matemático</a:t>
@@ -10216,9 +9603,9 @@
                   <a:srgbClr val="000000"/>
                 </a:solidFill>
                 <a:effectLst/>
-                <a:latin typeface="Avenir Roman" charset="0"/>
-                <a:ea typeface="Avenir Roman" charset="0"/>
-                <a:cs typeface="Avenir Roman" charset="0"/>
+                <a:latin typeface="Avenir" charset="0"/>
+                <a:ea typeface="Avenir" charset="0"/>
+                <a:cs typeface="Avenir" charset="0"/>
                 <a:sym typeface="Avenir Roman" charset="0"/>
               </a:rPr>
               <a:t> y la </a:t>
@@ -10229,9 +9616,9 @@
                   <a:srgbClr val="000000"/>
                 </a:solidFill>
                 <a:effectLst/>
-                <a:latin typeface="Avenir Roman" charset="0"/>
-                <a:ea typeface="Avenir Roman" charset="0"/>
-                <a:cs typeface="Avenir Roman" charset="0"/>
+                <a:latin typeface="Avenir" charset="0"/>
+                <a:ea typeface="Avenir" charset="0"/>
+                <a:cs typeface="Avenir" charset="0"/>
                 <a:sym typeface="Avenir Roman" charset="0"/>
               </a:rPr>
               <a:t>arquitectura</a:t>
@@ -10242,9 +9629,9 @@
                   <a:srgbClr val="000000"/>
                 </a:solidFill>
                 <a:effectLst/>
-                <a:latin typeface="Avenir Roman" charset="0"/>
-                <a:ea typeface="Avenir Roman" charset="0"/>
-                <a:cs typeface="Avenir Roman" charset="0"/>
+                <a:latin typeface="Avenir" charset="0"/>
+                <a:ea typeface="Avenir" charset="0"/>
+                <a:cs typeface="Avenir" charset="0"/>
                 <a:sym typeface="Avenir Roman" charset="0"/>
               </a:rPr>
               <a:t> </a:t>
@@ -10255,9 +9642,9 @@
                   <a:srgbClr val="000000"/>
                 </a:solidFill>
                 <a:effectLst/>
-                <a:latin typeface="Avenir Roman" charset="0"/>
-                <a:ea typeface="Avenir Roman" charset="0"/>
-                <a:cs typeface="Avenir Roman" charset="0"/>
+                <a:latin typeface="Avenir" charset="0"/>
+                <a:ea typeface="Avenir" charset="0"/>
+                <a:cs typeface="Avenir" charset="0"/>
                 <a:sym typeface="Avenir Roman" charset="0"/>
               </a:rPr>
               <a:t>que</a:t>
@@ -10268,9 +9655,9 @@
                   <a:srgbClr val="000000"/>
                 </a:solidFill>
                 <a:effectLst/>
-                <a:latin typeface="Avenir Roman" charset="0"/>
-                <a:ea typeface="Avenir Roman" charset="0"/>
-                <a:cs typeface="Avenir Roman" charset="0"/>
+                <a:latin typeface="Avenir" charset="0"/>
+                <a:ea typeface="Avenir" charset="0"/>
+                <a:cs typeface="Avenir" charset="0"/>
                 <a:sym typeface="Avenir Roman" charset="0"/>
               </a:rPr>
               <a:t> </a:t>
@@ -10281,9 +9668,9 @@
                   <a:srgbClr val="000000"/>
                 </a:solidFill>
                 <a:effectLst/>
-                <a:latin typeface="Avenir Roman" charset="0"/>
-                <a:ea typeface="Avenir Roman" charset="0"/>
-                <a:cs typeface="Avenir Roman" charset="0"/>
+                <a:latin typeface="Avenir" charset="0"/>
+                <a:ea typeface="Avenir" charset="0"/>
+                <a:cs typeface="Avenir" charset="0"/>
                 <a:sym typeface="Avenir Roman" charset="0"/>
               </a:rPr>
               <a:t>construimos</a:t>
@@ -10294,9 +9681,9 @@
                   <a:srgbClr val="000000"/>
                 </a:solidFill>
                 <a:effectLst/>
-                <a:latin typeface="Avenir Roman" charset="0"/>
-                <a:ea typeface="Avenir Roman" charset="0"/>
-                <a:cs typeface="Avenir Roman" charset="0"/>
+                <a:latin typeface="Avenir" charset="0"/>
+                <a:ea typeface="Avenir" charset="0"/>
+                <a:cs typeface="Avenir" charset="0"/>
                 <a:sym typeface="Avenir Roman" charset="0"/>
               </a:rPr>
               <a:t> son </a:t>
@@ -10307,9 +9694,9 @@
                   <a:srgbClr val="000000"/>
                 </a:solidFill>
                 <a:effectLst/>
-                <a:latin typeface="Avenir Roman" charset="0"/>
-                <a:ea typeface="Avenir Roman" charset="0"/>
-                <a:cs typeface="Avenir Roman" charset="0"/>
+                <a:latin typeface="Avenir" charset="0"/>
+                <a:ea typeface="Avenir" charset="0"/>
+                <a:cs typeface="Avenir" charset="0"/>
                 <a:sym typeface="Avenir Roman" charset="0"/>
               </a:rPr>
               <a:t>reutilizables</a:t>
@@ -10320,9 +9707,9 @@
                   <a:srgbClr val="000000"/>
                 </a:solidFill>
                 <a:effectLst/>
-                <a:latin typeface="Avenir Roman" charset="0"/>
-                <a:ea typeface="Avenir Roman" charset="0"/>
-                <a:cs typeface="Avenir Roman" charset="0"/>
+                <a:latin typeface="Avenir" charset="0"/>
+                <a:ea typeface="Avenir" charset="0"/>
+                <a:cs typeface="Avenir" charset="0"/>
                 <a:sym typeface="Avenir Roman" charset="0"/>
               </a:rPr>
               <a:t> para </a:t>
@@ -10333,9 +9720,9 @@
                   <a:srgbClr val="000000"/>
                 </a:solidFill>
                 <a:effectLst/>
-                <a:latin typeface="Avenir Roman" charset="0"/>
-                <a:ea typeface="Avenir Roman" charset="0"/>
-                <a:cs typeface="Avenir Roman" charset="0"/>
+                <a:latin typeface="Avenir" charset="0"/>
+                <a:ea typeface="Avenir" charset="0"/>
+                <a:cs typeface="Avenir" charset="0"/>
                 <a:sym typeface="Avenir Roman" charset="0"/>
               </a:rPr>
               <a:t>cualquier</a:t>
@@ -10346,9 +9733,9 @@
                   <a:srgbClr val="000000"/>
                 </a:solidFill>
                 <a:effectLst/>
-                <a:latin typeface="Avenir Roman" charset="0"/>
-                <a:ea typeface="Avenir Roman" charset="0"/>
-                <a:cs typeface="Avenir Roman" charset="0"/>
+                <a:latin typeface="Avenir" charset="0"/>
+                <a:ea typeface="Avenir" charset="0"/>
+                <a:cs typeface="Avenir" charset="0"/>
                 <a:sym typeface="Avenir Roman" charset="0"/>
               </a:rPr>
               <a:t> </a:t>
@@ -10359,9 +9746,9 @@
                   <a:srgbClr val="000000"/>
                 </a:solidFill>
                 <a:effectLst/>
-                <a:latin typeface="Avenir Roman" charset="0"/>
-                <a:ea typeface="Avenir Roman" charset="0"/>
-                <a:cs typeface="Avenir Roman" charset="0"/>
+                <a:latin typeface="Avenir" charset="0"/>
+                <a:ea typeface="Avenir" charset="0"/>
+                <a:cs typeface="Avenir" charset="0"/>
                 <a:sym typeface="Avenir Roman" charset="0"/>
               </a:rPr>
               <a:t>especie</a:t>
@@ -10372,9 +9759,9 @@
                   <a:srgbClr val="000000"/>
                 </a:solidFill>
                 <a:effectLst/>
-                <a:latin typeface="Avenir Roman" charset="0"/>
-                <a:ea typeface="Avenir Roman" charset="0"/>
-                <a:cs typeface="Avenir Roman" charset="0"/>
+                <a:latin typeface="Avenir" charset="0"/>
+                <a:ea typeface="Avenir" charset="0"/>
+                <a:cs typeface="Avenir" charset="0"/>
                 <a:sym typeface="Avenir Roman" charset="0"/>
               </a:rPr>
               <a:t> </a:t>
@@ -10385,9 +9772,9 @@
                   <a:srgbClr val="000000"/>
                 </a:solidFill>
                 <a:effectLst/>
-                <a:latin typeface="Avenir Roman" charset="0"/>
-                <a:ea typeface="Avenir Roman" charset="0"/>
-                <a:cs typeface="Avenir Roman" charset="0"/>
+                <a:latin typeface="Avenir" charset="0"/>
+                <a:ea typeface="Avenir" charset="0"/>
+                <a:cs typeface="Avenir" charset="0"/>
                 <a:sym typeface="Avenir Roman" charset="0"/>
               </a:rPr>
               <a:t>productiva</a:t>
@@ -10398,9 +9785,9 @@
                   <a:srgbClr val="000000"/>
                 </a:solidFill>
                 <a:effectLst/>
-                <a:latin typeface="Avenir Roman" charset="0"/>
-                <a:ea typeface="Avenir Roman" charset="0"/>
-                <a:cs typeface="Avenir Roman" charset="0"/>
+                <a:latin typeface="Avenir" charset="0"/>
+                <a:ea typeface="Avenir" charset="0"/>
+                <a:cs typeface="Avenir" charset="0"/>
                 <a:sym typeface="Avenir Roman" charset="0"/>
               </a:rPr>
               <a:t>. Caporal AI es, </a:t>
@@ -10411,9 +9798,9 @@
                   <a:srgbClr val="000000"/>
                 </a:solidFill>
                 <a:effectLst/>
-                <a:latin typeface="Avenir Roman" charset="0"/>
-                <a:ea typeface="Avenir Roman" charset="0"/>
-                <a:cs typeface="Avenir Roman" charset="0"/>
+                <a:latin typeface="Avenir" charset="0"/>
+                <a:ea typeface="Avenir" charset="0"/>
+                <a:cs typeface="Avenir" charset="0"/>
                 <a:sym typeface="Avenir Roman" charset="0"/>
               </a:rPr>
               <a:t>en</a:t>
@@ -10424,9 +9811,9 @@
                   <a:srgbClr val="000000"/>
                 </a:solidFill>
                 <a:effectLst/>
-                <a:latin typeface="Avenir Roman" charset="0"/>
-                <a:ea typeface="Avenir Roman" charset="0"/>
-                <a:cs typeface="Avenir Roman" charset="0"/>
+                <a:latin typeface="Avenir" charset="0"/>
+                <a:ea typeface="Avenir" charset="0"/>
+                <a:cs typeface="Avenir" charset="0"/>
                 <a:sym typeface="Avenir Roman" charset="0"/>
               </a:rPr>
               <a:t> </a:t>
@@ -10437,9 +9824,9 @@
                   <a:srgbClr val="000000"/>
                 </a:solidFill>
                 <a:effectLst/>
-                <a:latin typeface="Avenir Roman" charset="0"/>
-                <a:ea typeface="Avenir Roman" charset="0"/>
-                <a:cs typeface="Avenir Roman" charset="0"/>
+                <a:latin typeface="Avenir" charset="0"/>
+                <a:ea typeface="Avenir" charset="0"/>
+                <a:cs typeface="Avenir" charset="0"/>
                 <a:sym typeface="Avenir Roman" charset="0"/>
               </a:rPr>
               <a:t>esencia</a:t>
@@ -10450,9 +9837,9 @@
                   <a:srgbClr val="000000"/>
                 </a:solidFill>
                 <a:effectLst/>
-                <a:latin typeface="Avenir Roman" charset="0"/>
-                <a:ea typeface="Avenir Roman" charset="0"/>
-                <a:cs typeface="Avenir Roman" charset="0"/>
+                <a:latin typeface="Avenir" charset="0"/>
+                <a:ea typeface="Avenir" charset="0"/>
+                <a:cs typeface="Avenir" charset="0"/>
                 <a:sym typeface="Avenir Roman" charset="0"/>
               </a:rPr>
               <a:t>, </a:t>
@@ -10463,9 +9850,9 @@
                   <a:srgbClr val="000000"/>
                 </a:solidFill>
                 <a:effectLst/>
-                <a:latin typeface="Avenir Roman" charset="0"/>
-                <a:ea typeface="Avenir Roman" charset="0"/>
-                <a:cs typeface="Avenir Roman" charset="0"/>
+                <a:latin typeface="Avenir" charset="0"/>
+                <a:ea typeface="Avenir" charset="0"/>
+                <a:cs typeface="Avenir" charset="0"/>
                 <a:sym typeface="Avenir Roman" charset="0"/>
               </a:rPr>
               <a:t>una</a:t>
@@ -10476,9 +9863,9 @@
                   <a:srgbClr val="000000"/>
                 </a:solidFill>
                 <a:effectLst/>
-                <a:latin typeface="Avenir Roman" charset="0"/>
-                <a:ea typeface="Avenir Roman" charset="0"/>
-                <a:cs typeface="Avenir Roman" charset="0"/>
+                <a:latin typeface="Avenir" charset="0"/>
+                <a:ea typeface="Avenir" charset="0"/>
+                <a:cs typeface="Avenir" charset="0"/>
                 <a:sym typeface="Avenir Roman" charset="0"/>
               </a:rPr>
               <a:t> </a:t>
@@ -10489,9 +9876,9 @@
                   <a:srgbClr val="000000"/>
                 </a:solidFill>
                 <a:effectLst/>
-                <a:latin typeface="Avenir Roman" charset="0"/>
-                <a:ea typeface="Avenir Roman" charset="0"/>
-                <a:cs typeface="Avenir Roman" charset="0"/>
+                <a:latin typeface="Avenir" charset="0"/>
+                <a:ea typeface="Avenir" charset="0"/>
+                <a:cs typeface="Avenir" charset="0"/>
                 <a:sym typeface="Avenir Roman" charset="0"/>
               </a:rPr>
               <a:t>plataforma</a:t>
@@ -10502,9 +9889,9 @@
                   <a:srgbClr val="000000"/>
                 </a:solidFill>
                 <a:effectLst/>
-                <a:latin typeface="Avenir Roman" charset="0"/>
-                <a:ea typeface="Avenir Roman" charset="0"/>
-                <a:cs typeface="Avenir Roman" charset="0"/>
+                <a:latin typeface="Avenir" charset="0"/>
+                <a:ea typeface="Avenir" charset="0"/>
+                <a:cs typeface="Avenir" charset="0"/>
                 <a:sym typeface="Avenir Roman" charset="0"/>
               </a:rPr>
               <a:t> de </a:t>
@@ -10515,9 +9902,9 @@
                   <a:srgbClr val="000000"/>
                 </a:solidFill>
                 <a:effectLst/>
-                <a:latin typeface="Avenir Roman" charset="0"/>
-                <a:ea typeface="Avenir Roman" charset="0"/>
-                <a:cs typeface="Avenir Roman" charset="0"/>
+                <a:latin typeface="Avenir" charset="0"/>
+                <a:ea typeface="Avenir" charset="0"/>
+                <a:cs typeface="Avenir" charset="0"/>
                 <a:sym typeface="Avenir Roman" charset="0"/>
               </a:rPr>
               <a:t>optimización</a:t>
@@ -10528,9 +9915,9 @@
                   <a:srgbClr val="000000"/>
                 </a:solidFill>
                 <a:effectLst/>
-                <a:latin typeface="Avenir Roman" charset="0"/>
-                <a:ea typeface="Avenir Roman" charset="0"/>
-                <a:cs typeface="Avenir Roman" charset="0"/>
+                <a:latin typeface="Avenir" charset="0"/>
+                <a:ea typeface="Avenir" charset="0"/>
+                <a:cs typeface="Avenir" charset="0"/>
                 <a:sym typeface="Avenir Roman" charset="0"/>
               </a:rPr>
               <a:t> </a:t>
@@ -10541,9 +9928,9 @@
                   <a:srgbClr val="000000"/>
                 </a:solidFill>
                 <a:effectLst/>
-                <a:latin typeface="Avenir Roman" charset="0"/>
-                <a:ea typeface="Avenir Roman" charset="0"/>
-                <a:cs typeface="Avenir Roman" charset="0"/>
+                <a:latin typeface="Avenir" charset="0"/>
+                <a:ea typeface="Avenir" charset="0"/>
+                <a:cs typeface="Avenir" charset="0"/>
                 <a:sym typeface="Avenir Roman" charset="0"/>
               </a:rPr>
               <a:t>nutricional</a:t>
@@ -10554,9 +9941,9 @@
                   <a:srgbClr val="000000"/>
                 </a:solidFill>
                 <a:effectLst/>
-                <a:latin typeface="Avenir Roman" charset="0"/>
-                <a:ea typeface="Avenir Roman" charset="0"/>
-                <a:cs typeface="Avenir Roman" charset="0"/>
+                <a:latin typeface="Avenir" charset="0"/>
+                <a:ea typeface="Avenir" charset="0"/>
+                <a:cs typeface="Avenir" charset="0"/>
                 <a:sym typeface="Avenir Roman" charset="0"/>
               </a:rPr>
               <a:t> con IA </a:t>
@@ -10567,9 +9954,9 @@
                   <a:srgbClr val="000000"/>
                 </a:solidFill>
                 <a:effectLst/>
-                <a:latin typeface="Avenir Roman" charset="0"/>
-                <a:ea typeface="Avenir Roman" charset="0"/>
-                <a:cs typeface="Avenir Roman" charset="0"/>
+                <a:latin typeface="Avenir" charset="0"/>
+                <a:ea typeface="Avenir" charset="0"/>
+                <a:cs typeface="Avenir" charset="0"/>
                 <a:sym typeface="Avenir Roman" charset="0"/>
               </a:rPr>
               <a:t>conversacional</a:t>
@@ -10580,9 +9967,9 @@
                   <a:srgbClr val="000000"/>
                 </a:solidFill>
                 <a:effectLst/>
-                <a:latin typeface="Avenir Roman" charset="0"/>
-                <a:ea typeface="Avenir Roman" charset="0"/>
-                <a:cs typeface="Avenir Roman" charset="0"/>
+                <a:latin typeface="Avenir" charset="0"/>
+                <a:ea typeface="Avenir" charset="0"/>
+                <a:cs typeface="Avenir" charset="0"/>
                 <a:sym typeface="Avenir Roman" charset="0"/>
               </a:rPr>
               <a:t>. </a:t>
@@ -10593,9 +9980,9 @@
                   <a:srgbClr val="000000"/>
                 </a:solidFill>
                 <a:effectLst/>
-                <a:latin typeface="Avenir Roman" charset="0"/>
-                <a:ea typeface="Avenir Roman" charset="0"/>
-                <a:cs typeface="Avenir Roman" charset="0"/>
+                <a:latin typeface="Avenir" charset="0"/>
+                <a:ea typeface="Avenir" charset="0"/>
+                <a:cs typeface="Avenir" charset="0"/>
                 <a:sym typeface="Avenir Roman" charset="0"/>
               </a:rPr>
               <a:t>Muchas</a:t>
@@ -10606,9 +9993,9 @@
                   <a:srgbClr val="000000"/>
                 </a:solidFill>
                 <a:effectLst/>
-                <a:latin typeface="Avenir Roman" charset="0"/>
-                <a:ea typeface="Avenir Roman" charset="0"/>
-                <a:cs typeface="Avenir Roman" charset="0"/>
+                <a:latin typeface="Avenir" charset="0"/>
+                <a:ea typeface="Avenir" charset="0"/>
+                <a:cs typeface="Avenir" charset="0"/>
                 <a:sym typeface="Avenir Roman" charset="0"/>
               </a:rPr>
               <a:t> gracias </a:t>
@@ -10619,9 +10006,9 @@
                   <a:srgbClr val="000000"/>
                 </a:solidFill>
                 <a:effectLst/>
-                <a:latin typeface="Avenir Roman" charset="0"/>
-                <a:ea typeface="Avenir Roman" charset="0"/>
-                <a:cs typeface="Avenir Roman" charset="0"/>
+                <a:latin typeface="Avenir" charset="0"/>
+                <a:ea typeface="Avenir" charset="0"/>
+                <a:cs typeface="Avenir" charset="0"/>
                 <a:sym typeface="Avenir Roman" charset="0"/>
               </a:rPr>
               <a:t>por</a:t>
@@ -10632,9 +10019,9 @@
                   <a:srgbClr val="000000"/>
                 </a:solidFill>
                 <a:effectLst/>
-                <a:latin typeface="Avenir Roman" charset="0"/>
-                <a:ea typeface="Avenir Roman" charset="0"/>
-                <a:cs typeface="Avenir Roman" charset="0"/>
+                <a:latin typeface="Avenir" charset="0"/>
+                <a:ea typeface="Avenir" charset="0"/>
+                <a:cs typeface="Avenir" charset="0"/>
                 <a:sym typeface="Avenir Roman" charset="0"/>
               </a:rPr>
               <a:t> </a:t>
@@ -10645,9 +10032,9 @@
                   <a:srgbClr val="000000"/>
                 </a:solidFill>
                 <a:effectLst/>
-                <a:latin typeface="Avenir Roman" charset="0"/>
-                <a:ea typeface="Avenir Roman" charset="0"/>
-                <a:cs typeface="Avenir Roman" charset="0"/>
+                <a:latin typeface="Avenir" charset="0"/>
+                <a:ea typeface="Avenir" charset="0"/>
+                <a:cs typeface="Avenir" charset="0"/>
                 <a:sym typeface="Avenir Roman" charset="0"/>
               </a:rPr>
               <a:t>su</a:t>
@@ -10658,9 +10045,9 @@
                   <a:srgbClr val="000000"/>
                 </a:solidFill>
                 <a:effectLst/>
-                <a:latin typeface="Avenir Roman" charset="0"/>
-                <a:ea typeface="Avenir Roman" charset="0"/>
-                <a:cs typeface="Avenir Roman" charset="0"/>
+                <a:latin typeface="Avenir" charset="0"/>
+                <a:ea typeface="Avenir" charset="0"/>
+                <a:cs typeface="Avenir" charset="0"/>
                 <a:sym typeface="Avenir Roman" charset="0"/>
               </a:rPr>
               <a:t> </a:t>
@@ -10671,9 +10058,9 @@
                   <a:srgbClr val="000000"/>
                 </a:solidFill>
                 <a:effectLst/>
-                <a:latin typeface="Avenir Roman" charset="0"/>
-                <a:ea typeface="Avenir Roman" charset="0"/>
-                <a:cs typeface="Avenir Roman" charset="0"/>
+                <a:latin typeface="Avenir" charset="0"/>
+                <a:ea typeface="Avenir" charset="0"/>
+                <a:cs typeface="Avenir" charset="0"/>
                 <a:sym typeface="Avenir Roman" charset="0"/>
               </a:rPr>
               <a:t>atención</a:t>
@@ -10684,9 +10071,9 @@
                   <a:srgbClr val="000000"/>
                 </a:solidFill>
                 <a:effectLst/>
-                <a:latin typeface="Avenir Roman" charset="0"/>
-                <a:ea typeface="Avenir Roman" charset="0"/>
-                <a:cs typeface="Avenir Roman" charset="0"/>
+                <a:latin typeface="Avenir" charset="0"/>
+                <a:ea typeface="Avenir" charset="0"/>
+                <a:cs typeface="Avenir" charset="0"/>
                 <a:sym typeface="Avenir Roman" charset="0"/>
               </a:rPr>
               <a:t>, </a:t>
@@ -10697,9 +10084,9 @@
                   <a:srgbClr val="000000"/>
                 </a:solidFill>
                 <a:effectLst/>
-                <a:latin typeface="Avenir Roman" charset="0"/>
-                <a:ea typeface="Avenir Roman" charset="0"/>
-                <a:cs typeface="Avenir Roman" charset="0"/>
+                <a:latin typeface="Avenir" charset="0"/>
+                <a:ea typeface="Avenir" charset="0"/>
+                <a:cs typeface="Avenir" charset="0"/>
                 <a:sym typeface="Avenir Roman" charset="0"/>
               </a:rPr>
               <a:t>estamos</a:t>
@@ -10710,9 +10097,9 @@
                   <a:srgbClr val="000000"/>
                 </a:solidFill>
                 <a:effectLst/>
-                <a:latin typeface="Avenir Roman" charset="0"/>
-                <a:ea typeface="Avenir Roman" charset="0"/>
-                <a:cs typeface="Avenir Roman" charset="0"/>
+                <a:latin typeface="Avenir" charset="0"/>
+                <a:ea typeface="Avenir" charset="0"/>
+                <a:cs typeface="Avenir" charset="0"/>
                 <a:sym typeface="Avenir Roman" charset="0"/>
               </a:rPr>
               <a:t> a </a:t>
@@ -10723,9 +10110,9 @@
                   <a:srgbClr val="000000"/>
                 </a:solidFill>
                 <a:effectLst/>
-                <a:latin typeface="Avenir Roman" charset="0"/>
-                <a:ea typeface="Avenir Roman" charset="0"/>
-                <a:cs typeface="Avenir Roman" charset="0"/>
+                <a:latin typeface="Avenir" charset="0"/>
+                <a:ea typeface="Avenir" charset="0"/>
+                <a:cs typeface="Avenir" charset="0"/>
                 <a:sym typeface="Avenir Roman" charset="0"/>
               </a:rPr>
               <a:t>su</a:t>
@@ -10736,9 +10123,9 @@
                   <a:srgbClr val="000000"/>
                 </a:solidFill>
                 <a:effectLst/>
-                <a:latin typeface="Avenir Roman" charset="0"/>
-                <a:ea typeface="Avenir Roman" charset="0"/>
-                <a:cs typeface="Avenir Roman" charset="0"/>
+                <a:latin typeface="Avenir" charset="0"/>
+                <a:ea typeface="Avenir" charset="0"/>
+                <a:cs typeface="Avenir" charset="0"/>
                 <a:sym typeface="Avenir Roman" charset="0"/>
               </a:rPr>
               <a:t> </a:t>
@@ -10749,9 +10136,9 @@
                   <a:srgbClr val="000000"/>
                 </a:solidFill>
                 <a:effectLst/>
-                <a:latin typeface="Avenir Roman" charset="0"/>
-                <a:ea typeface="Avenir Roman" charset="0"/>
-                <a:cs typeface="Avenir Roman" charset="0"/>
+                <a:latin typeface="Avenir" charset="0"/>
+                <a:ea typeface="Avenir" charset="0"/>
+                <a:cs typeface="Avenir" charset="0"/>
                 <a:sym typeface="Avenir Roman" charset="0"/>
               </a:rPr>
               <a:t>disposición</a:t>
@@ -10762,9 +10149,9 @@
                   <a:srgbClr val="000000"/>
                 </a:solidFill>
                 <a:effectLst/>
-                <a:latin typeface="Avenir Roman" charset="0"/>
-                <a:ea typeface="Avenir Roman" charset="0"/>
-                <a:cs typeface="Avenir Roman" charset="0"/>
+                <a:latin typeface="Avenir" charset="0"/>
+                <a:ea typeface="Avenir" charset="0"/>
+                <a:cs typeface="Avenir" charset="0"/>
                 <a:sym typeface="Avenir Roman" charset="0"/>
               </a:rPr>
               <a:t> para </a:t>
@@ -10775,9 +10162,9 @@
                   <a:srgbClr val="000000"/>
                 </a:solidFill>
                 <a:effectLst/>
-                <a:latin typeface="Avenir Roman" charset="0"/>
-                <a:ea typeface="Avenir Roman" charset="0"/>
-                <a:cs typeface="Avenir Roman" charset="0"/>
+                <a:latin typeface="Avenir" charset="0"/>
+                <a:ea typeface="Avenir" charset="0"/>
+                <a:cs typeface="Avenir" charset="0"/>
                 <a:sym typeface="Avenir Roman" charset="0"/>
               </a:rPr>
               <a:t>cualquier</a:t>
@@ -10788,9 +10175,9 @@
                   <a:srgbClr val="000000"/>
                 </a:solidFill>
                 <a:effectLst/>
-                <a:latin typeface="Avenir Roman" charset="0"/>
-                <a:ea typeface="Avenir Roman" charset="0"/>
-                <a:cs typeface="Avenir Roman" charset="0"/>
+                <a:latin typeface="Avenir" charset="0"/>
+                <a:ea typeface="Avenir" charset="0"/>
+                <a:cs typeface="Avenir" charset="0"/>
                 <a:sym typeface="Avenir Roman" charset="0"/>
               </a:rPr>
               <a:t> </a:t>
@@ -10801,9 +10188,9 @@
                   <a:srgbClr val="000000"/>
                 </a:solidFill>
                 <a:effectLst/>
-                <a:latin typeface="Avenir Roman" charset="0"/>
-                <a:ea typeface="Avenir Roman" charset="0"/>
-                <a:cs typeface="Avenir Roman" charset="0"/>
+                <a:latin typeface="Avenir" charset="0"/>
+                <a:ea typeface="Avenir" charset="0"/>
+                <a:cs typeface="Avenir" charset="0"/>
                 <a:sym typeface="Avenir Roman" charset="0"/>
               </a:rPr>
               <a:t>pregunta</a:t>
@@ -10814,9 +10201,9 @@
                   <a:srgbClr val="000000"/>
                 </a:solidFill>
                 <a:effectLst/>
-                <a:latin typeface="Avenir Roman" charset="0"/>
-                <a:ea typeface="Avenir Roman" charset="0"/>
-                <a:cs typeface="Avenir Roman" charset="0"/>
+                <a:latin typeface="Avenir" charset="0"/>
+                <a:ea typeface="Avenir" charset="0"/>
+                <a:cs typeface="Avenir" charset="0"/>
                 <a:sym typeface="Avenir Roman" charset="0"/>
               </a:rPr>
               <a:t>."</a:t>
@@ -10827,9 +10214,9 @@
                   <a:srgbClr val="000000"/>
                 </a:solidFill>
                 <a:effectLst/>
-                <a:latin typeface="Avenir Roman" charset="0"/>
-                <a:ea typeface="Avenir Roman" charset="0"/>
-                <a:cs typeface="Avenir Roman" charset="0"/>
+                <a:latin typeface="Avenir" charset="0"/>
+                <a:ea typeface="Avenir" charset="0"/>
+                <a:cs typeface="Avenir" charset="0"/>
                 <a:sym typeface="Avenir Roman" charset="0"/>
               </a:rPr>
             </a:br>
@@ -10839,9 +10226,9 @@
                   <a:srgbClr val="000000"/>
                 </a:solidFill>
                 <a:effectLst/>
-                <a:latin typeface="Avenir Roman" charset="0"/>
-                <a:ea typeface="Avenir Roman" charset="0"/>
-                <a:cs typeface="Avenir Roman" charset="0"/>
+                <a:latin typeface="Avenir" charset="0"/>
+                <a:ea typeface="Avenir" charset="0"/>
+                <a:cs typeface="Avenir" charset="0"/>
                 <a:sym typeface="Avenir Roman" charset="0"/>
               </a:rPr>
             </a:br>
@@ -10851,9 +10238,9 @@
                   <a:srgbClr val="000000"/>
                 </a:solidFill>
                 <a:effectLst/>
-                <a:latin typeface="Avenir Roman" charset="0"/>
-                <a:ea typeface="Avenir Roman" charset="0"/>
-                <a:cs typeface="Avenir Roman" charset="0"/>
+                <a:latin typeface="Avenir" charset="0"/>
+                <a:ea typeface="Avenir" charset="0"/>
+                <a:cs typeface="Avenir" charset="0"/>
                 <a:sym typeface="Avenir Roman" charset="0"/>
               </a:rPr>
               <a:t>⏱ ~1:00 min. | 💡 Reglas de Oro (</a:t>
@@ -10864,9 +10251,9 @@
                   <a:srgbClr val="000000"/>
                 </a:solidFill>
                 <a:effectLst/>
-                <a:latin typeface="Avenir Roman" charset="0"/>
-                <a:ea typeface="Avenir Roman" charset="0"/>
-                <a:cs typeface="Avenir Roman" charset="0"/>
+                <a:latin typeface="Avenir" charset="0"/>
+                <a:ea typeface="Avenir" charset="0"/>
+                <a:cs typeface="Avenir" charset="0"/>
                 <a:sym typeface="Avenir Roman" charset="0"/>
               </a:rPr>
               <a:t>recordatorio</a:t>
@@ -10877,9 +10264,9 @@
                   <a:srgbClr val="000000"/>
                 </a:solidFill>
                 <a:effectLst/>
-                <a:latin typeface="Avenir Roman" charset="0"/>
-                <a:ea typeface="Avenir Roman" charset="0"/>
-                <a:cs typeface="Avenir Roman" charset="0"/>
+                <a:latin typeface="Avenir" charset="0"/>
+                <a:ea typeface="Avenir" charset="0"/>
+                <a:cs typeface="Avenir" charset="0"/>
                 <a:sym typeface="Avenir Roman" charset="0"/>
               </a:rPr>
               <a:t>): No leer, </a:t>
@@ -10890,9 +10277,9 @@
                   <a:srgbClr val="000000"/>
                 </a:solidFill>
                 <a:effectLst/>
-                <a:latin typeface="Avenir Roman" charset="0"/>
-                <a:ea typeface="Avenir Roman" charset="0"/>
-                <a:cs typeface="Avenir Roman" charset="0"/>
+                <a:latin typeface="Avenir" charset="0"/>
+                <a:ea typeface="Avenir" charset="0"/>
+                <a:cs typeface="Avenir" charset="0"/>
                 <a:sym typeface="Avenir Roman" charset="0"/>
               </a:rPr>
               <a:t>cámaras</a:t>
@@ -10903,9 +10290,9 @@
                   <a:srgbClr val="000000"/>
                 </a:solidFill>
                 <a:effectLst/>
-                <a:latin typeface="Avenir Roman" charset="0"/>
-                <a:ea typeface="Avenir Roman" charset="0"/>
-                <a:cs typeface="Avenir Roman" charset="0"/>
+                <a:latin typeface="Avenir" charset="0"/>
+                <a:ea typeface="Avenir" charset="0"/>
+                <a:cs typeface="Avenir" charset="0"/>
                 <a:sym typeface="Avenir Roman" charset="0"/>
               </a:rPr>
               <a:t> </a:t>
@@ -10916,9 +10303,9 @@
                   <a:srgbClr val="000000"/>
                 </a:solidFill>
                 <a:effectLst/>
-                <a:latin typeface="Avenir Roman" charset="0"/>
-                <a:ea typeface="Avenir Roman" charset="0"/>
-                <a:cs typeface="Avenir Roman" charset="0"/>
+                <a:latin typeface="Avenir" charset="0"/>
+                <a:ea typeface="Avenir" charset="0"/>
+                <a:cs typeface="Avenir" charset="0"/>
                 <a:sym typeface="Avenir Roman" charset="0"/>
               </a:rPr>
               <a:t>encendidas</a:t>
@@ -10929,9 +10316,9 @@
                   <a:srgbClr val="000000"/>
                 </a:solidFill>
                 <a:effectLst/>
-                <a:latin typeface="Avenir Roman" charset="0"/>
-                <a:ea typeface="Avenir Roman" charset="0"/>
-                <a:cs typeface="Avenir Roman" charset="0"/>
+                <a:latin typeface="Avenir" charset="0"/>
+                <a:ea typeface="Avenir" charset="0"/>
+                <a:cs typeface="Avenir" charset="0"/>
                 <a:sym typeface="Avenir Roman" charset="0"/>
               </a:rPr>
               <a:t>, ≤10-15 min total.</a:t>
@@ -25141,6 +24528,10 @@
 </file>
 
 <file path=customXml/item1.xml><?xml version="1.0" encoding="utf-8"?>
+<LongProperties xmlns="http://schemas.microsoft.com/office/2006/metadata/longProperties"/>
+</file>
+
+<file path=customXml/item2.xml><?xml version="1.0" encoding="utf-8"?>
 <ct:contentTypeSchema xmlns:ct="http://schemas.microsoft.com/office/2006/metadata/contentType" xmlns:ma="http://schemas.microsoft.com/office/2006/metadata/properties/metaAttributes" ct:_="" ma:_="" ma:contentTypeName="Documento" ma:contentTypeID="0x010100DF3D7C797EA12745A270EF30E38719B9" ma:contentTypeVersion="13" ma:contentTypeDescription="Crear nuevo documento." ma:contentTypeScope="" ma:versionID="feff0f29e077e72dd6fa6953df5d7371">
   <xsd:schema xmlns:xsd="http://www.w3.org/2001/XMLSchema" xmlns:xs="http://www.w3.org/2001/XMLSchema" xmlns:p="http://schemas.microsoft.com/office/2006/metadata/properties" xmlns:ns2="0a70e875-3d35-4be2-921f-7117c31bab9b" xmlns:ns3="27c1adeb-3674-457c-b08c-8a73f31b6e23" targetNamespace="http://schemas.microsoft.com/office/2006/metadata/properties" ma:root="true" ma:fieldsID="9b4256d1cddb2683194a131f56fe33cb" ns2:_="" ns3:_="">
     <xsd:import namespace="0a70e875-3d35-4be2-921f-7117c31bab9b"/>
@@ -25363,10 +24754,6 @@
 </ct:contentTypeSchema>
 </file>
 
-<file path=customXml/item2.xml><?xml version="1.0" encoding="utf-8"?>
-<LongProperties xmlns="http://schemas.microsoft.com/office/2006/metadata/longProperties"/>
-</file>
-
 <file path=customXml/item3.xml><?xml version="1.0" encoding="utf-8"?>
 <?mso-contentType ?>
 <FormTemplates xmlns="http://schemas.microsoft.com/sharepoint/v3/contenttype/forms">
@@ -25377,6 +24764,14 @@
 </file>
 
 <file path=customXml/itemProps1.xml><?xml version="1.0" encoding="utf-8"?>
+<ds:datastoreItem xmlns:ds="http://schemas.openxmlformats.org/officeDocument/2006/customXml" ds:itemID="{7AD16EB9-01B6-4776-9665-B804093F677B}">
+  <ds:schemaRefs>
+    <ds:schemaRef ds:uri="http://schemas.microsoft.com/office/2006/metadata/longProperties"/>
+  </ds:schemaRefs>
+</ds:datastoreItem>
+</file>
+
+<file path=customXml/itemProps2.xml><?xml version="1.0" encoding="utf-8"?>
 <ds:datastoreItem xmlns:ds="http://schemas.openxmlformats.org/officeDocument/2006/customXml" ds:itemID="{C64FDB34-1A9E-4DB8-B4E4-60C039870F62}">
   <ds:schemaRefs>
     <ds:schemaRef ds:uri="http://schemas.microsoft.com/office/2006/metadata/contentType"/>
@@ -25395,14 +24790,6 @@
 </ds:datastoreItem>
 </file>
 
-<file path=customXml/itemProps2.xml><?xml version="1.0" encoding="utf-8"?>
-<ds:datastoreItem xmlns:ds="http://schemas.openxmlformats.org/officeDocument/2006/customXml" ds:itemID="{7AD16EB9-01B6-4776-9665-B804093F677B}">
-  <ds:schemaRefs>
-    <ds:schemaRef ds:uri="http://schemas.microsoft.com/office/2006/metadata/longProperties"/>
-  </ds:schemaRefs>
-</ds:datastoreItem>
-</file>
-
 <file path=customXml/itemProps3.xml><?xml version="1.0" encoding="utf-8"?>
 <ds:datastoreItem xmlns:ds="http://schemas.openxmlformats.org/officeDocument/2006/customXml" ds:itemID="{10B1355A-36E7-4AD5-952F-CBF38F156E8C}">
   <ds:schemaRefs>
